--- a/recursos/comercial/B2B/PRESENTACION_FONDOS_EMPLEADOS_HEIIU.pptx
+++ b/recursos/comercial/B2B/PRESENTACION_FONDOS_EMPLEADOS_HEIIU.pptx
@@ -8187,7 +8187,7 @@
                 </a:solidFill>
                 <a:latin typeface="Segoe UI"/>
               </a:rPr>
-              <a:t>beca del 45% sobre el programa completo, para él y para sus hijos.</a:t>
+              <a:t>beca del 45% sobre el programa completo, para él, su cónyuge y sus hijos desde los 12 años.</a:t>
             </a:r>
           </a:p>
           <a:p>
@@ -8946,7 +8946,7 @@
                 </a:solidFill>
                 <a:latin typeface="Constantia"/>
               </a:rPr>
-              <a:t>GRUPOS DE MÁXIMO 16</a:t>
+              <a:t>INICIO 3 DE NOVIEMBRE</a:t>
             </a:r>
           </a:p>
         </p:txBody>
@@ -8988,7 +8988,7 @@
                 </a:solidFill>
                 <a:latin typeface="Segoe UI"/>
               </a:rPr>
-              <a:t>El cupo se asigna por orden de matrícula con la inicial pagada. Próximo inicio: martes 3 de noviembre de 2026.</a:t>
+              <a:t>Grupos de máximo 16; el cupo se asigna por orden de matrícula con la inicial pagada. El grupo no para en diciembre: sigue hasta terminar el nivel, solo descansa los festivos.</a:t>
             </a:r>
           </a:p>
         </p:txBody>

--- a/recursos/comercial/B2B/PRESENTACION_FONDOS_EMPLEADOS_HEIIU.pptx
+++ b/recursos/comercial/B2B/PRESENTACION_FONDOS_EMPLEADOS_HEIIU.pptx
@@ -6,12 +6,11 @@
   </p:sldMasterIdLst>
   <p:sldIdLst>
     <p:sldId id="256" r:id="rId7"/>
-    <p:sldId id="257" r:id="rId8"/>
-    <p:sldId id="258" r:id="rId9"/>
-    <p:sldId id="259" r:id="rId10"/>
-    <p:sldId id="260" r:id="rId11"/>
-    <p:sldId id="261" r:id="rId12"/>
-    <p:sldId id="262" r:id="rId13"/>
+    <p:sldId id="257" r:id="rId9"/>
+    <p:sldId id="258" r:id="rId10"/>
+    <p:sldId id="259" r:id="rId11"/>
+    <p:sldId id="260" r:id="rId12"/>
+    <p:sldId id="261" r:id="rId13"/>
   </p:sldIdLst>
   <p:sldSz cx="12191695" cy="6858000" type="screen4x3"/>
   <p:notesSz cx="6858000" cy="9144000"/>
@@ -111,6 +110,821 @@
     </a:lvl9pPr>
   </p:defaultTextStyle>
 </p:presentation>
+</file>
+
+<file path=ppt/notesMasters/notesMaster1.xml><?xml version="1.0" encoding="utf-8"?>
+<p:notesMaster xmlns:a="http://schemas.openxmlformats.org/drawingml/2006/main" xmlns:p="http://schemas.openxmlformats.org/presentationml/2006/main" xmlns:r="http://schemas.openxmlformats.org/officeDocument/2006/relationships">
+  <p:cSld>
+    <p:bg>
+      <p:bgRef idx="1001">
+        <a:schemeClr val="bg1"/>
+      </p:bgRef>
+    </p:bg>
+    <p:spTree>
+      <p:nvGrpSpPr>
+        <p:cNvPr id="1" name=""/>
+        <p:cNvGrpSpPr/>
+        <p:nvPr/>
+      </p:nvGrpSpPr>
+      <p:grpSpPr>
+        <a:xfrm>
+          <a:off x="0" y="0"/>
+          <a:ext cx="0" cy="0"/>
+          <a:chOff x="0" y="0"/>
+          <a:chExt cx="0" cy="0"/>
+        </a:xfrm>
+      </p:grpSpPr>
+      <p:sp>
+        <p:nvSpPr>
+          <p:cNvPr id="2" name="Header Placeholder 1"/>
+          <p:cNvSpPr>
+            <a:spLocks noGrp="1"/>
+          </p:cNvSpPr>
+          <p:nvPr>
+            <p:ph type="hdr" sz="quarter"/>
+          </p:nvPr>
+        </p:nvSpPr>
+        <p:spPr>
+          <a:xfrm>
+            <a:off x="0" y="0"/>
+            <a:ext cx="2971800" cy="457200"/>
+          </a:xfrm>
+          <a:prstGeom prst="rect">
+            <a:avLst/>
+          </a:prstGeom>
+        </p:spPr>
+        <p:txBody>
+          <a:bodyPr vert="horz" lIns="91440" tIns="45720" rIns="91440" bIns="45720" rtlCol="0"/>
+          <a:lstStyle>
+            <a:lvl1pPr algn="l">
+              <a:defRPr sz="1200"/>
+            </a:lvl1pPr>
+          </a:lstStyle>
+          <a:p>
+            <a:endParaRPr lang="en-US"/>
+          </a:p>
+        </p:txBody>
+      </p:sp>
+      <p:sp>
+        <p:nvSpPr>
+          <p:cNvPr id="3" name="Date Placeholder 2"/>
+          <p:cNvSpPr>
+            <a:spLocks noGrp="1"/>
+          </p:cNvSpPr>
+          <p:nvPr>
+            <p:ph type="dt" idx="1"/>
+          </p:nvPr>
+        </p:nvSpPr>
+        <p:spPr>
+          <a:xfrm>
+            <a:off x="3884613" y="0"/>
+            <a:ext cx="2971800" cy="457200"/>
+          </a:xfrm>
+          <a:prstGeom prst="rect">
+            <a:avLst/>
+          </a:prstGeom>
+        </p:spPr>
+        <p:txBody>
+          <a:bodyPr vert="horz" lIns="91440" tIns="45720" rIns="91440" bIns="45720" rtlCol="0"/>
+          <a:lstStyle>
+            <a:lvl1pPr algn="r">
+              <a:defRPr sz="1200"/>
+            </a:lvl1pPr>
+          </a:lstStyle>
+          <a:p>
+            <a:fld id="{0F89C1C7-3DCD-1040-A9CF-14679D8B5DDD}" type="datetimeFigureOut">
+              <a:rPr lang="en-US" smtClean="0"/>
+              <a:t>10/17/16</a:t>
+            </a:fld>
+            <a:endParaRPr lang="en-US"/>
+          </a:p>
+        </p:txBody>
+      </p:sp>
+      <p:sp>
+        <p:nvSpPr>
+          <p:cNvPr id="4" name="Slide Image Placeholder 3"/>
+          <p:cNvSpPr>
+            <a:spLocks noGrp="1" noRot="1" noChangeAspect="1"/>
+          </p:cNvSpPr>
+          <p:nvPr>
+            <p:ph type="sldImg" idx="2"/>
+          </p:nvPr>
+        </p:nvSpPr>
+        <p:spPr>
+          <a:xfrm>
+            <a:off x="1143000" y="685800"/>
+            <a:ext cx="4572000" cy="3429000"/>
+          </a:xfrm>
+          <a:prstGeom prst="rect">
+            <a:avLst/>
+          </a:prstGeom>
+          <a:noFill/>
+          <a:ln w="12700">
+            <a:solidFill>
+              <a:prstClr val="black"/>
+            </a:solidFill>
+          </a:ln>
+        </p:spPr>
+        <p:txBody>
+          <a:bodyPr vert="horz" lIns="91440" tIns="45720" rIns="91440" bIns="45720" rtlCol="0" anchor="ctr"/>
+          <a:lstStyle/>
+          <a:p>
+            <a:endParaRPr lang="en-US"/>
+          </a:p>
+        </p:txBody>
+      </p:sp>
+      <p:sp>
+        <p:nvSpPr>
+          <p:cNvPr id="5" name="Notes Placeholder 4"/>
+          <p:cNvSpPr>
+            <a:spLocks noGrp="1"/>
+          </p:cNvSpPr>
+          <p:nvPr>
+            <p:ph type="body" sz="quarter" idx="3"/>
+          </p:nvPr>
+        </p:nvSpPr>
+        <p:spPr>
+          <a:xfrm>
+            <a:off x="685800" y="4343400"/>
+            <a:ext cx="5486400" cy="4114800"/>
+          </a:xfrm>
+          <a:prstGeom prst="rect">
+            <a:avLst/>
+          </a:prstGeom>
+        </p:spPr>
+        <p:txBody>
+          <a:bodyPr vert="horz" lIns="91440" tIns="45720" rIns="91440" bIns="45720" rtlCol="0"/>
+          <a:lstStyle/>
+          <a:p>
+            <a:pPr lvl="0"/>
+            <a:r>
+              <a:rPr lang="en-US" smtClean="0"/>
+              <a:t>Click to edit Master text styles</a:t>
+            </a:r>
+          </a:p>
+          <a:p>
+            <a:pPr lvl="1"/>
+            <a:r>
+              <a:rPr lang="en-US" smtClean="0"/>
+              <a:t>Second level</a:t>
+            </a:r>
+          </a:p>
+          <a:p>
+            <a:pPr lvl="2"/>
+            <a:r>
+              <a:rPr lang="en-US" smtClean="0"/>
+              <a:t>Third level</a:t>
+            </a:r>
+          </a:p>
+          <a:p>
+            <a:pPr lvl="3"/>
+            <a:r>
+              <a:rPr lang="en-US" smtClean="0"/>
+              <a:t>Fourth level</a:t>
+            </a:r>
+          </a:p>
+          <a:p>
+            <a:pPr lvl="4"/>
+            <a:r>
+              <a:rPr lang="en-US" smtClean="0"/>
+              <a:t>Fifth level</a:t>
+            </a:r>
+            <a:endParaRPr lang="en-US"/>
+          </a:p>
+        </p:txBody>
+      </p:sp>
+      <p:sp>
+        <p:nvSpPr>
+          <p:cNvPr id="6" name="Footer Placeholder 5"/>
+          <p:cNvSpPr>
+            <a:spLocks noGrp="1"/>
+          </p:cNvSpPr>
+          <p:nvPr>
+            <p:ph type="ftr" sz="quarter" idx="4"/>
+          </p:nvPr>
+        </p:nvSpPr>
+        <p:spPr>
+          <a:xfrm>
+            <a:off x="0" y="8685213"/>
+            <a:ext cx="2971800" cy="457200"/>
+          </a:xfrm>
+          <a:prstGeom prst="rect">
+            <a:avLst/>
+          </a:prstGeom>
+        </p:spPr>
+        <p:txBody>
+          <a:bodyPr vert="horz" lIns="91440" tIns="45720" rIns="91440" bIns="45720" rtlCol="0" anchor="b"/>
+          <a:lstStyle>
+            <a:lvl1pPr algn="l">
+              <a:defRPr sz="1200"/>
+            </a:lvl1pPr>
+          </a:lstStyle>
+          <a:p>
+            <a:endParaRPr lang="en-US"/>
+          </a:p>
+        </p:txBody>
+      </p:sp>
+      <p:sp>
+        <p:nvSpPr>
+          <p:cNvPr id="7" name="Slide Number Placeholder 6"/>
+          <p:cNvSpPr>
+            <a:spLocks noGrp="1"/>
+          </p:cNvSpPr>
+          <p:nvPr>
+            <p:ph type="sldNum" sz="quarter" idx="5"/>
+          </p:nvPr>
+        </p:nvSpPr>
+        <p:spPr>
+          <a:xfrm>
+            <a:off x="3884613" y="8685213"/>
+            <a:ext cx="2971800" cy="457200"/>
+          </a:xfrm>
+          <a:prstGeom prst="rect">
+            <a:avLst/>
+          </a:prstGeom>
+        </p:spPr>
+        <p:txBody>
+          <a:bodyPr vert="horz" lIns="91440" tIns="45720" rIns="91440" bIns="45720" rtlCol="0" anchor="b"/>
+          <a:lstStyle>
+            <a:lvl1pPr algn="r">
+              <a:defRPr sz="1200"/>
+            </a:lvl1pPr>
+          </a:lstStyle>
+          <a:p>
+            <a:fld id="{BB5E49A5-4136-284D-997B-48E1D791AD67}" type="slidenum">
+              <a:rPr lang="en-US" smtClean="0"/>
+              <a:t>‹#›</a:t>
+            </a:fld>
+            <a:endParaRPr lang="en-US"/>
+          </a:p>
+        </p:txBody>
+      </p:sp>
+    </p:spTree>
+    <p:extLst>
+      <p:ext uri="{BB962C8B-B14F-4D97-AF65-F5344CB8AC3E}">
+        <p14:creationId xmlns:p14="http://schemas.microsoft.com/office/powerpoint/2010/main" val="2623252185"/>
+      </p:ext>
+    </p:extLst>
+  </p:cSld>
+  <p:clrMap bg1="lt1" tx1="dk1" bg2="lt2" tx2="dk2" accent1="accent1" accent2="accent2" accent3="accent3" accent4="accent4" accent5="accent5" accent6="accent6" hlink="hlink" folHlink="folHlink"/>
+  <p:notesStyle>
+    <a:lvl1pPr marL="0" algn="l" defTabSz="457200" rtl="0" eaLnBrk="1" latinLnBrk="0" hangingPunct="1">
+      <a:defRPr sz="1200" kern="1200">
+        <a:solidFill>
+          <a:schemeClr val="tx1"/>
+        </a:solidFill>
+        <a:latin typeface="+mn-lt"/>
+        <a:ea typeface="+mn-ea"/>
+        <a:cs typeface="+mn-cs"/>
+      </a:defRPr>
+    </a:lvl1pPr>
+    <a:lvl2pPr marL="457200" algn="l" defTabSz="457200" rtl="0" eaLnBrk="1" latinLnBrk="0" hangingPunct="1">
+      <a:defRPr sz="1200" kern="1200">
+        <a:solidFill>
+          <a:schemeClr val="tx1"/>
+        </a:solidFill>
+        <a:latin typeface="+mn-lt"/>
+        <a:ea typeface="+mn-ea"/>
+        <a:cs typeface="+mn-cs"/>
+      </a:defRPr>
+    </a:lvl2pPr>
+    <a:lvl3pPr marL="914400" algn="l" defTabSz="457200" rtl="0" eaLnBrk="1" latinLnBrk="0" hangingPunct="1">
+      <a:defRPr sz="1200" kern="1200">
+        <a:solidFill>
+          <a:schemeClr val="tx1"/>
+        </a:solidFill>
+        <a:latin typeface="+mn-lt"/>
+        <a:ea typeface="+mn-ea"/>
+        <a:cs typeface="+mn-cs"/>
+      </a:defRPr>
+    </a:lvl3pPr>
+    <a:lvl4pPr marL="1371600" algn="l" defTabSz="457200" rtl="0" eaLnBrk="1" latinLnBrk="0" hangingPunct="1">
+      <a:defRPr sz="1200" kern="1200">
+        <a:solidFill>
+          <a:schemeClr val="tx1"/>
+        </a:solidFill>
+        <a:latin typeface="+mn-lt"/>
+        <a:ea typeface="+mn-ea"/>
+        <a:cs typeface="+mn-cs"/>
+      </a:defRPr>
+    </a:lvl4pPr>
+    <a:lvl5pPr marL="1828800" algn="l" defTabSz="457200" rtl="0" eaLnBrk="1" latinLnBrk="0" hangingPunct="1">
+      <a:defRPr sz="1200" kern="1200">
+        <a:solidFill>
+          <a:schemeClr val="tx1"/>
+        </a:solidFill>
+        <a:latin typeface="+mn-lt"/>
+        <a:ea typeface="+mn-ea"/>
+        <a:cs typeface="+mn-cs"/>
+      </a:defRPr>
+    </a:lvl5pPr>
+    <a:lvl6pPr marL="2286000" algn="l" defTabSz="457200" rtl="0" eaLnBrk="1" latinLnBrk="0" hangingPunct="1">
+      <a:defRPr sz="1200" kern="1200">
+        <a:solidFill>
+          <a:schemeClr val="tx1"/>
+        </a:solidFill>
+        <a:latin typeface="+mn-lt"/>
+        <a:ea typeface="+mn-ea"/>
+        <a:cs typeface="+mn-cs"/>
+      </a:defRPr>
+    </a:lvl6pPr>
+    <a:lvl7pPr marL="2743200" algn="l" defTabSz="457200" rtl="0" eaLnBrk="1" latinLnBrk="0" hangingPunct="1">
+      <a:defRPr sz="1200" kern="1200">
+        <a:solidFill>
+          <a:schemeClr val="tx1"/>
+        </a:solidFill>
+        <a:latin typeface="+mn-lt"/>
+        <a:ea typeface="+mn-ea"/>
+        <a:cs typeface="+mn-cs"/>
+      </a:defRPr>
+    </a:lvl7pPr>
+    <a:lvl8pPr marL="3200400" algn="l" defTabSz="457200" rtl="0" eaLnBrk="1" latinLnBrk="0" hangingPunct="1">
+      <a:defRPr sz="1200" kern="1200">
+        <a:solidFill>
+          <a:schemeClr val="tx1"/>
+        </a:solidFill>
+        <a:latin typeface="+mn-lt"/>
+        <a:ea typeface="+mn-ea"/>
+        <a:cs typeface="+mn-cs"/>
+      </a:defRPr>
+    </a:lvl8pPr>
+    <a:lvl9pPr marL="3657600" algn="l" defTabSz="457200" rtl="0" eaLnBrk="1" latinLnBrk="0" hangingPunct="1">
+      <a:defRPr sz="1200" kern="1200">
+        <a:solidFill>
+          <a:schemeClr val="tx1"/>
+        </a:solidFill>
+        <a:latin typeface="+mn-lt"/>
+        <a:ea typeface="+mn-ea"/>
+        <a:cs typeface="+mn-cs"/>
+      </a:defRPr>
+    </a:lvl9pPr>
+  </p:notesStyle>
+</p:notesMaster>
+</file>
+
+<file path=ppt/notesSlides/notesSlide1.xml><?xml version="1.0" encoding="utf-8"?>
+<p:notes xmlns:a="http://schemas.openxmlformats.org/drawingml/2006/main" xmlns:p="http://schemas.openxmlformats.org/presentationml/2006/main" xmlns:r="http://schemas.openxmlformats.org/officeDocument/2006/relationships">
+  <p:cSld>
+    <p:spTree>
+      <p:nvGrpSpPr>
+        <p:cNvPr id="1" name=""/>
+        <p:cNvGrpSpPr/>
+        <p:nvPr/>
+      </p:nvGrpSpPr>
+      <p:grpSpPr>
+        <a:xfrm>
+          <a:off x="0" y="0"/>
+          <a:ext cx="0" cy="0"/>
+          <a:chOff x="0" y="0"/>
+          <a:chExt cx="0" cy="0"/>
+        </a:xfrm>
+      </p:grpSpPr>
+      <p:sp>
+        <p:nvSpPr>
+          <p:cNvPr id="2" name="Slide Image Placeholder 1"/>
+          <p:cNvSpPr>
+            <a:spLocks noGrp="1"/>
+          </p:cNvSpPr>
+          <p:nvPr>
+            <p:ph type="sldImg" idx="2"/>
+          </p:nvPr>
+        </p:nvSpPr>
+        <p:spPr/>
+      </p:sp>
+      <p:sp>
+        <p:nvSpPr>
+          <p:cNvPr id="3" name="Notes Placeholder 2"/>
+          <p:cNvSpPr>
+            <a:spLocks noGrp="1"/>
+          </p:cNvSpPr>
+          <p:nvPr>
+            <p:ph type="body" idx="3" sz="quarter"/>
+          </p:nvPr>
+        </p:nvSpPr>
+        <p:spPr/>
+        <p:txBody>
+          <a:bodyPr/>
+          <a:lstStyle/>
+          <a:p>
+            <a:r>
+              <a:t>ANTES DE EMPEZAR (una pregunta): "¿Un convenio así lo firma usted o lo lleva a junta? ¿Cuándo se reúne la junta?" Con esa respuesta sabes si hoy sales con firma o con fecha de junta.</a:t>
+            </a:r>
+          </a:p>
+          <a:p>
+            <a:r>
+              <a:t>QUÉ DECIR (20 segundos): "Vengo a proponerle un beneficio nuevo para sus afiliados que al fondo no le cuesta nada: beca del 45% en el programa de inglés de Heiiu, para ellos y sus familias, con el nombre del fondo. Somos una academia de Bucaramanga con licencia de la Secretaría de Educación desde 2012 y certificación ISO 9001 e ICONTEC; el detalle se lo dejo en una hoja. Le pido 10 minutos y salgo con una sola cosa: una fecha."</a:t>
+            </a:r>
+          </a:p>
+          <a:p>
+            <a:r>
+              <a:t>NO leer la diapositiva. NO hablar de la academia más de 20 segundos. NO entregar la hoja todavía.</a:t>
+            </a:r>
+          </a:p>
+        </p:txBody>
+      </p:sp>
+      <p:sp>
+        <p:nvSpPr>
+          <p:cNvPr id="4" name="Slide Number Placeholder 3"/>
+          <p:cNvSpPr>
+            <a:spLocks noGrp="1"/>
+          </p:cNvSpPr>
+          <p:nvPr>
+            <p:ph type="sldNum" idx="5" sz="quarter"/>
+          </p:nvPr>
+        </p:nvSpPr>
+        <p:spPr/>
+      </p:sp>
+    </p:spTree>
+  </p:cSld>
+  <p:clrMapOvr>
+    <a:masterClrMapping/>
+  </p:clrMapOvr>
+</p:notes>
+</file>
+
+<file path=ppt/notesSlides/notesSlide2.xml><?xml version="1.0" encoding="utf-8"?>
+<p:notes xmlns:a="http://schemas.openxmlformats.org/drawingml/2006/main" xmlns:p="http://schemas.openxmlformats.org/presentationml/2006/main" xmlns:r="http://schemas.openxmlformats.org/officeDocument/2006/relationships">
+  <p:cSld>
+    <p:spTree>
+      <p:nvGrpSpPr>
+        <p:cNvPr id="1" name=""/>
+        <p:cNvGrpSpPr/>
+        <p:nvPr/>
+      </p:nvGrpSpPr>
+      <p:grpSpPr>
+        <a:xfrm>
+          <a:off x="0" y="0"/>
+          <a:ext cx="0" cy="0"/>
+          <a:chOff x="0" y="0"/>
+          <a:chExt cx="0" cy="0"/>
+        </a:xfrm>
+      </p:grpSpPr>
+      <p:sp>
+        <p:nvSpPr>
+          <p:cNvPr id="2" name="Slide Image Placeholder 1"/>
+          <p:cNvSpPr>
+            <a:spLocks noGrp="1"/>
+          </p:cNvSpPr>
+          <p:nvPr>
+            <p:ph type="sldImg" idx="2"/>
+          </p:nvPr>
+        </p:nvSpPr>
+        <p:spPr/>
+      </p:sp>
+      <p:sp>
+        <p:nvSpPr>
+          <p:cNvPr id="3" name="Notes Placeholder 2"/>
+          <p:cNvSpPr>
+            <a:spLocks noGrp="1"/>
+          </p:cNvSpPr>
+          <p:nvPr>
+            <p:ph type="body" idx="3" sz="quarter"/>
+          </p:nvPr>
+        </p:nvSpPr>
+        <p:spPr/>
+        <p:txBody>
+          <a:bodyPr/>
+          <a:lstStyle/>
+          <a:p>
+            <a:r>
+              <a:t>QUÉ DECIR: "Le hablo hoy y no el mes entrante por una razón: el grupo arranca el martes 3 de noviembre y no para en diciembre. Si firmamos esta semana, sus afiliados alcanzan a entrar. Si no, el siguiente grupo es [fecha real del siguiente grupo]."</a:t>
+            </a:r>
+          </a:p>
+          <a:p>
+            <a:r>
+              <a:t>Decir solo cupos reales: grupos de 16 y 3 becas con nombre por trimestre. Nunca "últimos cupos" si no es cierto.</a:t>
+            </a:r>
+          </a:p>
+        </p:txBody>
+      </p:sp>
+      <p:sp>
+        <p:nvSpPr>
+          <p:cNvPr id="4" name="Slide Number Placeholder 3"/>
+          <p:cNvSpPr>
+            <a:spLocks noGrp="1"/>
+          </p:cNvSpPr>
+          <p:nvPr>
+            <p:ph type="sldNum" idx="5" sz="quarter"/>
+          </p:nvPr>
+        </p:nvSpPr>
+        <p:spPr/>
+      </p:sp>
+    </p:spTree>
+  </p:cSld>
+  <p:clrMapOvr>
+    <a:masterClrMapping/>
+  </p:clrMapOvr>
+</p:notes>
+</file>
+
+<file path=ppt/notesSlides/notesSlide3.xml><?xml version="1.0" encoding="utf-8"?>
+<p:notes xmlns:a="http://schemas.openxmlformats.org/drawingml/2006/main" xmlns:p="http://schemas.openxmlformats.org/presentationml/2006/main" xmlns:r="http://schemas.openxmlformats.org/officeDocument/2006/relationships">
+  <p:cSld>
+    <p:spTree>
+      <p:nvGrpSpPr>
+        <p:cNvPr id="1" name=""/>
+        <p:cNvGrpSpPr/>
+        <p:nvPr/>
+      </p:nvGrpSpPr>
+      <p:grpSpPr>
+        <a:xfrm>
+          <a:off x="0" y="0"/>
+          <a:ext cx="0" cy="0"/>
+          <a:chOff x="0" y="0"/>
+          <a:chExt cx="0" cy="0"/>
+        </a:xfrm>
+      </p:grpSpPr>
+      <p:sp>
+        <p:nvSpPr>
+          <p:cNvPr id="2" name="Slide Image Placeholder 1"/>
+          <p:cNvSpPr>
+            <a:spLocks noGrp="1"/>
+          </p:cNvSpPr>
+          <p:nvPr>
+            <p:ph type="sldImg" idx="2"/>
+          </p:nvPr>
+        </p:nvSpPr>
+        <p:spPr/>
+      </p:sp>
+      <p:sp>
+        <p:nvSpPr>
+          <p:cNvPr id="3" name="Notes Placeholder 2"/>
+          <p:cNvSpPr>
+            <a:spLocks noGrp="1"/>
+          </p:cNvSpPr>
+          <p:nvPr>
+            <p:ph type="body" idx="3" sz="quarter"/>
+          </p:nvPr>
+        </p:nvSpPr>
+        <p:spPr/>
+        <p:txBody>
+          <a:bodyPr/>
+          <a:lstStyle/>
+          <a:p>
+            <a:r>
+              <a:t>QUÉ DECIR: "El afiliado paga $4.782.800 por el programa completo que vale $8.696.000. Es beca del Fondo de Becas Heiiu, no un descuento: la misma tarifa y la misma garantía para todos los que entran con carta del fondo. Si el fondo le presta o paga con cesantías, cuenta como contado y recibe la beca mayor. También hay plan a cuotas con la academia; los números están en la hoja."</a:t>
+            </a:r>
+          </a:p>
+          <a:p>
+            <a:r>
+              <a:t>NO mostrar ni recitar la tabla completa. Si pregunta por cuotas, horarios o profesores: "está en la hoja, se la dejo al final"; responde en una frase y vuelve al pedido.</a:t>
+            </a:r>
+          </a:p>
+        </p:txBody>
+      </p:sp>
+      <p:sp>
+        <p:nvSpPr>
+          <p:cNvPr id="4" name="Slide Number Placeholder 3"/>
+          <p:cNvSpPr>
+            <a:spLocks noGrp="1"/>
+          </p:cNvSpPr>
+          <p:nvPr>
+            <p:ph type="sldNum" idx="5" sz="quarter"/>
+          </p:nvPr>
+        </p:nvSpPr>
+        <p:spPr/>
+      </p:sp>
+    </p:spTree>
+  </p:cSld>
+  <p:clrMapOvr>
+    <a:masterClrMapping/>
+  </p:clrMapOvr>
+</p:notes>
+</file>
+
+<file path=ppt/notesSlides/notesSlide4.xml><?xml version="1.0" encoding="utf-8"?>
+<p:notes xmlns:a="http://schemas.openxmlformats.org/drawingml/2006/main" xmlns:p="http://schemas.openxmlformats.org/presentationml/2006/main" xmlns:r="http://schemas.openxmlformats.org/officeDocument/2006/relationships">
+  <p:cSld>
+    <p:spTree>
+      <p:nvGrpSpPr>
+        <p:cNvPr id="1" name=""/>
+        <p:cNvGrpSpPr/>
+        <p:nvPr/>
+      </p:nvGrpSpPr>
+      <p:grpSpPr>
+        <a:xfrm>
+          <a:off x="0" y="0"/>
+          <a:ext cx="0" cy="0"/>
+          <a:chOff x="0" y="0"/>
+          <a:chExt cx="0" cy="0"/>
+        </a:xfrm>
+      </p:grpSpPr>
+      <p:sp>
+        <p:nvSpPr>
+          <p:cNvPr id="2" name="Slide Image Placeholder 1"/>
+          <p:cNvSpPr>
+            <a:spLocks noGrp="1"/>
+          </p:cNvSpPr>
+          <p:nvPr>
+            <p:ph type="sldImg" idx="2"/>
+          </p:nvPr>
+        </p:nvSpPr>
+        <p:spPr/>
+      </p:sp>
+      <p:sp>
+        <p:nvSpPr>
+          <p:cNvPr id="3" name="Notes Placeholder 2"/>
+          <p:cNvSpPr>
+            <a:spLocks noGrp="1"/>
+          </p:cNvSpPr>
+          <p:nvPr>
+            <p:ph type="body" idx="3" sz="quarter"/>
+          </p:nvPr>
+        </p:nvSpPr>
+        <p:spPr/>
+        <p:txBody>
+          <a:bodyPr/>
+          <a:lstStyle/>
+          <a:p>
+            <a:r>
+              <a:t>QUÉ DECIR: "Lo que más le preocupa a un gerente es quedar mal con sus afiliados. Por eso lo firmamos: si el afiliado cumple su parte (asistencia del 80%, tarea diaria en video, evaluaciones) y no avanza, le devolvemos el 100% del nivel. Y el fondo no asume nada: no paga, no cobra, y puede terminar el convenio con aviso de 30 días."</a:t>
+            </a:r>
+          </a:p>
+          <a:p>
+            <a:r>
+              <a:t>Si pregunta "¿y si nadie se inscribe?": "No le cuesta nada al fondo. Lo único que le pido es la charla de 20 minutos."</a:t>
+            </a:r>
+          </a:p>
+        </p:txBody>
+      </p:sp>
+      <p:sp>
+        <p:nvSpPr>
+          <p:cNvPr id="4" name="Slide Number Placeholder 3"/>
+          <p:cNvSpPr>
+            <a:spLocks noGrp="1"/>
+          </p:cNvSpPr>
+          <p:nvPr>
+            <p:ph type="sldNum" idx="5" sz="quarter"/>
+          </p:nvPr>
+        </p:nvSpPr>
+        <p:spPr/>
+      </p:sp>
+    </p:spTree>
+  </p:cSld>
+  <p:clrMapOvr>
+    <a:masterClrMapping/>
+  </p:clrMapOvr>
+</p:notes>
+</file>
+
+<file path=ppt/notesSlides/notesSlide5.xml><?xml version="1.0" encoding="utf-8"?>
+<p:notes xmlns:a="http://schemas.openxmlformats.org/drawingml/2006/main" xmlns:p="http://schemas.openxmlformats.org/presentationml/2006/main" xmlns:r="http://schemas.openxmlformats.org/officeDocument/2006/relationships">
+  <p:cSld>
+    <p:spTree>
+      <p:nvGrpSpPr>
+        <p:cNvPr id="1" name=""/>
+        <p:cNvGrpSpPr/>
+        <p:nvPr/>
+      </p:nvGrpSpPr>
+      <p:grpSpPr>
+        <a:xfrm>
+          <a:off x="0" y="0"/>
+          <a:ext cx="0" cy="0"/>
+          <a:chOff x="0" y="0"/>
+          <a:chExt cx="0" cy="0"/>
+        </a:xfrm>
+      </p:grpSpPr>
+      <p:sp>
+        <p:nvSpPr>
+          <p:cNvPr id="2" name="Slide Image Placeholder 1"/>
+          <p:cNvSpPr>
+            <a:spLocks noGrp="1"/>
+          </p:cNvSpPr>
+          <p:nvPr>
+            <p:ph type="sldImg" idx="2"/>
+          </p:nvPr>
+        </p:nvSpPr>
+        <p:spPr/>
+      </p:sp>
+      <p:sp>
+        <p:nvSpPr>
+          <p:cNvPr id="3" name="Notes Placeholder 2"/>
+          <p:cNvSpPr>
+            <a:spLocks noGrp="1"/>
+          </p:cNvSpPr>
+          <p:nvPr>
+            <p:ph type="body" idx="3" sz="quarter"/>
+          </p:nvPr>
+        </p:nvSpPr>
+        <p:spPr/>
+        <p:txBody>
+          <a:bodyPr/>
+          <a:lstStyle/>
+          <a:p>
+            <a:r>
+              <a:t>QUÉ DECIR: "Para el fondo esto es un beneficio más en su portafolio, con su nombre, sin tocar presupuesto. Usted postula con una carta de una página y nosotros hacemos el resto. Cada trimestre recibe el reporte de asistencia y cumplimiento de sus becados; nunca notas. Y la semana siguiente a la firma hacemos el diagnóstico de nivel a 10 afiliados sin costo."</a:t>
+            </a:r>
+          </a:p>
+          <a:p>
+            <a:r>
+              <a:t>Si quiere datos de por qué inglés (26% más de ingreso, 1 de cada 8 sale del colegio con inglés): están en la hoja con fuente. Decir uno, no los seis.</a:t>
+            </a:r>
+          </a:p>
+        </p:txBody>
+      </p:sp>
+      <p:sp>
+        <p:nvSpPr>
+          <p:cNvPr id="4" name="Slide Number Placeholder 3"/>
+          <p:cNvSpPr>
+            <a:spLocks noGrp="1"/>
+          </p:cNvSpPr>
+          <p:nvPr>
+            <p:ph type="sldNum" idx="5" sz="quarter"/>
+          </p:nvPr>
+        </p:nvSpPr>
+        <p:spPr/>
+      </p:sp>
+    </p:spTree>
+  </p:cSld>
+  <p:clrMapOvr>
+    <a:masterClrMapping/>
+  </p:clrMapOvr>
+</p:notes>
+</file>
+
+<file path=ppt/notesSlides/notesSlide6.xml><?xml version="1.0" encoding="utf-8"?>
+<p:notes xmlns:a="http://schemas.openxmlformats.org/drawingml/2006/main" xmlns:p="http://schemas.openxmlformats.org/presentationml/2006/main" xmlns:r="http://schemas.openxmlformats.org/officeDocument/2006/relationships">
+  <p:cSld>
+    <p:spTree>
+      <p:nvGrpSpPr>
+        <p:cNvPr id="1" name=""/>
+        <p:cNvGrpSpPr/>
+        <p:nvPr/>
+      </p:nvGrpSpPr>
+      <p:grpSpPr>
+        <a:xfrm>
+          <a:off x="0" y="0"/>
+          <a:ext cx="0" cy="0"/>
+          <a:chOff x="0" y="0"/>
+          <a:chExt cx="0" cy="0"/>
+        </a:xfrm>
+      </p:grpSpPr>
+      <p:sp>
+        <p:nvSpPr>
+          <p:cNvPr id="2" name="Slide Image Placeholder 1"/>
+          <p:cNvSpPr>
+            <a:spLocks noGrp="1"/>
+          </p:cNvSpPr>
+          <p:nvPr>
+            <p:ph type="sldImg" idx="2"/>
+          </p:nvPr>
+        </p:nvSpPr>
+        <p:spPr/>
+      </p:sp>
+      <p:sp>
+        <p:nvSpPr>
+          <p:cNvPr id="3" name="Notes Placeholder 2"/>
+          <p:cNvSpPr>
+            <a:spLocks noGrp="1"/>
+          </p:cNvSpPr>
+          <p:nvPr>
+            <p:ph type="body" idx="3" sz="quarter"/>
+          </p:nvPr>
+        </p:nvSpPr>
+        <p:spPr/>
+        <p:txBody>
+          <a:bodyPr/>
+          <a:lstStyle/>
+          <a:p>
+            <a:r>
+              <a:t>QUÉ DECIR: "Le pido una sola cosa: que firmemos hoy este convenio de una página y me dé fecha y hora para la charla de 20 minutos con sus afiliados. ¿La hacemos el [día] a las [hora] o el [día] a las [hora]?" Y SILENCIO. Que responda él.</a:t>
+            </a:r>
+          </a:p>
+          <a:p>
+            <a:r>
+              <a:t>Si debe ir a junta: "¿Cuándo se reúne la junta? Le dejo el convenio y la hoja listos para esa fecha, y lo llamo el día siguiente."</a:t>
+            </a:r>
+          </a:p>
+          <a:p>
+            <a:r>
+              <a:t>AL FINAL, no antes: entregar la hoja (HOJA_FONDOS_EMPLEADOS_HEIIU.pdf impresa) y el convenio en dos copias.</a:t>
+            </a:r>
+          </a:p>
+          <a:p>
+            <a:r>
+              <a:t>Lo que cuenta para el tablero: convenio firmado con fecha de charla, o fecha de junta anotada. Un "lo pienso" sin fecha no cuenta.</a:t>
+            </a:r>
+          </a:p>
+        </p:txBody>
+      </p:sp>
+      <p:sp>
+        <p:nvSpPr>
+          <p:cNvPr id="4" name="Slide Number Placeholder 3"/>
+          <p:cNvSpPr>
+            <a:spLocks noGrp="1"/>
+          </p:cNvSpPr>
+          <p:nvPr>
+            <p:ph type="sldNum" idx="5" sz="quarter"/>
+          </p:nvPr>
+        </p:nvSpPr>
+        <p:spPr/>
+      </p:sp>
+    </p:spTree>
+  </p:cSld>
+  <p:clrMapOvr>
+    <a:masterClrMapping/>
+  </p:clrMapOvr>
+</p:notes>
 </file>
 
 <file path=ppt/slideLayouts/slideLayout1.xml><?xml version="1.0" encoding="utf-8"?>
@@ -3199,7 +4013,7 @@
         <p:spPr>
           <a:xfrm>
             <a:off x="457200" y="320040"/>
-            <a:ext cx="2601667" cy="1463040"/>
+            <a:ext cx="2439063" cy="1371600"/>
           </a:xfrm>
           <a:prstGeom prst="rect">
             <a:avLst/>
@@ -3214,7 +4028,7 @@
         </p:nvSpPr>
         <p:spPr>
           <a:xfrm>
-            <a:off x="548640" y="1920240"/>
+            <a:off x="548640" y="1874519"/>
             <a:ext cx="10972800" cy="457200"/>
           </a:xfrm>
           <a:prstGeom prst="rect">
@@ -3256,8 +4070,8 @@
         </p:nvSpPr>
         <p:spPr>
           <a:xfrm>
-            <a:off x="548640" y="2377440"/>
-            <a:ext cx="11155680" cy="2011680"/>
+            <a:off x="548640" y="2331720"/>
+            <a:ext cx="11155680" cy="2194560"/>
           </a:xfrm>
           <a:prstGeom prst="rect">
             <a:avLst/>
@@ -3279,22 +4093,22 @@
               </a:spcAft>
             </a:pPr>
             <a:r>
-              <a:rPr sz="4000" b="1" i="0">
+              <a:rPr sz="4400" b="1" i="0">
                 <a:solidFill>
                   <a:srgbClr val="FFFFFF"/>
                 </a:solidFill>
                 <a:latin typeface="Constantia"/>
               </a:rPr>
-              <a:t>Las otras academias le prometen inglés. </a:t>
-            </a:r>
-            <a:r>
-              <a:rPr sz="4000" b="1" i="1">
+              <a:t>Beca del 45% en inglés para sus afiliados y sus familias, </a:t>
+            </a:r>
+            <a:r>
+              <a:rPr sz="4400" b="1" i="1">
                 <a:solidFill>
                   <a:srgbClr val="FBC900"/>
                 </a:solidFill>
                 <a:latin typeface="Constantia"/>
               </a:rPr>
-              <a:t>Nosotros le devolvemos un mejor afiliado.</a:t>
+              <a:t>sin costo para el fondo.</a:t>
             </a:r>
           </a:p>
         </p:txBody>
@@ -3307,8 +4121,8 @@
         </p:nvSpPr>
         <p:spPr>
           <a:xfrm>
-            <a:off x="548640" y="4343400"/>
-            <a:ext cx="10972800" cy="1097280"/>
+            <a:off x="548640" y="4617720"/>
+            <a:ext cx="10972800" cy="822960"/>
           </a:xfrm>
           <a:prstGeom prst="rect">
             <a:avLst/>
@@ -3317,48 +4131,6 @@
         </p:spPr>
         <p:txBody>
           <a:bodyPr wrap="square" lIns="45720" rIns="45720" tIns="27432" bIns="27432" anchor="t">
-            <a:spAutoFit/>
-          </a:bodyPr>
-          <a:lstStyle/>
-          <a:p>
-            <a:pPr algn="l">
-              <a:lnSpc>
-                <a:spcPct val="120000"/>
-              </a:lnSpc>
-              <a:spcAft>
-                <a:spcPts val="0"/>
-              </a:spcAft>
-            </a:pPr>
-            <a:r>
-              <a:rPr sz="1700" b="0" i="0">
-                <a:solidFill>
-                  <a:srgbClr val="FFF8E7"/>
-                </a:solidFill>
-                <a:latin typeface="Segoe UI"/>
-              </a:rPr>
-              <a:t>Becas con el nombre de su fondo para sus afiliados y sus hijos, sin costo para el fondo. Con garantía de aprendizaje por escrito: si el estudiante cumple su parte y no avanza, le devolvemos el 100% del nivel.</a:t>
-            </a:r>
-          </a:p>
-        </p:txBody>
-      </p:sp>
-      <p:sp>
-        <p:nvSpPr>
-          <p:cNvPr id="8" name="TextBox 7"/>
-          <p:cNvSpPr txBox="1"/>
-          <p:nvPr/>
-        </p:nvSpPr>
-        <p:spPr>
-          <a:xfrm>
-            <a:off x="548640" y="5760720"/>
-            <a:ext cx="7315200" cy="914400"/>
-          </a:xfrm>
-          <a:prstGeom prst="rect">
-            <a:avLst/>
-          </a:prstGeom>
-          <a:noFill/>
-        </p:spPr>
-        <p:txBody>
-          <a:bodyPr wrap="square" lIns="45720" rIns="45720" tIns="27432" bIns="27432" anchor="ctr">
             <a:spAutoFit/>
           </a:bodyPr>
           <a:lstStyle/>
@@ -3372,13 +4144,55 @@
               </a:spcAft>
             </a:pPr>
             <a:r>
-              <a:rPr sz="1500" b="1" i="0">
-                <a:solidFill>
-                  <a:srgbClr val="FFFFFF"/>
+              <a:rPr sz="2000" b="0" i="0">
+                <a:solidFill>
+                  <a:srgbClr val="FFF8E7"/>
                 </a:solidFill>
                 <a:latin typeface="Segoe UI"/>
               </a:rPr>
-              <a:t>Presentación para: </a:t>
+              <a:t>Programa presencial de A1 a B2, en Bucaramanga. Con garantía de aprendizaje por escrito.</a:t>
+            </a:r>
+          </a:p>
+        </p:txBody>
+      </p:sp>
+      <p:sp>
+        <p:nvSpPr>
+          <p:cNvPr id="8" name="TextBox 7"/>
+          <p:cNvSpPr txBox="1"/>
+          <p:nvPr/>
+        </p:nvSpPr>
+        <p:spPr>
+          <a:xfrm>
+            <a:off x="548640" y="5760720"/>
+            <a:ext cx="7315200" cy="914400"/>
+          </a:xfrm>
+          <a:prstGeom prst="rect">
+            <a:avLst/>
+          </a:prstGeom>
+          <a:noFill/>
+        </p:spPr>
+        <p:txBody>
+          <a:bodyPr wrap="square" lIns="45720" rIns="45720" tIns="27432" bIns="27432" anchor="ctr">
+            <a:spAutoFit/>
+          </a:bodyPr>
+          <a:lstStyle/>
+          <a:p>
+            <a:pPr algn="l">
+              <a:lnSpc>
+                <a:spcPct val="115000"/>
+              </a:lnSpc>
+              <a:spcAft>
+                <a:spcPts val="0"/>
+              </a:spcAft>
+            </a:pPr>
+            <a:r>
+              <a:rPr sz="1500" b="1" i="0">
+                <a:solidFill>
+                  <a:srgbClr val="FFFFFF"/>
+                </a:solidFill>
+                <a:latin typeface="Segoe UI"/>
+              </a:rPr>
+              <a:t>Para: </a:t>
             </a:r>
             <a:r>
               <a:rPr sz="1500" b="0" i="0">
@@ -3550,7 +4364,7 @@
         <p:spPr>
           <a:xfrm>
             <a:off x="502920" y="36576"/>
-            <a:ext cx="8229600" cy="329184"/>
+            <a:ext cx="5486400" cy="329184"/>
           </a:xfrm>
           <a:prstGeom prst="rect">
             <a:avLst/>
@@ -3578,7 +4392,7 @@
                 </a:solidFill>
                 <a:latin typeface="Segoe UI"/>
               </a:rPr>
-              <a:t>2 · SOMOS HEIIU</a:t>
+              <a:t>2 de 6</a:t>
             </a:r>
           </a:p>
         </p:txBody>
@@ -3591,8 +4405,8 @@
         </p:nvSpPr>
         <p:spPr>
           <a:xfrm>
-            <a:off x="9326880" y="36576"/>
-            <a:ext cx="2377440" cy="329184"/>
+            <a:off x="6583680" y="36576"/>
+            <a:ext cx="5120640" cy="329184"/>
           </a:xfrm>
           <a:prstGeom prst="rect">
             <a:avLst/>
@@ -3620,7 +4434,7 @@
                 </a:solidFill>
                 <a:latin typeface="Segoe UI"/>
               </a:rPr>
-              <a:t>HEIIU ENGLISH ACADEMY</a:t>
+              <a:t>HEIIU ENGLISH ACADEMY · PROGRAMA PARA FONDOS DE EMPLEADOS</a:t>
             </a:r>
           </a:p>
         </p:txBody>
@@ -3633,8 +4447,8 @@
         </p:nvSpPr>
         <p:spPr>
           <a:xfrm>
-            <a:off x="502920" y="548640"/>
-            <a:ext cx="11155680" cy="1051560"/>
+            <a:off x="548640" y="914400"/>
+            <a:ext cx="7223760" cy="2377440"/>
           </a:xfrm>
           <a:prstGeom prst="rect">
             <a:avLst/>
@@ -3656,13 +4470,13 @@
               </a:spcAft>
             </a:pPr>
             <a:r>
-              <a:rPr sz="3200" b="1" i="0">
+              <a:rPr sz="4000" b="1" i="0">
                 <a:solidFill>
                   <a:srgbClr val="E54C09"/>
                 </a:solidFill>
                 <a:latin typeface="Constantia"/>
               </a:rPr>
-              <a:t>Una academia presencial de Bucaramanga que responde por el resultado</a:t>
+              <a:t>El próximo grupo arranca el martes 3 de noviembre.</a:t>
             </a:r>
           </a:p>
         </p:txBody>
@@ -3675,7 +4489,7 @@
         </p:nvSpPr>
         <p:spPr>
           <a:xfrm>
-            <a:off x="548640" y="1627632"/>
+            <a:off x="594360" y="3429000"/>
             <a:ext cx="1463040" cy="38000"/>
           </a:xfrm>
           <a:prstGeom prst="rect">
@@ -3719,8 +4533,8 @@
         </p:nvSpPr>
         <p:spPr>
           <a:xfrm>
-            <a:off x="502920" y="1828800"/>
-            <a:ext cx="5669280" cy="4206240"/>
+            <a:off x="548640" y="3657600"/>
+            <a:ext cx="7223760" cy="2468880"/>
           </a:xfrm>
           <a:prstGeom prst="rect">
             <a:avLst/>
@@ -3735,14 +4549,14 @@
           <a:p>
             <a:pPr algn="l">
               <a:lnSpc>
-                <a:spcPct val="112000"/>
+                <a:spcPct val="115000"/>
               </a:lnSpc>
               <a:spcAft>
-                <a:spcPts val="700"/>
+                <a:spcPts val="1000"/>
               </a:spcAft>
             </a:pPr>
             <a:r>
-              <a:rPr sz="1400" b="1" i="0">
+              <a:rPr sz="2200" b="1" i="0">
                 <a:solidFill>
                   <a:srgbClr val="E54C09"/>
                 </a:solidFill>
@@ -3751,35 +4565,26 @@
               <a:t>▪ </a:t>
             </a:r>
             <a:r>
-              <a:rPr sz="1400" b="1" i="0">
+              <a:rPr sz="2200" b="0" i="0">
                 <a:solidFill>
                   <a:srgbClr val="222222"/>
                 </a:solidFill>
                 <a:latin typeface="Segoe UI"/>
               </a:rPr>
-              <a:t>Desde 2012. </a:t>
-            </a:r>
-            <a:r>
-              <a:rPr sz="1400" b="0" i="0">
-                <a:solidFill>
-                  <a:srgbClr val="222222"/>
-                </a:solidFill>
-                <a:latin typeface="Segoe UI"/>
-              </a:rPr>
-              <a:t>Heiiu English Academy es la marca de Global Teacher S.A.S., con licencia de la Secretaría de Educación (educación para el trabajo y el desarrollo humano) y sede propia en Sotomayor, Carrera 27 # 48-49.</a:t>
+              <a:t>Quedan 8 días. El grupo no para en diciembre: sigue hasta terminar el nivel.</a:t>
             </a:r>
           </a:p>
           <a:p>
             <a:pPr algn="l">
               <a:lnSpc>
-                <a:spcPct val="112000"/>
+                <a:spcPct val="115000"/>
               </a:lnSpc>
               <a:spcAft>
-                <a:spcPts val="700"/>
+                <a:spcPts val="1000"/>
               </a:spcAft>
             </a:pPr>
             <a:r>
-              <a:rPr sz="1400" b="1" i="0">
+              <a:rPr sz="2200" b="1" i="0">
                 <a:solidFill>
                   <a:srgbClr val="E54C09"/>
                 </a:solidFill>
@@ -3788,35 +4593,26 @@
               <a:t>▪ </a:t>
             </a:r>
             <a:r>
-              <a:rPr sz="1400" b="1" i="0">
+              <a:rPr sz="2200" b="0" i="0">
                 <a:solidFill>
                   <a:srgbClr val="222222"/>
                 </a:solidFill>
                 <a:latin typeface="Segoe UI"/>
               </a:rPr>
-              <a:t>Certificada. </a:t>
-            </a:r>
-            <a:r>
-              <a:rPr sz="1400" b="0" i="0">
-                <a:solidFill>
-                  <a:srgbClr val="222222"/>
-                </a:solidFill>
-                <a:latin typeface="Segoe UI"/>
-              </a:rPr>
-              <a:t>Certificación de calidad ISO 9001 e ICONTEC.</a:t>
+              <a:t>Este trimestre hay 3 becas con el nombre del fondo. Si todos cumplen, suben a 5.</a:t>
             </a:r>
           </a:p>
           <a:p>
             <a:pPr algn="l">
               <a:lnSpc>
-                <a:spcPct val="112000"/>
+                <a:spcPct val="115000"/>
               </a:lnSpc>
               <a:spcAft>
-                <a:spcPts val="700"/>
+                <a:spcPts val="1000"/>
               </a:spcAft>
             </a:pPr>
             <a:r>
-              <a:rPr sz="1400" b="1" i="0">
+              <a:rPr sz="2200" b="1" i="0">
                 <a:solidFill>
                   <a:srgbClr val="E54C09"/>
                 </a:solidFill>
@@ -3825,96 +4621,13 @@
               <a:t>▪ </a:t>
             </a:r>
             <a:r>
-              <a:rPr sz="1400" b="1" i="0">
+              <a:rPr sz="2200" b="0" i="0">
                 <a:solidFill>
                   <a:srgbClr val="222222"/>
                 </a:solidFill>
                 <a:latin typeface="Segoe UI"/>
               </a:rPr>
-              <a:t>Un solo programa, completo. </a:t>
-            </a:r>
-            <a:r>
-              <a:rPr sz="1400" b="0" i="0">
-                <a:solidFill>
-                  <a:srgbClr val="222222"/>
-                </a:solidFill>
-                <a:latin typeface="Segoe UI"/>
-              </a:rPr>
-              <a:t>De A1 a B2 en 575 horas presenciales certificadas, en grupos de máximo 16 personas. B2 es el nivel que piden las vacantes, las universidades y los programas en el exterior.</a:t>
-            </a:r>
-          </a:p>
-          <a:p>
-            <a:pPr algn="l">
-              <a:lnSpc>
-                <a:spcPct val="112000"/>
-              </a:lnSpc>
-              <a:spcAft>
-                <a:spcPts val="700"/>
-              </a:spcAft>
-            </a:pPr>
-            <a:r>
-              <a:rPr sz="1400" b="1" i="0">
-                <a:solidFill>
-                  <a:srgbClr val="E54C09"/>
-                </a:solidFill>
-                <a:latin typeface="Segoe UI"/>
-              </a:rPr>
-              <a:t>▪ </a:t>
-            </a:r>
-            <a:r>
-              <a:rPr sz="1400" b="1" i="0">
-                <a:solidFill>
-                  <a:srgbClr val="222222"/>
-                </a:solidFill>
-                <a:latin typeface="Segoe UI"/>
-              </a:rPr>
-              <a:t>Nuestro logro: la garantía. </a:t>
-            </a:r>
-            <a:r>
-              <a:rPr sz="1400" b="0" i="0">
-                <a:solidFill>
-                  <a:srgbClr val="222222"/>
-                </a:solidFill>
-                <a:latin typeface="Segoe UI"/>
-              </a:rPr>
-              <a:t>Es la que queda por escrito en el contrato de cada estudiante: si cumple su parte y no avanza, le devolvemos el 100% del nivel. Pregunte en cualquier academia quién la firma.</a:t>
-            </a:r>
-          </a:p>
-          <a:p>
-            <a:pPr algn="l">
-              <a:lnSpc>
-                <a:spcPct val="112000"/>
-              </a:lnSpc>
-              <a:spcAft>
-                <a:spcPts val="700"/>
-              </a:spcAft>
-            </a:pPr>
-            <a:r>
-              <a:rPr sz="1400" b="1" i="0">
-                <a:solidFill>
-                  <a:srgbClr val="E54C09"/>
-                </a:solidFill>
-                <a:latin typeface="Segoe UI"/>
-              </a:rPr>
-              <a:t>▪ </a:t>
-            </a:r>
-            <a:r>
-              <a:rPr sz="1400" b="1" i="0">
-                <a:solidFill>
-                  <a:srgbClr val="222222"/>
-                </a:solidFill>
-                <a:latin typeface="Segoe UI"/>
-              </a:rPr>
-              <a:t>Convenios vigentes </a:t>
-            </a:r>
-            <a:r>
-              <a:rPr sz="1400" b="0" i="0">
-                <a:solidFill>
-                  <a:srgbClr val="222222"/>
-                </a:solidFill>
-                <a:latin typeface="Segoe UI"/>
-              </a:rPr>
-              <a:t>con entidades y empresas de la región, con becas a nombre de cada una.</a:t>
+              <a:t>Los afiliados que no entren ahora esperan al siguiente grupo.</a:t>
             </a:r>
           </a:p>
         </p:txBody>
@@ -3927,19 +4640,17 @@
         </p:nvSpPr>
         <p:spPr>
           <a:xfrm>
-            <a:off x="6492240" y="1828800"/>
-            <a:ext cx="5212080" cy="1325880"/>
+            <a:off x="8138160" y="914400"/>
+            <a:ext cx="3566160" cy="5120640"/>
           </a:xfrm>
           <a:prstGeom prst="rect">
             <a:avLst/>
           </a:prstGeom>
           <a:solidFill>
-            <a:srgbClr val="FFFFFF"/>
+            <a:srgbClr val="FF4A00"/>
           </a:solidFill>
-          <a:ln w="12700">
-            <a:solidFill>
-              <a:srgbClr val="F0D9C8"/>
-            </a:solidFill>
+          <a:ln>
+            <a:noFill/>
           </a:ln>
           <a:effectLst/>
         </p:spPr>
@@ -3973,8 +4684,8 @@
         </p:nvSpPr>
         <p:spPr>
           <a:xfrm>
-            <a:off x="6656832" y="1938528"/>
-            <a:ext cx="4882896" cy="411480"/>
+            <a:off x="8229600" y="1280160"/>
+            <a:ext cx="3383280" cy="2377440"/>
           </a:xfrm>
           <a:prstGeom prst="rect">
             <a:avLst/>
@@ -3982,7 +4693,91 @@
           <a:noFill/>
         </p:spPr>
         <p:txBody>
+          <a:bodyPr wrap="square" lIns="45720" rIns="45720" tIns="27432" bIns="27432" anchor="ctr">
+            <a:spAutoFit/>
+          </a:bodyPr>
+          <a:lstStyle/>
+          <a:p>
+            <a:pPr algn="ctr">
+              <a:lnSpc>
+                <a:spcPct val="100000"/>
+              </a:lnSpc>
+              <a:spcAft>
+                <a:spcPts val="0"/>
+              </a:spcAft>
+            </a:pPr>
+            <a:r>
+              <a:rPr sz="6400" b="1" i="0">
+                <a:solidFill>
+                  <a:srgbClr val="FFFFFF"/>
+                </a:solidFill>
+                <a:latin typeface="Constantia"/>
+              </a:rPr>
+              <a:t>3 NOV</a:t>
+            </a:r>
+          </a:p>
+        </p:txBody>
+      </p:sp>
+      <p:sp>
+        <p:nvSpPr>
+          <p:cNvPr id="11" name="TextBox 10"/>
+          <p:cNvSpPr txBox="1"/>
+          <p:nvPr/>
+        </p:nvSpPr>
+        <p:spPr>
+          <a:xfrm>
+            <a:off x="8321040" y="3749039"/>
+            <a:ext cx="3200400" cy="2103120"/>
+          </a:xfrm>
+          <a:prstGeom prst="rect">
+            <a:avLst/>
+          </a:prstGeom>
+          <a:noFill/>
+        </p:spPr>
+        <p:txBody>
           <a:bodyPr wrap="square" lIns="45720" rIns="45720" tIns="27432" bIns="27432" anchor="t">
+            <a:spAutoFit/>
+          </a:bodyPr>
+          <a:lstStyle/>
+          <a:p>
+            <a:pPr algn="ctr">
+              <a:lnSpc>
+                <a:spcPct val="120000"/>
+              </a:lnSpc>
+              <a:spcAft>
+                <a:spcPts val="0"/>
+              </a:spcAft>
+            </a:pPr>
+            <a:r>
+              <a:rPr sz="1800" b="0" i="0">
+                <a:solidFill>
+                  <a:srgbClr val="FFFFFF"/>
+                </a:solidFill>
+                <a:latin typeface="Segoe UI"/>
+              </a:rPr>
+              <a:t>Martes 3 de noviembre de 2026. Grupos de máximo 16, por orden de matrícula con la inicial pagada.</a:t>
+            </a:r>
+          </a:p>
+        </p:txBody>
+      </p:sp>
+      <p:sp>
+        <p:nvSpPr>
+          <p:cNvPr id="12" name="TextBox 11"/>
+          <p:cNvSpPr txBox="1"/>
+          <p:nvPr/>
+        </p:nvSpPr>
+        <p:spPr>
+          <a:xfrm>
+            <a:off x="502920" y="6355080"/>
+            <a:ext cx="11155680" cy="365760"/>
+          </a:xfrm>
+          <a:prstGeom prst="rect">
+            <a:avLst/>
+          </a:prstGeom>
+          <a:noFill/>
+        </p:spPr>
+        <p:txBody>
+          <a:bodyPr wrap="square" lIns="45720" rIns="45720" tIns="27432" bIns="27432" anchor="ctr">
             <a:spAutoFit/>
           </a:bodyPr>
           <a:lstStyle/>
@@ -3996,357 +4791,13 @@
               </a:spcAft>
             </a:pPr>
             <a:r>
-              <a:rPr sz="1300" b="1" i="0">
-                <a:solidFill>
-                  <a:srgbClr val="E54C09"/>
+              <a:rPr sz="1000" b="0" i="0">
+                <a:solidFill>
+                  <a:srgbClr val="5A5A5A"/>
                 </a:solidFill>
                 <a:latin typeface="Segoe UI"/>
               </a:rPr>
-              <a:t>HABLAS DESDE EL PRIMER DÍA</a:t>
-            </a:r>
-          </a:p>
-        </p:txBody>
-      </p:sp>
-      <p:sp>
-        <p:nvSpPr>
-          <p:cNvPr id="11" name="TextBox 10"/>
-          <p:cNvSpPr txBox="1"/>
-          <p:nvPr/>
-        </p:nvSpPr>
-        <p:spPr>
-          <a:xfrm>
-            <a:off x="6656832" y="2331720"/>
-            <a:ext cx="4882896" cy="731520"/>
-          </a:xfrm>
-          <a:prstGeom prst="rect">
-            <a:avLst/>
-          </a:prstGeom>
-          <a:noFill/>
-        </p:spPr>
-        <p:txBody>
-          <a:bodyPr wrap="square" lIns="45720" rIns="45720" tIns="27432" bIns="27432" anchor="t">
-            <a:spAutoFit/>
-          </a:bodyPr>
-          <a:lstStyle/>
-          <a:p>
-            <a:pPr algn="l">
-              <a:lnSpc>
-                <a:spcPct val="112000"/>
-              </a:lnSpc>
-              <a:spcAft>
-                <a:spcPts val="0"/>
-              </a:spcAft>
-            </a:pPr>
-            <a:r>
-              <a:rPr sz="1200" b="0" i="0">
-                <a:solidFill>
-                  <a:srgbClr val="222222"/>
-                </a:solidFill>
-                <a:latin typeface="Segoe UI"/>
-              </a:rPr>
-              <a:t>Cada clase tiene una simulación real (una llamada, una reunión, un cliente, una entrevista) con un profesor que corrige ahí mismo. Celular guardado.</a:t>
-            </a:r>
-          </a:p>
-        </p:txBody>
-      </p:sp>
-      <p:sp>
-        <p:nvSpPr>
-          <p:cNvPr id="12" name="Rectangle 11"/>
-          <p:cNvSpPr/>
-          <p:nvPr/>
-        </p:nvSpPr>
-        <p:spPr>
-          <a:xfrm>
-            <a:off x="6492240" y="3273552"/>
-            <a:ext cx="5212080" cy="1325880"/>
-          </a:xfrm>
-          <a:prstGeom prst="rect">
-            <a:avLst/>
-          </a:prstGeom>
-          <a:solidFill>
-            <a:srgbClr val="FFFFFF"/>
-          </a:solidFill>
-          <a:ln w="12700">
-            <a:solidFill>
-              <a:srgbClr val="F0D9C8"/>
-            </a:solidFill>
-          </a:ln>
-          <a:effectLst/>
-        </p:spPr>
-        <p:style>
-          <a:lnRef idx="1">
-            <a:schemeClr val="accent1"/>
-          </a:lnRef>
-          <a:fillRef idx="3">
-            <a:schemeClr val="accent1"/>
-          </a:fillRef>
-          <a:effectRef idx="2">
-            <a:schemeClr val="accent1"/>
-          </a:effectRef>
-          <a:fontRef idx="minor">
-            <a:schemeClr val="lt1"/>
-          </a:fontRef>
-        </p:style>
-        <p:txBody>
-          <a:bodyPr rtlCol="0" anchor="ctr"/>
-          <a:lstStyle/>
-          <a:p>
-            <a:pPr algn="ctr"/>
-          </a:p>
-        </p:txBody>
-      </p:sp>
-      <p:sp>
-        <p:nvSpPr>
-          <p:cNvPr id="13" name="TextBox 12"/>
-          <p:cNvSpPr txBox="1"/>
-          <p:nvPr/>
-        </p:nvSpPr>
-        <p:spPr>
-          <a:xfrm>
-            <a:off x="6656832" y="3383280"/>
-            <a:ext cx="4882896" cy="411480"/>
-          </a:xfrm>
-          <a:prstGeom prst="rect">
-            <a:avLst/>
-          </a:prstGeom>
-          <a:noFill/>
-        </p:spPr>
-        <p:txBody>
-          <a:bodyPr wrap="square" lIns="45720" rIns="45720" tIns="27432" bIns="27432" anchor="t">
-            <a:spAutoFit/>
-          </a:bodyPr>
-          <a:lstStyle/>
-          <a:p>
-            <a:pPr algn="l">
-              <a:lnSpc>
-                <a:spcPct val="115000"/>
-              </a:lnSpc>
-              <a:spcAft>
-                <a:spcPts val="0"/>
-              </a:spcAft>
-            </a:pPr>
-            <a:r>
-              <a:rPr sz="1300" b="1" i="0">
-                <a:solidFill>
-                  <a:srgbClr val="E54C09"/>
-                </a:solidFill>
-                <a:latin typeface="Segoe UI"/>
-              </a:rPr>
-              <a:t>AQUÍ NADIE ENTRENA SOLO</a:t>
-            </a:r>
-          </a:p>
-        </p:txBody>
-      </p:sp>
-      <p:sp>
-        <p:nvSpPr>
-          <p:cNvPr id="14" name="TextBox 13"/>
-          <p:cNvSpPr txBox="1"/>
-          <p:nvPr/>
-        </p:nvSpPr>
-        <p:spPr>
-          <a:xfrm>
-            <a:off x="6656832" y="3776472"/>
-            <a:ext cx="4882896" cy="731520"/>
-          </a:xfrm>
-          <a:prstGeom prst="rect">
-            <a:avLst/>
-          </a:prstGeom>
-          <a:noFill/>
-        </p:spPr>
-        <p:txBody>
-          <a:bodyPr wrap="square" lIns="45720" rIns="45720" tIns="27432" bIns="27432" anchor="t">
-            <a:spAutoFit/>
-          </a:bodyPr>
-          <a:lstStyle/>
-          <a:p>
-            <a:pPr algn="l">
-              <a:lnSpc>
-                <a:spcPct val="112000"/>
-              </a:lnSpc>
-              <a:spcAft>
-                <a:spcPts val="0"/>
-              </a:spcAft>
-            </a:pPr>
-            <a:r>
-              <a:rPr sz="1200" b="0" i="0">
-                <a:solidFill>
-                  <a:srgbClr val="222222"/>
-                </a:solidFill>
-                <a:latin typeface="Segoe UI"/>
-              </a:rPr>
-              <a:t>Video corto en inglés todos los días desde la casa, devuelto con una mejora. Si falta y no avisa, lo llamamos ese mismo día. Cada clase registra la hora de llegada.</a:t>
-            </a:r>
-          </a:p>
-        </p:txBody>
-      </p:sp>
-      <p:sp>
-        <p:nvSpPr>
-          <p:cNvPr id="15" name="Rectangle 14"/>
-          <p:cNvSpPr/>
-          <p:nvPr/>
-        </p:nvSpPr>
-        <p:spPr>
-          <a:xfrm>
-            <a:off x="6492240" y="4718304"/>
-            <a:ext cx="5212080" cy="1325880"/>
-          </a:xfrm>
-          <a:prstGeom prst="rect">
-            <a:avLst/>
-          </a:prstGeom>
-          <a:solidFill>
-            <a:srgbClr val="FFFFFF"/>
-          </a:solidFill>
-          <a:ln w="12700">
-            <a:solidFill>
-              <a:srgbClr val="F0D9C8"/>
-            </a:solidFill>
-          </a:ln>
-          <a:effectLst/>
-        </p:spPr>
-        <p:style>
-          <a:lnRef idx="1">
-            <a:schemeClr val="accent1"/>
-          </a:lnRef>
-          <a:fillRef idx="3">
-            <a:schemeClr val="accent1"/>
-          </a:fillRef>
-          <a:effectRef idx="2">
-            <a:schemeClr val="accent1"/>
-          </a:effectRef>
-          <a:fontRef idx="minor">
-            <a:schemeClr val="lt1"/>
-          </a:fontRef>
-        </p:style>
-        <p:txBody>
-          <a:bodyPr rtlCol="0" anchor="ctr"/>
-          <a:lstStyle/>
-          <a:p>
-            <a:pPr algn="ctr"/>
-          </a:p>
-        </p:txBody>
-      </p:sp>
-      <p:sp>
-        <p:nvSpPr>
-          <p:cNvPr id="16" name="TextBox 15"/>
-          <p:cNvSpPr txBox="1"/>
-          <p:nvPr/>
-        </p:nvSpPr>
-        <p:spPr>
-          <a:xfrm>
-            <a:off x="6656832" y="4828032"/>
-            <a:ext cx="4882896" cy="411480"/>
-          </a:xfrm>
-          <a:prstGeom prst="rect">
-            <a:avLst/>
-          </a:prstGeom>
-          <a:noFill/>
-        </p:spPr>
-        <p:txBody>
-          <a:bodyPr wrap="square" lIns="45720" rIns="45720" tIns="27432" bIns="27432" anchor="t">
-            <a:spAutoFit/>
-          </a:bodyPr>
-          <a:lstStyle/>
-          <a:p>
-            <a:pPr algn="l">
-              <a:lnSpc>
-                <a:spcPct val="115000"/>
-              </a:lnSpc>
-              <a:spcAft>
-                <a:spcPts val="0"/>
-              </a:spcAft>
-            </a:pPr>
-            <a:r>
-              <a:rPr sz="1300" b="1" i="0">
-                <a:solidFill>
-                  <a:srgbClr val="E54C09"/>
-                </a:solidFill>
-                <a:latin typeface="Segoe UI"/>
-              </a:rPr>
-              <a:t>SE NOTA, Y SE PUEDE MOSTRAR</a:t>
-            </a:r>
-          </a:p>
-        </p:txBody>
-      </p:sp>
-      <p:sp>
-        <p:nvSpPr>
-          <p:cNvPr id="17" name="TextBox 16"/>
-          <p:cNvSpPr txBox="1"/>
-          <p:nvPr/>
-        </p:nvSpPr>
-        <p:spPr>
-          <a:xfrm>
-            <a:off x="6656832" y="5221224"/>
-            <a:ext cx="4882896" cy="731520"/>
-          </a:xfrm>
-          <a:prstGeom prst="rect">
-            <a:avLst/>
-          </a:prstGeom>
-          <a:noFill/>
-        </p:spPr>
-        <p:txBody>
-          <a:bodyPr wrap="square" lIns="45720" rIns="45720" tIns="27432" bIns="27432" anchor="t">
-            <a:spAutoFit/>
-          </a:bodyPr>
-          <a:lstStyle/>
-          <a:p>
-            <a:pPr algn="l">
-              <a:lnSpc>
-                <a:spcPct val="112000"/>
-              </a:lnSpc>
-              <a:spcAft>
-                <a:spcPts val="0"/>
-              </a:spcAft>
-            </a:pPr>
-            <a:r>
-              <a:rPr sz="1200" b="0" i="0">
-                <a:solidFill>
-                  <a:srgbClr val="222222"/>
-                </a:solidFill>
-                <a:latin typeface="Segoe UI"/>
-              </a:rPr>
-              <a:t>Prueba de entrada y de salida, evaluador externo al cierre de cada nivel, y el video del primer día junto al del último. Lo que avanza queda por escrito, no en una sensación.</a:t>
-            </a:r>
-          </a:p>
-        </p:txBody>
-      </p:sp>
-      <p:sp>
-        <p:nvSpPr>
-          <p:cNvPr id="18" name="TextBox 17"/>
-          <p:cNvSpPr txBox="1"/>
-          <p:nvPr/>
-        </p:nvSpPr>
-        <p:spPr>
-          <a:xfrm>
-            <a:off x="502920" y="6355080"/>
-            <a:ext cx="11155680" cy="365760"/>
-          </a:xfrm>
-          <a:prstGeom prst="rect">
-            <a:avLst/>
-          </a:prstGeom>
-          <a:noFill/>
-        </p:spPr>
-        <p:txBody>
-          <a:bodyPr wrap="square" lIns="45720" rIns="45720" tIns="27432" bIns="27432" anchor="ctr">
-            <a:spAutoFit/>
-          </a:bodyPr>
-          <a:lstStyle/>
-          <a:p>
-            <a:pPr algn="l">
-              <a:lnSpc>
-                <a:spcPct val="115000"/>
-              </a:lnSpc>
-              <a:spcAft>
-                <a:spcPts val="0"/>
-              </a:spcAft>
-            </a:pPr>
-            <a:r>
-              <a:rPr sz="1000" b="0" i="0">
-                <a:solidFill>
-                  <a:srgbClr val="5A5A5A"/>
-                </a:solidFill>
-                <a:latin typeface="Segoe UI"/>
-              </a:rPr>
-              <a:t>Vender inglés es fácil. Lo difícil es que la gente aprenda. En Heiiu queremos la parte difícil: que venga, que se suelte a hablar y que no se rinda.</a:t>
+              <a:t>Línea de alianzas 316 768 8793 · Carrera 27 # 48-49, Sotomayor, Bucaramanga</a:t>
             </a:r>
           </a:p>
         </p:txBody>
@@ -4466,7 +4917,7 @@
         <p:spPr>
           <a:xfrm>
             <a:off x="502920" y="36576"/>
-            <a:ext cx="8229600" cy="329184"/>
+            <a:ext cx="5486400" cy="329184"/>
           </a:xfrm>
           <a:prstGeom prst="rect">
             <a:avLst/>
@@ -4494,7 +4945,7 @@
                 </a:solidFill>
                 <a:latin typeface="Segoe UI"/>
               </a:rPr>
-              <a:t>3 · OFERTA EDUCATIVA · PLAN A</a:t>
+              <a:t>3 de 6</a:t>
             </a:r>
           </a:p>
         </p:txBody>
@@ -4507,8 +4958,8 @@
         </p:nvSpPr>
         <p:spPr>
           <a:xfrm>
-            <a:off x="9326880" y="36576"/>
-            <a:ext cx="2377440" cy="329184"/>
+            <a:off x="6583680" y="36576"/>
+            <a:ext cx="5120640" cy="329184"/>
           </a:xfrm>
           <a:prstGeom prst="rect">
             <a:avLst/>
@@ -4536,7 +4987,7 @@
                 </a:solidFill>
                 <a:latin typeface="Segoe UI"/>
               </a:rPr>
-              <a:t>HEIIU ENGLISH ACADEMY</a:t>
+              <a:t>HEIIU ENGLISH ACADEMY · PROGRAMA PARA FONDOS DE EMPLEADOS</a:t>
             </a:r>
           </a:p>
         </p:txBody>
@@ -4549,8 +5000,8 @@
         </p:nvSpPr>
         <p:spPr>
           <a:xfrm>
-            <a:off x="502920" y="548640"/>
-            <a:ext cx="11155680" cy="1051560"/>
+            <a:off x="548640" y="914400"/>
+            <a:ext cx="7223760" cy="2377440"/>
           </a:xfrm>
           <a:prstGeom prst="rect">
             <a:avLst/>
@@ -4572,13 +5023,13 @@
               </a:spcAft>
             </a:pPr>
             <a:r>
-              <a:rPr sz="3200" b="1" i="0">
+              <a:rPr sz="4000" b="1" i="0">
                 <a:solidFill>
                   <a:srgbClr val="E54C09"/>
                 </a:solidFill>
                 <a:latin typeface="Constantia"/>
               </a:rPr>
-              <a:t>Programa completo de inglés, de A1 a B2: 575 horas presenciales</a:t>
+              <a:t>Afiliados y familias estudian con 45% de beca a nombre del fondo.</a:t>
             </a:r>
           </a:p>
         </p:txBody>
@@ -4591,7 +5042,7 @@
         </p:nvSpPr>
         <p:spPr>
           <a:xfrm>
-            <a:off x="548640" y="1627632"/>
+            <a:off x="594360" y="3429000"/>
             <a:ext cx="1463040" cy="38000"/>
           </a:xfrm>
           <a:prstGeom prst="rect">
@@ -4629,25 +5080,130 @@
       </p:sp>
       <p:sp>
         <p:nvSpPr>
-          <p:cNvPr id="8" name="Rectangle 7"/>
+          <p:cNvPr id="8" name="TextBox 7"/>
+          <p:cNvSpPr txBox="1"/>
+          <p:nvPr/>
+        </p:nvSpPr>
+        <p:spPr>
+          <a:xfrm>
+            <a:off x="548640" y="3657600"/>
+            <a:ext cx="7223760" cy="2468880"/>
+          </a:xfrm>
+          <a:prstGeom prst="rect">
+            <a:avLst/>
+          </a:prstGeom>
+          <a:noFill/>
+        </p:spPr>
+        <p:txBody>
+          <a:bodyPr wrap="square" lIns="45720" rIns="45720" tIns="27432" bIns="27432" anchor="t">
+            <a:spAutoFit/>
+          </a:bodyPr>
+          <a:lstStyle/>
+          <a:p>
+            <a:pPr algn="l">
+              <a:lnSpc>
+                <a:spcPct val="115000"/>
+              </a:lnSpc>
+              <a:spcAft>
+                <a:spcPts val="1000"/>
+              </a:spcAft>
+            </a:pPr>
+            <a:r>
+              <a:rPr sz="2200" b="1" i="0">
+                <a:solidFill>
+                  <a:srgbClr val="E54C09"/>
+                </a:solidFill>
+                <a:latin typeface="Segoe UI"/>
+              </a:rPr>
+              <a:t>▪ </a:t>
+            </a:r>
+            <a:r>
+              <a:rPr sz="2200" b="0" i="0">
+                <a:solidFill>
+                  <a:srgbClr val="222222"/>
+                </a:solidFill>
+                <a:latin typeface="Segoe UI"/>
+              </a:rPr>
+              <a:t>Programa completo de inglés, de A1 a B2: 575 horas presenciales, grupos de máximo 16.</a:t>
+            </a:r>
+          </a:p>
+          <a:p>
+            <a:pPr algn="l">
+              <a:lnSpc>
+                <a:spcPct val="115000"/>
+              </a:lnSpc>
+              <a:spcAft>
+                <a:spcPts val="1000"/>
+              </a:spcAft>
+            </a:pPr>
+            <a:r>
+              <a:rPr sz="2200" b="1" i="0">
+                <a:solidFill>
+                  <a:srgbClr val="E54C09"/>
+                </a:solidFill>
+                <a:latin typeface="Segoe UI"/>
+              </a:rPr>
+              <a:t>▪ </a:t>
+            </a:r>
+            <a:r>
+              <a:rPr sz="2200" b="0" i="0">
+                <a:solidFill>
+                  <a:srgbClr val="222222"/>
+                </a:solidFill>
+                <a:latin typeface="Segoe UI"/>
+              </a:rPr>
+              <a:t>Para el afiliado, su cónyuge y sus hijos desde los 12 años.</a:t>
+            </a:r>
+          </a:p>
+          <a:p>
+            <a:pPr algn="l">
+              <a:lnSpc>
+                <a:spcPct val="115000"/>
+              </a:lnSpc>
+              <a:spcAft>
+                <a:spcPts val="1000"/>
+              </a:spcAft>
+            </a:pPr>
+            <a:r>
+              <a:rPr sz="2200" b="1" i="0">
+                <a:solidFill>
+                  <a:srgbClr val="E54C09"/>
+                </a:solidFill>
+                <a:latin typeface="Segoe UI"/>
+              </a:rPr>
+              <a:t>▪ </a:t>
+            </a:r>
+            <a:r>
+              <a:rPr sz="2200" b="0" i="0">
+                <a:solidFill>
+                  <a:srgbClr val="222222"/>
+                </a:solidFill>
+                <a:latin typeface="Segoe UI"/>
+              </a:rPr>
+              <a:t>Con crédito del fondo o cesantías paga de contado, y la beca de contado es la mayor.</a:t>
+            </a:r>
+          </a:p>
+        </p:txBody>
+      </p:sp>
+      <p:sp>
+        <p:nvSpPr>
+          <p:cNvPr id="9" name="Rectangle 8"/>
           <p:cNvSpPr/>
           <p:nvPr/>
         </p:nvSpPr>
         <p:spPr>
           <a:xfrm>
-            <a:off x="502920" y="1828800"/>
-            <a:ext cx="3611880" cy="2011680"/>
+            <a:off x="8138160" y="914400"/>
+            <a:ext cx="3566160" cy="5120640"/>
           </a:xfrm>
           <a:prstGeom prst="rect">
             <a:avLst/>
           </a:prstGeom>
           <a:solidFill>
-            <a:srgbClr val="FFFFFF"/>
+            <a:srgbClr val="FF4A00"/>
           </a:solidFill>
-          <a:ln w="12700">
-            <a:solidFill>
-              <a:srgbClr val="F0D9C8"/>
-            </a:solidFill>
+          <a:ln>
+            <a:noFill/>
           </a:ln>
           <a:effectLst/>
         </p:spPr>
@@ -4675,14 +5231,14 @@
       </p:sp>
       <p:sp>
         <p:nvSpPr>
-          <p:cNvPr id="9" name="TextBox 8"/>
+          <p:cNvPr id="10" name="TextBox 9"/>
           <p:cNvSpPr txBox="1"/>
           <p:nvPr/>
         </p:nvSpPr>
         <p:spPr>
           <a:xfrm>
-            <a:off x="667512" y="1938528"/>
-            <a:ext cx="3282696" cy="411480"/>
+            <a:off x="8229600" y="1280160"/>
+            <a:ext cx="3383280" cy="2377440"/>
           </a:xfrm>
           <a:prstGeom prst="rect">
             <a:avLst/>
@@ -4690,7 +5246,91 @@
           <a:noFill/>
         </p:spPr>
         <p:txBody>
+          <a:bodyPr wrap="square" lIns="45720" rIns="45720" tIns="27432" bIns="27432" anchor="ctr">
+            <a:spAutoFit/>
+          </a:bodyPr>
+          <a:lstStyle/>
+          <a:p>
+            <a:pPr algn="ctr">
+              <a:lnSpc>
+                <a:spcPct val="100000"/>
+              </a:lnSpc>
+              <a:spcAft>
+                <a:spcPts val="0"/>
+              </a:spcAft>
+            </a:pPr>
+            <a:r>
+              <a:rPr sz="4600" b="1" i="0">
+                <a:solidFill>
+                  <a:srgbClr val="FFFFFF"/>
+                </a:solidFill>
+                <a:latin typeface="Constantia"/>
+              </a:rPr>
+              <a:t>$3.913.200</a:t>
+            </a:r>
+          </a:p>
+        </p:txBody>
+      </p:sp>
+      <p:sp>
+        <p:nvSpPr>
+          <p:cNvPr id="11" name="TextBox 10"/>
+          <p:cNvSpPr txBox="1"/>
+          <p:nvPr/>
+        </p:nvSpPr>
+        <p:spPr>
+          <a:xfrm>
+            <a:off x="8321040" y="3749039"/>
+            <a:ext cx="3200400" cy="2103120"/>
+          </a:xfrm>
+          <a:prstGeom prst="rect">
+            <a:avLst/>
+          </a:prstGeom>
+          <a:noFill/>
+        </p:spPr>
+        <p:txBody>
           <a:bodyPr wrap="square" lIns="45720" rIns="45720" tIns="27432" bIns="27432" anchor="t">
+            <a:spAutoFit/>
+          </a:bodyPr>
+          <a:lstStyle/>
+          <a:p>
+            <a:pPr algn="ctr">
+              <a:lnSpc>
+                <a:spcPct val="120000"/>
+              </a:lnSpc>
+              <a:spcAft>
+                <a:spcPts val="0"/>
+              </a:spcAft>
+            </a:pPr>
+            <a:r>
+              <a:rPr sz="1800" b="0" i="0">
+                <a:solidFill>
+                  <a:srgbClr val="FFFFFF"/>
+                </a:solidFill>
+                <a:latin typeface="Segoe UI"/>
+              </a:rPr>
+              <a:t>menos por afiliado: $4.782.800 en lugar de $8.696.000, el programa completo.</a:t>
+            </a:r>
+          </a:p>
+        </p:txBody>
+      </p:sp>
+      <p:sp>
+        <p:nvSpPr>
+          <p:cNvPr id="12" name="TextBox 11"/>
+          <p:cNvSpPr txBox="1"/>
+          <p:nvPr/>
+        </p:nvSpPr>
+        <p:spPr>
+          <a:xfrm>
+            <a:off x="502920" y="6355080"/>
+            <a:ext cx="11155680" cy="365760"/>
+          </a:xfrm>
+          <a:prstGeom prst="rect">
+            <a:avLst/>
+          </a:prstGeom>
+          <a:noFill/>
+        </p:spPr>
+        <p:txBody>
+          <a:bodyPr wrap="square" lIns="45720" rIns="45720" tIns="27432" bIns="27432" anchor="ctr">
             <a:spAutoFit/>
           </a:bodyPr>
           <a:lstStyle/>
@@ -4704,1089 +5344,13 @@
               </a:spcAft>
             </a:pPr>
             <a:r>
-              <a:rPr sz="1300" b="1" i="0">
-                <a:solidFill>
-                  <a:srgbClr val="E54C09"/>
+              <a:rPr sz="1000" b="0" i="0">
+                <a:solidFill>
+                  <a:srgbClr val="5A5A5A"/>
                 </a:solidFill>
                 <a:latin typeface="Segoe UI"/>
               </a:rPr>
-              <a:t>HORARIOS</a:t>
-            </a:r>
-          </a:p>
-        </p:txBody>
-      </p:sp>
-      <p:sp>
-        <p:nvSpPr>
-          <p:cNvPr id="10" name="TextBox 9"/>
-          <p:cNvSpPr txBox="1"/>
-          <p:nvPr/>
-        </p:nvSpPr>
-        <p:spPr>
-          <a:xfrm>
-            <a:off x="667512" y="2331720"/>
-            <a:ext cx="3282696" cy="1417320"/>
-          </a:xfrm>
-          <a:prstGeom prst="rect">
-            <a:avLst/>
-          </a:prstGeom>
-          <a:noFill/>
-        </p:spPr>
-        <p:txBody>
-          <a:bodyPr wrap="square" lIns="45720" rIns="45720" tIns="27432" bIns="27432" anchor="t">
-            <a:spAutoFit/>
-          </a:bodyPr>
-          <a:lstStyle/>
-          <a:p>
-            <a:pPr algn="l">
-              <a:lnSpc>
-                <a:spcPct val="112000"/>
-              </a:lnSpc>
-              <a:spcAft>
-                <a:spcPts val="0"/>
-              </a:spcAft>
-            </a:pPr>
-            <a:r>
-              <a:rPr sz="1250" b="1" i="0">
-                <a:solidFill>
-                  <a:srgbClr val="222222"/>
-                </a:solidFill>
-                <a:latin typeface="Segoe UI"/>
-              </a:rPr>
-              <a:t>Mañana: </a:t>
-            </a:r>
-            <a:r>
-              <a:rPr sz="1250" b="0" i="0">
-                <a:solidFill>
-                  <a:srgbClr val="222222"/>
-                </a:solidFill>
-                <a:latin typeface="Segoe UI"/>
-              </a:rPr>
-              <a:t>lunes a viernes, 8:00 a 12:00.</a:t>
-            </a:r>
-          </a:p>
-          <a:p>
-            <a:pPr algn="l">
-              <a:lnSpc>
-                <a:spcPct val="112000"/>
-              </a:lnSpc>
-              <a:spcAft>
-                <a:spcPts val="0"/>
-              </a:spcAft>
-            </a:pPr>
-            <a:r>
-              <a:rPr sz="1250" b="1" i="0">
-                <a:solidFill>
-                  <a:srgbClr val="222222"/>
-                </a:solidFill>
-                <a:latin typeface="Segoe UI"/>
-              </a:rPr>
-              <a:t>Noche: </a:t>
-            </a:r>
-            <a:r>
-              <a:rPr sz="1250" b="0" i="0">
-                <a:solidFill>
-                  <a:srgbClr val="222222"/>
-                </a:solidFill>
-                <a:latin typeface="Segoe UI"/>
-              </a:rPr>
-              <a:t>lunes a viernes, 6:30 a 8:30 p. m.</a:t>
-            </a:r>
-          </a:p>
-          <a:p>
-            <a:pPr algn="l">
-              <a:lnSpc>
-                <a:spcPct val="112000"/>
-              </a:lnSpc>
-              <a:spcAft>
-                <a:spcPts val="0"/>
-              </a:spcAft>
-            </a:pPr>
-            <a:r>
-              <a:rPr sz="1250" b="1" i="0">
-                <a:solidFill>
-                  <a:srgbClr val="222222"/>
-                </a:solidFill>
-                <a:latin typeface="Segoe UI"/>
-              </a:rPr>
-              <a:t>Sábados: </a:t>
-            </a:r>
-            <a:r>
-              <a:rPr sz="1250" b="0" i="0">
-                <a:solidFill>
-                  <a:srgbClr val="222222"/>
-                </a:solidFill>
-                <a:latin typeface="Segoe UI"/>
-              </a:rPr>
-              <a:t>8:00 a 12:00 (taller).</a:t>
-            </a:r>
-          </a:p>
-          <a:p>
-            <a:pPr algn="l">
-              <a:lnSpc>
-                <a:spcPct val="112000"/>
-              </a:lnSpc>
-              <a:spcAft>
-                <a:spcPts val="0"/>
-              </a:spcAft>
-            </a:pPr>
-            <a:r>
-              <a:rPr sz="1100" b="0" i="0">
-                <a:solidFill>
-                  <a:srgbClr val="5A5A5A"/>
-                </a:solidFill>
-                <a:latin typeface="Segoe UI"/>
-              </a:rPr>
-              <a:t>Con 8 o más afiliados en el mismo grupo, el horario lo define el fondo.</a:t>
-            </a:r>
-          </a:p>
-        </p:txBody>
-      </p:sp>
-      <p:sp>
-        <p:nvSpPr>
-          <p:cNvPr id="11" name="Rectangle 10"/>
-          <p:cNvSpPr/>
-          <p:nvPr/>
-        </p:nvSpPr>
-        <p:spPr>
-          <a:xfrm>
-            <a:off x="4270248" y="1828800"/>
-            <a:ext cx="3611880" cy="2011680"/>
-          </a:xfrm>
-          <a:prstGeom prst="rect">
-            <a:avLst/>
-          </a:prstGeom>
-          <a:solidFill>
-            <a:srgbClr val="FFFFFF"/>
-          </a:solidFill>
-          <a:ln w="12700">
-            <a:solidFill>
-              <a:srgbClr val="F0D9C8"/>
-            </a:solidFill>
-          </a:ln>
-          <a:effectLst/>
-        </p:spPr>
-        <p:style>
-          <a:lnRef idx="1">
-            <a:schemeClr val="accent1"/>
-          </a:lnRef>
-          <a:fillRef idx="3">
-            <a:schemeClr val="accent1"/>
-          </a:fillRef>
-          <a:effectRef idx="2">
-            <a:schemeClr val="accent1"/>
-          </a:effectRef>
-          <a:fontRef idx="minor">
-            <a:schemeClr val="lt1"/>
-          </a:fontRef>
-        </p:style>
-        <p:txBody>
-          <a:bodyPr rtlCol="0" anchor="ctr"/>
-          <a:lstStyle/>
-          <a:p>
-            <a:pPr algn="ctr"/>
-          </a:p>
-        </p:txBody>
-      </p:sp>
-      <p:sp>
-        <p:nvSpPr>
-          <p:cNvPr id="12" name="TextBox 11"/>
-          <p:cNvSpPr txBox="1"/>
-          <p:nvPr/>
-        </p:nvSpPr>
-        <p:spPr>
-          <a:xfrm>
-            <a:off x="4434840" y="1938528"/>
-            <a:ext cx="3282696" cy="411480"/>
-          </a:xfrm>
-          <a:prstGeom prst="rect">
-            <a:avLst/>
-          </a:prstGeom>
-          <a:noFill/>
-        </p:spPr>
-        <p:txBody>
-          <a:bodyPr wrap="square" lIns="45720" rIns="45720" tIns="27432" bIns="27432" anchor="t">
-            <a:spAutoFit/>
-          </a:bodyPr>
-          <a:lstStyle/>
-          <a:p>
-            <a:pPr algn="l">
-              <a:lnSpc>
-                <a:spcPct val="115000"/>
-              </a:lnSpc>
-              <a:spcAft>
-                <a:spcPts val="0"/>
-              </a:spcAft>
-            </a:pPr>
-            <a:r>
-              <a:rPr sz="1300" b="1" i="0">
-                <a:solidFill>
-                  <a:srgbClr val="E54C09"/>
-                </a:solidFill>
-                <a:latin typeface="Segoe UI"/>
-              </a:rPr>
-              <a:t>INTENSIDAD</a:t>
-            </a:r>
-          </a:p>
-        </p:txBody>
-      </p:sp>
-      <p:sp>
-        <p:nvSpPr>
-          <p:cNvPr id="13" name="TextBox 12"/>
-          <p:cNvSpPr txBox="1"/>
-          <p:nvPr/>
-        </p:nvSpPr>
-        <p:spPr>
-          <a:xfrm>
-            <a:off x="4434840" y="2331720"/>
-            <a:ext cx="3282696" cy="1417320"/>
-          </a:xfrm>
-          <a:prstGeom prst="rect">
-            <a:avLst/>
-          </a:prstGeom>
-          <a:noFill/>
-        </p:spPr>
-        <p:txBody>
-          <a:bodyPr wrap="square" lIns="45720" rIns="45720" tIns="27432" bIns="27432" anchor="t">
-            <a:spAutoFit/>
-          </a:bodyPr>
-          <a:lstStyle/>
-          <a:p>
-            <a:pPr algn="l">
-              <a:lnSpc>
-                <a:spcPct val="112000"/>
-              </a:lnSpc>
-              <a:spcAft>
-                <a:spcPts val="0"/>
-              </a:spcAft>
-            </a:pPr>
-            <a:r>
-              <a:rPr sz="1250" b="1" i="0">
-                <a:solidFill>
-                  <a:srgbClr val="222222"/>
-                </a:solidFill>
-                <a:latin typeface="Segoe UI"/>
-              </a:rPr>
-              <a:t>Súper intensivo: </a:t>
-            </a:r>
-            <a:r>
-              <a:rPr sz="1250" b="0" i="0">
-                <a:solidFill>
-                  <a:srgbClr val="222222"/>
-                </a:solidFill>
-                <a:latin typeface="Segoe UI"/>
-              </a:rPr>
-              <a:t>20 horas a la semana, programa completo en unos 7 meses.</a:t>
-            </a:r>
-          </a:p>
-          <a:p>
-            <a:pPr algn="l">
-              <a:lnSpc>
-                <a:spcPct val="112000"/>
-              </a:lnSpc>
-              <a:spcAft>
-                <a:spcPts val="0"/>
-              </a:spcAft>
-            </a:pPr>
-            <a:r>
-              <a:rPr sz="1250" b="1" i="0">
-                <a:solidFill>
-                  <a:srgbClr val="222222"/>
-                </a:solidFill>
-                <a:latin typeface="Segoe UI"/>
-              </a:rPr>
-              <a:t>Intensivo: </a:t>
-            </a:r>
-            <a:r>
-              <a:rPr sz="1250" b="0" i="0">
-                <a:solidFill>
-                  <a:srgbClr val="222222"/>
-                </a:solidFill>
-                <a:latin typeface="Segoe UI"/>
-              </a:rPr>
-              <a:t>10 horas a la semana, en unos 14 meses.</a:t>
-            </a:r>
-          </a:p>
-          <a:p>
-            <a:pPr algn="l">
-              <a:lnSpc>
-                <a:spcPct val="112000"/>
-              </a:lnSpc>
-              <a:spcAft>
-                <a:spcPts val="0"/>
-              </a:spcAft>
-            </a:pPr>
-            <a:r>
-              <a:rPr sz="1250" b="1" i="0">
-                <a:solidFill>
-                  <a:srgbClr val="222222"/>
-                </a:solidFill>
-                <a:latin typeface="Segoe UI"/>
-              </a:rPr>
-              <a:t>Más la práctica diaria: </a:t>
-            </a:r>
-            <a:r>
-              <a:rPr sz="1250" b="0" i="0">
-                <a:solidFill>
-                  <a:srgbClr val="222222"/>
-                </a:solidFill>
-                <a:latin typeface="Segoe UI"/>
-              </a:rPr>
-              <a:t>un video corto en inglés desde la casa, todos los días, devuelto con una mejora.</a:t>
-            </a:r>
-          </a:p>
-        </p:txBody>
-      </p:sp>
-      <p:sp>
-        <p:nvSpPr>
-          <p:cNvPr id="14" name="Rectangle 13"/>
-          <p:cNvSpPr/>
-          <p:nvPr/>
-        </p:nvSpPr>
-        <p:spPr>
-          <a:xfrm>
-            <a:off x="8037576" y="1828800"/>
-            <a:ext cx="3611880" cy="2011680"/>
-          </a:xfrm>
-          <a:prstGeom prst="rect">
-            <a:avLst/>
-          </a:prstGeom>
-          <a:solidFill>
-            <a:srgbClr val="FFFFFF"/>
-          </a:solidFill>
-          <a:ln w="12700">
-            <a:solidFill>
-              <a:srgbClr val="F0D9C8"/>
-            </a:solidFill>
-          </a:ln>
-          <a:effectLst/>
-        </p:spPr>
-        <p:style>
-          <a:lnRef idx="1">
-            <a:schemeClr val="accent1"/>
-          </a:lnRef>
-          <a:fillRef idx="3">
-            <a:schemeClr val="accent1"/>
-          </a:fillRef>
-          <a:effectRef idx="2">
-            <a:schemeClr val="accent1"/>
-          </a:effectRef>
-          <a:fontRef idx="minor">
-            <a:schemeClr val="lt1"/>
-          </a:fontRef>
-        </p:style>
-        <p:txBody>
-          <a:bodyPr rtlCol="0" anchor="ctr"/>
-          <a:lstStyle/>
-          <a:p>
-            <a:pPr algn="ctr"/>
-          </a:p>
-        </p:txBody>
-      </p:sp>
-      <p:sp>
-        <p:nvSpPr>
-          <p:cNvPr id="15" name="TextBox 14"/>
-          <p:cNvSpPr txBox="1"/>
-          <p:nvPr/>
-        </p:nvSpPr>
-        <p:spPr>
-          <a:xfrm>
-            <a:off x="8202168" y="1938528"/>
-            <a:ext cx="3282696" cy="411480"/>
-          </a:xfrm>
-          <a:prstGeom prst="rect">
-            <a:avLst/>
-          </a:prstGeom>
-          <a:noFill/>
-        </p:spPr>
-        <p:txBody>
-          <a:bodyPr wrap="square" lIns="45720" rIns="45720" tIns="27432" bIns="27432" anchor="t">
-            <a:spAutoFit/>
-          </a:bodyPr>
-          <a:lstStyle/>
-          <a:p>
-            <a:pPr algn="l">
-              <a:lnSpc>
-                <a:spcPct val="115000"/>
-              </a:lnSpc>
-              <a:spcAft>
-                <a:spcPts val="0"/>
-              </a:spcAft>
-            </a:pPr>
-            <a:r>
-              <a:rPr sz="1300" b="1" i="0">
-                <a:solidFill>
-                  <a:srgbClr val="E54C09"/>
-                </a:solidFill>
-                <a:latin typeface="Segoe UI"/>
-              </a:rPr>
-              <a:t>DOCENTES</a:t>
-            </a:r>
-          </a:p>
-        </p:txBody>
-      </p:sp>
-      <p:sp>
-        <p:nvSpPr>
-          <p:cNvPr id="16" name="TextBox 15"/>
-          <p:cNvSpPr txBox="1"/>
-          <p:nvPr/>
-        </p:nvSpPr>
-        <p:spPr>
-          <a:xfrm>
-            <a:off x="8202168" y="2331720"/>
-            <a:ext cx="3282696" cy="1417320"/>
-          </a:xfrm>
-          <a:prstGeom prst="rect">
-            <a:avLst/>
-          </a:prstGeom>
-          <a:noFill/>
-        </p:spPr>
-        <p:txBody>
-          <a:bodyPr wrap="square" lIns="45720" rIns="45720" tIns="27432" bIns="27432" anchor="t">
-            <a:spAutoFit/>
-          </a:bodyPr>
-          <a:lstStyle/>
-          <a:p>
-            <a:pPr algn="l">
-              <a:lnSpc>
-                <a:spcPct val="112000"/>
-              </a:lnSpc>
-              <a:spcAft>
-                <a:spcPts val="0"/>
-              </a:spcAft>
-            </a:pPr>
-            <a:r>
-              <a:rPr sz="1250" b="1" i="0">
-                <a:solidFill>
-                  <a:srgbClr val="222222"/>
-                </a:solidFill>
-                <a:latin typeface="Segoe UI"/>
-              </a:rPr>
-              <a:t>Profesores bilingües colombianos, </a:t>
-            </a:r>
-            <a:r>
-              <a:rPr sz="1250" b="0" i="0">
-                <a:solidFill>
-                  <a:srgbClr val="222222"/>
-                </a:solidFill>
-                <a:latin typeface="Segoe UI"/>
-              </a:rPr>
-              <a:t>un profesor por grupo de máximo 16.</a:t>
-            </a:r>
-          </a:p>
-          <a:p>
-            <a:pPr algn="l">
-              <a:lnSpc>
-                <a:spcPct val="112000"/>
-              </a:lnSpc>
-              <a:spcAft>
-                <a:spcPts val="0"/>
-              </a:spcAft>
-            </a:pPr>
-            <a:r>
-              <a:rPr sz="1250" b="1" i="0">
-                <a:solidFill>
-                  <a:srgbClr val="222222"/>
-                </a:solidFill>
-                <a:latin typeface="Segoe UI"/>
-              </a:rPr>
-              <a:t>Trabajan como coach: </a:t>
-            </a:r>
-            <a:r>
-              <a:rPr sz="1250" b="0" i="0">
-                <a:solidFill>
-                  <a:srgbClr val="222222"/>
-                </a:solidFill>
-                <a:latin typeface="Segoe UI"/>
-              </a:rPr>
-              <a:t>dirigen la simulación, corrigen en el momento y revisan el video de cada día.</a:t>
-            </a:r>
-          </a:p>
-          <a:p>
-            <a:pPr algn="l">
-              <a:lnSpc>
-                <a:spcPct val="112000"/>
-              </a:lnSpc>
-              <a:spcAft>
-                <a:spcPts val="0"/>
-              </a:spcAft>
-            </a:pPr>
-            <a:r>
-              <a:rPr sz="1250" b="1" i="0">
-                <a:solidFill>
-                  <a:srgbClr val="222222"/>
-                </a:solidFill>
-                <a:latin typeface="Segoe UI"/>
-              </a:rPr>
-              <a:t>Coordinación académica </a:t>
-            </a:r>
-            <a:r>
-              <a:rPr sz="1250" b="0" i="0">
-                <a:solidFill>
-                  <a:srgbClr val="222222"/>
-                </a:solidFill>
-                <a:latin typeface="Segoe UI"/>
-              </a:rPr>
-              <a:t>sigue asistencia, tareas y evaluaciones.</a:t>
-            </a:r>
-          </a:p>
-        </p:txBody>
-      </p:sp>
-      <p:sp>
-        <p:nvSpPr>
-          <p:cNvPr id="17" name="Rectangle 16"/>
-          <p:cNvSpPr/>
-          <p:nvPr/>
-        </p:nvSpPr>
-        <p:spPr>
-          <a:xfrm>
-            <a:off x="502920" y="3995928"/>
-            <a:ext cx="3611880" cy="2148840"/>
-          </a:xfrm>
-          <a:prstGeom prst="rect">
-            <a:avLst/>
-          </a:prstGeom>
-          <a:solidFill>
-            <a:srgbClr val="FFFFFF"/>
-          </a:solidFill>
-          <a:ln w="12700">
-            <a:solidFill>
-              <a:srgbClr val="F0D9C8"/>
-            </a:solidFill>
-          </a:ln>
-          <a:effectLst/>
-        </p:spPr>
-        <p:style>
-          <a:lnRef idx="1">
-            <a:schemeClr val="accent1"/>
-          </a:lnRef>
-          <a:fillRef idx="3">
-            <a:schemeClr val="accent1"/>
-          </a:fillRef>
-          <a:effectRef idx="2">
-            <a:schemeClr val="accent1"/>
-          </a:effectRef>
-          <a:fontRef idx="minor">
-            <a:schemeClr val="lt1"/>
-          </a:fontRef>
-        </p:style>
-        <p:txBody>
-          <a:bodyPr rtlCol="0" anchor="ctr"/>
-          <a:lstStyle/>
-          <a:p>
-            <a:pPr algn="ctr"/>
-          </a:p>
-        </p:txBody>
-      </p:sp>
-      <p:sp>
-        <p:nvSpPr>
-          <p:cNvPr id="18" name="TextBox 17"/>
-          <p:cNvSpPr txBox="1"/>
-          <p:nvPr/>
-        </p:nvSpPr>
-        <p:spPr>
-          <a:xfrm>
-            <a:off x="667512" y="4105656"/>
-            <a:ext cx="3282696" cy="411480"/>
-          </a:xfrm>
-          <a:prstGeom prst="rect">
-            <a:avLst/>
-          </a:prstGeom>
-          <a:noFill/>
-        </p:spPr>
-        <p:txBody>
-          <a:bodyPr wrap="square" lIns="45720" rIns="45720" tIns="27432" bIns="27432" anchor="t">
-            <a:spAutoFit/>
-          </a:bodyPr>
-          <a:lstStyle/>
-          <a:p>
-            <a:pPr algn="l">
-              <a:lnSpc>
-                <a:spcPct val="115000"/>
-              </a:lnSpc>
-              <a:spcAft>
-                <a:spcPts val="0"/>
-              </a:spcAft>
-            </a:pPr>
-            <a:r>
-              <a:rPr sz="1300" b="1" i="0">
-                <a:solidFill>
-                  <a:srgbClr val="E54C09"/>
-                </a:solidFill>
-                <a:latin typeface="Segoe UI"/>
-              </a:rPr>
-              <a:t>EVALUACIÓN</a:t>
-            </a:r>
-          </a:p>
-        </p:txBody>
-      </p:sp>
-      <p:sp>
-        <p:nvSpPr>
-          <p:cNvPr id="19" name="TextBox 18"/>
-          <p:cNvSpPr txBox="1"/>
-          <p:nvPr/>
-        </p:nvSpPr>
-        <p:spPr>
-          <a:xfrm>
-            <a:off x="667512" y="4498848"/>
-            <a:ext cx="3282696" cy="1554480"/>
-          </a:xfrm>
-          <a:prstGeom prst="rect">
-            <a:avLst/>
-          </a:prstGeom>
-          <a:noFill/>
-        </p:spPr>
-        <p:txBody>
-          <a:bodyPr wrap="square" lIns="45720" rIns="45720" tIns="27432" bIns="27432" anchor="t">
-            <a:spAutoFit/>
-          </a:bodyPr>
-          <a:lstStyle/>
-          <a:p>
-            <a:pPr algn="l">
-              <a:lnSpc>
-                <a:spcPct val="112000"/>
-              </a:lnSpc>
-              <a:spcAft>
-                <a:spcPts val="0"/>
-              </a:spcAft>
-            </a:pPr>
-            <a:r>
-              <a:rPr sz="1250" b="1" i="0">
-                <a:solidFill>
-                  <a:srgbClr val="222222"/>
-                </a:solidFill>
-                <a:latin typeface="Segoe UI"/>
-              </a:rPr>
-              <a:t>Prueba de entrada </a:t>
-            </a:r>
-            <a:r>
-              <a:rPr sz="1250" b="0" i="0">
-                <a:solidFill>
-                  <a:srgbClr val="222222"/>
-                </a:solidFill>
-                <a:latin typeface="Segoe UI"/>
-              </a:rPr>
-              <a:t>el primer día.</a:t>
-            </a:r>
-          </a:p>
-          <a:p>
-            <a:pPr algn="l">
-              <a:lnSpc>
-                <a:spcPct val="112000"/>
-              </a:lnSpc>
-              <a:spcAft>
-                <a:spcPts val="0"/>
-              </a:spcAft>
-            </a:pPr>
-            <a:r>
-              <a:rPr sz="1250" b="1" i="0">
-                <a:solidFill>
-                  <a:srgbClr val="222222"/>
-                </a:solidFill>
-                <a:latin typeface="Segoe UI"/>
-              </a:rPr>
-              <a:t>Evaluaciones durante el nivel </a:t>
-            </a:r>
-            <a:r>
-              <a:rPr sz="1250" b="0" i="0">
-                <a:solidFill>
-                  <a:srgbClr val="222222"/>
-                </a:solidFill>
-                <a:latin typeface="Segoe UI"/>
-              </a:rPr>
-              <a:t>y evaluación final con evaluador externo al cierre de cada nivel.</a:t>
-            </a:r>
-          </a:p>
-          <a:p>
-            <a:pPr algn="l">
-              <a:lnSpc>
-                <a:spcPct val="112000"/>
-              </a:lnSpc>
-              <a:spcAft>
-                <a:spcPts val="0"/>
-              </a:spcAft>
-            </a:pPr>
-            <a:r>
-              <a:rPr sz="1250" b="1" i="0">
-                <a:solidFill>
-                  <a:srgbClr val="222222"/>
-                </a:solidFill>
-                <a:latin typeface="Segoe UI"/>
-              </a:rPr>
-              <a:t>Reporte al fondo: </a:t>
-            </a:r>
-            <a:r>
-              <a:rPr sz="1250" b="0" i="0">
-                <a:solidFill>
-                  <a:srgbClr val="222222"/>
-                </a:solidFill>
-                <a:latin typeface="Segoe UI"/>
-              </a:rPr>
-              <a:t>asistencia y cumplimiento de tareas de cada afiliado becado. Nunca notas: esas son del estudiante.</a:t>
-            </a:r>
-          </a:p>
-        </p:txBody>
-      </p:sp>
-      <p:sp>
-        <p:nvSpPr>
-          <p:cNvPr id="20" name="Rectangle 19"/>
-          <p:cNvSpPr/>
-          <p:nvPr/>
-        </p:nvSpPr>
-        <p:spPr>
-          <a:xfrm>
-            <a:off x="4270248" y="3995928"/>
-            <a:ext cx="3611880" cy="2148840"/>
-          </a:xfrm>
-          <a:prstGeom prst="rect">
-            <a:avLst/>
-          </a:prstGeom>
-          <a:solidFill>
-            <a:srgbClr val="FFFFFF"/>
-          </a:solidFill>
-          <a:ln w="12700">
-            <a:solidFill>
-              <a:srgbClr val="F0D9C8"/>
-            </a:solidFill>
-          </a:ln>
-          <a:effectLst/>
-        </p:spPr>
-        <p:style>
-          <a:lnRef idx="1">
-            <a:schemeClr val="accent1"/>
-          </a:lnRef>
-          <a:fillRef idx="3">
-            <a:schemeClr val="accent1"/>
-          </a:fillRef>
-          <a:effectRef idx="2">
-            <a:schemeClr val="accent1"/>
-          </a:effectRef>
-          <a:fontRef idx="minor">
-            <a:schemeClr val="lt1"/>
-          </a:fontRef>
-        </p:style>
-        <p:txBody>
-          <a:bodyPr rtlCol="0" anchor="ctr"/>
-          <a:lstStyle/>
-          <a:p>
-            <a:pPr algn="ctr"/>
-          </a:p>
-        </p:txBody>
-      </p:sp>
-      <p:sp>
-        <p:nvSpPr>
-          <p:cNvPr id="21" name="TextBox 20"/>
-          <p:cNvSpPr txBox="1"/>
-          <p:nvPr/>
-        </p:nvSpPr>
-        <p:spPr>
-          <a:xfrm>
-            <a:off x="4434840" y="4105656"/>
-            <a:ext cx="3282696" cy="411480"/>
-          </a:xfrm>
-          <a:prstGeom prst="rect">
-            <a:avLst/>
-          </a:prstGeom>
-          <a:noFill/>
-        </p:spPr>
-        <p:txBody>
-          <a:bodyPr wrap="square" lIns="45720" rIns="45720" tIns="27432" bIns="27432" anchor="t">
-            <a:spAutoFit/>
-          </a:bodyPr>
-          <a:lstStyle/>
-          <a:p>
-            <a:pPr algn="l">
-              <a:lnSpc>
-                <a:spcPct val="115000"/>
-              </a:lnSpc>
-              <a:spcAft>
-                <a:spcPts val="0"/>
-              </a:spcAft>
-            </a:pPr>
-            <a:r>
-              <a:rPr sz="1300" b="1" i="0">
-                <a:solidFill>
-                  <a:srgbClr val="E54C09"/>
-                </a:solidFill>
-                <a:latin typeface="Segoe UI"/>
-              </a:rPr>
-              <a:t>CERTIFICACIÓN</a:t>
-            </a:r>
-          </a:p>
-        </p:txBody>
-      </p:sp>
-      <p:sp>
-        <p:nvSpPr>
-          <p:cNvPr id="22" name="TextBox 21"/>
-          <p:cNvSpPr txBox="1"/>
-          <p:nvPr/>
-        </p:nvSpPr>
-        <p:spPr>
-          <a:xfrm>
-            <a:off x="4434840" y="4498848"/>
-            <a:ext cx="3282696" cy="1554480"/>
-          </a:xfrm>
-          <a:prstGeom prst="rect">
-            <a:avLst/>
-          </a:prstGeom>
-          <a:noFill/>
-        </p:spPr>
-        <p:txBody>
-          <a:bodyPr wrap="square" lIns="45720" rIns="45720" tIns="27432" bIns="27432" anchor="t">
-            <a:spAutoFit/>
-          </a:bodyPr>
-          <a:lstStyle/>
-          <a:p>
-            <a:pPr algn="l">
-              <a:lnSpc>
-                <a:spcPct val="112000"/>
-              </a:lnSpc>
-              <a:spcAft>
-                <a:spcPts val="0"/>
-              </a:spcAft>
-            </a:pPr>
-            <a:r>
-              <a:rPr sz="1250" b="1" i="0">
-                <a:solidFill>
-                  <a:srgbClr val="222222"/>
-                </a:solidFill>
-                <a:latin typeface="Segoe UI"/>
-              </a:rPr>
-              <a:t>Certificado Heiiu por cada nivel terminado </a:t>
-            </a:r>
-            <a:r>
-              <a:rPr sz="1250" b="0" i="0">
-                <a:solidFill>
-                  <a:srgbClr val="222222"/>
-                </a:solidFill>
-                <a:latin typeface="Segoe UI"/>
-              </a:rPr>
-              <a:t>(A1, A2, B1, B2) y por el programa completo, según los estándares de la Secretaría de Educación.</a:t>
-            </a:r>
-          </a:p>
-          <a:p>
-            <a:pPr algn="l">
-              <a:lnSpc>
-                <a:spcPct val="112000"/>
-              </a:lnSpc>
-              <a:spcAft>
-                <a:spcPts val="0"/>
-              </a:spcAft>
-            </a:pPr>
-            <a:r>
-              <a:rPr sz="1250" b="1" i="0">
-                <a:solidFill>
-                  <a:srgbClr val="222222"/>
-                </a:solidFill>
-                <a:latin typeface="Segoe UI"/>
-              </a:rPr>
-              <a:t>Certificado de beca </a:t>
-            </a:r>
-            <a:r>
-              <a:rPr sz="1250" b="0" i="0">
-                <a:solidFill>
-                  <a:srgbClr val="222222"/>
-                </a:solidFill>
-                <a:latin typeface="Segoe UI"/>
-              </a:rPr>
-              <a:t>a nombre del fondo para cada becado, entregado en el fondo o en la sede.</a:t>
-            </a:r>
-          </a:p>
-        </p:txBody>
-      </p:sp>
-      <p:sp>
-        <p:nvSpPr>
-          <p:cNvPr id="23" name="Rectangle 22"/>
-          <p:cNvSpPr/>
-          <p:nvPr/>
-        </p:nvSpPr>
-        <p:spPr>
-          <a:xfrm>
-            <a:off x="8037576" y="3995928"/>
-            <a:ext cx="3611880" cy="2148840"/>
-          </a:xfrm>
-          <a:prstGeom prst="rect">
-            <a:avLst/>
-          </a:prstGeom>
-          <a:solidFill>
-            <a:srgbClr val="1C1714"/>
-          </a:solidFill>
-          <a:ln>
-            <a:noFill/>
-          </a:ln>
-          <a:effectLst/>
-        </p:spPr>
-        <p:style>
-          <a:lnRef idx="1">
-            <a:schemeClr val="accent1"/>
-          </a:lnRef>
-          <a:fillRef idx="3">
-            <a:schemeClr val="accent1"/>
-          </a:fillRef>
-          <a:effectRef idx="2">
-            <a:schemeClr val="accent1"/>
-          </a:effectRef>
-          <a:fontRef idx="minor">
-            <a:schemeClr val="lt1"/>
-          </a:fontRef>
-        </p:style>
-        <p:txBody>
-          <a:bodyPr rtlCol="0" anchor="ctr"/>
-          <a:lstStyle/>
-          <a:p>
-            <a:pPr algn="ctr"/>
-          </a:p>
-        </p:txBody>
-      </p:sp>
-      <p:sp>
-        <p:nvSpPr>
-          <p:cNvPr id="24" name="TextBox 23"/>
-          <p:cNvSpPr txBox="1"/>
-          <p:nvPr/>
-        </p:nvSpPr>
-        <p:spPr>
-          <a:xfrm>
-            <a:off x="8220456" y="4105656"/>
-            <a:ext cx="3246120" cy="365760"/>
-          </a:xfrm>
-          <a:prstGeom prst="rect">
-            <a:avLst/>
-          </a:prstGeom>
-          <a:noFill/>
-        </p:spPr>
-        <p:txBody>
-          <a:bodyPr wrap="square" lIns="45720" rIns="45720" tIns="27432" bIns="27432" anchor="t">
-            <a:spAutoFit/>
-          </a:bodyPr>
-          <a:lstStyle/>
-          <a:p>
-            <a:pPr algn="l">
-              <a:lnSpc>
-                <a:spcPct val="115000"/>
-              </a:lnSpc>
-              <a:spcAft>
-                <a:spcPts val="0"/>
-              </a:spcAft>
-            </a:pPr>
-            <a:r>
-              <a:rPr sz="1200" b="1" i="0">
-                <a:solidFill>
-                  <a:srgbClr val="FBC900"/>
-                </a:solidFill>
-                <a:latin typeface="Segoe UI"/>
-              </a:rPr>
-              <a:t>LA GARANTÍA, TAL COMO QUEDA EN EL CONTRATO</a:t>
-            </a:r>
-          </a:p>
-        </p:txBody>
-      </p:sp>
-      <p:sp>
-        <p:nvSpPr>
-          <p:cNvPr id="25" name="TextBox 24"/>
-          <p:cNvSpPr txBox="1"/>
-          <p:nvPr/>
-        </p:nvSpPr>
-        <p:spPr>
-          <a:xfrm>
-            <a:off x="8220456" y="4498848"/>
-            <a:ext cx="3246120" cy="1554480"/>
-          </a:xfrm>
-          <a:prstGeom prst="rect">
-            <a:avLst/>
-          </a:prstGeom>
-          <a:noFill/>
-        </p:spPr>
-        <p:txBody>
-          <a:bodyPr wrap="square" lIns="45720" rIns="45720" tIns="27432" bIns="27432" anchor="t">
-            <a:spAutoFit/>
-          </a:bodyPr>
-          <a:lstStyle/>
-          <a:p>
-            <a:pPr algn="l">
-              <a:lnSpc>
-                <a:spcPct val="115000"/>
-              </a:lnSpc>
-              <a:spcAft>
-                <a:spcPts val="600"/>
-              </a:spcAft>
-            </a:pPr>
-            <a:r>
-              <a:rPr sz="1250" b="0" i="0">
-                <a:solidFill>
-                  <a:srgbClr val="FFFFFF"/>
-                </a:solidFill>
-                <a:latin typeface="Segoe UI"/>
-              </a:rPr>
-              <a:t>Si el estudiante cumple (asistencia del 80%, 90% de las tareas con video diario, todas las evaluaciones) y no avanza, </a:t>
-            </a:r>
-            <a:r>
-              <a:rPr sz="1250" b="1" i="0">
-                <a:solidFill>
-                  <a:srgbClr val="FBC900"/>
-                </a:solidFill>
-                <a:latin typeface="Segoe UI"/>
-              </a:rPr>
-              <a:t>le devolvemos el 100% del nivel.</a:t>
-            </a:r>
-          </a:p>
-          <a:p>
-            <a:pPr algn="l">
-              <a:lnSpc>
-                <a:spcPct val="115000"/>
-              </a:lnSpc>
-              <a:spcAft>
-                <a:spcPts val="600"/>
-              </a:spcAft>
-            </a:pPr>
-            <a:r>
-              <a:rPr sz="1100" b="0" i="1">
-                <a:solidFill>
-                  <a:srgbClr val="FFF8E7"/>
-                </a:solidFill>
-                <a:latin typeface="Segoe UI"/>
-              </a:rPr>
-              <a:t>No prometemos que sea fácil ni rápido. Prometemos que funciona si hace su parte, y lo firmamos.</a:t>
-            </a:r>
-          </a:p>
-        </p:txBody>
-      </p:sp>
-      <p:sp>
-        <p:nvSpPr>
-          <p:cNvPr id="26" name="TextBox 25"/>
-          <p:cNvSpPr txBox="1"/>
-          <p:nvPr/>
-        </p:nvSpPr>
-        <p:spPr>
-          <a:xfrm>
-            <a:off x="502920" y="6355080"/>
-            <a:ext cx="11155680" cy="365760"/>
-          </a:xfrm>
-          <a:prstGeom prst="rect">
-            <a:avLst/>
-          </a:prstGeom>
-          <a:noFill/>
-        </p:spPr>
-        <p:txBody>
-          <a:bodyPr wrap="square" lIns="45720" rIns="45720" tIns="27432" bIns="27432" anchor="ctr">
-            <a:spAutoFit/>
-          </a:bodyPr>
-          <a:lstStyle/>
-          <a:p>
-            <a:pPr algn="l">
-              <a:lnSpc>
-                <a:spcPct val="115000"/>
-              </a:lnSpc>
-              <a:spcAft>
-                <a:spcPts val="0"/>
-              </a:spcAft>
-            </a:pPr>
-            <a:r>
-              <a:rPr sz="1000" b="0" i="0">
-                <a:solidFill>
-                  <a:srgbClr val="5A5A5A"/>
-                </a:solidFill>
-                <a:latin typeface="Segoe UI"/>
-              </a:rPr>
-              <a:t>Y a cada estudiante lo empujamos a pensar una idea de negocio propia y a contarla en inglés.</a:t>
+              <a:t>Línea de alianzas 316 768 8793 · Carrera 27 # 48-49, Sotomayor, Bucaramanga</a:t>
             </a:r>
           </a:p>
         </p:txBody>
@@ -5824,7 +5388,7 @@
             <a:avLst/>
           </a:prstGeom>
           <a:solidFill>
-            <a:srgbClr val="FFF8E7"/>
+            <a:srgbClr val="1C1714"/>
           </a:solidFill>
           <a:ln>
             <a:noFill/>
@@ -5906,7 +5470,7 @@
         <p:spPr>
           <a:xfrm>
             <a:off x="502920" y="36576"/>
-            <a:ext cx="8229600" cy="329184"/>
+            <a:ext cx="5486400" cy="329184"/>
           </a:xfrm>
           <a:prstGeom prst="rect">
             <a:avLst/>
@@ -5934,7 +5498,7 @@
                 </a:solidFill>
                 <a:latin typeface="Segoe UI"/>
               </a:rPr>
-              <a:t>3 · OFERTA EDUCATIVA · VALOR ECONÓMICO</a:t>
+              <a:t>4 de 6</a:t>
             </a:r>
           </a:p>
         </p:txBody>
@@ -5947,8 +5511,8 @@
         </p:nvSpPr>
         <p:spPr>
           <a:xfrm>
-            <a:off x="9326880" y="36576"/>
-            <a:ext cx="2377440" cy="329184"/>
+            <a:off x="6583680" y="36576"/>
+            <a:ext cx="5120640" cy="329184"/>
           </a:xfrm>
           <a:prstGeom prst="rect">
             <a:avLst/>
@@ -5976,7 +5540,7 @@
                 </a:solidFill>
                 <a:latin typeface="Segoe UI"/>
               </a:rPr>
-              <a:t>HEIIU ENGLISH ACADEMY</a:t>
+              <a:t>HEIIU ENGLISH ACADEMY · PROGRAMA PARA FONDOS DE EMPLEADOS</a:t>
             </a:r>
           </a:p>
         </p:txBody>
@@ -5989,8 +5553,8 @@
         </p:nvSpPr>
         <p:spPr>
           <a:xfrm>
-            <a:off x="502920" y="548640"/>
-            <a:ext cx="11155680" cy="1051560"/>
+            <a:off x="548640" y="914400"/>
+            <a:ext cx="7223760" cy="2377440"/>
           </a:xfrm>
           <a:prstGeom prst="rect">
             <a:avLst/>
@@ -6012,13 +5576,13 @@
               </a:spcAft>
             </a:pPr>
             <a:r>
-              <a:rPr sz="3200" b="1" i="0">
-                <a:solidFill>
-                  <a:srgbClr val="E54C09"/>
+              <a:rPr sz="4000" b="1" i="0">
+                <a:solidFill>
+                  <a:srgbClr val="FFFFFF"/>
                 </a:solidFill>
                 <a:latin typeface="Constantia"/>
               </a:rPr>
-              <a:t>Lo que paga el afiliado con carta del fondo: beca del Fondo de Becas Heiiu</a:t>
+              <a:t>Si el estudiante cumple y no avanza, le devolvemos el 100% del nivel.</a:t>
             </a:r>
           </a:p>
         </p:txBody>
@@ -6031,7 +5595,7 @@
         </p:nvSpPr>
         <p:spPr>
           <a:xfrm>
-            <a:off x="548640" y="1627632"/>
+            <a:off x="594360" y="3429000"/>
             <a:ext cx="1463040" cy="38000"/>
           </a:xfrm>
           <a:prstGeom prst="rect">
@@ -6069,25 +5633,130 @@
       </p:sp>
       <p:sp>
         <p:nvSpPr>
-          <p:cNvPr id="8" name="Rectangle 7"/>
+          <p:cNvPr id="8" name="TextBox 7"/>
+          <p:cNvSpPr txBox="1"/>
+          <p:nvPr/>
+        </p:nvSpPr>
+        <p:spPr>
+          <a:xfrm>
+            <a:off x="548640" y="3657600"/>
+            <a:ext cx="7223760" cy="2468880"/>
+          </a:xfrm>
+          <a:prstGeom prst="rect">
+            <a:avLst/>
+          </a:prstGeom>
+          <a:noFill/>
+        </p:spPr>
+        <p:txBody>
+          <a:bodyPr wrap="square" lIns="45720" rIns="45720" tIns="27432" bIns="27432" anchor="t">
+            <a:spAutoFit/>
+          </a:bodyPr>
+          <a:lstStyle/>
+          <a:p>
+            <a:pPr algn="l">
+              <a:lnSpc>
+                <a:spcPct val="115000"/>
+              </a:lnSpc>
+              <a:spcAft>
+                <a:spcPts val="1000"/>
+              </a:spcAft>
+            </a:pPr>
+            <a:r>
+              <a:rPr sz="2200" b="1" i="0">
+                <a:solidFill>
+                  <a:srgbClr val="FBC900"/>
+                </a:solidFill>
+                <a:latin typeface="Segoe UI"/>
+              </a:rPr>
+              <a:t>▪ </a:t>
+            </a:r>
+            <a:r>
+              <a:rPr sz="2200" b="0" i="0">
+                <a:solidFill>
+                  <a:srgbClr val="FFF8E7"/>
+                </a:solidFill>
+                <a:latin typeface="Segoe UI"/>
+              </a:rPr>
+              <a:t>Garantía por escrito, en el contrato de cada afiliado.</a:t>
+            </a:r>
+          </a:p>
+          <a:p>
+            <a:pPr algn="l">
+              <a:lnSpc>
+                <a:spcPct val="115000"/>
+              </a:lnSpc>
+              <a:spcAft>
+                <a:spcPts val="1000"/>
+              </a:spcAft>
+            </a:pPr>
+            <a:r>
+              <a:rPr sz="2200" b="1" i="0">
+                <a:solidFill>
+                  <a:srgbClr val="FBC900"/>
+                </a:solidFill>
+                <a:latin typeface="Segoe UI"/>
+              </a:rPr>
+              <a:t>▪ </a:t>
+            </a:r>
+            <a:r>
+              <a:rPr sz="2200" b="0" i="0">
+                <a:solidFill>
+                  <a:srgbClr val="FFF8E7"/>
+                </a:solidFill>
+                <a:latin typeface="Segoe UI"/>
+              </a:rPr>
+              <a:t>El fondo no paga, no cobra ni gestiona nada: cada afiliado contrata directo con la academia.</a:t>
+            </a:r>
+          </a:p>
+          <a:p>
+            <a:pPr algn="l">
+              <a:lnSpc>
+                <a:spcPct val="115000"/>
+              </a:lnSpc>
+              <a:spcAft>
+                <a:spcPts val="1000"/>
+              </a:spcAft>
+            </a:pPr>
+            <a:r>
+              <a:rPr sz="2200" b="1" i="0">
+                <a:solidFill>
+                  <a:srgbClr val="FBC900"/>
+                </a:solidFill>
+                <a:latin typeface="Segoe UI"/>
+              </a:rPr>
+              <a:t>▪ </a:t>
+            </a:r>
+            <a:r>
+              <a:rPr sz="2200" b="0" i="0">
+                <a:solidFill>
+                  <a:srgbClr val="FFF8E7"/>
+                </a:solidFill>
+                <a:latin typeface="Segoe UI"/>
+              </a:rPr>
+              <a:t>El convenio se termina con aviso de 30 días, sin afectar a los ya matriculados.</a:t>
+            </a:r>
+          </a:p>
+        </p:txBody>
+      </p:sp>
+      <p:sp>
+        <p:nvSpPr>
+          <p:cNvPr id="9" name="Rectangle 8"/>
           <p:cNvSpPr/>
           <p:nvPr/>
         </p:nvSpPr>
         <p:spPr>
           <a:xfrm>
-            <a:off x="502920" y="1828800"/>
-            <a:ext cx="5760720" cy="530352"/>
+            <a:off x="8138160" y="914400"/>
+            <a:ext cx="3566160" cy="5120640"/>
           </a:xfrm>
           <a:prstGeom prst="rect">
             <a:avLst/>
           </a:prstGeom>
           <a:solidFill>
-            <a:srgbClr val="E54C09"/>
+            <a:srgbClr val="FF4A00"/>
           </a:solidFill>
-          <a:ln w="12700">
-            <a:solidFill>
-              <a:srgbClr val="F0D9C8"/>
-            </a:solidFill>
+          <a:ln>
+            <a:noFill/>
           </a:ln>
           <a:effectLst/>
         </p:spPr>
@@ -6115,14 +5784,98 @@
       </p:sp>
       <p:sp>
         <p:nvSpPr>
-          <p:cNvPr id="9" name="TextBox 8"/>
+          <p:cNvPr id="10" name="TextBox 9"/>
           <p:cNvSpPr txBox="1"/>
           <p:nvPr/>
         </p:nvSpPr>
         <p:spPr>
           <a:xfrm>
-            <a:off x="594360" y="1828800"/>
-            <a:ext cx="5577840" cy="530352"/>
+            <a:off x="8229600" y="1280160"/>
+            <a:ext cx="3383280" cy="2377440"/>
+          </a:xfrm>
+          <a:prstGeom prst="rect">
+            <a:avLst/>
+          </a:prstGeom>
+          <a:noFill/>
+        </p:spPr>
+        <p:txBody>
+          <a:bodyPr wrap="square" lIns="45720" rIns="45720" tIns="27432" bIns="27432" anchor="ctr">
+            <a:spAutoFit/>
+          </a:bodyPr>
+          <a:lstStyle/>
+          <a:p>
+            <a:pPr algn="ctr">
+              <a:lnSpc>
+                <a:spcPct val="100000"/>
+              </a:lnSpc>
+              <a:spcAft>
+                <a:spcPts val="0"/>
+              </a:spcAft>
+            </a:pPr>
+            <a:r>
+              <a:rPr sz="6400" b="1" i="0">
+                <a:solidFill>
+                  <a:srgbClr val="FFFFFF"/>
+                </a:solidFill>
+                <a:latin typeface="Constantia"/>
+              </a:rPr>
+              <a:t>100%</a:t>
+            </a:r>
+          </a:p>
+        </p:txBody>
+      </p:sp>
+      <p:sp>
+        <p:nvSpPr>
+          <p:cNvPr id="11" name="TextBox 10"/>
+          <p:cNvSpPr txBox="1"/>
+          <p:nvPr/>
+        </p:nvSpPr>
+        <p:spPr>
+          <a:xfrm>
+            <a:off x="8321040" y="3749039"/>
+            <a:ext cx="3200400" cy="2103120"/>
+          </a:xfrm>
+          <a:prstGeom prst="rect">
+            <a:avLst/>
+          </a:prstGeom>
+          <a:noFill/>
+        </p:spPr>
+        <p:txBody>
+          <a:bodyPr wrap="square" lIns="45720" rIns="45720" tIns="27432" bIns="27432" anchor="t">
+            <a:spAutoFit/>
+          </a:bodyPr>
+          <a:lstStyle/>
+          <a:p>
+            <a:pPr algn="ctr">
+              <a:lnSpc>
+                <a:spcPct val="120000"/>
+              </a:lnSpc>
+              <a:spcAft>
+                <a:spcPts val="0"/>
+              </a:spcAft>
+            </a:pPr>
+            <a:r>
+              <a:rPr sz="1800" b="0" i="0">
+                <a:solidFill>
+                  <a:srgbClr val="FFFFFF"/>
+                </a:solidFill>
+                <a:latin typeface="Segoe UI"/>
+              </a:rPr>
+              <a:t>del nivel devuelto si cumple asistencia, tareas y evaluaciones y no avanza. Por escrito.</a:t>
+            </a:r>
+          </a:p>
+        </p:txBody>
+      </p:sp>
+      <p:sp>
+        <p:nvSpPr>
+          <p:cNvPr id="12" name="TextBox 11"/>
+          <p:cNvSpPr txBox="1"/>
+          <p:nvPr/>
+        </p:nvSpPr>
+        <p:spPr>
+          <a:xfrm>
+            <a:off x="502920" y="6355080"/>
+            <a:ext cx="11155680" cy="365760"/>
           </a:xfrm>
           <a:prstGeom prst="rect">
             <a:avLst/>
@@ -6144,1334 +5897,13 @@
               </a:spcAft>
             </a:pPr>
             <a:r>
-              <a:rPr sz="1200" b="1" i="0">
-                <a:solidFill>
-                  <a:srgbClr val="FFFFFF"/>
+              <a:rPr sz="1000" b="0" i="0">
+                <a:solidFill>
+                  <a:srgbClr val="C9B8A3"/>
                 </a:solidFill>
                 <a:latin typeface="Segoe UI"/>
               </a:rPr>
-              <a:t>Programa completo A1 a B2 (575 h)</a:t>
-            </a:r>
-          </a:p>
-        </p:txBody>
-      </p:sp>
-      <p:sp>
-        <p:nvSpPr>
-          <p:cNvPr id="10" name="Rectangle 9"/>
-          <p:cNvSpPr/>
-          <p:nvPr/>
-        </p:nvSpPr>
-        <p:spPr>
-          <a:xfrm>
-            <a:off x="6263640" y="1828800"/>
-            <a:ext cx="2194560" cy="530352"/>
-          </a:xfrm>
-          <a:prstGeom prst="rect">
-            <a:avLst/>
-          </a:prstGeom>
-          <a:solidFill>
-            <a:srgbClr val="E54C09"/>
-          </a:solidFill>
-          <a:ln w="12700">
-            <a:solidFill>
-              <a:srgbClr val="F0D9C8"/>
-            </a:solidFill>
-          </a:ln>
-          <a:effectLst/>
-        </p:spPr>
-        <p:style>
-          <a:lnRef idx="1">
-            <a:schemeClr val="accent1"/>
-          </a:lnRef>
-          <a:fillRef idx="3">
-            <a:schemeClr val="accent1"/>
-          </a:fillRef>
-          <a:effectRef idx="2">
-            <a:schemeClr val="accent1"/>
-          </a:effectRef>
-          <a:fontRef idx="minor">
-            <a:schemeClr val="lt1"/>
-          </a:fontRef>
-        </p:style>
-        <p:txBody>
-          <a:bodyPr rtlCol="0" anchor="ctr"/>
-          <a:lstStyle/>
-          <a:p>
-            <a:pPr algn="ctr"/>
-          </a:p>
-        </p:txBody>
-      </p:sp>
-      <p:sp>
-        <p:nvSpPr>
-          <p:cNvPr id="11" name="TextBox 10"/>
-          <p:cNvSpPr txBox="1"/>
-          <p:nvPr/>
-        </p:nvSpPr>
-        <p:spPr>
-          <a:xfrm>
-            <a:off x="6355080" y="1828800"/>
-            <a:ext cx="2011680" cy="530352"/>
-          </a:xfrm>
-          <a:prstGeom prst="rect">
-            <a:avLst/>
-          </a:prstGeom>
-          <a:noFill/>
-        </p:spPr>
-        <p:txBody>
-          <a:bodyPr wrap="square" lIns="45720" rIns="45720" tIns="27432" bIns="27432" anchor="ctr">
-            <a:spAutoFit/>
-          </a:bodyPr>
-          <a:lstStyle/>
-          <a:p>
-            <a:pPr algn="l">
-              <a:lnSpc>
-                <a:spcPct val="115000"/>
-              </a:lnSpc>
-              <a:spcAft>
-                <a:spcPts val="0"/>
-              </a:spcAft>
-            </a:pPr>
-            <a:r>
-              <a:rPr sz="1200" b="1" i="0">
-                <a:solidFill>
-                  <a:srgbClr val="FFFFFF"/>
-                </a:solidFill>
-                <a:latin typeface="Segoe UI"/>
-              </a:rPr>
-              <a:t>Valor de lista</a:t>
-            </a:r>
-          </a:p>
-        </p:txBody>
-      </p:sp>
-      <p:sp>
-        <p:nvSpPr>
-          <p:cNvPr id="12" name="Rectangle 11"/>
-          <p:cNvSpPr/>
-          <p:nvPr/>
-        </p:nvSpPr>
-        <p:spPr>
-          <a:xfrm>
-            <a:off x="8458200" y="1828800"/>
-            <a:ext cx="3200400" cy="530352"/>
-          </a:xfrm>
-          <a:prstGeom prst="rect">
-            <a:avLst/>
-          </a:prstGeom>
-          <a:solidFill>
-            <a:srgbClr val="E54C09"/>
-          </a:solidFill>
-          <a:ln w="12700">
-            <a:solidFill>
-              <a:srgbClr val="F0D9C8"/>
-            </a:solidFill>
-          </a:ln>
-          <a:effectLst/>
-        </p:spPr>
-        <p:style>
-          <a:lnRef idx="1">
-            <a:schemeClr val="accent1"/>
-          </a:lnRef>
-          <a:fillRef idx="3">
-            <a:schemeClr val="accent1"/>
-          </a:fillRef>
-          <a:effectRef idx="2">
-            <a:schemeClr val="accent1"/>
-          </a:effectRef>
-          <a:fontRef idx="minor">
-            <a:schemeClr val="lt1"/>
-          </a:fontRef>
-        </p:style>
-        <p:txBody>
-          <a:bodyPr rtlCol="0" anchor="ctr"/>
-          <a:lstStyle/>
-          <a:p>
-            <a:pPr algn="ctr"/>
-          </a:p>
-        </p:txBody>
-      </p:sp>
-      <p:sp>
-        <p:nvSpPr>
-          <p:cNvPr id="13" name="TextBox 12"/>
-          <p:cNvSpPr txBox="1"/>
-          <p:nvPr/>
-        </p:nvSpPr>
-        <p:spPr>
-          <a:xfrm>
-            <a:off x="8549640" y="1828800"/>
-            <a:ext cx="3017520" cy="530352"/>
-          </a:xfrm>
-          <a:prstGeom prst="rect">
-            <a:avLst/>
-          </a:prstGeom>
-          <a:noFill/>
-        </p:spPr>
-        <p:txBody>
-          <a:bodyPr wrap="square" lIns="45720" rIns="45720" tIns="27432" bIns="27432" anchor="ctr">
-            <a:spAutoFit/>
-          </a:bodyPr>
-          <a:lstStyle/>
-          <a:p>
-            <a:pPr algn="l">
-              <a:lnSpc>
-                <a:spcPct val="115000"/>
-              </a:lnSpc>
-              <a:spcAft>
-                <a:spcPts val="0"/>
-              </a:spcAft>
-            </a:pPr>
-            <a:r>
-              <a:rPr sz="1200" b="1" i="0">
-                <a:solidFill>
-                  <a:srgbClr val="FFFFFF"/>
-                </a:solidFill>
-                <a:latin typeface="Segoe UI"/>
-              </a:rPr>
-              <a:t>Con carta del fondo</a:t>
-            </a:r>
-          </a:p>
-        </p:txBody>
-      </p:sp>
-      <p:sp>
-        <p:nvSpPr>
-          <p:cNvPr id="14" name="Rectangle 13"/>
-          <p:cNvSpPr/>
-          <p:nvPr/>
-        </p:nvSpPr>
-        <p:spPr>
-          <a:xfrm>
-            <a:off x="502920" y="2359152"/>
-            <a:ext cx="5760720" cy="530352"/>
-          </a:xfrm>
-          <a:prstGeom prst="rect">
-            <a:avLst/>
-          </a:prstGeom>
-          <a:solidFill>
-            <a:srgbClr val="FFFFFF"/>
-          </a:solidFill>
-          <a:ln w="12700">
-            <a:solidFill>
-              <a:srgbClr val="F0D9C8"/>
-            </a:solidFill>
-          </a:ln>
-          <a:effectLst/>
-        </p:spPr>
-        <p:style>
-          <a:lnRef idx="1">
-            <a:schemeClr val="accent1"/>
-          </a:lnRef>
-          <a:fillRef idx="3">
-            <a:schemeClr val="accent1"/>
-          </a:fillRef>
-          <a:effectRef idx="2">
-            <a:schemeClr val="accent1"/>
-          </a:effectRef>
-          <a:fontRef idx="minor">
-            <a:schemeClr val="lt1"/>
-          </a:fontRef>
-        </p:style>
-        <p:txBody>
-          <a:bodyPr rtlCol="0" anchor="ctr"/>
-          <a:lstStyle/>
-          <a:p>
-            <a:pPr algn="ctr"/>
-          </a:p>
-        </p:txBody>
-      </p:sp>
-      <p:sp>
-        <p:nvSpPr>
-          <p:cNvPr id="15" name="TextBox 14"/>
-          <p:cNvSpPr txBox="1"/>
-          <p:nvPr/>
-        </p:nvSpPr>
-        <p:spPr>
-          <a:xfrm>
-            <a:off x="594360" y="2359152"/>
-            <a:ext cx="5577840" cy="530352"/>
-          </a:xfrm>
-          <a:prstGeom prst="rect">
-            <a:avLst/>
-          </a:prstGeom>
-          <a:noFill/>
-        </p:spPr>
-        <p:txBody>
-          <a:bodyPr wrap="square" lIns="45720" rIns="45720" tIns="27432" bIns="27432" anchor="ctr">
-            <a:spAutoFit/>
-          </a:bodyPr>
-          <a:lstStyle/>
-          <a:p>
-            <a:pPr algn="l">
-              <a:lnSpc>
-                <a:spcPct val="115000"/>
-              </a:lnSpc>
-              <a:spcAft>
-                <a:spcPts val="0"/>
-              </a:spcAft>
-            </a:pPr>
-            <a:r>
-              <a:rPr sz="1250" b="0" i="0">
-                <a:solidFill>
-                  <a:srgbClr val="222222"/>
-                </a:solidFill>
-                <a:latin typeface="Segoe UI"/>
-              </a:rPr>
-              <a:t>De contado (transferencia, tarjeta, cesantías o crédito del fondo o de una cooperativa)</a:t>
-            </a:r>
-          </a:p>
-        </p:txBody>
-      </p:sp>
-      <p:sp>
-        <p:nvSpPr>
-          <p:cNvPr id="16" name="Rectangle 15"/>
-          <p:cNvSpPr/>
-          <p:nvPr/>
-        </p:nvSpPr>
-        <p:spPr>
-          <a:xfrm>
-            <a:off x="6263640" y="2359152"/>
-            <a:ext cx="2194560" cy="530352"/>
-          </a:xfrm>
-          <a:prstGeom prst="rect">
-            <a:avLst/>
-          </a:prstGeom>
-          <a:solidFill>
-            <a:srgbClr val="FFFFFF"/>
-          </a:solidFill>
-          <a:ln w="12700">
-            <a:solidFill>
-              <a:srgbClr val="F0D9C8"/>
-            </a:solidFill>
-          </a:ln>
-          <a:effectLst/>
-        </p:spPr>
-        <p:style>
-          <a:lnRef idx="1">
-            <a:schemeClr val="accent1"/>
-          </a:lnRef>
-          <a:fillRef idx="3">
-            <a:schemeClr val="accent1"/>
-          </a:fillRef>
-          <a:effectRef idx="2">
-            <a:schemeClr val="accent1"/>
-          </a:effectRef>
-          <a:fontRef idx="minor">
-            <a:schemeClr val="lt1"/>
-          </a:fontRef>
-        </p:style>
-        <p:txBody>
-          <a:bodyPr rtlCol="0" anchor="ctr"/>
-          <a:lstStyle/>
-          <a:p>
-            <a:pPr algn="ctr"/>
-          </a:p>
-        </p:txBody>
-      </p:sp>
-      <p:sp>
-        <p:nvSpPr>
-          <p:cNvPr id="17" name="TextBox 16"/>
-          <p:cNvSpPr txBox="1"/>
-          <p:nvPr/>
-        </p:nvSpPr>
-        <p:spPr>
-          <a:xfrm>
-            <a:off x="6355080" y="2359152"/>
-            <a:ext cx="2011680" cy="530352"/>
-          </a:xfrm>
-          <a:prstGeom prst="rect">
-            <a:avLst/>
-          </a:prstGeom>
-          <a:noFill/>
-        </p:spPr>
-        <p:txBody>
-          <a:bodyPr wrap="square" lIns="45720" rIns="45720" tIns="27432" bIns="27432" anchor="ctr">
-            <a:spAutoFit/>
-          </a:bodyPr>
-          <a:lstStyle/>
-          <a:p>
-            <a:pPr algn="l">
-              <a:lnSpc>
-                <a:spcPct val="115000"/>
-              </a:lnSpc>
-              <a:spcAft>
-                <a:spcPts val="0"/>
-              </a:spcAft>
-            </a:pPr>
-            <a:r>
-              <a:rPr sz="1250" b="0" i="0">
-                <a:solidFill>
-                  <a:srgbClr val="222222"/>
-                </a:solidFill>
-                <a:latin typeface="Segoe UI"/>
-              </a:rPr>
-              <a:t>$8.696.000</a:t>
-            </a:r>
-          </a:p>
-        </p:txBody>
-      </p:sp>
-      <p:sp>
-        <p:nvSpPr>
-          <p:cNvPr id="18" name="Rectangle 17"/>
-          <p:cNvSpPr/>
-          <p:nvPr/>
-        </p:nvSpPr>
-        <p:spPr>
-          <a:xfrm>
-            <a:off x="8458200" y="2359152"/>
-            <a:ext cx="3200400" cy="530352"/>
-          </a:xfrm>
-          <a:prstGeom prst="rect">
-            <a:avLst/>
-          </a:prstGeom>
-          <a:solidFill>
-            <a:srgbClr val="FFFFFF"/>
-          </a:solidFill>
-          <a:ln w="12700">
-            <a:solidFill>
-              <a:srgbClr val="F0D9C8"/>
-            </a:solidFill>
-          </a:ln>
-          <a:effectLst/>
-        </p:spPr>
-        <p:style>
-          <a:lnRef idx="1">
-            <a:schemeClr val="accent1"/>
-          </a:lnRef>
-          <a:fillRef idx="3">
-            <a:schemeClr val="accent1"/>
-          </a:fillRef>
-          <a:effectRef idx="2">
-            <a:schemeClr val="accent1"/>
-          </a:effectRef>
-          <a:fontRef idx="minor">
-            <a:schemeClr val="lt1"/>
-          </a:fontRef>
-        </p:style>
-        <p:txBody>
-          <a:bodyPr rtlCol="0" anchor="ctr"/>
-          <a:lstStyle/>
-          <a:p>
-            <a:pPr algn="ctr"/>
-          </a:p>
-        </p:txBody>
-      </p:sp>
-      <p:sp>
-        <p:nvSpPr>
-          <p:cNvPr id="19" name="TextBox 18"/>
-          <p:cNvSpPr txBox="1"/>
-          <p:nvPr/>
-        </p:nvSpPr>
-        <p:spPr>
-          <a:xfrm>
-            <a:off x="8549640" y="2359152"/>
-            <a:ext cx="3017520" cy="530352"/>
-          </a:xfrm>
-          <a:prstGeom prst="rect">
-            <a:avLst/>
-          </a:prstGeom>
-          <a:noFill/>
-        </p:spPr>
-        <p:txBody>
-          <a:bodyPr wrap="square" lIns="45720" rIns="45720" tIns="27432" bIns="27432" anchor="ctr">
-            <a:spAutoFit/>
-          </a:bodyPr>
-          <a:lstStyle/>
-          <a:p>
-            <a:pPr algn="l">
-              <a:lnSpc>
-                <a:spcPct val="115000"/>
-              </a:lnSpc>
-              <a:spcAft>
-                <a:spcPts val="0"/>
-              </a:spcAft>
-            </a:pPr>
-            <a:r>
-              <a:rPr sz="1250" b="1" i="0">
-                <a:solidFill>
-                  <a:srgbClr val="E54C09"/>
-                </a:solidFill>
-                <a:latin typeface="Segoe UI"/>
-              </a:rPr>
-              <a:t>$4.782.800  ·  beca del 45%</a:t>
-            </a:r>
-          </a:p>
-        </p:txBody>
-      </p:sp>
-      <p:sp>
-        <p:nvSpPr>
-          <p:cNvPr id="20" name="Rectangle 19"/>
-          <p:cNvSpPr/>
-          <p:nvPr/>
-        </p:nvSpPr>
-        <p:spPr>
-          <a:xfrm>
-            <a:off x="502920" y="2889504"/>
-            <a:ext cx="5760720" cy="530352"/>
-          </a:xfrm>
-          <a:prstGeom prst="rect">
-            <a:avLst/>
-          </a:prstGeom>
-          <a:solidFill>
-            <a:srgbClr val="FFF8E7"/>
-          </a:solidFill>
-          <a:ln w="12700">
-            <a:solidFill>
-              <a:srgbClr val="F0D9C8"/>
-            </a:solidFill>
-          </a:ln>
-          <a:effectLst/>
-        </p:spPr>
-        <p:style>
-          <a:lnRef idx="1">
-            <a:schemeClr val="accent1"/>
-          </a:lnRef>
-          <a:fillRef idx="3">
-            <a:schemeClr val="accent1"/>
-          </a:fillRef>
-          <a:effectRef idx="2">
-            <a:schemeClr val="accent1"/>
-          </a:effectRef>
-          <a:fontRef idx="minor">
-            <a:schemeClr val="lt1"/>
-          </a:fontRef>
-        </p:style>
-        <p:txBody>
-          <a:bodyPr rtlCol="0" anchor="ctr"/>
-          <a:lstStyle/>
-          <a:p>
-            <a:pPr algn="ctr"/>
-          </a:p>
-        </p:txBody>
-      </p:sp>
-      <p:sp>
-        <p:nvSpPr>
-          <p:cNvPr id="21" name="TextBox 20"/>
-          <p:cNvSpPr txBox="1"/>
-          <p:nvPr/>
-        </p:nvSpPr>
-        <p:spPr>
-          <a:xfrm>
-            <a:off x="594360" y="2889504"/>
-            <a:ext cx="5577840" cy="530352"/>
-          </a:xfrm>
-          <a:prstGeom prst="rect">
-            <a:avLst/>
-          </a:prstGeom>
-          <a:noFill/>
-        </p:spPr>
-        <p:txBody>
-          <a:bodyPr wrap="square" lIns="45720" rIns="45720" tIns="27432" bIns="27432" anchor="ctr">
-            <a:spAutoFit/>
-          </a:bodyPr>
-          <a:lstStyle/>
-          <a:p>
-            <a:pPr algn="l">
-              <a:lnSpc>
-                <a:spcPct val="115000"/>
-              </a:lnSpc>
-              <a:spcAft>
-                <a:spcPts val="0"/>
-              </a:spcAft>
-            </a:pPr>
-            <a:r>
-              <a:rPr sz="1250" b="0" i="0">
-                <a:solidFill>
-                  <a:srgbClr val="222222"/>
-                </a:solidFill>
-                <a:latin typeface="Segoe UI"/>
-              </a:rPr>
-              <a:t>A cuotas, con crédito directo de la academia</a:t>
-            </a:r>
-          </a:p>
-        </p:txBody>
-      </p:sp>
-      <p:sp>
-        <p:nvSpPr>
-          <p:cNvPr id="22" name="Rectangle 21"/>
-          <p:cNvSpPr/>
-          <p:nvPr/>
-        </p:nvSpPr>
-        <p:spPr>
-          <a:xfrm>
-            <a:off x="6263640" y="2889504"/>
-            <a:ext cx="2194560" cy="530352"/>
-          </a:xfrm>
-          <a:prstGeom prst="rect">
-            <a:avLst/>
-          </a:prstGeom>
-          <a:solidFill>
-            <a:srgbClr val="FFF8E7"/>
-          </a:solidFill>
-          <a:ln w="12700">
-            <a:solidFill>
-              <a:srgbClr val="F0D9C8"/>
-            </a:solidFill>
-          </a:ln>
-          <a:effectLst/>
-        </p:spPr>
-        <p:style>
-          <a:lnRef idx="1">
-            <a:schemeClr val="accent1"/>
-          </a:lnRef>
-          <a:fillRef idx="3">
-            <a:schemeClr val="accent1"/>
-          </a:fillRef>
-          <a:effectRef idx="2">
-            <a:schemeClr val="accent1"/>
-          </a:effectRef>
-          <a:fontRef idx="minor">
-            <a:schemeClr val="lt1"/>
-          </a:fontRef>
-        </p:style>
-        <p:txBody>
-          <a:bodyPr rtlCol="0" anchor="ctr"/>
-          <a:lstStyle/>
-          <a:p>
-            <a:pPr algn="ctr"/>
-          </a:p>
-        </p:txBody>
-      </p:sp>
-      <p:sp>
-        <p:nvSpPr>
-          <p:cNvPr id="23" name="TextBox 22"/>
-          <p:cNvSpPr txBox="1"/>
-          <p:nvPr/>
-        </p:nvSpPr>
-        <p:spPr>
-          <a:xfrm>
-            <a:off x="6355080" y="2889504"/>
-            <a:ext cx="2011680" cy="530352"/>
-          </a:xfrm>
-          <a:prstGeom prst="rect">
-            <a:avLst/>
-          </a:prstGeom>
-          <a:noFill/>
-        </p:spPr>
-        <p:txBody>
-          <a:bodyPr wrap="square" lIns="45720" rIns="45720" tIns="27432" bIns="27432" anchor="ctr">
-            <a:spAutoFit/>
-          </a:bodyPr>
-          <a:lstStyle/>
-          <a:p>
-            <a:pPr algn="l">
-              <a:lnSpc>
-                <a:spcPct val="115000"/>
-              </a:lnSpc>
-              <a:spcAft>
-                <a:spcPts val="0"/>
-              </a:spcAft>
-            </a:pPr>
-            <a:r>
-              <a:rPr sz="1250" b="0" i="0">
-                <a:solidFill>
-                  <a:srgbClr val="222222"/>
-                </a:solidFill>
-                <a:latin typeface="Segoe UI"/>
-              </a:rPr>
-              <a:t>$8.696.000</a:t>
-            </a:r>
-          </a:p>
-        </p:txBody>
-      </p:sp>
-      <p:sp>
-        <p:nvSpPr>
-          <p:cNvPr id="24" name="Rectangle 23"/>
-          <p:cNvSpPr/>
-          <p:nvPr/>
-        </p:nvSpPr>
-        <p:spPr>
-          <a:xfrm>
-            <a:off x="8458200" y="2889504"/>
-            <a:ext cx="3200400" cy="530352"/>
-          </a:xfrm>
-          <a:prstGeom prst="rect">
-            <a:avLst/>
-          </a:prstGeom>
-          <a:solidFill>
-            <a:srgbClr val="FFF8E7"/>
-          </a:solidFill>
-          <a:ln w="12700">
-            <a:solidFill>
-              <a:srgbClr val="F0D9C8"/>
-            </a:solidFill>
-          </a:ln>
-          <a:effectLst/>
-        </p:spPr>
-        <p:style>
-          <a:lnRef idx="1">
-            <a:schemeClr val="accent1"/>
-          </a:lnRef>
-          <a:fillRef idx="3">
-            <a:schemeClr val="accent1"/>
-          </a:fillRef>
-          <a:effectRef idx="2">
-            <a:schemeClr val="accent1"/>
-          </a:effectRef>
-          <a:fontRef idx="minor">
-            <a:schemeClr val="lt1"/>
-          </a:fontRef>
-        </p:style>
-        <p:txBody>
-          <a:bodyPr rtlCol="0" anchor="ctr"/>
-          <a:lstStyle/>
-          <a:p>
-            <a:pPr algn="ctr"/>
-          </a:p>
-        </p:txBody>
-      </p:sp>
-      <p:sp>
-        <p:nvSpPr>
-          <p:cNvPr id="25" name="TextBox 24"/>
-          <p:cNvSpPr txBox="1"/>
-          <p:nvPr/>
-        </p:nvSpPr>
-        <p:spPr>
-          <a:xfrm>
-            <a:off x="8549640" y="2889504"/>
-            <a:ext cx="3017520" cy="530352"/>
-          </a:xfrm>
-          <a:prstGeom prst="rect">
-            <a:avLst/>
-          </a:prstGeom>
-          <a:noFill/>
-        </p:spPr>
-        <p:txBody>
-          <a:bodyPr wrap="square" lIns="45720" rIns="45720" tIns="27432" bIns="27432" anchor="ctr">
-            <a:spAutoFit/>
-          </a:bodyPr>
-          <a:lstStyle/>
-          <a:p>
-            <a:pPr algn="l">
-              <a:lnSpc>
-                <a:spcPct val="115000"/>
-              </a:lnSpc>
-              <a:spcAft>
-                <a:spcPts val="0"/>
-              </a:spcAft>
-            </a:pPr>
-            <a:r>
-              <a:rPr sz="1250" b="1" i="0">
-                <a:solidFill>
-                  <a:srgbClr val="E54C09"/>
-                </a:solidFill>
-                <a:latin typeface="Segoe UI"/>
-              </a:rPr>
-              <a:t>$5.565.440  ·  beca del 36%</a:t>
-            </a:r>
-          </a:p>
-        </p:txBody>
-      </p:sp>
-      <p:sp>
-        <p:nvSpPr>
-          <p:cNvPr id="26" name="Rectangle 25"/>
-          <p:cNvSpPr/>
-          <p:nvPr/>
-        </p:nvSpPr>
-        <p:spPr>
-          <a:xfrm>
-            <a:off x="502920" y="3419856"/>
-            <a:ext cx="5760720" cy="530352"/>
-          </a:xfrm>
-          <a:prstGeom prst="rect">
-            <a:avLst/>
-          </a:prstGeom>
-          <a:solidFill>
-            <a:srgbClr val="FFFFFF"/>
-          </a:solidFill>
-          <a:ln w="12700">
-            <a:solidFill>
-              <a:srgbClr val="F0D9C8"/>
-            </a:solidFill>
-          </a:ln>
-          <a:effectLst/>
-        </p:spPr>
-        <p:style>
-          <a:lnRef idx="1">
-            <a:schemeClr val="accent1"/>
-          </a:lnRef>
-          <a:fillRef idx="3">
-            <a:schemeClr val="accent1"/>
-          </a:fillRef>
-          <a:effectRef idx="2">
-            <a:schemeClr val="accent1"/>
-          </a:effectRef>
-          <a:fontRef idx="minor">
-            <a:schemeClr val="lt1"/>
-          </a:fontRef>
-        </p:style>
-        <p:txBody>
-          <a:bodyPr rtlCol="0" anchor="ctr"/>
-          <a:lstStyle/>
-          <a:p>
-            <a:pPr algn="ctr"/>
-          </a:p>
-        </p:txBody>
-      </p:sp>
-      <p:sp>
-        <p:nvSpPr>
-          <p:cNvPr id="27" name="TextBox 26"/>
-          <p:cNvSpPr txBox="1"/>
-          <p:nvPr/>
-        </p:nvSpPr>
-        <p:spPr>
-          <a:xfrm>
-            <a:off x="594360" y="3419856"/>
-            <a:ext cx="5577840" cy="530352"/>
-          </a:xfrm>
-          <a:prstGeom prst="rect">
-            <a:avLst/>
-          </a:prstGeom>
-          <a:noFill/>
-        </p:spPr>
-        <p:txBody>
-          <a:bodyPr wrap="square" lIns="45720" rIns="45720" tIns="27432" bIns="27432" anchor="ctr">
-            <a:spAutoFit/>
-          </a:bodyPr>
-          <a:lstStyle/>
-          <a:p>
-            <a:pPr algn="l">
-              <a:lnSpc>
-                <a:spcPct val="115000"/>
-              </a:lnSpc>
-              <a:spcAft>
-                <a:spcPts val="0"/>
-              </a:spcAft>
-            </a:pPr>
-            <a:r>
-              <a:rPr sz="1250" b="0" i="0">
-                <a:solidFill>
-                  <a:srgbClr val="222222"/>
-                </a:solidFill>
-                <a:latin typeface="Segoe UI"/>
-              </a:rPr>
-              <a:t>Ejemplo a cuotas: inicial del 20% y 11 cuotas</a:t>
-            </a:r>
-          </a:p>
-        </p:txBody>
-      </p:sp>
-      <p:sp>
-        <p:nvSpPr>
-          <p:cNvPr id="28" name="Rectangle 27"/>
-          <p:cNvSpPr/>
-          <p:nvPr/>
-        </p:nvSpPr>
-        <p:spPr>
-          <a:xfrm>
-            <a:off x="6263640" y="3419856"/>
-            <a:ext cx="2194560" cy="530352"/>
-          </a:xfrm>
-          <a:prstGeom prst="rect">
-            <a:avLst/>
-          </a:prstGeom>
-          <a:solidFill>
-            <a:srgbClr val="FFFFFF"/>
-          </a:solidFill>
-          <a:ln w="12700">
-            <a:solidFill>
-              <a:srgbClr val="F0D9C8"/>
-            </a:solidFill>
-          </a:ln>
-          <a:effectLst/>
-        </p:spPr>
-        <p:style>
-          <a:lnRef idx="1">
-            <a:schemeClr val="accent1"/>
-          </a:lnRef>
-          <a:fillRef idx="3">
-            <a:schemeClr val="accent1"/>
-          </a:fillRef>
-          <a:effectRef idx="2">
-            <a:schemeClr val="accent1"/>
-          </a:effectRef>
-          <a:fontRef idx="minor">
-            <a:schemeClr val="lt1"/>
-          </a:fontRef>
-        </p:style>
-        <p:txBody>
-          <a:bodyPr rtlCol="0" anchor="ctr"/>
-          <a:lstStyle/>
-          <a:p>
-            <a:pPr algn="ctr"/>
-          </a:p>
-        </p:txBody>
-      </p:sp>
-      <p:sp>
-        <p:nvSpPr>
-          <p:cNvPr id="29" name="TextBox 28"/>
-          <p:cNvSpPr txBox="1"/>
-          <p:nvPr/>
-        </p:nvSpPr>
-        <p:spPr>
-          <a:xfrm>
-            <a:off x="6355080" y="3419856"/>
-            <a:ext cx="2011680" cy="530352"/>
-          </a:xfrm>
-          <a:prstGeom prst="rect">
-            <a:avLst/>
-          </a:prstGeom>
-          <a:noFill/>
-        </p:spPr>
-        <p:txBody>
-          <a:bodyPr wrap="square" lIns="45720" rIns="45720" tIns="27432" bIns="27432" anchor="ctr">
-            <a:spAutoFit/>
-          </a:bodyPr>
-          <a:lstStyle/>
-          <a:p>
-            <a:pPr algn="l">
-              <a:lnSpc>
-                <a:spcPct val="115000"/>
-              </a:lnSpc>
-              <a:spcAft>
-                <a:spcPts val="0"/>
-              </a:spcAft>
-            </a:pPr>
-            <a:r>
-              <a:rPr sz="1250" b="0" i="0">
-                <a:solidFill>
-                  <a:srgbClr val="222222"/>
-                </a:solidFill>
-                <a:latin typeface="Segoe UI"/>
-              </a:rPr>
-              <a:t/>
-            </a:r>
-          </a:p>
-        </p:txBody>
-      </p:sp>
-      <p:sp>
-        <p:nvSpPr>
-          <p:cNvPr id="30" name="Rectangle 29"/>
-          <p:cNvSpPr/>
-          <p:nvPr/>
-        </p:nvSpPr>
-        <p:spPr>
-          <a:xfrm>
-            <a:off x="8458200" y="3419856"/>
-            <a:ext cx="3200400" cy="530352"/>
-          </a:xfrm>
-          <a:prstGeom prst="rect">
-            <a:avLst/>
-          </a:prstGeom>
-          <a:solidFill>
-            <a:srgbClr val="FFFFFF"/>
-          </a:solidFill>
-          <a:ln w="12700">
-            <a:solidFill>
-              <a:srgbClr val="F0D9C8"/>
-            </a:solidFill>
-          </a:ln>
-          <a:effectLst/>
-        </p:spPr>
-        <p:style>
-          <a:lnRef idx="1">
-            <a:schemeClr val="accent1"/>
-          </a:lnRef>
-          <a:fillRef idx="3">
-            <a:schemeClr val="accent1"/>
-          </a:fillRef>
-          <a:effectRef idx="2">
-            <a:schemeClr val="accent1"/>
-          </a:effectRef>
-          <a:fontRef idx="minor">
-            <a:schemeClr val="lt1"/>
-          </a:fontRef>
-        </p:style>
-        <p:txBody>
-          <a:bodyPr rtlCol="0" anchor="ctr"/>
-          <a:lstStyle/>
-          <a:p>
-            <a:pPr algn="ctr"/>
-          </a:p>
-        </p:txBody>
-      </p:sp>
-      <p:sp>
-        <p:nvSpPr>
-          <p:cNvPr id="31" name="TextBox 30"/>
-          <p:cNvSpPr txBox="1"/>
-          <p:nvPr/>
-        </p:nvSpPr>
-        <p:spPr>
-          <a:xfrm>
-            <a:off x="8549640" y="3419856"/>
-            <a:ext cx="3017520" cy="530352"/>
-          </a:xfrm>
-          <a:prstGeom prst="rect">
-            <a:avLst/>
-          </a:prstGeom>
-          <a:noFill/>
-        </p:spPr>
-        <p:txBody>
-          <a:bodyPr wrap="square" lIns="45720" rIns="45720" tIns="27432" bIns="27432" anchor="ctr">
-            <a:spAutoFit/>
-          </a:bodyPr>
-          <a:lstStyle/>
-          <a:p>
-            <a:pPr algn="l">
-              <a:lnSpc>
-                <a:spcPct val="115000"/>
-              </a:lnSpc>
-              <a:spcAft>
-                <a:spcPts val="0"/>
-              </a:spcAft>
-            </a:pPr>
-            <a:r>
-              <a:rPr sz="1250" b="1" i="0">
-                <a:solidFill>
-                  <a:srgbClr val="E54C09"/>
-                </a:solidFill>
-                <a:latin typeface="Segoe UI"/>
-              </a:rPr>
-              <a:t>$1.113.088 hoy y 11 cuotas de $452.348</a:t>
-            </a:r>
-          </a:p>
-        </p:txBody>
-      </p:sp>
-      <p:sp>
-        <p:nvSpPr>
-          <p:cNvPr id="32" name="TextBox 31"/>
-          <p:cNvSpPr txBox="1"/>
-          <p:nvPr/>
-        </p:nvSpPr>
-        <p:spPr>
-          <a:xfrm>
-            <a:off x="502920" y="4023360"/>
-            <a:ext cx="11155680" cy="457200"/>
-          </a:xfrm>
-          <a:prstGeom prst="rect">
-            <a:avLst/>
-          </a:prstGeom>
-          <a:noFill/>
-        </p:spPr>
-        <p:txBody>
-          <a:bodyPr wrap="square" lIns="45720" rIns="45720" tIns="27432" bIns="27432" anchor="t">
-            <a:spAutoFit/>
-          </a:bodyPr>
-          <a:lstStyle/>
-          <a:p>
-            <a:pPr algn="l">
-              <a:lnSpc>
-                <a:spcPct val="115000"/>
-              </a:lnSpc>
-              <a:spcAft>
-                <a:spcPts val="0"/>
-              </a:spcAft>
-            </a:pPr>
-            <a:r>
-              <a:rPr sz="1200" b="0" i="0">
-                <a:solidFill>
-                  <a:srgbClr val="5A5A5A"/>
-                </a:solidFill>
-                <a:latin typeface="Segoe UI"/>
-              </a:rPr>
-              <a:t>Es beca del Fondo de Becas Heiiu, no un descuento: la misma tarifa y la misma garantía para todos los que entran con carta del fondo. El crédito del fondo cuenta como pago de contado, y da la beca de contado.</a:t>
-            </a:r>
-          </a:p>
-        </p:txBody>
-      </p:sp>
-      <p:sp>
-        <p:nvSpPr>
-          <p:cNvPr id="33" name="Rectangle 32"/>
-          <p:cNvSpPr/>
-          <p:nvPr/>
-        </p:nvSpPr>
-        <p:spPr>
-          <a:xfrm>
-            <a:off x="502920" y="4617720"/>
-            <a:ext cx="5486400" cy="1600200"/>
-          </a:xfrm>
-          <a:prstGeom prst="rect">
-            <a:avLst/>
-          </a:prstGeom>
-          <a:solidFill>
-            <a:srgbClr val="FFFFFF"/>
-          </a:solidFill>
-          <a:ln w="12700">
-            <a:solidFill>
-              <a:srgbClr val="F0D9C8"/>
-            </a:solidFill>
-          </a:ln>
-          <a:effectLst/>
-        </p:spPr>
-        <p:style>
-          <a:lnRef idx="1">
-            <a:schemeClr val="accent1"/>
-          </a:lnRef>
-          <a:fillRef idx="3">
-            <a:schemeClr val="accent1"/>
-          </a:fillRef>
-          <a:effectRef idx="2">
-            <a:schemeClr val="accent1"/>
-          </a:effectRef>
-          <a:fontRef idx="minor">
-            <a:schemeClr val="lt1"/>
-          </a:fontRef>
-        </p:style>
-        <p:txBody>
-          <a:bodyPr rtlCol="0" anchor="ctr"/>
-          <a:lstStyle/>
-          <a:p>
-            <a:pPr algn="ctr"/>
-          </a:p>
-        </p:txBody>
-      </p:sp>
-      <p:sp>
-        <p:nvSpPr>
-          <p:cNvPr id="34" name="TextBox 33"/>
-          <p:cNvSpPr txBox="1"/>
-          <p:nvPr/>
-        </p:nvSpPr>
-        <p:spPr>
-          <a:xfrm>
-            <a:off x="667512" y="4727448"/>
-            <a:ext cx="5157216" cy="411480"/>
-          </a:xfrm>
-          <a:prstGeom prst="rect">
-            <a:avLst/>
-          </a:prstGeom>
-          <a:noFill/>
-        </p:spPr>
-        <p:txBody>
-          <a:bodyPr wrap="square" lIns="45720" rIns="45720" tIns="27432" bIns="27432" anchor="t">
-            <a:spAutoFit/>
-          </a:bodyPr>
-          <a:lstStyle/>
-          <a:p>
-            <a:pPr algn="l">
-              <a:lnSpc>
-                <a:spcPct val="115000"/>
-              </a:lnSpc>
-              <a:spcAft>
-                <a:spcPts val="0"/>
-              </a:spcAft>
-            </a:pPr>
-            <a:r>
-              <a:rPr sz="1300" b="1" i="0">
-                <a:solidFill>
-                  <a:srgbClr val="E54C09"/>
-                </a:solidFill>
-                <a:latin typeface="Segoe UI"/>
-              </a:rPr>
-              <a:t>BECA CON EL NOMBRE DEL FONDO</a:t>
-            </a:r>
-          </a:p>
-        </p:txBody>
-      </p:sp>
-      <p:sp>
-        <p:nvSpPr>
-          <p:cNvPr id="35" name="TextBox 34"/>
-          <p:cNvSpPr txBox="1"/>
-          <p:nvPr/>
-        </p:nvSpPr>
-        <p:spPr>
-          <a:xfrm>
-            <a:off x="667512" y="5120640"/>
-            <a:ext cx="5157216" cy="1005840"/>
-          </a:xfrm>
-          <a:prstGeom prst="rect">
-            <a:avLst/>
-          </a:prstGeom>
-          <a:noFill/>
-        </p:spPr>
-        <p:txBody>
-          <a:bodyPr wrap="square" lIns="45720" rIns="45720" tIns="27432" bIns="27432" anchor="t">
-            <a:spAutoFit/>
-          </a:bodyPr>
-          <a:lstStyle/>
-          <a:p>
-            <a:pPr algn="l">
-              <a:lnSpc>
-                <a:spcPct val="112000"/>
-              </a:lnSpc>
-              <a:spcAft>
-                <a:spcPts val="0"/>
-              </a:spcAft>
-            </a:pPr>
-            <a:r>
-              <a:rPr sz="1200" b="0" i="0">
-                <a:solidFill>
-                  <a:srgbClr val="222222"/>
-                </a:solidFill>
-                <a:latin typeface="Segoe UI"/>
-              </a:rPr>
-              <a:t>Hasta 3 afiliados por trimestre, elegidos por el fondo, reciben el 45% aunque paguen a cuotas, más los libros del programa y prioridad de cupo. Si todos sus becados cumplen, el cupo sube a 5 el trimestre siguiente.</a:t>
-            </a:r>
-          </a:p>
-        </p:txBody>
-      </p:sp>
-      <p:sp>
-        <p:nvSpPr>
-          <p:cNvPr id="36" name="Rectangle 35"/>
-          <p:cNvSpPr/>
-          <p:nvPr/>
-        </p:nvSpPr>
-        <p:spPr>
-          <a:xfrm>
-            <a:off x="6172200" y="4617720"/>
-            <a:ext cx="5532120" cy="1600200"/>
-          </a:xfrm>
-          <a:prstGeom prst="rect">
-            <a:avLst/>
-          </a:prstGeom>
-          <a:solidFill>
-            <a:srgbClr val="FFFFFF"/>
-          </a:solidFill>
-          <a:ln w="12700">
-            <a:solidFill>
-              <a:srgbClr val="F0D9C8"/>
-            </a:solidFill>
-          </a:ln>
-          <a:effectLst/>
-        </p:spPr>
-        <p:style>
-          <a:lnRef idx="1">
-            <a:schemeClr val="accent1"/>
-          </a:lnRef>
-          <a:fillRef idx="3">
-            <a:schemeClr val="accent1"/>
-          </a:fillRef>
-          <a:effectRef idx="2">
-            <a:schemeClr val="accent1"/>
-          </a:effectRef>
-          <a:fontRef idx="minor">
-            <a:schemeClr val="lt1"/>
-          </a:fontRef>
-        </p:style>
-        <p:txBody>
-          <a:bodyPr rtlCol="0" anchor="ctr"/>
-          <a:lstStyle/>
-          <a:p>
-            <a:pPr algn="ctr"/>
-          </a:p>
-        </p:txBody>
-      </p:sp>
-      <p:sp>
-        <p:nvSpPr>
-          <p:cNvPr id="37" name="TextBox 36"/>
-          <p:cNvSpPr txBox="1"/>
-          <p:nvPr/>
-        </p:nvSpPr>
-        <p:spPr>
-          <a:xfrm>
-            <a:off x="6336792" y="4727448"/>
-            <a:ext cx="5202936" cy="411480"/>
-          </a:xfrm>
-          <a:prstGeom prst="rect">
-            <a:avLst/>
-          </a:prstGeom>
-          <a:noFill/>
-        </p:spPr>
-        <p:txBody>
-          <a:bodyPr wrap="square" lIns="45720" rIns="45720" tIns="27432" bIns="27432" anchor="t">
-            <a:spAutoFit/>
-          </a:bodyPr>
-          <a:lstStyle/>
-          <a:p>
-            <a:pPr algn="l">
-              <a:lnSpc>
-                <a:spcPct val="115000"/>
-              </a:lnSpc>
-              <a:spcAft>
-                <a:spcPts val="0"/>
-              </a:spcAft>
-            </a:pPr>
-            <a:r>
-              <a:rPr sz="1300" b="1" i="0">
-                <a:solidFill>
-                  <a:srgbClr val="E54C09"/>
-                </a:solidFill>
-                <a:latin typeface="Segoe UI"/>
-              </a:rPr>
-              <a:t>SI EL FONDO PREFIERE PAGAR LOS CUPOS (PLAN EMPRESA)</a:t>
-            </a:r>
-          </a:p>
-        </p:txBody>
-      </p:sp>
-      <p:sp>
-        <p:nvSpPr>
-          <p:cNvPr id="38" name="TextBox 37"/>
-          <p:cNvSpPr txBox="1"/>
-          <p:nvPr/>
-        </p:nvSpPr>
-        <p:spPr>
-          <a:xfrm>
-            <a:off x="6336792" y="5120640"/>
-            <a:ext cx="5202936" cy="1005840"/>
-          </a:xfrm>
-          <a:prstGeom prst="rect">
-            <a:avLst/>
-          </a:prstGeom>
-          <a:noFill/>
-        </p:spPr>
-        <p:txBody>
-          <a:bodyPr wrap="square" lIns="45720" rIns="45720" tIns="27432" bIns="27432" anchor="t">
-            <a:spAutoFit/>
-          </a:bodyPr>
-          <a:lstStyle/>
-          <a:p>
-            <a:pPr algn="l">
-              <a:lnSpc>
-                <a:spcPct val="112000"/>
-              </a:lnSpc>
-              <a:spcAft>
-                <a:spcPts val="0"/>
-              </a:spcAft>
-            </a:pPr>
-            <a:r>
-              <a:rPr sz="1200" b="1" i="0">
-                <a:solidFill>
-                  <a:srgbClr val="222222"/>
-                </a:solidFill>
-                <a:latin typeface="Segoe UI"/>
-              </a:rPr>
-              <a:t>$4.782.800 por cupo de 3 a 7 · $4.350.000 de 8 a 15 · $3.950.000 de 16 a 30. </a:t>
-            </a:r>
-            <a:r>
-              <a:rPr sz="1200" b="0" i="0">
-                <a:solidFill>
-                  <a:srgbClr val="222222"/>
-                </a:solidFill>
-                <a:latin typeface="Segoe UI"/>
-              </a:rPr>
-              <a:t>De contado o con inicial y 3 cuotas. El fondo escoge a quién, y con 8 o más el horario es suyo.</a:t>
-            </a:r>
-          </a:p>
-        </p:txBody>
-      </p:sp>
-      <p:sp>
-        <p:nvSpPr>
-          <p:cNvPr id="39" name="TextBox 38"/>
-          <p:cNvSpPr txBox="1"/>
-          <p:nvPr/>
-        </p:nvSpPr>
-        <p:spPr>
-          <a:xfrm>
-            <a:off x="502920" y="6355080"/>
-            <a:ext cx="11155680" cy="365760"/>
-          </a:xfrm>
-          <a:prstGeom prst="rect">
-            <a:avLst/>
-          </a:prstGeom>
-          <a:noFill/>
-        </p:spPr>
-        <p:txBody>
-          <a:bodyPr wrap="square" lIns="45720" rIns="45720" tIns="27432" bIns="27432" anchor="ctr">
-            <a:spAutoFit/>
-          </a:bodyPr>
-          <a:lstStyle/>
-          <a:p>
-            <a:pPr algn="l">
-              <a:lnSpc>
-                <a:spcPct val="115000"/>
-              </a:lnSpc>
-              <a:spcAft>
-                <a:spcPts val="0"/>
-              </a:spcAft>
-            </a:pPr>
-            <a:r>
-              <a:rPr sz="1000" b="0" i="0">
-                <a:solidFill>
-                  <a:srgbClr val="5A5A5A"/>
-                </a:solidFill>
-                <a:latin typeface="Segoe UI"/>
-              </a:rPr>
-              <a:t>Valores vigentes 30 días desde la presentación. Todo pago entra directamente a la academia; el fondo no recibe ni gestiona pagos.</a:t>
+              <a:t>Línea de alianzas 316 768 8793 · Carrera 27 # 48-49, Sotomayor, Bucaramanga</a:t>
             </a:r>
           </a:p>
         </p:txBody>
@@ -7591,7 +6023,7 @@
         <p:spPr>
           <a:xfrm>
             <a:off x="502920" y="36576"/>
-            <a:ext cx="8229600" cy="329184"/>
+            <a:ext cx="5486400" cy="329184"/>
           </a:xfrm>
           <a:prstGeom prst="rect">
             <a:avLst/>
@@ -7619,7 +6051,7 @@
                 </a:solidFill>
                 <a:latin typeface="Segoe UI"/>
               </a:rPr>
-              <a:t>4 · BENEFICIOS</a:t>
+              <a:t>5 de 6</a:t>
             </a:r>
           </a:p>
         </p:txBody>
@@ -7632,8 +6064,8 @@
         </p:nvSpPr>
         <p:spPr>
           <a:xfrm>
-            <a:off x="9326880" y="36576"/>
-            <a:ext cx="2377440" cy="329184"/>
+            <a:off x="6583680" y="36576"/>
+            <a:ext cx="5120640" cy="329184"/>
           </a:xfrm>
           <a:prstGeom prst="rect">
             <a:avLst/>
@@ -7661,7 +6093,7 @@
                 </a:solidFill>
                 <a:latin typeface="Segoe UI"/>
               </a:rPr>
-              <a:t>HEIIU ENGLISH ACADEMY</a:t>
+              <a:t>HEIIU ENGLISH ACADEMY · PROGRAMA PARA FONDOS DE EMPLEADOS</a:t>
             </a:r>
           </a:p>
         </p:txBody>
@@ -7674,8 +6106,8 @@
         </p:nvSpPr>
         <p:spPr>
           <a:xfrm>
-            <a:off x="502920" y="548640"/>
-            <a:ext cx="11155680" cy="1051560"/>
+            <a:off x="548640" y="914400"/>
+            <a:ext cx="11155680" cy="2377440"/>
           </a:xfrm>
           <a:prstGeom prst="rect">
             <a:avLst/>
@@ -7697,13 +6129,13 @@
               </a:spcAft>
             </a:pPr>
             <a:r>
-              <a:rPr sz="3200" b="1" i="0">
+              <a:rPr sz="4000" b="1" i="0">
                 <a:solidFill>
                   <a:srgbClr val="E54C09"/>
                 </a:solidFill>
                 <a:latin typeface="Constantia"/>
               </a:rPr>
-              <a:t>¿Qué gano yo? Lo que recibe el fondo y lo que recibe cada afiliado</a:t>
+              <a:t>Un beneficio nuevo con su nombre, sin presupuesto y con reporte.</a:t>
             </a:r>
           </a:p>
         </p:txBody>
@@ -7716,7 +6148,7 @@
         </p:nvSpPr>
         <p:spPr>
           <a:xfrm>
-            <a:off x="548640" y="1627632"/>
+            <a:off x="594360" y="3429000"/>
             <a:ext cx="1463040" cy="38000"/>
           </a:xfrm>
           <a:prstGeom prst="rect">
@@ -7754,45 +6186,108 @@
       </p:sp>
       <p:sp>
         <p:nvSpPr>
-          <p:cNvPr id="8" name="Rectangle 7"/>
-          <p:cNvSpPr/>
+          <p:cNvPr id="8" name="TextBox 7"/>
+          <p:cNvSpPr txBox="1"/>
           <p:nvPr/>
         </p:nvSpPr>
         <p:spPr>
           <a:xfrm>
-            <a:off x="502920" y="1828800"/>
-            <a:ext cx="5486400" cy="411480"/>
+            <a:off x="548640" y="3657600"/>
+            <a:ext cx="11155680" cy="2468880"/>
           </a:xfrm>
           <a:prstGeom prst="rect">
             <a:avLst/>
           </a:prstGeom>
-          <a:solidFill>
-            <a:srgbClr val="E54C09"/>
-          </a:solidFill>
-          <a:ln>
-            <a:noFill/>
-          </a:ln>
-          <a:effectLst/>
-        </p:spPr>
-        <p:style>
-          <a:lnRef idx="1">
-            <a:schemeClr val="accent1"/>
-          </a:lnRef>
-          <a:fillRef idx="3">
-            <a:schemeClr val="accent1"/>
-          </a:fillRef>
-          <a:effectRef idx="2">
-            <a:schemeClr val="accent1"/>
-          </a:effectRef>
-          <a:fontRef idx="minor">
-            <a:schemeClr val="lt1"/>
-          </a:fontRef>
-        </p:style>
-        <p:txBody>
-          <a:bodyPr rtlCol="0" anchor="ctr"/>
-          <a:lstStyle/>
-          <a:p>
-            <a:pPr algn="ctr"/>
+          <a:noFill/>
+        </p:spPr>
+        <p:txBody>
+          <a:bodyPr wrap="square" lIns="45720" rIns="45720" tIns="27432" bIns="27432" anchor="t">
+            <a:spAutoFit/>
+          </a:bodyPr>
+          <a:lstStyle/>
+          <a:p>
+            <a:pPr algn="l">
+              <a:lnSpc>
+                <a:spcPct val="115000"/>
+              </a:lnSpc>
+              <a:spcAft>
+                <a:spcPts val="1000"/>
+              </a:spcAft>
+            </a:pPr>
+            <a:r>
+              <a:rPr sz="2200" b="1" i="0">
+                <a:solidFill>
+                  <a:srgbClr val="E54C09"/>
+                </a:solidFill>
+                <a:latin typeface="Segoe UI"/>
+              </a:rPr>
+              <a:t>▪ </a:t>
+            </a:r>
+            <a:r>
+              <a:rPr sz="2200" b="0" i="0">
+                <a:solidFill>
+                  <a:srgbClr val="222222"/>
+                </a:solidFill>
+                <a:latin typeface="Segoe UI"/>
+              </a:rPr>
+              <a:t>Becas y certificados con el nombre del fondo, entregados en su propio evento.</a:t>
+            </a:r>
+          </a:p>
+          <a:p>
+            <a:pPr algn="l">
+              <a:lnSpc>
+                <a:spcPct val="115000"/>
+              </a:lnSpc>
+              <a:spcAft>
+                <a:spcPts val="1000"/>
+              </a:spcAft>
+            </a:pPr>
+            <a:r>
+              <a:rPr sz="2200" b="1" i="0">
+                <a:solidFill>
+                  <a:srgbClr val="E54C09"/>
+                </a:solidFill>
+                <a:latin typeface="Segoe UI"/>
+              </a:rPr>
+              <a:t>▪ </a:t>
+            </a:r>
+            <a:r>
+              <a:rPr sz="2200" b="0" i="0">
+                <a:solidFill>
+                  <a:srgbClr val="222222"/>
+                </a:solidFill>
+                <a:latin typeface="Segoe UI"/>
+              </a:rPr>
+              <a:t>Reporte de asistencia y cumplimiento de cada becado: el fondo ve quién cumple.</a:t>
+            </a:r>
+          </a:p>
+          <a:p>
+            <a:pPr algn="l">
+              <a:lnSpc>
+                <a:spcPct val="115000"/>
+              </a:lnSpc>
+              <a:spcAft>
+                <a:spcPts val="1000"/>
+              </a:spcAft>
+            </a:pPr>
+            <a:r>
+              <a:rPr sz="2200" b="1" i="0">
+                <a:solidFill>
+                  <a:srgbClr val="E54C09"/>
+                </a:solidFill>
+                <a:latin typeface="Segoe UI"/>
+              </a:rPr>
+              <a:t>▪ </a:t>
+            </a:r>
+            <a:r>
+              <a:rPr sz="2200" b="0" i="0">
+                <a:solidFill>
+                  <a:srgbClr val="222222"/>
+                </a:solidFill>
+                <a:latin typeface="Segoe UI"/>
+              </a:rPr>
+              <a:t>Cero carga operativa: el fondo postula con una carta, la academia hace el resto. Y diagnóstico de nivel para 10 afiliados, sin costo.</a:t>
+            </a:r>
           </a:p>
         </p:txBody>
       </p:sp>
@@ -7804,8 +6299,8 @@
         </p:nvSpPr>
         <p:spPr>
           <a:xfrm>
-            <a:off x="640080" y="1828800"/>
-            <a:ext cx="5303520" cy="411480"/>
+            <a:off x="502920" y="6355080"/>
+            <a:ext cx="11155680" cy="365760"/>
           </a:xfrm>
           <a:prstGeom prst="rect">
             <a:avLst/>
@@ -7827,594 +6322,13 @@
               </a:spcAft>
             </a:pPr>
             <a:r>
-              <a:rPr sz="1300" b="1" i="0">
-                <a:solidFill>
-                  <a:srgbClr val="FFFFFF"/>
+              <a:rPr sz="1000" b="0" i="0">
+                <a:solidFill>
+                  <a:srgbClr val="5A5A5A"/>
                 </a:solidFill>
                 <a:latin typeface="Segoe UI"/>
               </a:rPr>
-              <a:t>EL FONDO</a:t>
-            </a:r>
-          </a:p>
-        </p:txBody>
-      </p:sp>
-      <p:sp>
-        <p:nvSpPr>
-          <p:cNvPr id="10" name="TextBox 9"/>
-          <p:cNvSpPr txBox="1"/>
-          <p:nvPr/>
-        </p:nvSpPr>
-        <p:spPr>
-          <a:xfrm>
-            <a:off x="502920" y="2331720"/>
-            <a:ext cx="5486400" cy="3931920"/>
-          </a:xfrm>
-          <a:prstGeom prst="rect">
-            <a:avLst/>
-          </a:prstGeom>
-          <a:noFill/>
-        </p:spPr>
-        <p:txBody>
-          <a:bodyPr wrap="square" lIns="45720" rIns="45720" tIns="27432" bIns="27432" anchor="t">
-            <a:spAutoFit/>
-          </a:bodyPr>
-          <a:lstStyle/>
-          <a:p>
-            <a:pPr algn="l">
-              <a:lnSpc>
-                <a:spcPct val="112000"/>
-              </a:lnSpc>
-              <a:spcAft>
-                <a:spcPts val="600"/>
-              </a:spcAft>
-            </a:pPr>
-            <a:r>
-              <a:rPr sz="1350" b="1" i="0">
-                <a:solidFill>
-                  <a:srgbClr val="E54C09"/>
-                </a:solidFill>
-                <a:latin typeface="Segoe UI"/>
-              </a:rPr>
-              <a:t>▪ </a:t>
-            </a:r>
-            <a:r>
-              <a:rPr sz="1350" b="1" i="0">
-                <a:solidFill>
-                  <a:srgbClr val="222222"/>
-                </a:solidFill>
-                <a:latin typeface="Segoe UI"/>
-              </a:rPr>
-              <a:t>Un beneficio nuevo para sus afiliados, sin costo para el fondo. </a:t>
-            </a:r>
-            <a:r>
-              <a:rPr sz="1350" b="0" i="0">
-                <a:solidFill>
-                  <a:srgbClr val="222222"/>
-                </a:solidFill>
-                <a:latin typeface="Segoe UI"/>
-              </a:rPr>
-              <a:t>El fondo postula, no paga ni cobra nada.</a:t>
-            </a:r>
-          </a:p>
-          <a:p>
-            <a:pPr algn="l">
-              <a:lnSpc>
-                <a:spcPct val="112000"/>
-              </a:lnSpc>
-              <a:spcAft>
-                <a:spcPts val="600"/>
-              </a:spcAft>
-            </a:pPr>
-            <a:r>
-              <a:rPr sz="1350" b="1" i="0">
-                <a:solidFill>
-                  <a:srgbClr val="E54C09"/>
-                </a:solidFill>
-                <a:latin typeface="Segoe UI"/>
-              </a:rPr>
-              <a:t>▪ </a:t>
-            </a:r>
-            <a:r>
-              <a:rPr sz="1350" b="1" i="0">
-                <a:solidFill>
-                  <a:srgbClr val="222222"/>
-                </a:solidFill>
-                <a:latin typeface="Segoe UI"/>
-              </a:rPr>
-              <a:t>Becas con el nombre del fondo </a:t>
-            </a:r>
-            <a:r>
-              <a:rPr sz="1350" b="0" i="0">
-                <a:solidFill>
-                  <a:srgbClr val="222222"/>
-                </a:solidFill>
-                <a:latin typeface="Segoe UI"/>
-              </a:rPr>
-              <a:t>y certificado a su nombre, entregado en su propio evento.</a:t>
-            </a:r>
-          </a:p>
-          <a:p>
-            <a:pPr algn="l">
-              <a:lnSpc>
-                <a:spcPct val="112000"/>
-              </a:lnSpc>
-              <a:spcAft>
-                <a:spcPts val="600"/>
-              </a:spcAft>
-            </a:pPr>
-            <a:r>
-              <a:rPr sz="1350" b="1" i="0">
-                <a:solidFill>
-                  <a:srgbClr val="E54C09"/>
-                </a:solidFill>
-                <a:latin typeface="Segoe UI"/>
-              </a:rPr>
-              <a:t>▪ </a:t>
-            </a:r>
-            <a:r>
-              <a:rPr sz="1350" b="1" i="0">
-                <a:solidFill>
-                  <a:srgbClr val="222222"/>
-                </a:solidFill>
-                <a:latin typeface="Segoe UI"/>
-              </a:rPr>
-              <a:t>Reporte periódico </a:t>
-            </a:r>
-            <a:r>
-              <a:rPr sz="1350" b="0" i="0">
-                <a:solidFill>
-                  <a:srgbClr val="222222"/>
-                </a:solidFill>
-                <a:latin typeface="Segoe UI"/>
-              </a:rPr>
-              <a:t>de asistencia y cumplimiento de cada becado: el fondo ve quién cumple.</a:t>
-            </a:r>
-          </a:p>
-          <a:p>
-            <a:pPr algn="l">
-              <a:lnSpc>
-                <a:spcPct val="112000"/>
-              </a:lnSpc>
-              <a:spcAft>
-                <a:spcPts val="600"/>
-              </a:spcAft>
-            </a:pPr>
-            <a:r>
-              <a:rPr sz="1350" b="1" i="0">
-                <a:solidFill>
-                  <a:srgbClr val="E54C09"/>
-                </a:solidFill>
-                <a:latin typeface="Segoe UI"/>
-              </a:rPr>
-              <a:t>▪ </a:t>
-            </a:r>
-            <a:r>
-              <a:rPr sz="1350" b="1" i="0">
-                <a:solidFill>
-                  <a:srgbClr val="222222"/>
-                </a:solidFill>
-                <a:latin typeface="Segoe UI"/>
-              </a:rPr>
-              <a:t>Diagnóstico de nivel de inglés </a:t>
-            </a:r>
-            <a:r>
-              <a:rPr sz="1350" b="0" i="0">
-                <a:solidFill>
-                  <a:srgbClr val="222222"/>
-                </a:solidFill>
-                <a:latin typeface="Segoe UI"/>
-              </a:rPr>
-              <a:t>para hasta 10 afiliados, sin costo.</a:t>
-            </a:r>
-          </a:p>
-          <a:p>
-            <a:pPr algn="l">
-              <a:lnSpc>
-                <a:spcPct val="112000"/>
-              </a:lnSpc>
-              <a:spcAft>
-                <a:spcPts val="600"/>
-              </a:spcAft>
-            </a:pPr>
-            <a:r>
-              <a:rPr sz="1350" b="1" i="0">
-                <a:solidFill>
-                  <a:srgbClr val="E54C09"/>
-                </a:solidFill>
-                <a:latin typeface="Segoe UI"/>
-              </a:rPr>
-              <a:t>▪ </a:t>
-            </a:r>
-            <a:r>
-              <a:rPr sz="1350" b="1" i="0">
-                <a:solidFill>
-                  <a:srgbClr val="222222"/>
-                </a:solidFill>
-                <a:latin typeface="Segoe UI"/>
-              </a:rPr>
-              <a:t>Un afiliado que avanza se lo agradece al fondo. </a:t>
-            </a:r>
-            <a:r>
-              <a:rPr sz="1350" b="0" i="0">
-                <a:solidFill>
-                  <a:srgbClr val="222222"/>
-                </a:solidFill>
-                <a:latin typeface="Segoe UI"/>
-              </a:rPr>
-              <a:t>Y lo que el fondo hace por su hijo, no lo olvida.</a:t>
-            </a:r>
-          </a:p>
-        </p:txBody>
-      </p:sp>
-      <p:sp>
-        <p:nvSpPr>
-          <p:cNvPr id="11" name="Rectangle 10"/>
-          <p:cNvSpPr/>
-          <p:nvPr/>
-        </p:nvSpPr>
-        <p:spPr>
-          <a:xfrm>
-            <a:off x="6217920" y="1828800"/>
-            <a:ext cx="5486400" cy="411480"/>
-          </a:xfrm>
-          <a:prstGeom prst="rect">
-            <a:avLst/>
-          </a:prstGeom>
-          <a:solidFill>
-            <a:srgbClr val="1C1714"/>
-          </a:solidFill>
-          <a:ln>
-            <a:noFill/>
-          </a:ln>
-          <a:effectLst/>
-        </p:spPr>
-        <p:style>
-          <a:lnRef idx="1">
-            <a:schemeClr val="accent1"/>
-          </a:lnRef>
-          <a:fillRef idx="3">
-            <a:schemeClr val="accent1"/>
-          </a:fillRef>
-          <a:effectRef idx="2">
-            <a:schemeClr val="accent1"/>
-          </a:effectRef>
-          <a:fontRef idx="minor">
-            <a:schemeClr val="lt1"/>
-          </a:fontRef>
-        </p:style>
-        <p:txBody>
-          <a:bodyPr rtlCol="0" anchor="ctr"/>
-          <a:lstStyle/>
-          <a:p>
-            <a:pPr algn="ctr"/>
-          </a:p>
-        </p:txBody>
-      </p:sp>
-      <p:sp>
-        <p:nvSpPr>
-          <p:cNvPr id="12" name="TextBox 11"/>
-          <p:cNvSpPr txBox="1"/>
-          <p:nvPr/>
-        </p:nvSpPr>
-        <p:spPr>
-          <a:xfrm>
-            <a:off x="6355080" y="1828800"/>
-            <a:ext cx="5303520" cy="411480"/>
-          </a:xfrm>
-          <a:prstGeom prst="rect">
-            <a:avLst/>
-          </a:prstGeom>
-          <a:noFill/>
-        </p:spPr>
-        <p:txBody>
-          <a:bodyPr wrap="square" lIns="45720" rIns="45720" tIns="27432" bIns="27432" anchor="ctr">
-            <a:spAutoFit/>
-          </a:bodyPr>
-          <a:lstStyle/>
-          <a:p>
-            <a:pPr algn="l">
-              <a:lnSpc>
-                <a:spcPct val="115000"/>
-              </a:lnSpc>
-              <a:spcAft>
-                <a:spcPts val="0"/>
-              </a:spcAft>
-            </a:pPr>
-            <a:r>
-              <a:rPr sz="1300" b="1" i="0">
-                <a:solidFill>
-                  <a:srgbClr val="FBC900"/>
-                </a:solidFill>
-                <a:latin typeface="Segoe UI"/>
-              </a:rPr>
-              <a:t>EL AFILIADO Y SU FAMILIA</a:t>
-            </a:r>
-          </a:p>
-        </p:txBody>
-      </p:sp>
-      <p:sp>
-        <p:nvSpPr>
-          <p:cNvPr id="13" name="TextBox 12"/>
-          <p:cNvSpPr txBox="1"/>
-          <p:nvPr/>
-        </p:nvSpPr>
-        <p:spPr>
-          <a:xfrm>
-            <a:off x="6217920" y="2331720"/>
-            <a:ext cx="5486400" cy="3931920"/>
-          </a:xfrm>
-          <a:prstGeom prst="rect">
-            <a:avLst/>
-          </a:prstGeom>
-          <a:noFill/>
-        </p:spPr>
-        <p:txBody>
-          <a:bodyPr wrap="square" lIns="45720" rIns="45720" tIns="27432" bIns="27432" anchor="t">
-            <a:spAutoFit/>
-          </a:bodyPr>
-          <a:lstStyle/>
-          <a:p>
-            <a:pPr algn="l">
-              <a:lnSpc>
-                <a:spcPct val="112000"/>
-              </a:lnSpc>
-              <a:spcAft>
-                <a:spcPts val="600"/>
-              </a:spcAft>
-            </a:pPr>
-            <a:r>
-              <a:rPr sz="1350" b="1" i="0">
-                <a:solidFill>
-                  <a:srgbClr val="E54C09"/>
-                </a:solidFill>
-                <a:latin typeface="Segoe UI"/>
-              </a:rPr>
-              <a:t>▪ </a:t>
-            </a:r>
-            <a:r>
-              <a:rPr sz="1350" b="1" i="0">
-                <a:solidFill>
-                  <a:srgbClr val="222222"/>
-                </a:solidFill>
-                <a:latin typeface="Segoe UI"/>
-              </a:rPr>
-              <a:t>Paga la mitad por ser afiliado: </a:t>
-            </a:r>
-            <a:r>
-              <a:rPr sz="1350" b="0" i="0">
-                <a:solidFill>
-                  <a:srgbClr val="222222"/>
-                </a:solidFill>
-                <a:latin typeface="Segoe UI"/>
-              </a:rPr>
-              <a:t>beca del 45% sobre el programa completo, para él, su cónyuge y sus hijos desde los 12 años.</a:t>
-            </a:r>
-          </a:p>
-          <a:p>
-            <a:pPr algn="l">
-              <a:lnSpc>
-                <a:spcPct val="112000"/>
-              </a:lnSpc>
-              <a:spcAft>
-                <a:spcPts val="600"/>
-              </a:spcAft>
-            </a:pPr>
-            <a:r>
-              <a:rPr sz="1350" b="1" i="0">
-                <a:solidFill>
-                  <a:srgbClr val="E54C09"/>
-                </a:solidFill>
-                <a:latin typeface="Segoe UI"/>
-              </a:rPr>
-              <a:t>▪ </a:t>
-            </a:r>
-            <a:r>
-              <a:rPr sz="1350" b="1" i="0">
-                <a:solidFill>
-                  <a:srgbClr val="222222"/>
-                </a:solidFill>
-                <a:latin typeface="Segoe UI"/>
-              </a:rPr>
-              <a:t>Quien certifica su inglés gana cerca de un 26% más </a:t>
-            </a:r>
-            <a:r>
-              <a:rPr sz="1350" b="0" i="0">
-                <a:solidFill>
-                  <a:srgbClr val="222222"/>
-                </a:solidFill>
-                <a:latin typeface="Segoe UI"/>
-              </a:rPr>
-              <a:t>que quien hace el mismo trabajo sin él.¹</a:t>
-            </a:r>
-          </a:p>
-          <a:p>
-            <a:pPr algn="l">
-              <a:lnSpc>
-                <a:spcPct val="112000"/>
-              </a:lnSpc>
-              <a:spcAft>
-                <a:spcPts val="600"/>
-              </a:spcAft>
-            </a:pPr>
-            <a:r>
-              <a:rPr sz="1350" b="1" i="0">
-                <a:solidFill>
-                  <a:srgbClr val="E54C09"/>
-                </a:solidFill>
-                <a:latin typeface="Segoe UI"/>
-              </a:rPr>
-              <a:t>▪ </a:t>
-            </a:r>
-            <a:r>
-              <a:rPr sz="1350" b="1" i="0">
-                <a:solidFill>
-                  <a:srgbClr val="222222"/>
-                </a:solidFill>
-                <a:latin typeface="Segoe UI"/>
-              </a:rPr>
-              <a:t>Garantía por escrito: </a:t>
-            </a:r>
-            <a:r>
-              <a:rPr sz="1350" b="0" i="0">
-                <a:solidFill>
-                  <a:srgbClr val="222222"/>
-                </a:solidFill>
-                <a:latin typeface="Segoe UI"/>
-              </a:rPr>
-              <a:t>si cumple su parte y no avanza, recibe el 100% del nivel de vuelta.</a:t>
-            </a:r>
-          </a:p>
-          <a:p>
-            <a:pPr algn="l">
-              <a:lnSpc>
-                <a:spcPct val="112000"/>
-              </a:lnSpc>
-              <a:spcAft>
-                <a:spcPts val="600"/>
-              </a:spcAft>
-            </a:pPr>
-            <a:r>
-              <a:rPr sz="1350" b="1" i="0">
-                <a:solidFill>
-                  <a:srgbClr val="E54C09"/>
-                </a:solidFill>
-                <a:latin typeface="Segoe UI"/>
-              </a:rPr>
-              <a:t>▪ </a:t>
-            </a:r>
-            <a:r>
-              <a:rPr sz="1350" b="1" i="0">
-                <a:solidFill>
-                  <a:srgbClr val="222222"/>
-                </a:solidFill>
-                <a:latin typeface="Segoe UI"/>
-              </a:rPr>
-              <a:t>No entrena solo: </a:t>
-            </a:r>
-            <a:r>
-              <a:rPr sz="1350" b="0" i="0">
-                <a:solidFill>
-                  <a:srgbClr val="222222"/>
-                </a:solidFill>
-                <a:latin typeface="Segoe UI"/>
-              </a:rPr>
-              <a:t>un profesor que corrige ahí mismo y un coach que no lo deja rendirse.</a:t>
-            </a:r>
-          </a:p>
-          <a:p>
-            <a:pPr algn="l">
-              <a:lnSpc>
-                <a:spcPct val="112000"/>
-              </a:lnSpc>
-              <a:spcAft>
-                <a:spcPts val="600"/>
-              </a:spcAft>
-            </a:pPr>
-            <a:r>
-              <a:rPr sz="1350" b="1" i="0">
-                <a:solidFill>
-                  <a:srgbClr val="E54C09"/>
-                </a:solidFill>
-                <a:latin typeface="Segoe UI"/>
-              </a:rPr>
-              <a:t>▪ </a:t>
-            </a:r>
-            <a:r>
-              <a:rPr sz="1350" b="1" i="0">
-                <a:solidFill>
-                  <a:srgbClr val="222222"/>
-                </a:solidFill>
-                <a:latin typeface="Segoe UI"/>
-              </a:rPr>
-              <a:t>Sale con algo que mostrar: </a:t>
-            </a:r>
-            <a:r>
-              <a:rPr sz="1350" b="0" i="0">
-                <a:solidFill>
-                  <a:srgbClr val="222222"/>
-                </a:solidFill>
-                <a:latin typeface="Segoe UI"/>
-              </a:rPr>
-              <a:t>el video del primer día junto al del último, y una idea de negocio propia contada en inglés.</a:t>
-            </a:r>
-          </a:p>
-          <a:p>
-            <a:pPr algn="l">
-              <a:lnSpc>
-                <a:spcPct val="112000"/>
-              </a:lnSpc>
-              <a:spcAft>
-                <a:spcPts val="600"/>
-              </a:spcAft>
-            </a:pPr>
-            <a:r>
-              <a:rPr sz="1350" b="1" i="0">
-                <a:solidFill>
-                  <a:srgbClr val="E54C09"/>
-                </a:solidFill>
-                <a:latin typeface="Segoe UI"/>
-              </a:rPr>
-              <a:t>▪ </a:t>
-            </a:r>
-            <a:r>
-              <a:rPr sz="1350" b="1" i="0">
-                <a:solidFill>
-                  <a:srgbClr val="222222"/>
-                </a:solidFill>
-                <a:latin typeface="Segoe UI"/>
-              </a:rPr>
-              <a:t>Para sus hijos que salen del colegio: </a:t>
-            </a:r>
-            <a:r>
-              <a:rPr sz="1350" b="0" i="0">
-                <a:solidFill>
-                  <a:srgbClr val="222222"/>
-                </a:solidFill>
-                <a:latin typeface="Segoe UI"/>
-              </a:rPr>
-              <a:t>un año de inglés con disciplina abre la beca, el intercambio y la carrera que sí es. Solo 1 de cada 8 sale del colegio con un inglés que le sirva.²</a:t>
-            </a:r>
-          </a:p>
-        </p:txBody>
-      </p:sp>
-      <p:sp>
-        <p:nvSpPr>
-          <p:cNvPr id="14" name="TextBox 13"/>
-          <p:cNvSpPr txBox="1"/>
-          <p:nvPr/>
-        </p:nvSpPr>
-        <p:spPr>
-          <a:xfrm>
-            <a:off x="502920" y="6355080"/>
-            <a:ext cx="11155680" cy="365760"/>
-          </a:xfrm>
-          <a:prstGeom prst="rect">
-            <a:avLst/>
-          </a:prstGeom>
-          <a:noFill/>
-        </p:spPr>
-        <p:txBody>
-          <a:bodyPr wrap="square" lIns="45720" rIns="45720" tIns="27432" bIns="27432" anchor="ctr">
-            <a:spAutoFit/>
-          </a:bodyPr>
-          <a:lstStyle/>
-          <a:p>
-            <a:pPr algn="l">
-              <a:lnSpc>
-                <a:spcPct val="115000"/>
-              </a:lnSpc>
-              <a:spcAft>
-                <a:spcPts val="0"/>
-              </a:spcAft>
-            </a:pPr>
-            <a:r>
-              <a:rPr sz="1000" b="0" i="0">
-                <a:solidFill>
-                  <a:srgbClr val="5A5A5A"/>
-                </a:solidFill>
-                <a:latin typeface="Segoe UI"/>
-              </a:rPr>
-              <a:t>¹ DNP, Archivos de Economía, Bilingüismo laboral en Colombia. ² Pruebas Saber 11 de 2025, análisis del Observatorio de Realidades Educativas de la Universidad Icesi.</a:t>
+              <a:t>Línea de alianzas 316 768 8793 · Carrera 27 # 48-49, Sotomayor, Bucaramanga</a:t>
             </a:r>
           </a:p>
         </p:txBody>
@@ -8534,7 +6448,7 @@
         <p:spPr>
           <a:xfrm>
             <a:off x="502920" y="36576"/>
-            <a:ext cx="8229600" cy="329184"/>
+            <a:ext cx="5486400" cy="329184"/>
           </a:xfrm>
           <a:prstGeom prst="rect">
             <a:avLst/>
@@ -8562,7 +6476,7 @@
                 </a:solidFill>
                 <a:latin typeface="Segoe UI"/>
               </a:rPr>
-              <a:t>5 · LLAMADO A LA ACCIÓN</a:t>
+              <a:t>6 de 6</a:t>
             </a:r>
           </a:p>
         </p:txBody>
@@ -8575,8 +6489,8 @@
         </p:nvSpPr>
         <p:spPr>
           <a:xfrm>
-            <a:off x="9326880" y="36576"/>
-            <a:ext cx="2377440" cy="329184"/>
+            <a:off x="6583680" y="36576"/>
+            <a:ext cx="5120640" cy="329184"/>
           </a:xfrm>
           <a:prstGeom prst="rect">
             <a:avLst/>
@@ -8604,7 +6518,7 @@
                 </a:solidFill>
                 <a:latin typeface="Segoe UI"/>
               </a:rPr>
-              <a:t>HEIIU ENGLISH ACADEMY</a:t>
+              <a:t>HEIIU ENGLISH ACADEMY · PROGRAMA PARA FONDOS DE EMPLEADOS</a:t>
             </a:r>
           </a:p>
         </p:txBody>
@@ -8617,8 +6531,8 @@
         </p:nvSpPr>
         <p:spPr>
           <a:xfrm>
-            <a:off x="502920" y="548640"/>
-            <a:ext cx="11155680" cy="1051560"/>
+            <a:off x="548640" y="822960"/>
+            <a:ext cx="7498079" cy="2103120"/>
           </a:xfrm>
           <a:prstGeom prst="rect">
             <a:avLst/>
@@ -8640,13 +6554,22 @@
               </a:spcAft>
             </a:pPr>
             <a:r>
-              <a:rPr sz="3200" b="1" i="0">
-                <a:solidFill>
-                  <a:srgbClr val="FFFFFF"/>
+              <a:rPr sz="3600" b="1" i="0">
+                <a:solidFill>
+                  <a:srgbClr val="FBC900"/>
                 </a:solidFill>
                 <a:latin typeface="Constantia"/>
               </a:rPr>
-              <a:t>Firmemos el convenio esta semana y hablemos con sus afiliados</a:t>
+              <a:t>Un solo paso: </a:t>
+            </a:r>
+            <a:r>
+              <a:rPr sz="3600" b="1" i="0">
+                <a:solidFill>
+                  <a:srgbClr val="FFFFFF"/>
+                </a:solidFill>
+                <a:latin typeface="Constantia"/>
+              </a:rPr>
+              <a:t>firmar el convenio hoy y fijar la charla de 20 minutos con sus afiliados.</a:t>
             </a:r>
           </a:p>
         </p:txBody>
@@ -8659,7 +6582,7 @@
         </p:nvSpPr>
         <p:spPr>
           <a:xfrm>
-            <a:off x="548640" y="1627632"/>
+            <a:off x="594360" y="3017520"/>
             <a:ext cx="1463040" cy="38000"/>
           </a:xfrm>
           <a:prstGeom prst="rect">
@@ -8697,56 +6620,14 @@
       </p:sp>
       <p:sp>
         <p:nvSpPr>
-          <p:cNvPr id="8" name="TextBox 7"/>
-          <p:cNvSpPr txBox="1"/>
-          <p:nvPr/>
-        </p:nvSpPr>
-        <p:spPr>
-          <a:xfrm>
-            <a:off x="502920" y="1874519"/>
-            <a:ext cx="11155680" cy="822960"/>
-          </a:xfrm>
-          <a:prstGeom prst="rect">
-            <a:avLst/>
-          </a:prstGeom>
-          <a:noFill/>
-        </p:spPr>
-        <p:txBody>
-          <a:bodyPr wrap="square" lIns="45720" rIns="45720" tIns="27432" bIns="27432" anchor="t">
-            <a:spAutoFit/>
-          </a:bodyPr>
-          <a:lstStyle/>
-          <a:p>
-            <a:pPr algn="l">
-              <a:lnSpc>
-                <a:spcPct val="120000"/>
-              </a:lnSpc>
-              <a:spcAft>
-                <a:spcPts val="0"/>
-              </a:spcAft>
-            </a:pPr>
-            <a:r>
-              <a:rPr sz="1600" b="0" i="0">
-                <a:solidFill>
-                  <a:srgbClr val="FFF8E7"/>
-                </a:solidFill>
-                <a:latin typeface="Segoe UI"/>
-              </a:rPr>
-              <a:t>El convenio no tiene costo ni obligaciones económicas para el fondo. Se firma en una hoja, dura 12 meses, y lo único que le pedimos es 20 minutos con sus afiliados para contarles el programa y el Pacto antes de que decidan.</a:t>
-            </a:r>
-          </a:p>
-        </p:txBody>
-      </p:sp>
-      <p:sp>
-        <p:nvSpPr>
-          <p:cNvPr id="9" name="Rectangle 8"/>
+          <p:cNvPr id="8" name="Rectangle 7"/>
           <p:cNvSpPr/>
           <p:nvPr/>
         </p:nvSpPr>
         <p:spPr>
           <a:xfrm>
-            <a:off x="502920" y="2971800"/>
-            <a:ext cx="3611880" cy="2103120"/>
+            <a:off x="548640" y="3291840"/>
+            <a:ext cx="7498079" cy="1371600"/>
           </a:xfrm>
           <a:prstGeom prst="rect">
             <a:avLst/>
@@ -8783,14 +6664,14 @@
       </p:sp>
       <p:sp>
         <p:nvSpPr>
-          <p:cNvPr id="10" name="TextBox 9"/>
+          <p:cNvPr id="9" name="TextBox 8"/>
           <p:cNvSpPr txBox="1"/>
           <p:nvPr/>
         </p:nvSpPr>
         <p:spPr>
           <a:xfrm>
-            <a:off x="685800" y="3108960"/>
-            <a:ext cx="3246120" cy="548640"/>
+            <a:off x="731520" y="3337560"/>
+            <a:ext cx="7132320" cy="1280160"/>
           </a:xfrm>
           <a:prstGeom prst="rect">
             <a:avLst/>
@@ -8798,347 +6679,7 @@
           <a:noFill/>
         </p:spPr>
         <p:txBody>
-          <a:bodyPr wrap="square" lIns="45720" rIns="45720" tIns="27432" bIns="27432" anchor="t">
-            <a:spAutoFit/>
-          </a:bodyPr>
-          <a:lstStyle/>
-          <a:p>
-            <a:pPr algn="l">
-              <a:lnSpc>
-                <a:spcPct val="115000"/>
-              </a:lnSpc>
-              <a:spcAft>
-                <a:spcPts val="0"/>
-              </a:spcAft>
-            </a:pPr>
-            <a:r>
-              <a:rPr sz="1900" b="1" i="0">
-                <a:solidFill>
-                  <a:srgbClr val="FFFFFF"/>
-                </a:solidFill>
-                <a:latin typeface="Constantia"/>
-              </a:rPr>
-              <a:t>3 BECAS CON SU NOMBRE</a:t>
-            </a:r>
-          </a:p>
-        </p:txBody>
-      </p:sp>
-      <p:sp>
-        <p:nvSpPr>
-          <p:cNvPr id="11" name="TextBox 10"/>
-          <p:cNvSpPr txBox="1"/>
-          <p:nvPr/>
-        </p:nvSpPr>
-        <p:spPr>
-          <a:xfrm>
-            <a:off x="685800" y="3703320"/>
-            <a:ext cx="3246120" cy="1325880"/>
-          </a:xfrm>
-          <a:prstGeom prst="rect">
-            <a:avLst/>
-          </a:prstGeom>
-          <a:noFill/>
-        </p:spPr>
-        <p:txBody>
-          <a:bodyPr wrap="square" lIns="45720" rIns="45720" tIns="27432" bIns="27432" anchor="t">
-            <a:spAutoFit/>
-          </a:bodyPr>
-          <a:lstStyle/>
-          <a:p>
-            <a:pPr algn="l">
-              <a:lnSpc>
-                <a:spcPct val="115000"/>
-              </a:lnSpc>
-              <a:spcAft>
-                <a:spcPts val="0"/>
-              </a:spcAft>
-            </a:pPr>
-            <a:r>
-              <a:rPr sz="1300" b="0" i="0">
-                <a:solidFill>
-                  <a:srgbClr val="FFFFFF"/>
-                </a:solidFill>
-                <a:latin typeface="Segoe UI"/>
-              </a:rPr>
-              <a:t>Este trimestre, para los afiliados que el fondo elija. Si todos cumplen, suben a 5.</a:t>
-            </a:r>
-          </a:p>
-        </p:txBody>
-      </p:sp>
-      <p:sp>
-        <p:nvSpPr>
-          <p:cNvPr id="12" name="Rectangle 11"/>
-          <p:cNvSpPr/>
-          <p:nvPr/>
-        </p:nvSpPr>
-        <p:spPr>
-          <a:xfrm>
-            <a:off x="4270248" y="2971800"/>
-            <a:ext cx="3611880" cy="2103120"/>
-          </a:xfrm>
-          <a:prstGeom prst="rect">
-            <a:avLst/>
-          </a:prstGeom>
-          <a:solidFill>
-            <a:srgbClr val="FF4A00"/>
-          </a:solidFill>
-          <a:ln>
-            <a:noFill/>
-          </a:ln>
-          <a:effectLst/>
-        </p:spPr>
-        <p:style>
-          <a:lnRef idx="1">
-            <a:schemeClr val="accent1"/>
-          </a:lnRef>
-          <a:fillRef idx="3">
-            <a:schemeClr val="accent1"/>
-          </a:fillRef>
-          <a:effectRef idx="2">
-            <a:schemeClr val="accent1"/>
-          </a:effectRef>
-          <a:fontRef idx="minor">
-            <a:schemeClr val="lt1"/>
-          </a:fontRef>
-        </p:style>
-        <p:txBody>
-          <a:bodyPr rtlCol="0" anchor="ctr"/>
-          <a:lstStyle/>
-          <a:p>
-            <a:pPr algn="ctr"/>
-          </a:p>
-        </p:txBody>
-      </p:sp>
-      <p:sp>
-        <p:nvSpPr>
-          <p:cNvPr id="13" name="TextBox 12"/>
-          <p:cNvSpPr txBox="1"/>
-          <p:nvPr/>
-        </p:nvSpPr>
-        <p:spPr>
-          <a:xfrm>
-            <a:off x="4453128" y="3108960"/>
-            <a:ext cx="3246120" cy="548640"/>
-          </a:xfrm>
-          <a:prstGeom prst="rect">
-            <a:avLst/>
-          </a:prstGeom>
-          <a:noFill/>
-        </p:spPr>
-        <p:txBody>
-          <a:bodyPr wrap="square" lIns="45720" rIns="45720" tIns="27432" bIns="27432" anchor="t">
-            <a:spAutoFit/>
-          </a:bodyPr>
-          <a:lstStyle/>
-          <a:p>
-            <a:pPr algn="l">
-              <a:lnSpc>
-                <a:spcPct val="115000"/>
-              </a:lnSpc>
-              <a:spcAft>
-                <a:spcPts val="0"/>
-              </a:spcAft>
-            </a:pPr>
-            <a:r>
-              <a:rPr sz="1900" b="1" i="0">
-                <a:solidFill>
-                  <a:srgbClr val="FFFFFF"/>
-                </a:solidFill>
-                <a:latin typeface="Constantia"/>
-              </a:rPr>
-              <a:t>INICIO 3 DE NOVIEMBRE</a:t>
-            </a:r>
-          </a:p>
-        </p:txBody>
-      </p:sp>
-      <p:sp>
-        <p:nvSpPr>
-          <p:cNvPr id="14" name="TextBox 13"/>
-          <p:cNvSpPr txBox="1"/>
-          <p:nvPr/>
-        </p:nvSpPr>
-        <p:spPr>
-          <a:xfrm>
-            <a:off x="4453128" y="3703320"/>
-            <a:ext cx="3246120" cy="1325880"/>
-          </a:xfrm>
-          <a:prstGeom prst="rect">
-            <a:avLst/>
-          </a:prstGeom>
-          <a:noFill/>
-        </p:spPr>
-        <p:txBody>
-          <a:bodyPr wrap="square" lIns="45720" rIns="45720" tIns="27432" bIns="27432" anchor="t">
-            <a:spAutoFit/>
-          </a:bodyPr>
-          <a:lstStyle/>
-          <a:p>
-            <a:pPr algn="l">
-              <a:lnSpc>
-                <a:spcPct val="115000"/>
-              </a:lnSpc>
-              <a:spcAft>
-                <a:spcPts val="0"/>
-              </a:spcAft>
-            </a:pPr>
-            <a:r>
-              <a:rPr sz="1300" b="0" i="0">
-                <a:solidFill>
-                  <a:srgbClr val="FFFFFF"/>
-                </a:solidFill>
-                <a:latin typeface="Segoe UI"/>
-              </a:rPr>
-              <a:t>Grupos de máximo 16; el cupo se asigna por orden de matrícula con la inicial pagada. El grupo no para en diciembre: sigue hasta terminar el nivel, solo descansa los festivos.</a:t>
-            </a:r>
-          </a:p>
-        </p:txBody>
-      </p:sp>
-      <p:sp>
-        <p:nvSpPr>
-          <p:cNvPr id="15" name="Rectangle 14"/>
-          <p:cNvSpPr/>
-          <p:nvPr/>
-        </p:nvSpPr>
-        <p:spPr>
-          <a:xfrm>
-            <a:off x="8037576" y="2971800"/>
-            <a:ext cx="3611880" cy="2103120"/>
-          </a:xfrm>
-          <a:prstGeom prst="rect">
-            <a:avLst/>
-          </a:prstGeom>
-          <a:solidFill>
-            <a:srgbClr val="FF4A00"/>
-          </a:solidFill>
-          <a:ln>
-            <a:noFill/>
-          </a:ln>
-          <a:effectLst/>
-        </p:spPr>
-        <p:style>
-          <a:lnRef idx="1">
-            <a:schemeClr val="accent1"/>
-          </a:lnRef>
-          <a:fillRef idx="3">
-            <a:schemeClr val="accent1"/>
-          </a:fillRef>
-          <a:effectRef idx="2">
-            <a:schemeClr val="accent1"/>
-          </a:effectRef>
-          <a:fontRef idx="minor">
-            <a:schemeClr val="lt1"/>
-          </a:fontRef>
-        </p:style>
-        <p:txBody>
-          <a:bodyPr rtlCol="0" anchor="ctr"/>
-          <a:lstStyle/>
-          <a:p>
-            <a:pPr algn="ctr"/>
-          </a:p>
-        </p:txBody>
-      </p:sp>
-      <p:sp>
-        <p:nvSpPr>
-          <p:cNvPr id="16" name="TextBox 15"/>
-          <p:cNvSpPr txBox="1"/>
-          <p:nvPr/>
-        </p:nvSpPr>
-        <p:spPr>
-          <a:xfrm>
-            <a:off x="8220456" y="3108960"/>
-            <a:ext cx="3246120" cy="548640"/>
-          </a:xfrm>
-          <a:prstGeom prst="rect">
-            <a:avLst/>
-          </a:prstGeom>
-          <a:noFill/>
-        </p:spPr>
-        <p:txBody>
-          <a:bodyPr wrap="square" lIns="45720" rIns="45720" tIns="27432" bIns="27432" anchor="t">
-            <a:spAutoFit/>
-          </a:bodyPr>
-          <a:lstStyle/>
-          <a:p>
-            <a:pPr algn="l">
-              <a:lnSpc>
-                <a:spcPct val="115000"/>
-              </a:lnSpc>
-              <a:spcAft>
-                <a:spcPts val="0"/>
-              </a:spcAft>
-            </a:pPr>
-            <a:r>
-              <a:rPr sz="1900" b="1" i="0">
-                <a:solidFill>
-                  <a:srgbClr val="FFFFFF"/>
-                </a:solidFill>
-                <a:latin typeface="Constantia"/>
-              </a:rPr>
-              <a:t>10 PRUEBAS DE NIVEL</a:t>
-            </a:r>
-          </a:p>
-        </p:txBody>
-      </p:sp>
-      <p:sp>
-        <p:nvSpPr>
-          <p:cNvPr id="17" name="TextBox 16"/>
-          <p:cNvSpPr txBox="1"/>
-          <p:nvPr/>
-        </p:nvSpPr>
-        <p:spPr>
-          <a:xfrm>
-            <a:off x="8220456" y="3703320"/>
-            <a:ext cx="3246120" cy="1325880"/>
-          </a:xfrm>
-          <a:prstGeom prst="rect">
-            <a:avLst/>
-          </a:prstGeom>
-          <a:noFill/>
-        </p:spPr>
-        <p:txBody>
-          <a:bodyPr wrap="square" lIns="45720" rIns="45720" tIns="27432" bIns="27432" anchor="t">
-            <a:spAutoFit/>
-          </a:bodyPr>
-          <a:lstStyle/>
-          <a:p>
-            <a:pPr algn="l">
-              <a:lnSpc>
-                <a:spcPct val="115000"/>
-              </a:lnSpc>
-              <a:spcAft>
-                <a:spcPts val="0"/>
-              </a:spcAft>
-            </a:pPr>
-            <a:r>
-              <a:rPr sz="1300" b="0" i="0">
-                <a:solidFill>
-                  <a:srgbClr val="FFFFFF"/>
-                </a:solidFill>
-                <a:latin typeface="Segoe UI"/>
-              </a:rPr>
-              <a:t>Diagnóstico sin costo para hasta 10 afiliados, en su sede o en la nuestra, la semana siguiente a la firma.</a:t>
-            </a:r>
-          </a:p>
-        </p:txBody>
-      </p:sp>
-      <p:sp>
-        <p:nvSpPr>
-          <p:cNvPr id="18" name="TextBox 17"/>
-          <p:cNvSpPr txBox="1"/>
-          <p:nvPr/>
-        </p:nvSpPr>
-        <p:spPr>
-          <a:xfrm>
-            <a:off x="502920" y="5303520"/>
-            <a:ext cx="11155680" cy="914400"/>
-          </a:xfrm>
-          <a:prstGeom prst="rect">
-            <a:avLst/>
-          </a:prstGeom>
-          <a:noFill/>
-        </p:spPr>
-        <p:txBody>
-          <a:bodyPr wrap="square" lIns="45720" rIns="45720" tIns="27432" bIns="27432" anchor="t">
+          <a:bodyPr wrap="square" lIns="45720" rIns="45720" tIns="27432" bIns="27432" anchor="ctr">
             <a:spAutoFit/>
           </a:bodyPr>
           <a:lstStyle/>
@@ -9152,72 +6693,99 @@
               </a:spcAft>
             </a:pPr>
             <a:r>
-              <a:rPr sz="1500" b="1" i="0">
-                <a:solidFill>
-                  <a:srgbClr val="FBC900"/>
+              <a:rPr sz="2400" b="1" i="0">
+                <a:solidFill>
+                  <a:srgbClr val="FFFFFF"/>
                 </a:solidFill>
                 <a:latin typeface="Segoe UI"/>
               </a:rPr>
-              <a:t>Hoy: </a:t>
-            </a:r>
-            <a:r>
-              <a:rPr sz="1500" b="0" i="0">
-                <a:solidFill>
-                  <a:srgbClr val="FFFFFF"/>
+              <a:t>¿La charla la hacemos el </a:t>
+            </a:r>
+            <a:r>
+              <a:rPr sz="2400" b="1" i="0">
+                <a:solidFill>
+                  <a:srgbClr val="FBC900"/>
                 </a:solidFill>
                 <a:latin typeface="Segoe UI"/>
               </a:rPr>
-              <a:t>firma del convenio y fecha de la charla con los afiliados.  </a:t>
-            </a:r>
-            <a:r>
-              <a:rPr sz="1500" b="1" i="0">
-                <a:solidFill>
-                  <a:srgbClr val="FBC900"/>
+              <a:t>________</a:t>
+            </a:r>
+            <a:r>
+              <a:rPr sz="2400" b="1" i="0">
+                <a:solidFill>
+                  <a:srgbClr val="FFFFFF"/>
                 </a:solidFill>
                 <a:latin typeface="Segoe UI"/>
               </a:rPr>
-              <a:t>Esta semana: </a:t>
-            </a:r>
-            <a:r>
-              <a:rPr sz="1500" b="0" i="0">
-                <a:solidFill>
-                  <a:srgbClr val="FFFFFF"/>
+              <a:t> a las </a:t>
+            </a:r>
+            <a:r>
+              <a:rPr sz="2400" b="1" i="0">
+                <a:solidFill>
+                  <a:srgbClr val="FBC900"/>
                 </a:solidFill>
                 <a:latin typeface="Segoe UI"/>
               </a:rPr>
-              <a:t>diagnóstico de nivel.  </a:t>
-            </a:r>
-            <a:r>
-              <a:rPr sz="1500" b="1" i="0">
-                <a:solidFill>
-                  <a:srgbClr val="FBC900"/>
+              <a:t>_____</a:t>
+            </a:r>
+            <a:r>
+              <a:rPr sz="2400" b="1" i="0">
+                <a:solidFill>
+                  <a:srgbClr val="FFFFFF"/>
                 </a:solidFill>
                 <a:latin typeface="Segoe UI"/>
               </a:rPr>
-              <a:t>Antes del 3 de noviembre: </a:t>
-            </a:r>
-            <a:r>
-              <a:rPr sz="1500" b="0" i="0">
-                <a:solidFill>
-                  <a:srgbClr val="FFFFFF"/>
+              <a:t> o el </a:t>
+            </a:r>
+            <a:r>
+              <a:rPr sz="2400" b="1" i="0">
+                <a:solidFill>
+                  <a:srgbClr val="FBC900"/>
                 </a:solidFill>
                 <a:latin typeface="Segoe UI"/>
               </a:rPr>
-              <a:t>los primeros afiliados en su grupo.</a:t>
-            </a:r>
-          </a:p>
-        </p:txBody>
-      </p:sp>
-      <p:sp>
-        <p:nvSpPr>
-          <p:cNvPr id="19" name="TextBox 18"/>
+              <a:t>________</a:t>
+            </a:r>
+            <a:r>
+              <a:rPr sz="2400" b="1" i="0">
+                <a:solidFill>
+                  <a:srgbClr val="FFFFFF"/>
+                </a:solidFill>
+                <a:latin typeface="Segoe UI"/>
+              </a:rPr>
+              <a:t> a las </a:t>
+            </a:r>
+            <a:r>
+              <a:rPr sz="2400" b="1" i="0">
+                <a:solidFill>
+                  <a:srgbClr val="FBC900"/>
+                </a:solidFill>
+                <a:latin typeface="Segoe UI"/>
+              </a:rPr>
+              <a:t>_____</a:t>
+            </a:r>
+            <a:r>
+              <a:rPr sz="2400" b="1" i="0">
+                <a:solidFill>
+                  <a:srgbClr val="FFFFFF"/>
+                </a:solidFill>
+                <a:latin typeface="Segoe UI"/>
+              </a:rPr>
+              <a:t>?</a:t>
+            </a:r>
+          </a:p>
+        </p:txBody>
+      </p:sp>
+      <p:sp>
+        <p:nvSpPr>
+          <p:cNvPr id="10" name="TextBox 9"/>
           <p:cNvSpPr txBox="1"/>
           <p:nvPr/>
         </p:nvSpPr>
         <p:spPr>
           <a:xfrm>
-            <a:off x="502920" y="6355080"/>
-            <a:ext cx="11155680" cy="365760"/>
+            <a:off x="548640" y="4846320"/>
+            <a:ext cx="7498079" cy="1280160"/>
           </a:xfrm>
           <a:prstGeom prst="rect">
             <a:avLst/>
@@ -9225,140 +6793,62 @@
           <a:noFill/>
         </p:spPr>
         <p:txBody>
-          <a:bodyPr wrap="square" lIns="45720" rIns="45720" tIns="27432" bIns="27432" anchor="ctr">
+          <a:bodyPr wrap="square" lIns="45720" rIns="45720" tIns="27432" bIns="27432" anchor="t">
             <a:spAutoFit/>
           </a:bodyPr>
           <a:lstStyle/>
           <a:p>
             <a:pPr algn="l">
               <a:lnSpc>
-                <a:spcPct val="115000"/>
+                <a:spcPct val="120000"/>
               </a:lnSpc>
               <a:spcAft>
-                <a:spcPts val="0"/>
+                <a:spcPts val="600"/>
               </a:spcAft>
             </a:pPr>
             <a:r>
-              <a:rPr sz="1000" b="0" i="0">
-                <a:solidFill>
-                  <a:srgbClr val="C9B8A3"/>
+              <a:rPr sz="1800" b="1" i="0">
+                <a:solidFill>
+                  <a:srgbClr val="FBC900"/>
                 </a:solidFill>
                 <a:latin typeface="Segoe UI"/>
               </a:rPr>
-              <a:t>Línea de alianzas: 316 768 8793 · Carrera 27 # 48-49, Sotomayor, Bucaramanga · Instagram @Heiiu_english</a:t>
-            </a:r>
-          </a:p>
-        </p:txBody>
-      </p:sp>
-    </p:spTree>
-  </p:cSld>
-  <p:clrMapOvr>
-    <a:masterClrMapping/>
-  </p:clrMapOvr>
-</p:sld>
-</file>
-
-<file path=ppt/slides/slide7.xml><?xml version="1.0" encoding="utf-8"?>
-<p:sld xmlns:a="http://schemas.openxmlformats.org/drawingml/2006/main" xmlns:p="http://schemas.openxmlformats.org/presentationml/2006/main" xmlns:r="http://schemas.openxmlformats.org/officeDocument/2006/relationships">
-  <p:cSld>
-    <p:spTree>
-      <p:nvGrpSpPr>
-        <p:cNvPr id="1" name=""/>
-        <p:cNvGrpSpPr/>
-        <p:nvPr/>
-      </p:nvGrpSpPr>
-      <p:grpSpPr/>
-      <p:sp>
-        <p:nvSpPr>
-          <p:cNvPr id="2" name="Rectangle 1"/>
-          <p:cNvSpPr/>
-          <p:nvPr/>
-        </p:nvSpPr>
-        <p:spPr>
-          <a:xfrm>
-            <a:off x="0" y="0"/>
-            <a:ext cx="12191695" cy="6858000"/>
-          </a:xfrm>
-          <a:prstGeom prst="rect">
-            <a:avLst/>
-          </a:prstGeom>
-          <a:solidFill>
-            <a:srgbClr val="1C1714"/>
-          </a:solidFill>
-          <a:ln>
-            <a:noFill/>
-          </a:ln>
-          <a:effectLst/>
-        </p:spPr>
-        <p:style>
-          <a:lnRef idx="1">
-            <a:schemeClr val="accent1"/>
-          </a:lnRef>
-          <a:fillRef idx="3">
-            <a:schemeClr val="accent1"/>
-          </a:fillRef>
-          <a:effectRef idx="2">
-            <a:schemeClr val="accent1"/>
-          </a:effectRef>
-          <a:fontRef idx="minor">
-            <a:schemeClr val="lt1"/>
-          </a:fontRef>
-        </p:style>
-        <p:txBody>
-          <a:bodyPr rtlCol="0" anchor="ctr"/>
-          <a:lstStyle/>
-          <a:p>
-            <a:pPr algn="ctr"/>
-          </a:p>
-        </p:txBody>
-      </p:sp>
-      <p:sp>
-        <p:nvSpPr>
-          <p:cNvPr id="3" name="Rectangle 2"/>
-          <p:cNvSpPr/>
-          <p:nvPr/>
-        </p:nvSpPr>
-        <p:spPr>
-          <a:xfrm>
-            <a:off x="0" y="5577840"/>
-            <a:ext cx="12191695" cy="1280160"/>
-          </a:xfrm>
-          <a:prstGeom prst="rect">
-            <a:avLst/>
-          </a:prstGeom>
-          <a:solidFill>
-            <a:srgbClr val="FF4A00"/>
-          </a:solidFill>
-          <a:ln>
-            <a:noFill/>
-          </a:ln>
-          <a:effectLst/>
-        </p:spPr>
-        <p:style>
-          <a:lnRef idx="1">
-            <a:schemeClr val="accent1"/>
-          </a:lnRef>
-          <a:fillRef idx="3">
-            <a:schemeClr val="accent1"/>
-          </a:fillRef>
-          <a:effectRef idx="2">
-            <a:schemeClr val="accent1"/>
-          </a:effectRef>
-          <a:fontRef idx="minor">
-            <a:schemeClr val="lt1"/>
-          </a:fontRef>
-        </p:style>
-        <p:txBody>
-          <a:bodyPr rtlCol="0" anchor="ctr"/>
-          <a:lstStyle/>
-          <a:p>
-            <a:pPr algn="ctr"/>
+              <a:t>Si va a junta: </a:t>
+            </a:r>
+            <a:r>
+              <a:rPr sz="1800" b="0" i="0">
+                <a:solidFill>
+                  <a:srgbClr val="FFF8E7"/>
+                </a:solidFill>
+                <a:latin typeface="Segoe UI"/>
+              </a:rPr>
+              <a:t>¿cuándo se reúne? Le dejo el convenio listo para esa fecha.</a:t>
+            </a:r>
+          </a:p>
+          <a:p>
+            <a:pPr algn="l">
+              <a:lnSpc>
+                <a:spcPct val="120000"/>
+              </a:lnSpc>
+              <a:spcAft>
+                <a:spcPts val="600"/>
+              </a:spcAft>
+            </a:pPr>
+            <a:r>
+              <a:rPr sz="1500" b="0" i="0">
+                <a:solidFill>
+                  <a:srgbClr val="C9B8A3"/>
+                </a:solidFill>
+                <a:latin typeface="Segoe UI"/>
+              </a:rPr>
+              <a:t>Una hoja, sin costo, 12 meses, se termina con aviso de 30 días.</a:t>
+            </a:r>
           </a:p>
         </p:txBody>
       </p:sp>
       <p:pic>
         <p:nvPicPr>
-          <p:cNvPr id="4" name="Picture 3" descr="logo_heiiu_transparente.png"/>
+          <p:cNvPr id="11" name="Picture 10" descr="_convenio_entidad_miniatura.png"/>
           <p:cNvPicPr>
             <a:picLocks noChangeAspect="1"/>
           </p:cNvPicPr>
@@ -9372,8 +6862,8 @@
         </p:blipFill>
         <p:spPr>
           <a:xfrm>
-            <a:off x="457200" y="320040"/>
-            <a:ext cx="2113854" cy="1188720"/>
+            <a:off x="8595360" y="822960"/>
+            <a:ext cx="3956858" cy="5120640"/>
           </a:xfrm>
           <a:prstGeom prst="rect">
             <a:avLst/>
@@ -9382,14 +6872,14 @@
       </p:pic>
       <p:sp>
         <p:nvSpPr>
-          <p:cNvPr id="5" name="TextBox 4"/>
+          <p:cNvPr id="12" name="TextBox 11"/>
           <p:cNvSpPr txBox="1"/>
           <p:nvPr/>
         </p:nvSpPr>
         <p:spPr>
           <a:xfrm>
-            <a:off x="548640" y="1783080"/>
-            <a:ext cx="11155680" cy="1280160"/>
+            <a:off x="502920" y="6355080"/>
+            <a:ext cx="11155680" cy="365760"/>
           </a:xfrm>
           <a:prstGeom prst="rect">
             <a:avLst/>
@@ -9397,100 +6887,7 @@
           <a:noFill/>
         </p:spPr>
         <p:txBody>
-          <a:bodyPr wrap="square" lIns="45720" rIns="45720" tIns="27432" bIns="27432" anchor="t">
-            <a:spAutoFit/>
-          </a:bodyPr>
-          <a:lstStyle/>
-          <a:p>
-            <a:pPr algn="l">
-              <a:lnSpc>
-                <a:spcPct val="125000"/>
-              </a:lnSpc>
-              <a:spcAft>
-                <a:spcPts val="0"/>
-              </a:spcAft>
-            </a:pPr>
-            <a:r>
-              <a:rPr sz="1700" b="0" i="0">
-                <a:solidFill>
-                  <a:srgbClr val="FFF8E7"/>
-                </a:solidFill>
-                <a:latin typeface="Segoe UI"/>
-              </a:rPr>
-              <a:t>Nuestro objetivo es que su afiliado salga hablando inglés. Si no se logra, algo está mal: o él dejó de entrenar, o nosotros no estamos cumpliendo. Por eso lo firmamos.</a:t>
-            </a:r>
-          </a:p>
-        </p:txBody>
-      </p:sp>
-      <p:sp>
-        <p:nvSpPr>
-          <p:cNvPr id="6" name="TextBox 5"/>
-          <p:cNvSpPr txBox="1"/>
-          <p:nvPr/>
-        </p:nvSpPr>
-        <p:spPr>
-          <a:xfrm>
-            <a:off x="548640" y="3200400"/>
-            <a:ext cx="11155680" cy="1737360"/>
-          </a:xfrm>
-          <a:prstGeom prst="rect">
-            <a:avLst/>
-          </a:prstGeom>
-          <a:noFill/>
-        </p:spPr>
-        <p:txBody>
-          <a:bodyPr wrap="square" lIns="45720" rIns="45720" tIns="27432" bIns="27432" anchor="t">
-            <a:spAutoFit/>
-          </a:bodyPr>
-          <a:lstStyle/>
-          <a:p>
-            <a:pPr algn="l">
-              <a:lnSpc>
-                <a:spcPct val="105000"/>
-              </a:lnSpc>
-              <a:spcAft>
-                <a:spcPts val="0"/>
-              </a:spcAft>
-            </a:pPr>
-            <a:r>
-              <a:rPr sz="3800" b="1" i="0">
-                <a:solidFill>
-                  <a:srgbClr val="FFFFFF"/>
-                </a:solidFill>
-                <a:latin typeface="Constantia"/>
-              </a:rPr>
-              <a:t>¿Cuántos de sus afiliados quiere ver hablando inglés </a:t>
-            </a:r>
-            <a:r>
-              <a:rPr sz="3800" b="1" i="1">
-                <a:solidFill>
-                  <a:srgbClr val="FBC900"/>
-                </a:solidFill>
-                <a:latin typeface="Constantia"/>
-              </a:rPr>
-              <a:t>el próximo año?</a:t>
-            </a:r>
-          </a:p>
-        </p:txBody>
-      </p:sp>
-      <p:sp>
-        <p:nvSpPr>
-          <p:cNvPr id="7" name="TextBox 6"/>
-          <p:cNvSpPr txBox="1"/>
-          <p:nvPr/>
-        </p:nvSpPr>
-        <p:spPr>
-          <a:xfrm>
-            <a:off x="548640" y="4892040"/>
-            <a:ext cx="11155680" cy="548640"/>
-          </a:xfrm>
-          <a:prstGeom prst="rect">
-            <a:avLst/>
-          </a:prstGeom>
-          <a:noFill/>
-        </p:spPr>
-        <p:txBody>
-          <a:bodyPr wrap="square" lIns="45720" rIns="45720" tIns="27432" bIns="27432" anchor="t">
+          <a:bodyPr wrap="square" lIns="45720" rIns="45720" tIns="27432" bIns="27432" anchor="ctr">
             <a:spAutoFit/>
           </a:bodyPr>
           <a:lstStyle/>
@@ -9504,102 +6901,17 @@
               </a:spcAft>
             </a:pPr>
             <a:r>
-              <a:rPr sz="1800" b="0" i="0">
-                <a:solidFill>
-                  <a:srgbClr val="FFF8E7"/>
+              <a:rPr sz="1000" b="0" i="0">
+                <a:solidFill>
+                  <a:srgbClr val="C9B8A3"/>
                 </a:solidFill>
                 <a:latin typeface="Segoe UI"/>
               </a:rPr>
-              <a:t>Dígame cuántos, y hoy mismo definimos a quiénes.</a:t>
-            </a:r>
-          </a:p>
-        </p:txBody>
-      </p:sp>
-      <p:sp>
-        <p:nvSpPr>
-          <p:cNvPr id="8" name="TextBox 7"/>
-          <p:cNvSpPr txBox="1"/>
-          <p:nvPr/>
-        </p:nvSpPr>
-        <p:spPr>
-          <a:xfrm>
-            <a:off x="548640" y="5760720"/>
-            <a:ext cx="8229600" cy="914400"/>
-          </a:xfrm>
-          <a:prstGeom prst="rect">
-            <a:avLst/>
-          </a:prstGeom>
-          <a:noFill/>
-        </p:spPr>
-        <p:txBody>
-          <a:bodyPr wrap="square" lIns="45720" rIns="45720" tIns="27432" bIns="27432" anchor="ctr">
-            <a:spAutoFit/>
-          </a:bodyPr>
-          <a:lstStyle/>
-          <a:p>
-            <a:pPr algn="l">
-              <a:lnSpc>
-                <a:spcPct val="115000"/>
-              </a:lnSpc>
-              <a:spcAft>
-                <a:spcPts val="0"/>
-              </a:spcAft>
-            </a:pPr>
-            <a:r>
-              <a:rPr sz="1500" b="1" i="0">
-                <a:solidFill>
-                  <a:srgbClr val="FFFFFF"/>
-                </a:solidFill>
-                <a:latin typeface="Segoe UI"/>
-              </a:rPr>
-              <a:t>Heiiu English Academy · Global Teacher S.A.S.</a:t>
-            </a:r>
-          </a:p>
-          <a:p>
-            <a:pPr algn="l">
-              <a:lnSpc>
-                <a:spcPct val="115000"/>
-              </a:lnSpc>
-              <a:spcAft>
-                <a:spcPts val="0"/>
-              </a:spcAft>
-            </a:pPr>
-            <a:r>
-              <a:rPr sz="1300" b="0" i="0">
-                <a:solidFill>
-                  <a:srgbClr val="FFFFFF"/>
-                </a:solidFill>
-                <a:latin typeface="Segoe UI"/>
-              </a:rPr>
-              <a:t>Línea de alianzas 316 768 8793 · Carrera 27 # 48-49, Sotomayor, Bucaramanga · @Heiiu_english</a:t>
-            </a:r>
-          </a:p>
-        </p:txBody>
-      </p:sp>
-      <p:pic>
-        <p:nvPicPr>
-          <p:cNvPr id="9" name="Picture 8" descr="logo_heiiu_sobre_naranja.png"/>
-          <p:cNvPicPr>
-            <a:picLocks noChangeAspect="1"/>
-          </p:cNvPicPr>
-          <p:nvPr/>
-        </p:nvPicPr>
-        <p:blipFill>
-          <a:blip r:embed="rId3"/>
-          <a:stretch>
-            <a:fillRect/>
-          </a:stretch>
-        </p:blipFill>
-        <p:spPr>
-          <a:xfrm>
-            <a:off x="9966960" y="5715000"/>
-            <a:ext cx="1788646" cy="1005840"/>
-          </a:xfrm>
-          <a:prstGeom prst="rect">
-            <a:avLst/>
-          </a:prstGeom>
-        </p:spPr>
-      </p:pic>
+              <a:t>Heiiu English Academy · Global Teacher S.A.S. · Línea de alianzas 316 768 8793 · Carrera 27 # 48-49, Sotomayor, Bucaramanga · @Heiiu_english</a:t>
+            </a:r>
+          </a:p>
+        </p:txBody>
+      </p:sp>
     </p:spTree>
   </p:cSld>
   <p:clrMapOvr>
@@ -9926,4 +7238,324 @@
   </a:objectDefaults>
   <a:extraClrSchemeLst/>
 </a:theme>
+</file>
+
+<file path=ppt/theme/theme2.xml><?xml version="1.0" encoding="utf-8"?>
+<a:theme xmlns:a="http://schemas.openxmlformats.org/drawingml/2006/main" name="Office Theme">
+  <a:themeElements>
+    <a:clrScheme name="Office">
+      <a:dk1>
+        <a:sysClr val="windowText" lastClr="000000"/>
+      </a:dk1>
+      <a:lt1>
+        <a:sysClr val="window" lastClr="FFFFFF"/>
+      </a:lt1>
+      <a:dk2>
+        <a:srgbClr val="1F497D"/>
+      </a:dk2>
+      <a:lt2>
+        <a:srgbClr val="EEECE1"/>
+      </a:lt2>
+      <a:accent1>
+        <a:srgbClr val="4F81BD"/>
+      </a:accent1>
+      <a:accent2>
+        <a:srgbClr val="C0504D"/>
+      </a:accent2>
+      <a:accent3>
+        <a:srgbClr val="9BBB59"/>
+      </a:accent3>
+      <a:accent4>
+        <a:srgbClr val="8064A2"/>
+      </a:accent4>
+      <a:accent5>
+        <a:srgbClr val="4BACC6"/>
+      </a:accent5>
+      <a:accent6>
+        <a:srgbClr val="F79646"/>
+      </a:accent6>
+      <a:hlink>
+        <a:srgbClr val="0000FF"/>
+      </a:hlink>
+      <a:folHlink>
+        <a:srgbClr val="800080"/>
+      </a:folHlink>
+    </a:clrScheme>
+    <a:fontScheme name="Office">
+      <a:majorFont>
+        <a:latin typeface="Calibri"/>
+        <a:ea typeface=""/>
+        <a:cs typeface=""/>
+        <a:font script="Jpan" typeface="ＭＳ Ｐゴシック"/>
+        <a:font script="Hang" typeface="맑은 고딕"/>
+        <a:font script="Hans" typeface="宋体"/>
+        <a:font script="Hant" typeface="新細明體"/>
+        <a:font script="Arab" typeface="Times New Roman"/>
+        <a:font script="Hebr" typeface="Times New Roman"/>
+        <a:font script="Thai" typeface="Angsana New"/>
+        <a:font script="Ethi" typeface="Nyala"/>
+        <a:font script="Beng" typeface="Vrinda"/>
+        <a:font script="Gujr" typeface="Shruti"/>
+        <a:font script="Khmr" typeface="MoolBoran"/>
+        <a:font script="Knda" typeface="Tunga"/>
+        <a:font script="Guru" typeface="Raavi"/>
+        <a:font script="Cans" typeface="Euphemia"/>
+        <a:font script="Cher" typeface="Plantagenet Cherokee"/>
+        <a:font script="Yiii" typeface="Microsoft Yi Baiti"/>
+        <a:font script="Tibt" typeface="Microsoft Himalaya"/>
+        <a:font script="Thaa" typeface="MV Boli"/>
+        <a:font script="Deva" typeface="Mangal"/>
+        <a:font script="Telu" typeface="Gautami"/>
+        <a:font script="Taml" typeface="Latha"/>
+        <a:font script="Syrc" typeface="Estrangelo Edessa"/>
+        <a:font script="Orya" typeface="Kalinga"/>
+        <a:font script="Mlym" typeface="Kartika"/>
+        <a:font script="Laoo" typeface="DokChampa"/>
+        <a:font script="Sinh" typeface="Iskoola Pota"/>
+        <a:font script="Mong" typeface="Mongolian Baiti"/>
+        <a:font script="Viet" typeface="Times New Roman"/>
+        <a:font script="Uigh" typeface="Microsoft Uighur"/>
+        <a:font script="Geor" typeface="Sylfaen"/>
+      </a:majorFont>
+      <a:minorFont>
+        <a:latin typeface="Calibri"/>
+        <a:ea typeface=""/>
+        <a:cs typeface=""/>
+        <a:font script="Jpan" typeface="ＭＳ Ｐゴシック"/>
+        <a:font script="Hang" typeface="맑은 고딕"/>
+        <a:font script="Hans" typeface="宋体"/>
+        <a:font script="Hant" typeface="新細明體"/>
+        <a:font script="Arab" typeface="Arial"/>
+        <a:font script="Hebr" typeface="Arial"/>
+        <a:font script="Thai" typeface="Cordia New"/>
+        <a:font script="Ethi" typeface="Nyala"/>
+        <a:font script="Beng" typeface="Vrinda"/>
+        <a:font script="Gujr" typeface="Shruti"/>
+        <a:font script="Khmr" typeface="DaunPenh"/>
+        <a:font script="Knda" typeface="Tunga"/>
+        <a:font script="Guru" typeface="Raavi"/>
+        <a:font script="Cans" typeface="Euphemia"/>
+        <a:font script="Cher" typeface="Plantagenet Cherokee"/>
+        <a:font script="Yiii" typeface="Microsoft Yi Baiti"/>
+        <a:font script="Tibt" typeface="Microsoft Himalaya"/>
+        <a:font script="Thaa" typeface="MV Boli"/>
+        <a:font script="Deva" typeface="Mangal"/>
+        <a:font script="Telu" typeface="Gautami"/>
+        <a:font script="Taml" typeface="Latha"/>
+        <a:font script="Syrc" typeface="Estrangelo Edessa"/>
+        <a:font script="Orya" typeface="Kalinga"/>
+        <a:font script="Mlym" typeface="Kartika"/>
+        <a:font script="Laoo" typeface="DokChampa"/>
+        <a:font script="Sinh" typeface="Iskoola Pota"/>
+        <a:font script="Mong" typeface="Mongolian Baiti"/>
+        <a:font script="Viet" typeface="Arial"/>
+        <a:font script="Uigh" typeface="Microsoft Uighur"/>
+        <a:font script="Geor" typeface="Sylfaen"/>
+      </a:minorFont>
+    </a:fontScheme>
+    <a:fmtScheme name="Office">
+      <a:fillStyleLst>
+        <a:solidFill>
+          <a:schemeClr val="phClr"/>
+        </a:solidFill>
+        <a:gradFill rotWithShape="1">
+          <a:gsLst>
+            <a:gs pos="0">
+              <a:schemeClr val="phClr">
+                <a:tint val="50000"/>
+                <a:satMod val="300000"/>
+              </a:schemeClr>
+            </a:gs>
+            <a:gs pos="35000">
+              <a:schemeClr val="phClr">
+                <a:tint val="37000"/>
+                <a:satMod val="300000"/>
+              </a:schemeClr>
+            </a:gs>
+            <a:gs pos="100000">
+              <a:schemeClr val="phClr">
+                <a:tint val="15000"/>
+                <a:satMod val="350000"/>
+              </a:schemeClr>
+            </a:gs>
+          </a:gsLst>
+          <a:lin ang="16200000" scaled="1"/>
+        </a:gradFill>
+        <a:gradFill rotWithShape="1">
+          <a:gsLst>
+            <a:gs pos="0">
+              <a:schemeClr val="phClr">
+                <a:tint val="100000"/>
+                <a:shade val="100000"/>
+                <a:satMod val="130000"/>
+              </a:schemeClr>
+            </a:gs>
+            <a:gs pos="100000">
+              <a:schemeClr val="phClr">
+                <a:tint val="50000"/>
+                <a:shade val="100000"/>
+                <a:satMod val="350000"/>
+              </a:schemeClr>
+            </a:gs>
+          </a:gsLst>
+          <a:lin ang="16200000" scaled="0"/>
+        </a:gradFill>
+      </a:fillStyleLst>
+      <a:lnStyleLst>
+        <a:ln w="9525" cap="flat" cmpd="sng" algn="ctr">
+          <a:solidFill>
+            <a:schemeClr val="phClr">
+              <a:shade val="95000"/>
+              <a:satMod val="105000"/>
+            </a:schemeClr>
+          </a:solidFill>
+          <a:prstDash val="solid"/>
+        </a:ln>
+        <a:ln w="25400" cap="flat" cmpd="sng" algn="ctr">
+          <a:solidFill>
+            <a:schemeClr val="phClr"/>
+          </a:solidFill>
+          <a:prstDash val="solid"/>
+        </a:ln>
+        <a:ln w="38100" cap="flat" cmpd="sng" algn="ctr">
+          <a:solidFill>
+            <a:schemeClr val="phClr"/>
+          </a:solidFill>
+          <a:prstDash val="solid"/>
+        </a:ln>
+      </a:lnStyleLst>
+      <a:effectStyleLst>
+        <a:effectStyle>
+          <a:effectLst>
+            <a:outerShdw blurRad="40000" dist="20000" dir="5400000" rotWithShape="0">
+              <a:srgbClr val="000000">
+                <a:alpha val="38000"/>
+              </a:srgbClr>
+            </a:outerShdw>
+          </a:effectLst>
+        </a:effectStyle>
+        <a:effectStyle>
+          <a:effectLst>
+            <a:outerShdw blurRad="40000" dist="23000" dir="5400000" rotWithShape="0">
+              <a:srgbClr val="000000">
+                <a:alpha val="35000"/>
+              </a:srgbClr>
+            </a:outerShdw>
+          </a:effectLst>
+        </a:effectStyle>
+        <a:effectStyle>
+          <a:effectLst>
+            <a:outerShdw blurRad="40000" dist="23000" dir="5400000" rotWithShape="0">
+              <a:srgbClr val="000000">
+                <a:alpha val="35000"/>
+              </a:srgbClr>
+            </a:outerShdw>
+          </a:effectLst>
+          <a:scene3d>
+            <a:camera prst="orthographicFront">
+              <a:rot lat="0" lon="0" rev="0"/>
+            </a:camera>
+            <a:lightRig rig="threePt" dir="t">
+              <a:rot lat="0" lon="0" rev="1200000"/>
+            </a:lightRig>
+          </a:scene3d>
+          <a:sp3d>
+            <a:bevelT w="63500" h="25400"/>
+          </a:sp3d>
+        </a:effectStyle>
+      </a:effectStyleLst>
+      <a:bgFillStyleLst>
+        <a:solidFill>
+          <a:schemeClr val="phClr"/>
+        </a:solidFill>
+        <a:gradFill rotWithShape="1">
+          <a:gsLst>
+            <a:gs pos="0">
+              <a:schemeClr val="phClr">
+                <a:tint val="40000"/>
+                <a:satMod val="350000"/>
+              </a:schemeClr>
+            </a:gs>
+            <a:gs pos="40000">
+              <a:schemeClr val="phClr">
+                <a:tint val="45000"/>
+                <a:shade val="99000"/>
+                <a:satMod val="350000"/>
+              </a:schemeClr>
+            </a:gs>
+            <a:gs pos="100000">
+              <a:schemeClr val="phClr">
+                <a:shade val="20000"/>
+                <a:satMod val="255000"/>
+              </a:schemeClr>
+            </a:gs>
+          </a:gsLst>
+          <a:path path="circle">
+            <a:fillToRect l="50000" t="-80000" r="50000" b="180000"/>
+          </a:path>
+        </a:gradFill>
+        <a:gradFill rotWithShape="1">
+          <a:gsLst>
+            <a:gs pos="0">
+              <a:schemeClr val="phClr">
+                <a:tint val="80000"/>
+                <a:satMod val="300000"/>
+              </a:schemeClr>
+            </a:gs>
+            <a:gs pos="100000">
+              <a:schemeClr val="phClr">
+                <a:shade val="30000"/>
+                <a:satMod val="200000"/>
+              </a:schemeClr>
+            </a:gs>
+          </a:gsLst>
+          <a:path path="circle">
+            <a:fillToRect l="50000" t="50000" r="50000" b="50000"/>
+          </a:path>
+        </a:gradFill>
+      </a:bgFillStyleLst>
+    </a:fmtScheme>
+  </a:themeElements>
+  <a:objectDefaults>
+    <a:spDef>
+      <a:spPr/>
+      <a:bodyPr/>
+      <a:lstStyle/>
+      <a:style>
+        <a:lnRef idx="1">
+          <a:schemeClr val="accent1"/>
+        </a:lnRef>
+        <a:fillRef idx="3">
+          <a:schemeClr val="accent1"/>
+        </a:fillRef>
+        <a:effectRef idx="2">
+          <a:schemeClr val="accent1"/>
+        </a:effectRef>
+        <a:fontRef idx="minor">
+          <a:schemeClr val="lt1"/>
+        </a:fontRef>
+      </a:style>
+    </a:spDef>
+    <a:lnDef>
+      <a:spPr/>
+      <a:bodyPr/>
+      <a:lstStyle/>
+      <a:style>
+        <a:lnRef idx="2">
+          <a:schemeClr val="accent1"/>
+        </a:lnRef>
+        <a:fillRef idx="0">
+          <a:schemeClr val="accent1"/>
+        </a:fillRef>
+        <a:effectRef idx="1">
+          <a:schemeClr val="accent1"/>
+        </a:effectRef>
+        <a:fontRef idx="minor">
+          <a:schemeClr val="tx1"/>
+        </a:fontRef>
+      </a:style>
+    </a:lnDef>
+  </a:objectDefaults>
+  <a:extraClrSchemeLst/>
+</a:theme>
 </file>
--- a/recursos/comercial/B2B/PRESENTACION_FONDOS_EMPLEADOS_HEIIU.pptx
+++ b/recursos/comercial/B2B/PRESENTACION_FONDOS_EMPLEADOS_HEIIU.pptx
@@ -11,6 +11,7 @@
     <p:sldId id="259" r:id="rId11"/>
     <p:sldId id="260" r:id="rId12"/>
     <p:sldId id="261" r:id="rId13"/>
+    <p:sldId id="262" r:id="rId14"/>
   </p:sldIdLst>
   <p:sldSz cx="12191695" cy="6858000" type="screen4x3"/>
   <p:notesSz cx="6858000" cy="9144000"/>
@@ -512,12 +513,12 @@
           </a:p>
           <a:p>
             <a:r>
-              <a:t>QUÉ DECIR (20 segundos): "Vengo a proponerle un beneficio nuevo para sus afiliados que al fondo no le cuesta nada: beca del 45% en el programa de inglés de Heiiu, para ellos y sus familias, con el nombre del fondo. Somos una academia de Bucaramanga con licencia de la Secretaría de Educación desde 2012 y certificación ISO 9001 e ICONTEC; el detalle se lo dejo en una hoja. Le pido 10 minutos y salgo con una sola cosa: una fecha."</a:t>
-            </a:r>
-          </a:p>
-          <a:p>
-            <a:r>
-              <a:t>NO leer la diapositiva. NO hablar de la academia más de 20 segundos. NO entregar la hoja todavía.</a:t>
+              <a:t>QUÉ DECIR (20 segundos): "Vengo a proponerle un beneficio nuevo para sus afiliados que al fondo no le cuesta nada: beca del 45% en el programa de inglés de Heiiu, para ellos y sus familias, con el nombre del fondo. Le pido 10 minutos y salgo con una sola cosa: una fecha."</a:t>
+            </a:r>
+          </a:p>
+          <a:p>
+            <a:r>
+              <a:t>NO leer la diapositiva. NO entregar la hoja todavía.</a:t>
             </a:r>
           </a:p>
         </p:txBody>
@@ -587,12 +588,7 @@
           <a:lstStyle/>
           <a:p>
             <a:r>
-              <a:t>QUÉ DECIR: "Le hablo hoy y no el mes entrante por una razón: el grupo arranca el martes 3 de noviembre y no para en diciembre. Si firmamos esta semana, sus afiliados alcanzan a entrar. Si no, el siguiente grupo es [fecha real del siguiente grupo]."</a:t>
-            </a:r>
-          </a:p>
-          <a:p>
-            <a:r>
-              <a:t>Decir solo cupos reales: grupos de 16 y 3 becas con nombre por trimestre. Nunca "últimos cupos" si no es cierto.</a:t>
+              <a:t>QUÉ DECIR (máximo 20 segundos, no más): "Somos una academia de Bucaramanga con licencia de la Secretaría de Educación desde 2012 y certificación ISO 9001 e ICONTEC. Un solo programa, de A1 a B2, presencial. Y lo que ninguna otra firma: la garantía por escrito." El detalle está en la hoja que se deja al final. Hablar de la academia más de 2 minutos baja el cierre.</a:t>
             </a:r>
           </a:p>
         </p:txBody>
@@ -662,12 +658,12 @@
           <a:lstStyle/>
           <a:p>
             <a:r>
-              <a:t>QUÉ DECIR: "El afiliado paga $4.782.800 por el programa completo que vale $8.696.000. Es beca del Fondo de Becas Heiiu, no un descuento: la misma tarifa y la misma garantía para todos los que entran con carta del fondo. Si el fondo le presta o paga con cesantías, cuenta como contado y recibe la beca mayor. También hay plan a cuotas con la academia; los números están en la hoja."</a:t>
-            </a:r>
-          </a:p>
-          <a:p>
-            <a:r>
-              <a:t>NO mostrar ni recitar la tabla completa. Si pregunta por cuotas, horarios o profesores: "está en la hoja, se la dejo al final"; responde en una frase y vuelve al pedido.</a:t>
+              <a:t>QUÉ DECIR: "Es un programa completo, presencial, en nuestra sede, en la mañana o en la noche; con 8 afiliados o más, el horario lo pone el fondo. Un profesor por grupo de máximo 16, y evaluador externo al cierre de cada nivel. Y lo firmamos: si cumple y no avanza, devolvemos el nivel."</a:t>
+            </a:r>
+          </a:p>
+          <a:p>
+            <a:r>
+              <a:t>NO leer las seis casillas. Si pregunta por una, responde en una frase: el detalle está en la hoja.</a:t>
             </a:r>
           </a:p>
         </p:txBody>
@@ -737,12 +733,12 @@
           <a:lstStyle/>
           <a:p>
             <a:r>
-              <a:t>QUÉ DECIR: "Lo que más le preocupa a un gerente es quedar mal con sus afiliados. Por eso lo firmamos: si el afiliado cumple su parte (asistencia del 80%, tarea diaria en video, evaluaciones) y no avanza, le devolvemos el 100% del nivel. Y el fondo no asume nada: no paga, no cobra, y puede terminar el convenio con aviso de 30 días."</a:t>
-            </a:r>
-          </a:p>
-          <a:p>
-            <a:r>
-              <a:t>Si pregunta "¿y si nadie se inscribe?": "No le cuesta nada al fondo. Lo único que le pido es la charla de 20 minutos."</a:t>
+              <a:t>QUÉ DECIR: "El afiliado paga $4.782.800 por el programa que vale $8.696.000. Si el fondo le presta o paga con cesantías, es contado y recibe la beca mayor. Y tres afiliados por trimestre, los que el fondo elija, reciben la beca con el nombre del fondo aunque paguen a cuotas."</a:t>
+            </a:r>
+          </a:p>
+          <a:p>
+            <a:r>
+              <a:t>Si el fondo quiere pagar los cupos: Plan Empresa, $4.782.800 por cupo de 3 a 7, $4.350.000 de 8 a 15, $3.950.000 de 16 a 30 (está en la hoja). NO recitar la tabla. "Beca", nunca "descuento".</a:t>
             </a:r>
           </a:p>
         </p:txBody>
@@ -812,12 +808,12 @@
           <a:lstStyle/>
           <a:p>
             <a:r>
-              <a:t>QUÉ DECIR: "Para el fondo esto es un beneficio más en su portafolio, con su nombre, sin tocar presupuesto. Usted postula con una carta de una página y nosotros hacemos el resto. Cada trimestre recibe el reporte de asistencia y cumplimiento de sus becados; nunca notas. Y la semana siguiente a la firma hacemos el diagnóstico de nivel a 10 afiliados sin costo."</a:t>
-            </a:r>
-          </a:p>
-          <a:p>
-            <a:r>
-              <a:t>Si quiere datos de por qué inglés (26% más de ingreso, 1 de cada 8 sale del colegio con inglés): están en la hoja con fuente. Decir uno, no los seis.</a:t>
+              <a:t>QUÉ DECIR: "Para el fondo es un beneficio más en su portafolio, con su nombre y sin tocar presupuesto: usted postula con una carta y nosotros hacemos el resto. Para el afiliado es pagar la mitad, con garantía, y que lo acompañen hasta que hable." Decir UN dato, no todos.</a:t>
+            </a:r>
+          </a:p>
+          <a:p>
+            <a:r>
+              <a:t>Si pregunta "¿y si nadie se inscribe?": "No le cuesta nada al fondo. Lo único que le pido es la charla de 20 minutos."</a:t>
             </a:r>
           </a:p>
         </p:txBody>
@@ -887,22 +883,92 @@
           <a:lstStyle/>
           <a:p>
             <a:r>
-              <a:t>QUÉ DECIR: "Le pido una sola cosa: que firmemos hoy este convenio de una página y me dé fecha y hora para la charla de 20 minutos con sus afiliados. ¿La hacemos el [día] a las [hora] o el [día] a las [hora]?" Y SILENCIO. Que responda él.</a:t>
-            </a:r>
-          </a:p>
-          <a:p>
-            <a:r>
-              <a:t>Si debe ir a junta: "¿Cuándo se reúne la junta? Le dejo el convenio y la hoja listos para esa fecha, y lo llamo el día siguiente."</a:t>
-            </a:r>
-          </a:p>
-          <a:p>
-            <a:r>
-              <a:t>AL FINAL, no antes: entregar la hoja (HOJA_FONDOS_EMPLEADOS_HEIIU.pdf impresa) y el convenio en dos copias.</a:t>
-            </a:r>
-          </a:p>
-          <a:p>
-            <a:r>
-              <a:t>Lo que cuenta para el tablero: convenio firmado con fecha de charla, o fecha de junta anotada. Un "lo pienso" sin fecha no cuenta.</a:t>
+              <a:t>QUÉ DECIR: "Le hablo hoy y no el mes entrante por una razón: el grupo arranca el martes 3 de noviembre y no para en diciembre. Si firmamos esta semana, sus afiliados alcanzan a entrar. El convenio no tiene costo ni obligaciones, se firma en una hoja, dura 12 meses y se termina con aviso de 30 días. Lo único que le pido es 20 minutos con sus afiliados."</a:t>
+            </a:r>
+          </a:p>
+          <a:p>
+            <a:r>
+              <a:t>Decir solo cupos reales (grupos de 16, 3 becas con nombre). Nunca "últimos cupos" si no es cierto.</a:t>
+            </a:r>
+          </a:p>
+        </p:txBody>
+      </p:sp>
+      <p:sp>
+        <p:nvSpPr>
+          <p:cNvPr id="4" name="Slide Number Placeholder 3"/>
+          <p:cNvSpPr>
+            <a:spLocks noGrp="1"/>
+          </p:cNvSpPr>
+          <p:nvPr>
+            <p:ph type="sldNum" idx="5" sz="quarter"/>
+          </p:nvPr>
+        </p:nvSpPr>
+        <p:spPr/>
+      </p:sp>
+    </p:spTree>
+  </p:cSld>
+  <p:clrMapOvr>
+    <a:masterClrMapping/>
+  </p:clrMapOvr>
+</p:notes>
+</file>
+
+<file path=ppt/notesSlides/notesSlide7.xml><?xml version="1.0" encoding="utf-8"?>
+<p:notes xmlns:a="http://schemas.openxmlformats.org/drawingml/2006/main" xmlns:p="http://schemas.openxmlformats.org/presentationml/2006/main" xmlns:r="http://schemas.openxmlformats.org/officeDocument/2006/relationships">
+  <p:cSld>
+    <p:spTree>
+      <p:nvGrpSpPr>
+        <p:cNvPr id="1" name=""/>
+        <p:cNvGrpSpPr/>
+        <p:nvPr/>
+      </p:nvGrpSpPr>
+      <p:grpSpPr>
+        <a:xfrm>
+          <a:off x="0" y="0"/>
+          <a:ext cx="0" cy="0"/>
+          <a:chOff x="0" y="0"/>
+          <a:chExt cx="0" cy="0"/>
+        </a:xfrm>
+      </p:grpSpPr>
+      <p:sp>
+        <p:nvSpPr>
+          <p:cNvPr id="2" name="Slide Image Placeholder 1"/>
+          <p:cNvSpPr>
+            <a:spLocks noGrp="1"/>
+          </p:cNvSpPr>
+          <p:nvPr>
+            <p:ph type="sldImg" idx="2"/>
+          </p:nvPr>
+        </p:nvSpPr>
+        <p:spPr/>
+      </p:sp>
+      <p:sp>
+        <p:nvSpPr>
+          <p:cNvPr id="3" name="Notes Placeholder 2"/>
+          <p:cNvSpPr>
+            <a:spLocks noGrp="1"/>
+          </p:cNvSpPr>
+          <p:nvPr>
+            <p:ph type="body" idx="3" sz="quarter"/>
+          </p:nvPr>
+        </p:nvSpPr>
+        <p:spPr/>
+        <p:txBody>
+          <a:bodyPr/>
+          <a:lstStyle/>
+          <a:p>
+            <a:r>
+              <a:t>QUÉ DECIR: "¿Cuántos de sus afiliados quiere ver hablando inglés el próximo año? Dígame cuántos y hoy mismo definimos a quiénes. Le pido una sola cosa: que firmemos hoy este convenio de una página y me dé fecha y hora para la charla. ¿La hacemos el [día] a las [hora] o el [día] a las [hora]?" Y SILENCIO. Que responda él.</a:t>
+            </a:r>
+          </a:p>
+          <a:p>
+            <a:r>
+              <a:t>Si debe ir a junta: "¿Cuándo se reúne? Le dejo el convenio y la hoja listos para esa fecha, y lo llamo al día siguiente."</a:t>
+            </a:r>
+          </a:p>
+          <a:p>
+            <a:r>
+              <a:t>AL FINAL, no antes: entregar la hoja de detalle impresa y el convenio en dos copias. Lo que cuenta para el tablero: convenio firmado con fecha de charla, o fecha de junta anotada.</a:t>
             </a:r>
           </a:p>
         </p:txBody>
@@ -3923,7 +3989,7 @@
             <a:avLst/>
           </a:prstGeom>
           <a:solidFill>
-            <a:srgbClr val="1C1714"/>
+            <a:srgbClr val="0F1B2D"/>
           </a:solidFill>
           <a:ln>
             <a:noFill/>
@@ -3960,14 +4026,14 @@
         </p:nvSpPr>
         <p:spPr>
           <a:xfrm>
-            <a:off x="0" y="5577840"/>
-            <a:ext cx="12191695" cy="1280160"/>
+            <a:off x="8778240" y="0"/>
+            <a:ext cx="3413455" cy="6858000"/>
           </a:xfrm>
           <a:prstGeom prst="rect">
             <a:avLst/>
           </a:prstGeom>
           <a:solidFill>
-            <a:srgbClr val="FF4A00"/>
+            <a:srgbClr val="1B2A41"/>
           </a:solidFill>
           <a:ln>
             <a:noFill/>
@@ -3996,9 +4062,53 @@
           </a:p>
         </p:txBody>
       </p:sp>
+      <p:sp>
+        <p:nvSpPr>
+          <p:cNvPr id="4" name="Rectangle 3"/>
+          <p:cNvSpPr/>
+          <p:nvPr/>
+        </p:nvSpPr>
+        <p:spPr>
+          <a:xfrm>
+            <a:off x="8778240" y="0"/>
+            <a:ext cx="60000" cy="6858000"/>
+          </a:xfrm>
+          <a:prstGeom prst="rect">
+            <a:avLst/>
+          </a:prstGeom>
+          <a:solidFill>
+            <a:srgbClr val="E54C09"/>
+          </a:solidFill>
+          <a:ln>
+            <a:noFill/>
+          </a:ln>
+          <a:effectLst/>
+        </p:spPr>
+        <p:style>
+          <a:lnRef idx="1">
+            <a:schemeClr val="accent1"/>
+          </a:lnRef>
+          <a:fillRef idx="3">
+            <a:schemeClr val="accent1"/>
+          </a:fillRef>
+          <a:effectRef idx="2">
+            <a:schemeClr val="accent1"/>
+          </a:effectRef>
+          <a:fontRef idx="minor">
+            <a:schemeClr val="lt1"/>
+          </a:fontRef>
+        </p:style>
+        <p:txBody>
+          <a:bodyPr rtlCol="0" anchor="ctr"/>
+          <a:lstStyle/>
+          <a:p>
+            <a:pPr algn="ctr"/>
+          </a:p>
+        </p:txBody>
+      </p:sp>
       <p:pic>
         <p:nvPicPr>
-          <p:cNvPr id="4" name="Picture 3" descr="logo_heiiu_transparente.png"/>
+          <p:cNvPr id="5" name="Picture 4" descr="logo_heiiu_transparente.png"/>
           <p:cNvPicPr>
             <a:picLocks noChangeAspect="1"/>
           </p:cNvPicPr>
@@ -4012,8 +4122,8 @@
         </p:blipFill>
         <p:spPr>
           <a:xfrm>
-            <a:off x="457200" y="320040"/>
-            <a:ext cx="2439063" cy="1371600"/>
+            <a:off x="548640" y="502920"/>
+            <a:ext cx="2032552" cy="1143000"/>
           </a:xfrm>
           <a:prstGeom prst="rect">
             <a:avLst/>
@@ -4022,14 +4132,14 @@
       </p:pic>
       <p:sp>
         <p:nvSpPr>
-          <p:cNvPr id="5" name="TextBox 4"/>
+          <p:cNvPr id="6" name="TextBox 5"/>
           <p:cNvSpPr txBox="1"/>
           <p:nvPr/>
         </p:nvSpPr>
         <p:spPr>
           <a:xfrm>
-            <a:off x="548640" y="1874519"/>
-            <a:ext cx="10972800" cy="457200"/>
+            <a:off x="548640" y="2148840"/>
+            <a:ext cx="7863840" cy="320040"/>
           </a:xfrm>
           <a:prstGeom prst="rect">
             <a:avLst/>
@@ -4051,11 +4161,11 @@
               </a:spcAft>
             </a:pPr>
             <a:r>
-              <a:rPr sz="1400" b="1" i="0">
-                <a:solidFill>
-                  <a:srgbClr val="FBC900"/>
-                </a:solidFill>
-                <a:latin typeface="Segoe UI"/>
+              <a:rPr sz="1100" b="1" i="0" spc="250">
+                <a:solidFill>
+                  <a:srgbClr val="E54C09"/>
+                </a:solidFill>
+                <a:latin typeface="Lato"/>
               </a:rPr>
               <a:t>PROGRAMA DE INGLÉS PARA FONDOS DE EMPLEADOS</a:t>
             </a:r>
@@ -4064,14 +4174,14 @@
       </p:sp>
       <p:sp>
         <p:nvSpPr>
-          <p:cNvPr id="6" name="TextBox 5"/>
+          <p:cNvPr id="7" name="TextBox 6"/>
           <p:cNvSpPr txBox="1"/>
           <p:nvPr/>
         </p:nvSpPr>
         <p:spPr>
           <a:xfrm>
-            <a:off x="548640" y="2331720"/>
-            <a:ext cx="11155680" cy="2194560"/>
+            <a:off x="548640" y="2514600"/>
+            <a:ext cx="7955279" cy="2377440"/>
           </a:xfrm>
           <a:prstGeom prst="rect">
             <a:avLst/>
@@ -4086,27 +4196,27 @@
           <a:p>
             <a:pPr algn="l">
               <a:lnSpc>
-                <a:spcPct val="105000"/>
+                <a:spcPct val="106000"/>
               </a:lnSpc>
               <a:spcAft>
                 <a:spcPts val="0"/>
               </a:spcAft>
             </a:pPr>
             <a:r>
-              <a:rPr sz="4400" b="1" i="0">
-                <a:solidFill>
-                  <a:srgbClr val="FFFFFF"/>
-                </a:solidFill>
-                <a:latin typeface="Constantia"/>
+              <a:rPr sz="4200" b="1" i="0">
+                <a:solidFill>
+                  <a:srgbClr val="F6F1E9"/>
+                </a:solidFill>
+                <a:latin typeface="Lato Black"/>
               </a:rPr>
               <a:t>Beca del 45% en inglés para sus afiliados y sus familias, </a:t>
             </a:r>
             <a:r>
-              <a:rPr sz="4400" b="1" i="1">
+              <a:rPr sz="4200" b="1" i="0">
                 <a:solidFill>
                   <a:srgbClr val="FBC900"/>
                 </a:solidFill>
-                <a:latin typeface="Constantia"/>
+                <a:latin typeface="Lato Black"/>
               </a:rPr>
               <a:t>sin costo para el fondo.</a:t>
             </a:r>
@@ -4115,14 +4225,56 @@
       </p:sp>
       <p:sp>
         <p:nvSpPr>
-          <p:cNvPr id="7" name="TextBox 6"/>
+          <p:cNvPr id="8" name="TextBox 7"/>
           <p:cNvSpPr txBox="1"/>
           <p:nvPr/>
         </p:nvSpPr>
         <p:spPr>
           <a:xfrm>
-            <a:off x="548640" y="4617720"/>
-            <a:ext cx="10972800" cy="822960"/>
+            <a:off x="548640" y="4983480"/>
+            <a:ext cx="7680960" cy="731520"/>
+          </a:xfrm>
+          <a:prstGeom prst="rect">
+            <a:avLst/>
+          </a:prstGeom>
+          <a:noFill/>
+        </p:spPr>
+        <p:txBody>
+          <a:bodyPr wrap="square" lIns="45720" rIns="45720" tIns="27432" bIns="27432" anchor="t">
+            <a:spAutoFit/>
+          </a:bodyPr>
+          <a:lstStyle/>
+          <a:p>
+            <a:pPr algn="l">
+              <a:lnSpc>
+                <a:spcPct val="120000"/>
+              </a:lnSpc>
+              <a:spcAft>
+                <a:spcPts val="0"/>
+              </a:spcAft>
+            </a:pPr>
+            <a:r>
+              <a:rPr sz="1800" b="0" i="0">
+                <a:solidFill>
+                  <a:srgbClr val="C9D0DB"/>
+                </a:solidFill>
+                <a:latin typeface="Lato"/>
+              </a:rPr>
+              <a:t>Programa presencial de A1 a B2 en Bucaramanga, con garantía de aprendizaje por escrito.</a:t>
+            </a:r>
+          </a:p>
+        </p:txBody>
+      </p:sp>
+      <p:sp>
+        <p:nvSpPr>
+          <p:cNvPr id="9" name="TextBox 8"/>
+          <p:cNvSpPr txBox="1"/>
+          <p:nvPr/>
+        </p:nvSpPr>
+        <p:spPr>
+          <a:xfrm>
+            <a:off x="548640" y="5897880"/>
+            <a:ext cx="7680960" cy="548640"/>
           </a:xfrm>
           <a:prstGeom prst="rect">
             <a:avLst/>
@@ -4144,27 +4296,45 @@
               </a:spcAft>
             </a:pPr>
             <a:r>
-              <a:rPr sz="2000" b="0" i="0">
-                <a:solidFill>
-                  <a:srgbClr val="FFF8E7"/>
-                </a:solidFill>
-                <a:latin typeface="Segoe UI"/>
-              </a:rPr>
-              <a:t>Programa presencial de A1 a B2, en Bucaramanga. Con garantía de aprendizaje por escrito.</a:t>
-            </a:r>
-          </a:p>
-        </p:txBody>
-      </p:sp>
-      <p:sp>
-        <p:nvSpPr>
-          <p:cNvPr id="8" name="TextBox 7"/>
+              <a:rPr sz="1300" b="0" i="0">
+                <a:solidFill>
+                  <a:srgbClr val="7A828F"/>
+                </a:solidFill>
+                <a:latin typeface="Lato"/>
+              </a:rPr>
+              <a:t>Presentación para  </a:t>
+            </a:r>
+            <a:r>
+              <a:rPr sz="1300" b="0" i="0">
+                <a:solidFill>
+                  <a:srgbClr val="9AA4B5"/>
+                </a:solidFill>
+                <a:latin typeface="Lato"/>
+              </a:rPr>
+              <a:t>_______________________________</a:t>
+            </a:r>
+            <a:r>
+              <a:rPr sz="1300" b="0" i="0">
+                <a:solidFill>
+                  <a:srgbClr val="7A828F"/>
+                </a:solidFill>
+                <a:latin typeface="Lato"/>
+              </a:rPr>
+              <a:t>     Bucaramanga, octubre de 2026</a:t>
+            </a:r>
+          </a:p>
+        </p:txBody>
+      </p:sp>
+      <p:sp>
+        <p:nvSpPr>
+          <p:cNvPr id="10" name="TextBox 9"/>
           <p:cNvSpPr txBox="1"/>
           <p:nvPr/>
         </p:nvSpPr>
         <p:spPr>
           <a:xfrm>
-            <a:off x="548640" y="5760720"/>
-            <a:ext cx="7315200" cy="914400"/>
+            <a:off x="9098280" y="2103120"/>
+            <a:ext cx="2834640" cy="1097280"/>
           </a:xfrm>
           <a:prstGeom prst="rect">
             <a:avLst/>
@@ -4186,24 +4356,80 @@
               </a:spcAft>
             </a:pPr>
             <a:r>
-              <a:rPr sz="1500" b="1" i="0">
-                <a:solidFill>
-                  <a:srgbClr val="FFFFFF"/>
-                </a:solidFill>
-                <a:latin typeface="Segoe UI"/>
-              </a:rPr>
-              <a:t>Para: </a:t>
-            </a:r>
+              <a:rPr sz="9600" b="0" i="0">
+                <a:solidFill>
+                  <a:srgbClr val="FBC900"/>
+                </a:solidFill>
+                <a:latin typeface="Oswald"/>
+              </a:rPr>
+              <a:t>45%</a:t>
+            </a:r>
+          </a:p>
+        </p:txBody>
+      </p:sp>
+      <p:sp>
+        <p:nvSpPr>
+          <p:cNvPr id="11" name="TextBox 10"/>
+          <p:cNvSpPr txBox="1"/>
+          <p:nvPr/>
+        </p:nvSpPr>
+        <p:spPr>
+          <a:xfrm>
+            <a:off x="9098280" y="3246120"/>
+            <a:ext cx="2834640" cy="914400"/>
+          </a:xfrm>
+          <a:prstGeom prst="rect">
+            <a:avLst/>
+          </a:prstGeom>
+          <a:noFill/>
+        </p:spPr>
+        <p:txBody>
+          <a:bodyPr wrap="square" lIns="45720" rIns="45720" tIns="27432" bIns="27432" anchor="t">
+            <a:spAutoFit/>
+          </a:bodyPr>
+          <a:lstStyle/>
+          <a:p>
+            <a:pPr algn="l">
+              <a:lnSpc>
+                <a:spcPct val="120000"/>
+              </a:lnSpc>
+              <a:spcAft>
+                <a:spcPts val="0"/>
+              </a:spcAft>
+            </a:pPr>
             <a:r>
               <a:rPr sz="1500" b="0" i="0">
                 <a:solidFill>
-                  <a:srgbClr val="FFFFFF"/>
-                </a:solidFill>
-                <a:latin typeface="Segoe UI"/>
-              </a:rPr>
-              <a:t>________________________________</a:t>
-            </a:r>
-          </a:p>
+                  <a:srgbClr val="F6F1E9"/>
+                </a:solidFill>
+                <a:latin typeface="Lato"/>
+              </a:rPr>
+              <a:t>de beca sobre el programa completo, a nombre del fondo</a:t>
+            </a:r>
+          </a:p>
+        </p:txBody>
+      </p:sp>
+      <p:sp>
+        <p:nvSpPr>
+          <p:cNvPr id="12" name="TextBox 11"/>
+          <p:cNvSpPr txBox="1"/>
+          <p:nvPr/>
+        </p:nvSpPr>
+        <p:spPr>
+          <a:xfrm>
+            <a:off x="9098280" y="4343400"/>
+            <a:ext cx="2834640" cy="914400"/>
+          </a:xfrm>
+          <a:prstGeom prst="rect">
+            <a:avLst/>
+          </a:prstGeom>
+          <a:noFill/>
+        </p:spPr>
+        <p:txBody>
+          <a:bodyPr wrap="square" lIns="45720" rIns="45720" tIns="27432" bIns="27432" anchor="ctr">
+            <a:spAutoFit/>
+          </a:bodyPr>
+          <a:lstStyle/>
           <a:p>
             <a:pPr algn="l">
               <a:lnSpc>
@@ -4214,41 +4440,59 @@
               </a:spcAft>
             </a:pPr>
             <a:r>
-              <a:rPr sz="1300" b="0" i="0">
-                <a:solidFill>
-                  <a:srgbClr val="FFFFFF"/>
-                </a:solidFill>
-                <a:latin typeface="Segoe UI"/>
-              </a:rPr>
-              <a:t>Bucaramanga · octubre de 2026</a:t>
-            </a:r>
-          </a:p>
-        </p:txBody>
-      </p:sp>
-      <p:pic>
-        <p:nvPicPr>
-          <p:cNvPr id="9" name="Picture 8" descr="logo_heiiu_sobre_naranja.png"/>
-          <p:cNvPicPr>
-            <a:picLocks noChangeAspect="1"/>
-          </p:cNvPicPr>
-          <p:nvPr/>
-        </p:nvPicPr>
-        <p:blipFill>
-          <a:blip r:embed="rId3"/>
-          <a:stretch>
-            <a:fillRect/>
-          </a:stretch>
-        </p:blipFill>
-        <p:spPr>
-          <a:xfrm>
-            <a:off x="9966960" y="5715000"/>
-            <a:ext cx="1788646" cy="1005840"/>
-          </a:xfrm>
-          <a:prstGeom prst="rect">
-            <a:avLst/>
-          </a:prstGeom>
-        </p:spPr>
-      </p:pic>
+              <a:rPr sz="7200" b="0" i="0">
+                <a:solidFill>
+                  <a:srgbClr val="F6F1E9"/>
+                </a:solidFill>
+                <a:latin typeface="Oswald"/>
+              </a:rPr>
+              <a:t>$0</a:t>
+            </a:r>
+          </a:p>
+        </p:txBody>
+      </p:sp>
+      <p:sp>
+        <p:nvSpPr>
+          <p:cNvPr id="13" name="TextBox 12"/>
+          <p:cNvSpPr txBox="1"/>
+          <p:nvPr/>
+        </p:nvSpPr>
+        <p:spPr>
+          <a:xfrm>
+            <a:off x="9098280" y="5303520"/>
+            <a:ext cx="2834640" cy="822960"/>
+          </a:xfrm>
+          <a:prstGeom prst="rect">
+            <a:avLst/>
+          </a:prstGeom>
+          <a:noFill/>
+        </p:spPr>
+        <p:txBody>
+          <a:bodyPr wrap="square" lIns="45720" rIns="45720" tIns="27432" bIns="27432" anchor="t">
+            <a:spAutoFit/>
+          </a:bodyPr>
+          <a:lstStyle/>
+          <a:p>
+            <a:pPr algn="l">
+              <a:lnSpc>
+                <a:spcPct val="120000"/>
+              </a:lnSpc>
+              <a:spcAft>
+                <a:spcPts val="0"/>
+              </a:spcAft>
+            </a:pPr>
+            <a:r>
+              <a:rPr sz="1500" b="0" i="0">
+                <a:solidFill>
+                  <a:srgbClr val="F6F1E9"/>
+                </a:solidFill>
+                <a:latin typeface="Lato"/>
+              </a:rPr>
+              <a:t>de costo para el fondo. Una hoja, 12 meses.</a:t>
+            </a:r>
+          </a:p>
+        </p:txBody>
+      </p:sp>
     </p:spTree>
   </p:cSld>
   <p:clrMapOvr>
@@ -4282,7 +4526,7 @@
             <a:avLst/>
           </a:prstGeom>
           <a:solidFill>
-            <a:srgbClr val="FFF8E7"/>
+            <a:srgbClr val="F6F1E9"/>
           </a:solidFill>
           <a:ln>
             <a:noFill/>
@@ -4313,20 +4557,22 @@
       </p:sp>
       <p:sp>
         <p:nvSpPr>
-          <p:cNvPr id="3" name="Rectangle 2"/>
+          <p:cNvPr id="3" name="Rounded Rectangle 2"/>
           <p:cNvSpPr/>
           <p:nvPr/>
         </p:nvSpPr>
         <p:spPr>
           <a:xfrm>
-            <a:off x="0" y="0"/>
-            <a:ext cx="12191695" cy="384048"/>
-          </a:xfrm>
-          <a:prstGeom prst="rect">
-            <a:avLst/>
+            <a:off x="548640" y="384048"/>
+            <a:ext cx="1417320" cy="566928"/>
+          </a:xfrm>
+          <a:prstGeom prst="roundRect">
+            <a:avLst>
+              <a:gd name="adj" fmla="val 50000"/>
+            </a:avLst>
           </a:prstGeom>
           <a:solidFill>
-            <a:srgbClr val="FF4A00"/>
+            <a:srgbClr val="0F1B2D"/>
           </a:solidFill>
           <a:ln>
             <a:noFill/>
@@ -4355,16 +4601,40 @@
           </a:p>
         </p:txBody>
       </p:sp>
-      <p:sp>
-        <p:nvSpPr>
-          <p:cNvPr id="4" name="TextBox 3"/>
+      <p:pic>
+        <p:nvPicPr>
+          <p:cNvPr id="4" name="Picture 3" descr="logo_heiiu_transparente.png"/>
+          <p:cNvPicPr>
+            <a:picLocks noChangeAspect="1"/>
+          </p:cNvPicPr>
+          <p:nvPr/>
+        </p:nvPicPr>
+        <p:blipFill>
+          <a:blip r:embed="rId2"/>
+          <a:stretch>
+            <a:fillRect/>
+          </a:stretch>
+        </p:blipFill>
+        <p:spPr>
+          <a:xfrm>
+            <a:off x="731520" y="457200"/>
+            <a:ext cx="747979" cy="420624"/>
+          </a:xfrm>
+          <a:prstGeom prst="rect">
+            <a:avLst/>
+          </a:prstGeom>
+        </p:spPr>
+      </p:pic>
+      <p:sp>
+        <p:nvSpPr>
+          <p:cNvPr id="5" name="TextBox 4"/>
           <p:cNvSpPr txBox="1"/>
           <p:nvPr/>
         </p:nvSpPr>
         <p:spPr>
           <a:xfrm>
-            <a:off x="502920" y="36576"/>
-            <a:ext cx="5486400" cy="329184"/>
+            <a:off x="9418320" y="384048"/>
+            <a:ext cx="2286000" cy="566928"/>
           </a:xfrm>
           <a:prstGeom prst="rect">
             <a:avLst/>
@@ -4373,6 +4643,48 @@
         </p:spPr>
         <p:txBody>
           <a:bodyPr wrap="square" lIns="45720" rIns="45720" tIns="27432" bIns="27432" anchor="ctr">
+            <a:spAutoFit/>
+          </a:bodyPr>
+          <a:lstStyle/>
+          <a:p>
+            <a:pPr algn="r">
+              <a:lnSpc>
+                <a:spcPct val="115000"/>
+              </a:lnSpc>
+              <a:spcAft>
+                <a:spcPts val="0"/>
+              </a:spcAft>
+            </a:pPr>
+            <a:r>
+              <a:rPr sz="1200" b="0" i="0">
+                <a:solidFill>
+                  <a:srgbClr val="7A828F"/>
+                </a:solidFill>
+                <a:latin typeface="Oswald"/>
+              </a:rPr>
+              <a:t>2 / 7</a:t>
+            </a:r>
+          </a:p>
+        </p:txBody>
+      </p:sp>
+      <p:sp>
+        <p:nvSpPr>
+          <p:cNvPr id="6" name="TextBox 5"/>
+          <p:cNvSpPr txBox="1"/>
+          <p:nvPr/>
+        </p:nvSpPr>
+        <p:spPr>
+          <a:xfrm>
+            <a:off x="548640" y="1234440"/>
+            <a:ext cx="7315200" cy="320040"/>
+          </a:xfrm>
+          <a:prstGeom prst="rect">
+            <a:avLst/>
+          </a:prstGeom>
+          <a:noFill/>
+        </p:spPr>
+        <p:txBody>
+          <a:bodyPr wrap="square" lIns="45720" rIns="45720" tIns="27432" bIns="27432" anchor="t">
             <a:spAutoFit/>
           </a:bodyPr>
           <a:lstStyle/>
@@ -4386,27 +4698,27 @@
               </a:spcAft>
             </a:pPr>
             <a:r>
-              <a:rPr sz="1200" b="1" i="0">
-                <a:solidFill>
-                  <a:srgbClr val="FFFFFF"/>
-                </a:solidFill>
-                <a:latin typeface="Segoe UI"/>
-              </a:rPr>
-              <a:t>2 de 6</a:t>
-            </a:r>
-          </a:p>
-        </p:txBody>
-      </p:sp>
-      <p:sp>
-        <p:nvSpPr>
-          <p:cNvPr id="5" name="TextBox 4"/>
+              <a:rPr sz="1100" b="1" i="0" spc="250">
+                <a:solidFill>
+                  <a:srgbClr val="E54C09"/>
+                </a:solidFill>
+                <a:latin typeface="Lato"/>
+              </a:rPr>
+              <a:t>SOMOS HEIIU</a:t>
+            </a:r>
+          </a:p>
+        </p:txBody>
+      </p:sp>
+      <p:sp>
+        <p:nvSpPr>
+          <p:cNvPr id="7" name="TextBox 6"/>
           <p:cNvSpPr txBox="1"/>
           <p:nvPr/>
         </p:nvSpPr>
         <p:spPr>
           <a:xfrm>
-            <a:off x="6583680" y="36576"/>
-            <a:ext cx="5120640" cy="329184"/>
+            <a:off x="548640" y="1554480"/>
+            <a:ext cx="10058400" cy="1737360"/>
           </a:xfrm>
           <a:prstGeom prst="rect">
             <a:avLst/>
@@ -4414,114 +4726,28 @@
           <a:noFill/>
         </p:spPr>
         <p:txBody>
-          <a:bodyPr wrap="square" lIns="45720" rIns="45720" tIns="27432" bIns="27432" anchor="ctr">
+          <a:bodyPr wrap="square" lIns="45720" rIns="45720" tIns="27432" bIns="27432" anchor="t">
             <a:spAutoFit/>
           </a:bodyPr>
           <a:lstStyle/>
           <a:p>
-            <a:pPr algn="r">
+            <a:pPr algn="l">
               <a:lnSpc>
-                <a:spcPct val="115000"/>
+                <a:spcPct val="108000"/>
               </a:lnSpc>
               <a:spcAft>
                 <a:spcPts val="0"/>
               </a:spcAft>
             </a:pPr>
             <a:r>
-              <a:rPr sz="1100" b="1" i="0">
-                <a:solidFill>
-                  <a:srgbClr val="FFFFFF"/>
-                </a:solidFill>
-                <a:latin typeface="Segoe UI"/>
-              </a:rPr>
-              <a:t>HEIIU ENGLISH ACADEMY · PROGRAMA PARA FONDOS DE EMPLEADOS</a:t>
-            </a:r>
-          </a:p>
-        </p:txBody>
-      </p:sp>
-      <p:sp>
-        <p:nvSpPr>
-          <p:cNvPr id="6" name="TextBox 5"/>
-          <p:cNvSpPr txBox="1"/>
-          <p:nvPr/>
-        </p:nvSpPr>
-        <p:spPr>
-          <a:xfrm>
-            <a:off x="548640" y="914400"/>
-            <a:ext cx="7223760" cy="2377440"/>
-          </a:xfrm>
-          <a:prstGeom prst="rect">
-            <a:avLst/>
-          </a:prstGeom>
-          <a:noFill/>
-        </p:spPr>
-        <p:txBody>
-          <a:bodyPr wrap="square" lIns="45720" rIns="45720" tIns="27432" bIns="27432" anchor="ctr">
-            <a:spAutoFit/>
-          </a:bodyPr>
-          <a:lstStyle/>
-          <a:p>
-            <a:pPr algn="l">
-              <a:lnSpc>
-                <a:spcPct val="105000"/>
-              </a:lnSpc>
-              <a:spcAft>
-                <a:spcPts val="0"/>
-              </a:spcAft>
-            </a:pPr>
-            <a:r>
-              <a:rPr sz="4000" b="1" i="0">
-                <a:solidFill>
-                  <a:srgbClr val="E54C09"/>
-                </a:solidFill>
-                <a:latin typeface="Constantia"/>
-              </a:rPr>
-              <a:t>El próximo grupo arranca el martes 3 de noviembre.</a:t>
-            </a:r>
-          </a:p>
-        </p:txBody>
-      </p:sp>
-      <p:sp>
-        <p:nvSpPr>
-          <p:cNvPr id="7" name="Rectangle 6"/>
-          <p:cNvSpPr/>
-          <p:nvPr/>
-        </p:nvSpPr>
-        <p:spPr>
-          <a:xfrm>
-            <a:off x="594360" y="3429000"/>
-            <a:ext cx="1463040" cy="38000"/>
-          </a:xfrm>
-          <a:prstGeom prst="rect">
-            <a:avLst/>
-          </a:prstGeom>
-          <a:solidFill>
-            <a:srgbClr val="FBC900"/>
-          </a:solidFill>
-          <a:ln>
-            <a:noFill/>
-          </a:ln>
-          <a:effectLst/>
-        </p:spPr>
-        <p:style>
-          <a:lnRef idx="1">
-            <a:schemeClr val="accent1"/>
-          </a:lnRef>
-          <a:fillRef idx="3">
-            <a:schemeClr val="accent1"/>
-          </a:fillRef>
-          <a:effectRef idx="2">
-            <a:schemeClr val="accent1"/>
-          </a:effectRef>
-          <a:fontRef idx="minor">
-            <a:schemeClr val="lt1"/>
-          </a:fontRef>
-        </p:style>
-        <p:txBody>
-          <a:bodyPr rtlCol="0" anchor="ctr"/>
-          <a:lstStyle/>
-          <a:p>
-            <a:pPr algn="ctr"/>
+              <a:rPr sz="3400" b="1" i="0">
+                <a:solidFill>
+                  <a:srgbClr val="0F1B2D"/>
+                </a:solidFill>
+                <a:latin typeface="Lato Black"/>
+              </a:rPr>
+              <a:t>Una academia presencial de Bucaramanga que responde por el resultado.</a:t>
+            </a:r>
           </a:p>
         </p:txBody>
       </p:sp>
@@ -4533,243 +4759,8 @@
         </p:nvSpPr>
         <p:spPr>
           <a:xfrm>
-            <a:off x="548640" y="3657600"/>
-            <a:ext cx="7223760" cy="2468880"/>
-          </a:xfrm>
-          <a:prstGeom prst="rect">
-            <a:avLst/>
-          </a:prstGeom>
-          <a:noFill/>
-        </p:spPr>
-        <p:txBody>
-          <a:bodyPr wrap="square" lIns="45720" rIns="45720" tIns="27432" bIns="27432" anchor="t">
-            <a:spAutoFit/>
-          </a:bodyPr>
-          <a:lstStyle/>
-          <a:p>
-            <a:pPr algn="l">
-              <a:lnSpc>
-                <a:spcPct val="115000"/>
-              </a:lnSpc>
-              <a:spcAft>
-                <a:spcPts val="1000"/>
-              </a:spcAft>
-            </a:pPr>
-            <a:r>
-              <a:rPr sz="2200" b="1" i="0">
-                <a:solidFill>
-                  <a:srgbClr val="E54C09"/>
-                </a:solidFill>
-                <a:latin typeface="Segoe UI"/>
-              </a:rPr>
-              <a:t>▪ </a:t>
-            </a:r>
-            <a:r>
-              <a:rPr sz="2200" b="0" i="0">
-                <a:solidFill>
-                  <a:srgbClr val="222222"/>
-                </a:solidFill>
-                <a:latin typeface="Segoe UI"/>
-              </a:rPr>
-              <a:t>Quedan 8 días. El grupo no para en diciembre: sigue hasta terminar el nivel.</a:t>
-            </a:r>
-          </a:p>
-          <a:p>
-            <a:pPr algn="l">
-              <a:lnSpc>
-                <a:spcPct val="115000"/>
-              </a:lnSpc>
-              <a:spcAft>
-                <a:spcPts val="1000"/>
-              </a:spcAft>
-            </a:pPr>
-            <a:r>
-              <a:rPr sz="2200" b="1" i="0">
-                <a:solidFill>
-                  <a:srgbClr val="E54C09"/>
-                </a:solidFill>
-                <a:latin typeface="Segoe UI"/>
-              </a:rPr>
-              <a:t>▪ </a:t>
-            </a:r>
-            <a:r>
-              <a:rPr sz="2200" b="0" i="0">
-                <a:solidFill>
-                  <a:srgbClr val="222222"/>
-                </a:solidFill>
-                <a:latin typeface="Segoe UI"/>
-              </a:rPr>
-              <a:t>Este trimestre hay 3 becas con el nombre del fondo. Si todos cumplen, suben a 5.</a:t>
-            </a:r>
-          </a:p>
-          <a:p>
-            <a:pPr algn="l">
-              <a:lnSpc>
-                <a:spcPct val="115000"/>
-              </a:lnSpc>
-              <a:spcAft>
-                <a:spcPts val="1000"/>
-              </a:spcAft>
-            </a:pPr>
-            <a:r>
-              <a:rPr sz="2200" b="1" i="0">
-                <a:solidFill>
-                  <a:srgbClr val="E54C09"/>
-                </a:solidFill>
-                <a:latin typeface="Segoe UI"/>
-              </a:rPr>
-              <a:t>▪ </a:t>
-            </a:r>
-            <a:r>
-              <a:rPr sz="2200" b="0" i="0">
-                <a:solidFill>
-                  <a:srgbClr val="222222"/>
-                </a:solidFill>
-                <a:latin typeface="Segoe UI"/>
-              </a:rPr>
-              <a:t>Los afiliados que no entren ahora esperan al siguiente grupo.</a:t>
-            </a:r>
-          </a:p>
-        </p:txBody>
-      </p:sp>
-      <p:sp>
-        <p:nvSpPr>
-          <p:cNvPr id="9" name="Rectangle 8"/>
-          <p:cNvSpPr/>
-          <p:nvPr/>
-        </p:nvSpPr>
-        <p:spPr>
-          <a:xfrm>
-            <a:off x="8138160" y="914400"/>
-            <a:ext cx="3566160" cy="5120640"/>
-          </a:xfrm>
-          <a:prstGeom prst="rect">
-            <a:avLst/>
-          </a:prstGeom>
-          <a:solidFill>
-            <a:srgbClr val="FF4A00"/>
-          </a:solidFill>
-          <a:ln>
-            <a:noFill/>
-          </a:ln>
-          <a:effectLst/>
-        </p:spPr>
-        <p:style>
-          <a:lnRef idx="1">
-            <a:schemeClr val="accent1"/>
-          </a:lnRef>
-          <a:fillRef idx="3">
-            <a:schemeClr val="accent1"/>
-          </a:fillRef>
-          <a:effectRef idx="2">
-            <a:schemeClr val="accent1"/>
-          </a:effectRef>
-          <a:fontRef idx="minor">
-            <a:schemeClr val="lt1"/>
-          </a:fontRef>
-        </p:style>
-        <p:txBody>
-          <a:bodyPr rtlCol="0" anchor="ctr"/>
-          <a:lstStyle/>
-          <a:p>
-            <a:pPr algn="ctr"/>
-          </a:p>
-        </p:txBody>
-      </p:sp>
-      <p:sp>
-        <p:nvSpPr>
-          <p:cNvPr id="10" name="TextBox 9"/>
-          <p:cNvSpPr txBox="1"/>
-          <p:nvPr/>
-        </p:nvSpPr>
-        <p:spPr>
-          <a:xfrm>
-            <a:off x="8229600" y="1280160"/>
-            <a:ext cx="3383280" cy="2377440"/>
-          </a:xfrm>
-          <a:prstGeom prst="rect">
-            <a:avLst/>
-          </a:prstGeom>
-          <a:noFill/>
-        </p:spPr>
-        <p:txBody>
-          <a:bodyPr wrap="square" lIns="45720" rIns="45720" tIns="27432" bIns="27432" anchor="ctr">
-            <a:spAutoFit/>
-          </a:bodyPr>
-          <a:lstStyle/>
-          <a:p>
-            <a:pPr algn="ctr">
-              <a:lnSpc>
-                <a:spcPct val="100000"/>
-              </a:lnSpc>
-              <a:spcAft>
-                <a:spcPts val="0"/>
-              </a:spcAft>
-            </a:pPr>
-            <a:r>
-              <a:rPr sz="6400" b="1" i="0">
-                <a:solidFill>
-                  <a:srgbClr val="FFFFFF"/>
-                </a:solidFill>
-                <a:latin typeface="Constantia"/>
-              </a:rPr>
-              <a:t>3 NOV</a:t>
-            </a:r>
-          </a:p>
-        </p:txBody>
-      </p:sp>
-      <p:sp>
-        <p:nvSpPr>
-          <p:cNvPr id="11" name="TextBox 10"/>
-          <p:cNvSpPr txBox="1"/>
-          <p:nvPr/>
-        </p:nvSpPr>
-        <p:spPr>
-          <a:xfrm>
-            <a:off x="8321040" y="3749039"/>
-            <a:ext cx="3200400" cy="2103120"/>
-          </a:xfrm>
-          <a:prstGeom prst="rect">
-            <a:avLst/>
-          </a:prstGeom>
-          <a:noFill/>
-        </p:spPr>
-        <p:txBody>
-          <a:bodyPr wrap="square" lIns="45720" rIns="45720" tIns="27432" bIns="27432" anchor="t">
-            <a:spAutoFit/>
-          </a:bodyPr>
-          <a:lstStyle/>
-          <a:p>
-            <a:pPr algn="ctr">
-              <a:lnSpc>
-                <a:spcPct val="120000"/>
-              </a:lnSpc>
-              <a:spcAft>
-                <a:spcPts val="0"/>
-              </a:spcAft>
-            </a:pPr>
-            <a:r>
-              <a:rPr sz="1800" b="0" i="0">
-                <a:solidFill>
-                  <a:srgbClr val="FFFFFF"/>
-                </a:solidFill>
-                <a:latin typeface="Segoe UI"/>
-              </a:rPr>
-              <a:t>Martes 3 de noviembre de 2026. Grupos de máximo 16, por orden de matrícula con la inicial pagada.</a:t>
-            </a:r>
-          </a:p>
-        </p:txBody>
-      </p:sp>
-      <p:sp>
-        <p:nvSpPr>
-          <p:cNvPr id="12" name="TextBox 11"/>
-          <p:cNvSpPr txBox="1"/>
-          <p:nvPr/>
-        </p:nvSpPr>
-        <p:spPr>
-          <a:xfrm>
-            <a:off x="502920" y="6355080"/>
-            <a:ext cx="11155680" cy="365760"/>
+            <a:off x="548640" y="6400800"/>
+            <a:ext cx="11155680" cy="320040"/>
           </a:xfrm>
           <a:prstGeom prst="rect">
             <a:avLst/>
@@ -4791,13 +4782,717 @@
               </a:spcAft>
             </a:pPr>
             <a:r>
-              <a:rPr sz="1000" b="0" i="0">
-                <a:solidFill>
-                  <a:srgbClr val="5A5A5A"/>
-                </a:solidFill>
-                <a:latin typeface="Segoe UI"/>
-              </a:rPr>
-              <a:t>Línea de alianzas 316 768 8793 · Carrera 27 # 48-49, Sotomayor, Bucaramanga</a:t>
+              <a:rPr sz="950" b="0" i="0">
+                <a:solidFill>
+                  <a:srgbClr val="7A828F"/>
+                </a:solidFill>
+                <a:latin typeface="Lato"/>
+              </a:rPr>
+              <a:t>Heiiu English Academy · Línea de alianzas 316 768 8793 · Carrera 27 # 48-49, Sotomayor, Bucaramanga</a:t>
+            </a:r>
+          </a:p>
+        </p:txBody>
+      </p:sp>
+      <p:sp>
+        <p:nvSpPr>
+          <p:cNvPr id="9" name="Rounded Rectangle 8"/>
+          <p:cNvSpPr/>
+          <p:nvPr/>
+        </p:nvSpPr>
+        <p:spPr>
+          <a:xfrm>
+            <a:off x="548640" y="3429000"/>
+            <a:ext cx="2651760" cy="2606040"/>
+          </a:xfrm>
+          <a:prstGeom prst="roundRect">
+            <a:avLst>
+              <a:gd name="adj" fmla="val 6000"/>
+            </a:avLst>
+          </a:prstGeom>
+          <a:solidFill>
+            <a:srgbClr val="FFFFFF"/>
+          </a:solidFill>
+          <a:ln w="9525">
+            <a:solidFill>
+              <a:srgbClr val="E3DBCF"/>
+            </a:solidFill>
+          </a:ln>
+          <a:effectLst/>
+        </p:spPr>
+        <p:style>
+          <a:lnRef idx="1">
+            <a:schemeClr val="accent1"/>
+          </a:lnRef>
+          <a:fillRef idx="3">
+            <a:schemeClr val="accent1"/>
+          </a:fillRef>
+          <a:effectRef idx="2">
+            <a:schemeClr val="accent1"/>
+          </a:effectRef>
+          <a:fontRef idx="minor">
+            <a:schemeClr val="lt1"/>
+          </a:fontRef>
+        </p:style>
+        <p:txBody>
+          <a:bodyPr rtlCol="0" anchor="ctr"/>
+          <a:lstStyle/>
+          <a:p>
+            <a:pPr algn="ctr"/>
+          </a:p>
+        </p:txBody>
+      </p:sp>
+      <p:sp>
+        <p:nvSpPr>
+          <p:cNvPr id="10" name="Rectangle 9"/>
+          <p:cNvSpPr/>
+          <p:nvPr/>
+        </p:nvSpPr>
+        <p:spPr>
+          <a:xfrm>
+            <a:off x="822960" y="3703320"/>
+            <a:ext cx="457200" cy="30000"/>
+          </a:xfrm>
+          <a:prstGeom prst="rect">
+            <a:avLst/>
+          </a:prstGeom>
+          <a:solidFill>
+            <a:srgbClr val="E54C09"/>
+          </a:solidFill>
+          <a:ln>
+            <a:noFill/>
+          </a:ln>
+          <a:effectLst/>
+        </p:spPr>
+        <p:style>
+          <a:lnRef idx="1">
+            <a:schemeClr val="accent1"/>
+          </a:lnRef>
+          <a:fillRef idx="3">
+            <a:schemeClr val="accent1"/>
+          </a:fillRef>
+          <a:effectRef idx="2">
+            <a:schemeClr val="accent1"/>
+          </a:effectRef>
+          <a:fontRef idx="minor">
+            <a:schemeClr val="lt1"/>
+          </a:fontRef>
+        </p:style>
+        <p:txBody>
+          <a:bodyPr rtlCol="0" anchor="ctr"/>
+          <a:lstStyle/>
+          <a:p>
+            <a:pPr algn="ctr"/>
+          </a:p>
+        </p:txBody>
+      </p:sp>
+      <p:sp>
+        <p:nvSpPr>
+          <p:cNvPr id="11" name="TextBox 10"/>
+          <p:cNvSpPr txBox="1"/>
+          <p:nvPr/>
+        </p:nvSpPr>
+        <p:spPr>
+          <a:xfrm>
+            <a:off x="777240" y="3886200"/>
+            <a:ext cx="2286000" cy="914400"/>
+          </a:xfrm>
+          <a:prstGeom prst="rect">
+            <a:avLst/>
+          </a:prstGeom>
+          <a:noFill/>
+        </p:spPr>
+        <p:txBody>
+          <a:bodyPr wrap="square" lIns="45720" rIns="45720" tIns="27432" bIns="27432" anchor="ctr">
+            <a:spAutoFit/>
+          </a:bodyPr>
+          <a:lstStyle/>
+          <a:p>
+            <a:pPr algn="l">
+              <a:lnSpc>
+                <a:spcPct val="115000"/>
+              </a:lnSpc>
+              <a:spcAft>
+                <a:spcPts val="0"/>
+              </a:spcAft>
+            </a:pPr>
+            <a:r>
+              <a:rPr sz="4400" b="0" i="0">
+                <a:solidFill>
+                  <a:srgbClr val="0F1B2D"/>
+                </a:solidFill>
+                <a:latin typeface="Oswald"/>
+              </a:rPr>
+              <a:t>2012</a:t>
+            </a:r>
+          </a:p>
+        </p:txBody>
+      </p:sp>
+      <p:sp>
+        <p:nvSpPr>
+          <p:cNvPr id="12" name="TextBox 11"/>
+          <p:cNvSpPr txBox="1"/>
+          <p:nvPr/>
+        </p:nvSpPr>
+        <p:spPr>
+          <a:xfrm>
+            <a:off x="822960" y="4846320"/>
+            <a:ext cx="2148840" cy="1143000"/>
+          </a:xfrm>
+          <a:prstGeom prst="rect">
+            <a:avLst/>
+          </a:prstGeom>
+          <a:noFill/>
+        </p:spPr>
+        <p:txBody>
+          <a:bodyPr wrap="square" lIns="45720" rIns="45720" tIns="27432" bIns="27432" anchor="t">
+            <a:spAutoFit/>
+          </a:bodyPr>
+          <a:lstStyle/>
+          <a:p>
+            <a:pPr algn="l">
+              <a:lnSpc>
+                <a:spcPct val="120000"/>
+              </a:lnSpc>
+              <a:spcAft>
+                <a:spcPts val="0"/>
+              </a:spcAft>
+            </a:pPr>
+            <a:r>
+              <a:rPr sz="1300" b="0" i="0">
+                <a:solidFill>
+                  <a:srgbClr val="2B3445"/>
+                </a:solidFill>
+                <a:latin typeface="Lato"/>
+              </a:rPr>
+              <a:t>Licencia de la Secretaría de Educación desde 2012. Sede propia en Sotomayor.</a:t>
+            </a:r>
+          </a:p>
+        </p:txBody>
+      </p:sp>
+      <p:sp>
+        <p:nvSpPr>
+          <p:cNvPr id="13" name="Rounded Rectangle 12"/>
+          <p:cNvSpPr/>
+          <p:nvPr/>
+        </p:nvSpPr>
+        <p:spPr>
+          <a:xfrm>
+            <a:off x="3383280" y="3429000"/>
+            <a:ext cx="2651760" cy="2606040"/>
+          </a:xfrm>
+          <a:prstGeom prst="roundRect">
+            <a:avLst>
+              <a:gd name="adj" fmla="val 6000"/>
+            </a:avLst>
+          </a:prstGeom>
+          <a:solidFill>
+            <a:srgbClr val="FFFFFF"/>
+          </a:solidFill>
+          <a:ln w="9525">
+            <a:solidFill>
+              <a:srgbClr val="E3DBCF"/>
+            </a:solidFill>
+          </a:ln>
+          <a:effectLst/>
+        </p:spPr>
+        <p:style>
+          <a:lnRef idx="1">
+            <a:schemeClr val="accent1"/>
+          </a:lnRef>
+          <a:fillRef idx="3">
+            <a:schemeClr val="accent1"/>
+          </a:fillRef>
+          <a:effectRef idx="2">
+            <a:schemeClr val="accent1"/>
+          </a:effectRef>
+          <a:fontRef idx="minor">
+            <a:schemeClr val="lt1"/>
+          </a:fontRef>
+        </p:style>
+        <p:txBody>
+          <a:bodyPr rtlCol="0" anchor="ctr"/>
+          <a:lstStyle/>
+          <a:p>
+            <a:pPr algn="ctr"/>
+          </a:p>
+        </p:txBody>
+      </p:sp>
+      <p:sp>
+        <p:nvSpPr>
+          <p:cNvPr id="14" name="Rectangle 13"/>
+          <p:cNvSpPr/>
+          <p:nvPr/>
+        </p:nvSpPr>
+        <p:spPr>
+          <a:xfrm>
+            <a:off x="3657600" y="3703320"/>
+            <a:ext cx="457200" cy="30000"/>
+          </a:xfrm>
+          <a:prstGeom prst="rect">
+            <a:avLst/>
+          </a:prstGeom>
+          <a:solidFill>
+            <a:srgbClr val="E54C09"/>
+          </a:solidFill>
+          <a:ln>
+            <a:noFill/>
+          </a:ln>
+          <a:effectLst/>
+        </p:spPr>
+        <p:style>
+          <a:lnRef idx="1">
+            <a:schemeClr val="accent1"/>
+          </a:lnRef>
+          <a:fillRef idx="3">
+            <a:schemeClr val="accent1"/>
+          </a:fillRef>
+          <a:effectRef idx="2">
+            <a:schemeClr val="accent1"/>
+          </a:effectRef>
+          <a:fontRef idx="minor">
+            <a:schemeClr val="lt1"/>
+          </a:fontRef>
+        </p:style>
+        <p:txBody>
+          <a:bodyPr rtlCol="0" anchor="ctr"/>
+          <a:lstStyle/>
+          <a:p>
+            <a:pPr algn="ctr"/>
+          </a:p>
+        </p:txBody>
+      </p:sp>
+      <p:sp>
+        <p:nvSpPr>
+          <p:cNvPr id="15" name="TextBox 14"/>
+          <p:cNvSpPr txBox="1"/>
+          <p:nvPr/>
+        </p:nvSpPr>
+        <p:spPr>
+          <a:xfrm>
+            <a:off x="3611880" y="3886200"/>
+            <a:ext cx="2286000" cy="914400"/>
+          </a:xfrm>
+          <a:prstGeom prst="rect">
+            <a:avLst/>
+          </a:prstGeom>
+          <a:noFill/>
+        </p:spPr>
+        <p:txBody>
+          <a:bodyPr wrap="square" lIns="45720" rIns="45720" tIns="27432" bIns="27432" anchor="ctr">
+            <a:spAutoFit/>
+          </a:bodyPr>
+          <a:lstStyle/>
+          <a:p>
+            <a:pPr algn="l">
+              <a:lnSpc>
+                <a:spcPct val="115000"/>
+              </a:lnSpc>
+              <a:spcAft>
+                <a:spcPts val="0"/>
+              </a:spcAft>
+            </a:pPr>
+            <a:r>
+              <a:rPr sz="4400" b="0" i="0">
+                <a:solidFill>
+                  <a:srgbClr val="0F1B2D"/>
+                </a:solidFill>
+                <a:latin typeface="Oswald"/>
+              </a:rPr>
+              <a:t>ISO 9001</a:t>
+            </a:r>
+          </a:p>
+        </p:txBody>
+      </p:sp>
+      <p:sp>
+        <p:nvSpPr>
+          <p:cNvPr id="16" name="TextBox 15"/>
+          <p:cNvSpPr txBox="1"/>
+          <p:nvPr/>
+        </p:nvSpPr>
+        <p:spPr>
+          <a:xfrm>
+            <a:off x="3657600" y="4846320"/>
+            <a:ext cx="2148840" cy="1143000"/>
+          </a:xfrm>
+          <a:prstGeom prst="rect">
+            <a:avLst/>
+          </a:prstGeom>
+          <a:noFill/>
+        </p:spPr>
+        <p:txBody>
+          <a:bodyPr wrap="square" lIns="45720" rIns="45720" tIns="27432" bIns="27432" anchor="t">
+            <a:spAutoFit/>
+          </a:bodyPr>
+          <a:lstStyle/>
+          <a:p>
+            <a:pPr algn="l">
+              <a:lnSpc>
+                <a:spcPct val="120000"/>
+              </a:lnSpc>
+              <a:spcAft>
+                <a:spcPts val="0"/>
+              </a:spcAft>
+            </a:pPr>
+            <a:r>
+              <a:rPr sz="1300" b="0" i="0">
+                <a:solidFill>
+                  <a:srgbClr val="2B3445"/>
+                </a:solidFill>
+                <a:latin typeface="Lato"/>
+              </a:rPr>
+              <a:t>Certificación de calidad ISO 9001 e ICONTEC.</a:t>
+            </a:r>
+          </a:p>
+        </p:txBody>
+      </p:sp>
+      <p:sp>
+        <p:nvSpPr>
+          <p:cNvPr id="17" name="Rounded Rectangle 16"/>
+          <p:cNvSpPr/>
+          <p:nvPr/>
+        </p:nvSpPr>
+        <p:spPr>
+          <a:xfrm>
+            <a:off x="6217920" y="3429000"/>
+            <a:ext cx="2651760" cy="2606040"/>
+          </a:xfrm>
+          <a:prstGeom prst="roundRect">
+            <a:avLst>
+              <a:gd name="adj" fmla="val 6000"/>
+            </a:avLst>
+          </a:prstGeom>
+          <a:solidFill>
+            <a:srgbClr val="FFFFFF"/>
+          </a:solidFill>
+          <a:ln w="9525">
+            <a:solidFill>
+              <a:srgbClr val="E3DBCF"/>
+            </a:solidFill>
+          </a:ln>
+          <a:effectLst/>
+        </p:spPr>
+        <p:style>
+          <a:lnRef idx="1">
+            <a:schemeClr val="accent1"/>
+          </a:lnRef>
+          <a:fillRef idx="3">
+            <a:schemeClr val="accent1"/>
+          </a:fillRef>
+          <a:effectRef idx="2">
+            <a:schemeClr val="accent1"/>
+          </a:effectRef>
+          <a:fontRef idx="minor">
+            <a:schemeClr val="lt1"/>
+          </a:fontRef>
+        </p:style>
+        <p:txBody>
+          <a:bodyPr rtlCol="0" anchor="ctr"/>
+          <a:lstStyle/>
+          <a:p>
+            <a:pPr algn="ctr"/>
+          </a:p>
+        </p:txBody>
+      </p:sp>
+      <p:sp>
+        <p:nvSpPr>
+          <p:cNvPr id="18" name="Rectangle 17"/>
+          <p:cNvSpPr/>
+          <p:nvPr/>
+        </p:nvSpPr>
+        <p:spPr>
+          <a:xfrm>
+            <a:off x="6492240" y="3703320"/>
+            <a:ext cx="457200" cy="30000"/>
+          </a:xfrm>
+          <a:prstGeom prst="rect">
+            <a:avLst/>
+          </a:prstGeom>
+          <a:solidFill>
+            <a:srgbClr val="E54C09"/>
+          </a:solidFill>
+          <a:ln>
+            <a:noFill/>
+          </a:ln>
+          <a:effectLst/>
+        </p:spPr>
+        <p:style>
+          <a:lnRef idx="1">
+            <a:schemeClr val="accent1"/>
+          </a:lnRef>
+          <a:fillRef idx="3">
+            <a:schemeClr val="accent1"/>
+          </a:fillRef>
+          <a:effectRef idx="2">
+            <a:schemeClr val="accent1"/>
+          </a:effectRef>
+          <a:fontRef idx="minor">
+            <a:schemeClr val="lt1"/>
+          </a:fontRef>
+        </p:style>
+        <p:txBody>
+          <a:bodyPr rtlCol="0" anchor="ctr"/>
+          <a:lstStyle/>
+          <a:p>
+            <a:pPr algn="ctr"/>
+          </a:p>
+        </p:txBody>
+      </p:sp>
+      <p:sp>
+        <p:nvSpPr>
+          <p:cNvPr id="19" name="TextBox 18"/>
+          <p:cNvSpPr txBox="1"/>
+          <p:nvPr/>
+        </p:nvSpPr>
+        <p:spPr>
+          <a:xfrm>
+            <a:off x="6446520" y="3886200"/>
+            <a:ext cx="2286000" cy="914400"/>
+          </a:xfrm>
+          <a:prstGeom prst="rect">
+            <a:avLst/>
+          </a:prstGeom>
+          <a:noFill/>
+        </p:spPr>
+        <p:txBody>
+          <a:bodyPr wrap="square" lIns="45720" rIns="45720" tIns="27432" bIns="27432" anchor="ctr">
+            <a:spAutoFit/>
+          </a:bodyPr>
+          <a:lstStyle/>
+          <a:p>
+            <a:pPr algn="l">
+              <a:lnSpc>
+                <a:spcPct val="115000"/>
+              </a:lnSpc>
+              <a:spcAft>
+                <a:spcPts val="0"/>
+              </a:spcAft>
+            </a:pPr>
+            <a:r>
+              <a:rPr sz="4400" b="0" i="0">
+                <a:solidFill>
+                  <a:srgbClr val="0F1B2D"/>
+                </a:solidFill>
+                <a:latin typeface="Oswald"/>
+              </a:rPr>
+              <a:t>575 h</a:t>
+            </a:r>
+          </a:p>
+        </p:txBody>
+      </p:sp>
+      <p:sp>
+        <p:nvSpPr>
+          <p:cNvPr id="20" name="TextBox 19"/>
+          <p:cNvSpPr txBox="1"/>
+          <p:nvPr/>
+        </p:nvSpPr>
+        <p:spPr>
+          <a:xfrm>
+            <a:off x="6492240" y="4846320"/>
+            <a:ext cx="2148840" cy="1143000"/>
+          </a:xfrm>
+          <a:prstGeom prst="rect">
+            <a:avLst/>
+          </a:prstGeom>
+          <a:noFill/>
+        </p:spPr>
+        <p:txBody>
+          <a:bodyPr wrap="square" lIns="45720" rIns="45720" tIns="27432" bIns="27432" anchor="t">
+            <a:spAutoFit/>
+          </a:bodyPr>
+          <a:lstStyle/>
+          <a:p>
+            <a:pPr algn="l">
+              <a:lnSpc>
+                <a:spcPct val="120000"/>
+              </a:lnSpc>
+              <a:spcAft>
+                <a:spcPts val="0"/>
+              </a:spcAft>
+            </a:pPr>
+            <a:r>
+              <a:rPr sz="1300" b="0" i="0">
+                <a:solidFill>
+                  <a:srgbClr val="2B3445"/>
+                </a:solidFill>
+                <a:latin typeface="Lato"/>
+              </a:rPr>
+              <a:t>Un solo programa, completo: de A1 a B2, presencial, en grupos de máximo 16.</a:t>
+            </a:r>
+          </a:p>
+        </p:txBody>
+      </p:sp>
+      <p:sp>
+        <p:nvSpPr>
+          <p:cNvPr id="21" name="Rounded Rectangle 20"/>
+          <p:cNvSpPr/>
+          <p:nvPr/>
+        </p:nvSpPr>
+        <p:spPr>
+          <a:xfrm>
+            <a:off x="9052560" y="3429000"/>
+            <a:ext cx="2651760" cy="2606040"/>
+          </a:xfrm>
+          <a:prstGeom prst="roundRect">
+            <a:avLst>
+              <a:gd name="adj" fmla="val 6000"/>
+            </a:avLst>
+          </a:prstGeom>
+          <a:solidFill>
+            <a:srgbClr val="FFFFFF"/>
+          </a:solidFill>
+          <a:ln w="9525">
+            <a:solidFill>
+              <a:srgbClr val="E3DBCF"/>
+            </a:solidFill>
+          </a:ln>
+          <a:effectLst/>
+        </p:spPr>
+        <p:style>
+          <a:lnRef idx="1">
+            <a:schemeClr val="accent1"/>
+          </a:lnRef>
+          <a:fillRef idx="3">
+            <a:schemeClr val="accent1"/>
+          </a:fillRef>
+          <a:effectRef idx="2">
+            <a:schemeClr val="accent1"/>
+          </a:effectRef>
+          <a:fontRef idx="minor">
+            <a:schemeClr val="lt1"/>
+          </a:fontRef>
+        </p:style>
+        <p:txBody>
+          <a:bodyPr rtlCol="0" anchor="ctr"/>
+          <a:lstStyle/>
+          <a:p>
+            <a:pPr algn="ctr"/>
+          </a:p>
+        </p:txBody>
+      </p:sp>
+      <p:sp>
+        <p:nvSpPr>
+          <p:cNvPr id="22" name="Rectangle 21"/>
+          <p:cNvSpPr/>
+          <p:nvPr/>
+        </p:nvSpPr>
+        <p:spPr>
+          <a:xfrm>
+            <a:off x="9326880" y="3703320"/>
+            <a:ext cx="457200" cy="30000"/>
+          </a:xfrm>
+          <a:prstGeom prst="rect">
+            <a:avLst/>
+          </a:prstGeom>
+          <a:solidFill>
+            <a:srgbClr val="E54C09"/>
+          </a:solidFill>
+          <a:ln>
+            <a:noFill/>
+          </a:ln>
+          <a:effectLst/>
+        </p:spPr>
+        <p:style>
+          <a:lnRef idx="1">
+            <a:schemeClr val="accent1"/>
+          </a:lnRef>
+          <a:fillRef idx="3">
+            <a:schemeClr val="accent1"/>
+          </a:fillRef>
+          <a:effectRef idx="2">
+            <a:schemeClr val="accent1"/>
+          </a:effectRef>
+          <a:fontRef idx="minor">
+            <a:schemeClr val="lt1"/>
+          </a:fontRef>
+        </p:style>
+        <p:txBody>
+          <a:bodyPr rtlCol="0" anchor="ctr"/>
+          <a:lstStyle/>
+          <a:p>
+            <a:pPr algn="ctr"/>
+          </a:p>
+        </p:txBody>
+      </p:sp>
+      <p:sp>
+        <p:nvSpPr>
+          <p:cNvPr id="23" name="TextBox 22"/>
+          <p:cNvSpPr txBox="1"/>
+          <p:nvPr/>
+        </p:nvSpPr>
+        <p:spPr>
+          <a:xfrm>
+            <a:off x="9281160" y="3886200"/>
+            <a:ext cx="2286000" cy="914400"/>
+          </a:xfrm>
+          <a:prstGeom prst="rect">
+            <a:avLst/>
+          </a:prstGeom>
+          <a:noFill/>
+        </p:spPr>
+        <p:txBody>
+          <a:bodyPr wrap="square" lIns="45720" rIns="45720" tIns="27432" bIns="27432" anchor="ctr">
+            <a:spAutoFit/>
+          </a:bodyPr>
+          <a:lstStyle/>
+          <a:p>
+            <a:pPr algn="l">
+              <a:lnSpc>
+                <a:spcPct val="115000"/>
+              </a:lnSpc>
+              <a:spcAft>
+                <a:spcPts val="0"/>
+              </a:spcAft>
+            </a:pPr>
+            <a:r>
+              <a:rPr sz="4400" b="0" i="0">
+                <a:solidFill>
+                  <a:srgbClr val="0F1B2D"/>
+                </a:solidFill>
+                <a:latin typeface="Oswald"/>
+              </a:rPr>
+              <a:t>100%</a:t>
+            </a:r>
+          </a:p>
+        </p:txBody>
+      </p:sp>
+      <p:sp>
+        <p:nvSpPr>
+          <p:cNvPr id="24" name="TextBox 23"/>
+          <p:cNvSpPr txBox="1"/>
+          <p:nvPr/>
+        </p:nvSpPr>
+        <p:spPr>
+          <a:xfrm>
+            <a:off x="9326880" y="4846320"/>
+            <a:ext cx="2148840" cy="1143000"/>
+          </a:xfrm>
+          <a:prstGeom prst="rect">
+            <a:avLst/>
+          </a:prstGeom>
+          <a:noFill/>
+        </p:spPr>
+        <p:txBody>
+          <a:bodyPr wrap="square" lIns="45720" rIns="45720" tIns="27432" bIns="27432" anchor="t">
+            <a:spAutoFit/>
+          </a:bodyPr>
+          <a:lstStyle/>
+          <a:p>
+            <a:pPr algn="l">
+              <a:lnSpc>
+                <a:spcPct val="120000"/>
+              </a:lnSpc>
+              <a:spcAft>
+                <a:spcPts val="0"/>
+              </a:spcAft>
+            </a:pPr>
+            <a:r>
+              <a:rPr sz="1300" b="0" i="0">
+                <a:solidFill>
+                  <a:srgbClr val="2B3445"/>
+                </a:solidFill>
+                <a:latin typeface="Lato"/>
+              </a:rPr>
+              <a:t>Nuestro logro: la garantía por escrito. Si el estudiante cumple y no avanza, le devolvemos el 100% del nivel.</a:t>
             </a:r>
           </a:p>
         </p:txBody>
@@ -4835,7 +5530,7 @@
             <a:avLst/>
           </a:prstGeom>
           <a:solidFill>
-            <a:srgbClr val="FFF8E7"/>
+            <a:srgbClr val="F6F1E9"/>
           </a:solidFill>
           <a:ln>
             <a:noFill/>
@@ -4866,20 +5561,22 @@
       </p:sp>
       <p:sp>
         <p:nvSpPr>
-          <p:cNvPr id="3" name="Rectangle 2"/>
+          <p:cNvPr id="3" name="Rounded Rectangle 2"/>
           <p:cNvSpPr/>
           <p:nvPr/>
         </p:nvSpPr>
         <p:spPr>
           <a:xfrm>
-            <a:off x="0" y="0"/>
-            <a:ext cx="12191695" cy="384048"/>
-          </a:xfrm>
-          <a:prstGeom prst="rect">
-            <a:avLst/>
+            <a:off x="548640" y="384048"/>
+            <a:ext cx="1417320" cy="566928"/>
+          </a:xfrm>
+          <a:prstGeom prst="roundRect">
+            <a:avLst>
+              <a:gd name="adj" fmla="val 50000"/>
+            </a:avLst>
           </a:prstGeom>
           <a:solidFill>
-            <a:srgbClr val="FF4A00"/>
+            <a:srgbClr val="0F1B2D"/>
           </a:solidFill>
           <a:ln>
             <a:noFill/>
@@ -4908,16 +5605,40 @@
           </a:p>
         </p:txBody>
       </p:sp>
-      <p:sp>
-        <p:nvSpPr>
-          <p:cNvPr id="4" name="TextBox 3"/>
+      <p:pic>
+        <p:nvPicPr>
+          <p:cNvPr id="4" name="Picture 3" descr="logo_heiiu_transparente.png"/>
+          <p:cNvPicPr>
+            <a:picLocks noChangeAspect="1"/>
+          </p:cNvPicPr>
+          <p:nvPr/>
+        </p:nvPicPr>
+        <p:blipFill>
+          <a:blip r:embed="rId2"/>
+          <a:stretch>
+            <a:fillRect/>
+          </a:stretch>
+        </p:blipFill>
+        <p:spPr>
+          <a:xfrm>
+            <a:off x="731520" y="457200"/>
+            <a:ext cx="747979" cy="420624"/>
+          </a:xfrm>
+          <a:prstGeom prst="rect">
+            <a:avLst/>
+          </a:prstGeom>
+        </p:spPr>
+      </p:pic>
+      <p:sp>
+        <p:nvSpPr>
+          <p:cNvPr id="5" name="TextBox 4"/>
           <p:cNvSpPr txBox="1"/>
           <p:nvPr/>
         </p:nvSpPr>
         <p:spPr>
           <a:xfrm>
-            <a:off x="502920" y="36576"/>
-            <a:ext cx="5486400" cy="329184"/>
+            <a:off x="9418320" y="384048"/>
+            <a:ext cx="2286000" cy="566928"/>
           </a:xfrm>
           <a:prstGeom prst="rect">
             <a:avLst/>
@@ -4926,6 +5647,48 @@
         </p:spPr>
         <p:txBody>
           <a:bodyPr wrap="square" lIns="45720" rIns="45720" tIns="27432" bIns="27432" anchor="ctr">
+            <a:spAutoFit/>
+          </a:bodyPr>
+          <a:lstStyle/>
+          <a:p>
+            <a:pPr algn="r">
+              <a:lnSpc>
+                <a:spcPct val="115000"/>
+              </a:lnSpc>
+              <a:spcAft>
+                <a:spcPts val="0"/>
+              </a:spcAft>
+            </a:pPr>
+            <a:r>
+              <a:rPr sz="1200" b="0" i="0">
+                <a:solidFill>
+                  <a:srgbClr val="7A828F"/>
+                </a:solidFill>
+                <a:latin typeface="Oswald"/>
+              </a:rPr>
+              <a:t>3 / 7</a:t>
+            </a:r>
+          </a:p>
+        </p:txBody>
+      </p:sp>
+      <p:sp>
+        <p:nvSpPr>
+          <p:cNvPr id="6" name="TextBox 5"/>
+          <p:cNvSpPr txBox="1"/>
+          <p:nvPr/>
+        </p:nvSpPr>
+        <p:spPr>
+          <a:xfrm>
+            <a:off x="548640" y="1234440"/>
+            <a:ext cx="7315200" cy="320040"/>
+          </a:xfrm>
+          <a:prstGeom prst="rect">
+            <a:avLst/>
+          </a:prstGeom>
+          <a:noFill/>
+        </p:spPr>
+        <p:txBody>
+          <a:bodyPr wrap="square" lIns="45720" rIns="45720" tIns="27432" bIns="27432" anchor="t">
             <a:spAutoFit/>
           </a:bodyPr>
           <a:lstStyle/>
@@ -4939,27 +5702,27 @@
               </a:spcAft>
             </a:pPr>
             <a:r>
-              <a:rPr sz="1200" b="1" i="0">
-                <a:solidFill>
-                  <a:srgbClr val="FFFFFF"/>
-                </a:solidFill>
-                <a:latin typeface="Segoe UI"/>
-              </a:rPr>
-              <a:t>3 de 6</a:t>
-            </a:r>
-          </a:p>
-        </p:txBody>
-      </p:sp>
-      <p:sp>
-        <p:nvSpPr>
-          <p:cNvPr id="5" name="TextBox 4"/>
+              <a:rPr sz="1100" b="1" i="0" spc="250">
+                <a:solidFill>
+                  <a:srgbClr val="E54C09"/>
+                </a:solidFill>
+                <a:latin typeface="Lato"/>
+              </a:rPr>
+              <a:t>OFERTA EDUCATIVA · PLAN A</a:t>
+            </a:r>
+          </a:p>
+        </p:txBody>
+      </p:sp>
+      <p:sp>
+        <p:nvSpPr>
+          <p:cNvPr id="7" name="TextBox 6"/>
           <p:cNvSpPr txBox="1"/>
           <p:nvPr/>
         </p:nvSpPr>
         <p:spPr>
           <a:xfrm>
-            <a:off x="6583680" y="36576"/>
-            <a:ext cx="5120640" cy="329184"/>
+            <a:off x="548640" y="1554480"/>
+            <a:ext cx="10058400" cy="1737360"/>
           </a:xfrm>
           <a:prstGeom prst="rect">
             <a:avLst/>
@@ -4967,114 +5730,28 @@
           <a:noFill/>
         </p:spPr>
         <p:txBody>
-          <a:bodyPr wrap="square" lIns="45720" rIns="45720" tIns="27432" bIns="27432" anchor="ctr">
+          <a:bodyPr wrap="square" lIns="45720" rIns="45720" tIns="27432" bIns="27432" anchor="t">
             <a:spAutoFit/>
           </a:bodyPr>
           <a:lstStyle/>
           <a:p>
-            <a:pPr algn="r">
+            <a:pPr algn="l">
               <a:lnSpc>
-                <a:spcPct val="115000"/>
+                <a:spcPct val="108000"/>
               </a:lnSpc>
               <a:spcAft>
                 <a:spcPts val="0"/>
               </a:spcAft>
             </a:pPr>
             <a:r>
-              <a:rPr sz="1100" b="1" i="0">
-                <a:solidFill>
-                  <a:srgbClr val="FFFFFF"/>
-                </a:solidFill>
-                <a:latin typeface="Segoe UI"/>
-              </a:rPr>
-              <a:t>HEIIU ENGLISH ACADEMY · PROGRAMA PARA FONDOS DE EMPLEADOS</a:t>
-            </a:r>
-          </a:p>
-        </p:txBody>
-      </p:sp>
-      <p:sp>
-        <p:nvSpPr>
-          <p:cNvPr id="6" name="TextBox 5"/>
-          <p:cNvSpPr txBox="1"/>
-          <p:nvPr/>
-        </p:nvSpPr>
-        <p:spPr>
-          <a:xfrm>
-            <a:off x="548640" y="914400"/>
-            <a:ext cx="7223760" cy="2377440"/>
-          </a:xfrm>
-          <a:prstGeom prst="rect">
-            <a:avLst/>
-          </a:prstGeom>
-          <a:noFill/>
-        </p:spPr>
-        <p:txBody>
-          <a:bodyPr wrap="square" lIns="45720" rIns="45720" tIns="27432" bIns="27432" anchor="ctr">
-            <a:spAutoFit/>
-          </a:bodyPr>
-          <a:lstStyle/>
-          <a:p>
-            <a:pPr algn="l">
-              <a:lnSpc>
-                <a:spcPct val="105000"/>
-              </a:lnSpc>
-              <a:spcAft>
-                <a:spcPts val="0"/>
-              </a:spcAft>
-            </a:pPr>
-            <a:r>
-              <a:rPr sz="4000" b="1" i="0">
-                <a:solidFill>
-                  <a:srgbClr val="E54C09"/>
-                </a:solidFill>
-                <a:latin typeface="Constantia"/>
-              </a:rPr>
-              <a:t>Afiliados y familias estudian con 45% de beca a nombre del fondo.</a:t>
-            </a:r>
-          </a:p>
-        </p:txBody>
-      </p:sp>
-      <p:sp>
-        <p:nvSpPr>
-          <p:cNvPr id="7" name="Rectangle 6"/>
-          <p:cNvSpPr/>
-          <p:nvPr/>
-        </p:nvSpPr>
-        <p:spPr>
-          <a:xfrm>
-            <a:off x="594360" y="3429000"/>
-            <a:ext cx="1463040" cy="38000"/>
-          </a:xfrm>
-          <a:prstGeom prst="rect">
-            <a:avLst/>
-          </a:prstGeom>
-          <a:solidFill>
-            <a:srgbClr val="FBC900"/>
-          </a:solidFill>
-          <a:ln>
-            <a:noFill/>
-          </a:ln>
-          <a:effectLst/>
-        </p:spPr>
-        <p:style>
-          <a:lnRef idx="1">
-            <a:schemeClr val="accent1"/>
-          </a:lnRef>
-          <a:fillRef idx="3">
-            <a:schemeClr val="accent1"/>
-          </a:fillRef>
-          <a:effectRef idx="2">
-            <a:schemeClr val="accent1"/>
-          </a:effectRef>
-          <a:fontRef idx="minor">
-            <a:schemeClr val="lt1"/>
-          </a:fontRef>
-        </p:style>
-        <p:txBody>
-          <a:bodyPr rtlCol="0" anchor="ctr"/>
-          <a:lstStyle/>
-          <a:p>
-            <a:pPr algn="ctr"/>
+              <a:rPr sz="3400" b="1" i="0">
+                <a:solidFill>
+                  <a:srgbClr val="0F1B2D"/>
+                </a:solidFill>
+                <a:latin typeface="Lato Black"/>
+              </a:rPr>
+              <a:t>Programa completo de inglés, de A1 a B2: 575 horas presenciales.</a:t>
+            </a:r>
           </a:p>
         </p:txBody>
       </p:sp>
@@ -5086,243 +5763,8 @@
         </p:nvSpPr>
         <p:spPr>
           <a:xfrm>
-            <a:off x="548640" y="3657600"/>
-            <a:ext cx="7223760" cy="2468880"/>
-          </a:xfrm>
-          <a:prstGeom prst="rect">
-            <a:avLst/>
-          </a:prstGeom>
-          <a:noFill/>
-        </p:spPr>
-        <p:txBody>
-          <a:bodyPr wrap="square" lIns="45720" rIns="45720" tIns="27432" bIns="27432" anchor="t">
-            <a:spAutoFit/>
-          </a:bodyPr>
-          <a:lstStyle/>
-          <a:p>
-            <a:pPr algn="l">
-              <a:lnSpc>
-                <a:spcPct val="115000"/>
-              </a:lnSpc>
-              <a:spcAft>
-                <a:spcPts val="1000"/>
-              </a:spcAft>
-            </a:pPr>
-            <a:r>
-              <a:rPr sz="2200" b="1" i="0">
-                <a:solidFill>
-                  <a:srgbClr val="E54C09"/>
-                </a:solidFill>
-                <a:latin typeface="Segoe UI"/>
-              </a:rPr>
-              <a:t>▪ </a:t>
-            </a:r>
-            <a:r>
-              <a:rPr sz="2200" b="0" i="0">
-                <a:solidFill>
-                  <a:srgbClr val="222222"/>
-                </a:solidFill>
-                <a:latin typeface="Segoe UI"/>
-              </a:rPr>
-              <a:t>Programa completo de inglés, de A1 a B2: 575 horas presenciales, grupos de máximo 16.</a:t>
-            </a:r>
-          </a:p>
-          <a:p>
-            <a:pPr algn="l">
-              <a:lnSpc>
-                <a:spcPct val="115000"/>
-              </a:lnSpc>
-              <a:spcAft>
-                <a:spcPts val="1000"/>
-              </a:spcAft>
-            </a:pPr>
-            <a:r>
-              <a:rPr sz="2200" b="1" i="0">
-                <a:solidFill>
-                  <a:srgbClr val="E54C09"/>
-                </a:solidFill>
-                <a:latin typeface="Segoe UI"/>
-              </a:rPr>
-              <a:t>▪ </a:t>
-            </a:r>
-            <a:r>
-              <a:rPr sz="2200" b="0" i="0">
-                <a:solidFill>
-                  <a:srgbClr val="222222"/>
-                </a:solidFill>
-                <a:latin typeface="Segoe UI"/>
-              </a:rPr>
-              <a:t>Para el afiliado, su cónyuge y sus hijos desde los 12 años.</a:t>
-            </a:r>
-          </a:p>
-          <a:p>
-            <a:pPr algn="l">
-              <a:lnSpc>
-                <a:spcPct val="115000"/>
-              </a:lnSpc>
-              <a:spcAft>
-                <a:spcPts val="1000"/>
-              </a:spcAft>
-            </a:pPr>
-            <a:r>
-              <a:rPr sz="2200" b="1" i="0">
-                <a:solidFill>
-                  <a:srgbClr val="E54C09"/>
-                </a:solidFill>
-                <a:latin typeface="Segoe UI"/>
-              </a:rPr>
-              <a:t>▪ </a:t>
-            </a:r>
-            <a:r>
-              <a:rPr sz="2200" b="0" i="0">
-                <a:solidFill>
-                  <a:srgbClr val="222222"/>
-                </a:solidFill>
-                <a:latin typeface="Segoe UI"/>
-              </a:rPr>
-              <a:t>Con crédito del fondo o cesantías paga de contado, y la beca de contado es la mayor.</a:t>
-            </a:r>
-          </a:p>
-        </p:txBody>
-      </p:sp>
-      <p:sp>
-        <p:nvSpPr>
-          <p:cNvPr id="9" name="Rectangle 8"/>
-          <p:cNvSpPr/>
-          <p:nvPr/>
-        </p:nvSpPr>
-        <p:spPr>
-          <a:xfrm>
-            <a:off x="8138160" y="914400"/>
-            <a:ext cx="3566160" cy="5120640"/>
-          </a:xfrm>
-          <a:prstGeom prst="rect">
-            <a:avLst/>
-          </a:prstGeom>
-          <a:solidFill>
-            <a:srgbClr val="FF4A00"/>
-          </a:solidFill>
-          <a:ln>
-            <a:noFill/>
-          </a:ln>
-          <a:effectLst/>
-        </p:spPr>
-        <p:style>
-          <a:lnRef idx="1">
-            <a:schemeClr val="accent1"/>
-          </a:lnRef>
-          <a:fillRef idx="3">
-            <a:schemeClr val="accent1"/>
-          </a:fillRef>
-          <a:effectRef idx="2">
-            <a:schemeClr val="accent1"/>
-          </a:effectRef>
-          <a:fontRef idx="minor">
-            <a:schemeClr val="lt1"/>
-          </a:fontRef>
-        </p:style>
-        <p:txBody>
-          <a:bodyPr rtlCol="0" anchor="ctr"/>
-          <a:lstStyle/>
-          <a:p>
-            <a:pPr algn="ctr"/>
-          </a:p>
-        </p:txBody>
-      </p:sp>
-      <p:sp>
-        <p:nvSpPr>
-          <p:cNvPr id="10" name="TextBox 9"/>
-          <p:cNvSpPr txBox="1"/>
-          <p:nvPr/>
-        </p:nvSpPr>
-        <p:spPr>
-          <a:xfrm>
-            <a:off x="8229600" y="1280160"/>
-            <a:ext cx="3383280" cy="2377440"/>
-          </a:xfrm>
-          <a:prstGeom prst="rect">
-            <a:avLst/>
-          </a:prstGeom>
-          <a:noFill/>
-        </p:spPr>
-        <p:txBody>
-          <a:bodyPr wrap="square" lIns="45720" rIns="45720" tIns="27432" bIns="27432" anchor="ctr">
-            <a:spAutoFit/>
-          </a:bodyPr>
-          <a:lstStyle/>
-          <a:p>
-            <a:pPr algn="ctr">
-              <a:lnSpc>
-                <a:spcPct val="100000"/>
-              </a:lnSpc>
-              <a:spcAft>
-                <a:spcPts val="0"/>
-              </a:spcAft>
-            </a:pPr>
-            <a:r>
-              <a:rPr sz="4600" b="1" i="0">
-                <a:solidFill>
-                  <a:srgbClr val="FFFFFF"/>
-                </a:solidFill>
-                <a:latin typeface="Constantia"/>
-              </a:rPr>
-              <a:t>$3.913.200</a:t>
-            </a:r>
-          </a:p>
-        </p:txBody>
-      </p:sp>
-      <p:sp>
-        <p:nvSpPr>
-          <p:cNvPr id="11" name="TextBox 10"/>
-          <p:cNvSpPr txBox="1"/>
-          <p:nvPr/>
-        </p:nvSpPr>
-        <p:spPr>
-          <a:xfrm>
-            <a:off x="8321040" y="3749039"/>
-            <a:ext cx="3200400" cy="2103120"/>
-          </a:xfrm>
-          <a:prstGeom prst="rect">
-            <a:avLst/>
-          </a:prstGeom>
-          <a:noFill/>
-        </p:spPr>
-        <p:txBody>
-          <a:bodyPr wrap="square" lIns="45720" rIns="45720" tIns="27432" bIns="27432" anchor="t">
-            <a:spAutoFit/>
-          </a:bodyPr>
-          <a:lstStyle/>
-          <a:p>
-            <a:pPr algn="ctr">
-              <a:lnSpc>
-                <a:spcPct val="120000"/>
-              </a:lnSpc>
-              <a:spcAft>
-                <a:spcPts val="0"/>
-              </a:spcAft>
-            </a:pPr>
-            <a:r>
-              <a:rPr sz="1800" b="0" i="0">
-                <a:solidFill>
-                  <a:srgbClr val="FFFFFF"/>
-                </a:solidFill>
-                <a:latin typeface="Segoe UI"/>
-              </a:rPr>
-              <a:t>menos por afiliado: $4.782.800 en lugar de $8.696.000, el programa completo.</a:t>
-            </a:r>
-          </a:p>
-        </p:txBody>
-      </p:sp>
-      <p:sp>
-        <p:nvSpPr>
-          <p:cNvPr id="12" name="TextBox 11"/>
-          <p:cNvSpPr txBox="1"/>
-          <p:nvPr/>
-        </p:nvSpPr>
-        <p:spPr>
-          <a:xfrm>
-            <a:off x="502920" y="6355080"/>
-            <a:ext cx="11155680" cy="365760"/>
+            <a:off x="548640" y="6400800"/>
+            <a:ext cx="11155680" cy="320040"/>
           </a:xfrm>
           <a:prstGeom prst="rect">
             <a:avLst/>
@@ -5344,13 +5786,781 @@
               </a:spcAft>
             </a:pPr>
             <a:r>
-              <a:rPr sz="1000" b="0" i="0">
-                <a:solidFill>
-                  <a:srgbClr val="5A5A5A"/>
-                </a:solidFill>
-                <a:latin typeface="Segoe UI"/>
-              </a:rPr>
-              <a:t>Línea de alianzas 316 768 8793 · Carrera 27 # 48-49, Sotomayor, Bucaramanga</a:t>
+              <a:rPr sz="950" b="0" i="0">
+                <a:solidFill>
+                  <a:srgbClr val="7A828F"/>
+                </a:solidFill>
+                <a:latin typeface="Lato"/>
+              </a:rPr>
+              <a:t>Heiiu English Academy · Línea de alianzas 316 768 8793 · Carrera 27 # 48-49, Sotomayor, Bucaramanga</a:t>
+            </a:r>
+          </a:p>
+        </p:txBody>
+      </p:sp>
+      <p:sp>
+        <p:nvSpPr>
+          <p:cNvPr id="9" name="Rectangle 8"/>
+          <p:cNvSpPr/>
+          <p:nvPr/>
+        </p:nvSpPr>
+        <p:spPr>
+          <a:xfrm>
+            <a:off x="548640" y="3246120"/>
+            <a:ext cx="457200" cy="30000"/>
+          </a:xfrm>
+          <a:prstGeom prst="rect">
+            <a:avLst/>
+          </a:prstGeom>
+          <a:solidFill>
+            <a:srgbClr val="E54C09"/>
+          </a:solidFill>
+          <a:ln>
+            <a:noFill/>
+          </a:ln>
+          <a:effectLst/>
+        </p:spPr>
+        <p:style>
+          <a:lnRef idx="1">
+            <a:schemeClr val="accent1"/>
+          </a:lnRef>
+          <a:fillRef idx="3">
+            <a:schemeClr val="accent1"/>
+          </a:fillRef>
+          <a:effectRef idx="2">
+            <a:schemeClr val="accent1"/>
+          </a:effectRef>
+          <a:fontRef idx="minor">
+            <a:schemeClr val="lt1"/>
+          </a:fontRef>
+        </p:style>
+        <p:txBody>
+          <a:bodyPr rtlCol="0" anchor="ctr"/>
+          <a:lstStyle/>
+          <a:p>
+            <a:pPr algn="ctr"/>
+          </a:p>
+        </p:txBody>
+      </p:sp>
+      <p:sp>
+        <p:nvSpPr>
+          <p:cNvPr id="10" name="TextBox 9"/>
+          <p:cNvSpPr txBox="1"/>
+          <p:nvPr/>
+        </p:nvSpPr>
+        <p:spPr>
+          <a:xfrm>
+            <a:off x="548640" y="3355848"/>
+            <a:ext cx="3474720" cy="320040"/>
+          </a:xfrm>
+          <a:prstGeom prst="rect">
+            <a:avLst/>
+          </a:prstGeom>
+          <a:noFill/>
+        </p:spPr>
+        <p:txBody>
+          <a:bodyPr wrap="square" lIns="45720" rIns="45720" tIns="27432" bIns="27432" anchor="t">
+            <a:spAutoFit/>
+          </a:bodyPr>
+          <a:lstStyle/>
+          <a:p>
+            <a:pPr algn="l">
+              <a:lnSpc>
+                <a:spcPct val="115000"/>
+              </a:lnSpc>
+              <a:spcAft>
+                <a:spcPts val="0"/>
+              </a:spcAft>
+            </a:pPr>
+            <a:r>
+              <a:rPr sz="1100" b="1" i="0" spc="200">
+                <a:solidFill>
+                  <a:srgbClr val="0F1B2D"/>
+                </a:solidFill>
+                <a:latin typeface="Lato"/>
+              </a:rPr>
+              <a:t>HORARIOS</a:t>
+            </a:r>
+          </a:p>
+        </p:txBody>
+      </p:sp>
+      <p:sp>
+        <p:nvSpPr>
+          <p:cNvPr id="11" name="TextBox 10"/>
+          <p:cNvSpPr txBox="1"/>
+          <p:nvPr/>
+        </p:nvSpPr>
+        <p:spPr>
+          <a:xfrm>
+            <a:off x="548640" y="3675888"/>
+            <a:ext cx="3474720" cy="1097280"/>
+          </a:xfrm>
+          <a:prstGeom prst="rect">
+            <a:avLst/>
+          </a:prstGeom>
+          <a:noFill/>
+        </p:spPr>
+        <p:txBody>
+          <a:bodyPr wrap="square" lIns="45720" rIns="45720" tIns="27432" bIns="27432" anchor="t">
+            <a:spAutoFit/>
+          </a:bodyPr>
+          <a:lstStyle/>
+          <a:p>
+            <a:pPr algn="l">
+              <a:lnSpc>
+                <a:spcPct val="120000"/>
+              </a:lnSpc>
+              <a:spcAft>
+                <a:spcPts val="0"/>
+              </a:spcAft>
+            </a:pPr>
+            <a:r>
+              <a:rPr sz="1250" b="0" i="0">
+                <a:solidFill>
+                  <a:srgbClr val="2B3445"/>
+                </a:solidFill>
+                <a:latin typeface="Lato"/>
+              </a:rPr>
+              <a:t>Mañana 8:00 a 12:00 · Noche 6:30 a 8:30 p. m. · Sábados 8:00 a 12:00. Con 8 o más afiliados, el horario lo define el fondo.</a:t>
+            </a:r>
+          </a:p>
+        </p:txBody>
+      </p:sp>
+      <p:sp>
+        <p:nvSpPr>
+          <p:cNvPr id="12" name="Rectangle 11"/>
+          <p:cNvSpPr/>
+          <p:nvPr/>
+        </p:nvSpPr>
+        <p:spPr>
+          <a:xfrm>
+            <a:off x="4297679" y="3246120"/>
+            <a:ext cx="457200" cy="30000"/>
+          </a:xfrm>
+          <a:prstGeom prst="rect">
+            <a:avLst/>
+          </a:prstGeom>
+          <a:solidFill>
+            <a:srgbClr val="E54C09"/>
+          </a:solidFill>
+          <a:ln>
+            <a:noFill/>
+          </a:ln>
+          <a:effectLst/>
+        </p:spPr>
+        <p:style>
+          <a:lnRef idx="1">
+            <a:schemeClr val="accent1"/>
+          </a:lnRef>
+          <a:fillRef idx="3">
+            <a:schemeClr val="accent1"/>
+          </a:fillRef>
+          <a:effectRef idx="2">
+            <a:schemeClr val="accent1"/>
+          </a:effectRef>
+          <a:fontRef idx="minor">
+            <a:schemeClr val="lt1"/>
+          </a:fontRef>
+        </p:style>
+        <p:txBody>
+          <a:bodyPr rtlCol="0" anchor="ctr"/>
+          <a:lstStyle/>
+          <a:p>
+            <a:pPr algn="ctr"/>
+          </a:p>
+        </p:txBody>
+      </p:sp>
+      <p:sp>
+        <p:nvSpPr>
+          <p:cNvPr id="13" name="TextBox 12"/>
+          <p:cNvSpPr txBox="1"/>
+          <p:nvPr/>
+        </p:nvSpPr>
+        <p:spPr>
+          <a:xfrm>
+            <a:off x="4297679" y="3355848"/>
+            <a:ext cx="3474720" cy="320040"/>
+          </a:xfrm>
+          <a:prstGeom prst="rect">
+            <a:avLst/>
+          </a:prstGeom>
+          <a:noFill/>
+        </p:spPr>
+        <p:txBody>
+          <a:bodyPr wrap="square" lIns="45720" rIns="45720" tIns="27432" bIns="27432" anchor="t">
+            <a:spAutoFit/>
+          </a:bodyPr>
+          <a:lstStyle/>
+          <a:p>
+            <a:pPr algn="l">
+              <a:lnSpc>
+                <a:spcPct val="115000"/>
+              </a:lnSpc>
+              <a:spcAft>
+                <a:spcPts val="0"/>
+              </a:spcAft>
+            </a:pPr>
+            <a:r>
+              <a:rPr sz="1100" b="1" i="0" spc="200">
+                <a:solidFill>
+                  <a:srgbClr val="0F1B2D"/>
+                </a:solidFill>
+                <a:latin typeface="Lato"/>
+              </a:rPr>
+              <a:t>INTENSIDAD</a:t>
+            </a:r>
+          </a:p>
+        </p:txBody>
+      </p:sp>
+      <p:sp>
+        <p:nvSpPr>
+          <p:cNvPr id="14" name="TextBox 13"/>
+          <p:cNvSpPr txBox="1"/>
+          <p:nvPr/>
+        </p:nvSpPr>
+        <p:spPr>
+          <a:xfrm>
+            <a:off x="4297679" y="3675888"/>
+            <a:ext cx="3474720" cy="1097280"/>
+          </a:xfrm>
+          <a:prstGeom prst="rect">
+            <a:avLst/>
+          </a:prstGeom>
+          <a:noFill/>
+        </p:spPr>
+        <p:txBody>
+          <a:bodyPr wrap="square" lIns="45720" rIns="45720" tIns="27432" bIns="27432" anchor="t">
+            <a:spAutoFit/>
+          </a:bodyPr>
+          <a:lstStyle/>
+          <a:p>
+            <a:pPr algn="l">
+              <a:lnSpc>
+                <a:spcPct val="120000"/>
+              </a:lnSpc>
+              <a:spcAft>
+                <a:spcPts val="0"/>
+              </a:spcAft>
+            </a:pPr>
+            <a:r>
+              <a:rPr sz="1250" b="0" i="0">
+                <a:solidFill>
+                  <a:srgbClr val="2B3445"/>
+                </a:solidFill>
+                <a:latin typeface="Lato"/>
+              </a:rPr>
+              <a:t>20 h por semana (unos 7 meses) o 10 h por semana (unos 14 meses). Más un video corto en inglés cada día.</a:t>
+            </a:r>
+          </a:p>
+        </p:txBody>
+      </p:sp>
+      <p:sp>
+        <p:nvSpPr>
+          <p:cNvPr id="15" name="Rectangle 14"/>
+          <p:cNvSpPr/>
+          <p:nvPr/>
+        </p:nvSpPr>
+        <p:spPr>
+          <a:xfrm>
+            <a:off x="8046718" y="3246120"/>
+            <a:ext cx="457200" cy="30000"/>
+          </a:xfrm>
+          <a:prstGeom prst="rect">
+            <a:avLst/>
+          </a:prstGeom>
+          <a:solidFill>
+            <a:srgbClr val="E54C09"/>
+          </a:solidFill>
+          <a:ln>
+            <a:noFill/>
+          </a:ln>
+          <a:effectLst/>
+        </p:spPr>
+        <p:style>
+          <a:lnRef idx="1">
+            <a:schemeClr val="accent1"/>
+          </a:lnRef>
+          <a:fillRef idx="3">
+            <a:schemeClr val="accent1"/>
+          </a:fillRef>
+          <a:effectRef idx="2">
+            <a:schemeClr val="accent1"/>
+          </a:effectRef>
+          <a:fontRef idx="minor">
+            <a:schemeClr val="lt1"/>
+          </a:fontRef>
+        </p:style>
+        <p:txBody>
+          <a:bodyPr rtlCol="0" anchor="ctr"/>
+          <a:lstStyle/>
+          <a:p>
+            <a:pPr algn="ctr"/>
+          </a:p>
+        </p:txBody>
+      </p:sp>
+      <p:sp>
+        <p:nvSpPr>
+          <p:cNvPr id="16" name="TextBox 15"/>
+          <p:cNvSpPr txBox="1"/>
+          <p:nvPr/>
+        </p:nvSpPr>
+        <p:spPr>
+          <a:xfrm>
+            <a:off x="8046718" y="3355848"/>
+            <a:ext cx="3474720" cy="320040"/>
+          </a:xfrm>
+          <a:prstGeom prst="rect">
+            <a:avLst/>
+          </a:prstGeom>
+          <a:noFill/>
+        </p:spPr>
+        <p:txBody>
+          <a:bodyPr wrap="square" lIns="45720" rIns="45720" tIns="27432" bIns="27432" anchor="t">
+            <a:spAutoFit/>
+          </a:bodyPr>
+          <a:lstStyle/>
+          <a:p>
+            <a:pPr algn="l">
+              <a:lnSpc>
+                <a:spcPct val="115000"/>
+              </a:lnSpc>
+              <a:spcAft>
+                <a:spcPts val="0"/>
+              </a:spcAft>
+            </a:pPr>
+            <a:r>
+              <a:rPr sz="1100" b="1" i="0" spc="200">
+                <a:solidFill>
+                  <a:srgbClr val="0F1B2D"/>
+                </a:solidFill>
+                <a:latin typeface="Lato"/>
+              </a:rPr>
+              <a:t>DOCENTES</a:t>
+            </a:r>
+          </a:p>
+        </p:txBody>
+      </p:sp>
+      <p:sp>
+        <p:nvSpPr>
+          <p:cNvPr id="17" name="TextBox 16"/>
+          <p:cNvSpPr txBox="1"/>
+          <p:nvPr/>
+        </p:nvSpPr>
+        <p:spPr>
+          <a:xfrm>
+            <a:off x="8046718" y="3675888"/>
+            <a:ext cx="3474720" cy="1097280"/>
+          </a:xfrm>
+          <a:prstGeom prst="rect">
+            <a:avLst/>
+          </a:prstGeom>
+          <a:noFill/>
+        </p:spPr>
+        <p:txBody>
+          <a:bodyPr wrap="square" lIns="45720" rIns="45720" tIns="27432" bIns="27432" anchor="t">
+            <a:spAutoFit/>
+          </a:bodyPr>
+          <a:lstStyle/>
+          <a:p>
+            <a:pPr algn="l">
+              <a:lnSpc>
+                <a:spcPct val="120000"/>
+              </a:lnSpc>
+              <a:spcAft>
+                <a:spcPts val="0"/>
+              </a:spcAft>
+            </a:pPr>
+            <a:r>
+              <a:rPr sz="1250" b="0" i="0">
+                <a:solidFill>
+                  <a:srgbClr val="2B3445"/>
+                </a:solidFill>
+                <a:latin typeface="Lato"/>
+              </a:rPr>
+              <a:t>Profesores bilingües colombianos, uno por grupo de máximo 16, que trabajan como coach y corrigen en el momento.</a:t>
+            </a:r>
+          </a:p>
+        </p:txBody>
+      </p:sp>
+      <p:sp>
+        <p:nvSpPr>
+          <p:cNvPr id="18" name="Rectangle 17"/>
+          <p:cNvSpPr/>
+          <p:nvPr/>
+        </p:nvSpPr>
+        <p:spPr>
+          <a:xfrm>
+            <a:off x="548640" y="4800600"/>
+            <a:ext cx="457200" cy="30000"/>
+          </a:xfrm>
+          <a:prstGeom prst="rect">
+            <a:avLst/>
+          </a:prstGeom>
+          <a:solidFill>
+            <a:srgbClr val="E54C09"/>
+          </a:solidFill>
+          <a:ln>
+            <a:noFill/>
+          </a:ln>
+          <a:effectLst/>
+        </p:spPr>
+        <p:style>
+          <a:lnRef idx="1">
+            <a:schemeClr val="accent1"/>
+          </a:lnRef>
+          <a:fillRef idx="3">
+            <a:schemeClr val="accent1"/>
+          </a:fillRef>
+          <a:effectRef idx="2">
+            <a:schemeClr val="accent1"/>
+          </a:effectRef>
+          <a:fontRef idx="minor">
+            <a:schemeClr val="lt1"/>
+          </a:fontRef>
+        </p:style>
+        <p:txBody>
+          <a:bodyPr rtlCol="0" anchor="ctr"/>
+          <a:lstStyle/>
+          <a:p>
+            <a:pPr algn="ctr"/>
+          </a:p>
+        </p:txBody>
+      </p:sp>
+      <p:sp>
+        <p:nvSpPr>
+          <p:cNvPr id="19" name="TextBox 18"/>
+          <p:cNvSpPr txBox="1"/>
+          <p:nvPr/>
+        </p:nvSpPr>
+        <p:spPr>
+          <a:xfrm>
+            <a:off x="548640" y="4910328"/>
+            <a:ext cx="3474720" cy="320040"/>
+          </a:xfrm>
+          <a:prstGeom prst="rect">
+            <a:avLst/>
+          </a:prstGeom>
+          <a:noFill/>
+        </p:spPr>
+        <p:txBody>
+          <a:bodyPr wrap="square" lIns="45720" rIns="45720" tIns="27432" bIns="27432" anchor="t">
+            <a:spAutoFit/>
+          </a:bodyPr>
+          <a:lstStyle/>
+          <a:p>
+            <a:pPr algn="l">
+              <a:lnSpc>
+                <a:spcPct val="115000"/>
+              </a:lnSpc>
+              <a:spcAft>
+                <a:spcPts val="0"/>
+              </a:spcAft>
+            </a:pPr>
+            <a:r>
+              <a:rPr sz="1100" b="1" i="0" spc="200">
+                <a:solidFill>
+                  <a:srgbClr val="0F1B2D"/>
+                </a:solidFill>
+                <a:latin typeface="Lato"/>
+              </a:rPr>
+              <a:t>EVALUACIÓN</a:t>
+            </a:r>
+          </a:p>
+        </p:txBody>
+      </p:sp>
+      <p:sp>
+        <p:nvSpPr>
+          <p:cNvPr id="20" name="TextBox 19"/>
+          <p:cNvSpPr txBox="1"/>
+          <p:nvPr/>
+        </p:nvSpPr>
+        <p:spPr>
+          <a:xfrm>
+            <a:off x="548640" y="5230368"/>
+            <a:ext cx="3474720" cy="1097280"/>
+          </a:xfrm>
+          <a:prstGeom prst="rect">
+            <a:avLst/>
+          </a:prstGeom>
+          <a:noFill/>
+        </p:spPr>
+        <p:txBody>
+          <a:bodyPr wrap="square" lIns="45720" rIns="45720" tIns="27432" bIns="27432" anchor="t">
+            <a:spAutoFit/>
+          </a:bodyPr>
+          <a:lstStyle/>
+          <a:p>
+            <a:pPr algn="l">
+              <a:lnSpc>
+                <a:spcPct val="120000"/>
+              </a:lnSpc>
+              <a:spcAft>
+                <a:spcPts val="0"/>
+              </a:spcAft>
+            </a:pPr>
+            <a:r>
+              <a:rPr sz="1250" b="0" i="0">
+                <a:solidFill>
+                  <a:srgbClr val="2B3445"/>
+                </a:solidFill>
+                <a:latin typeface="Lato"/>
+              </a:rPr>
+              <a:t>Prueba de entrada, evaluaciones por nivel y evaluador externo al cierre. El fondo recibe asistencia y cumplimiento; nunca notas.</a:t>
+            </a:r>
+          </a:p>
+        </p:txBody>
+      </p:sp>
+      <p:sp>
+        <p:nvSpPr>
+          <p:cNvPr id="21" name="Rectangle 20"/>
+          <p:cNvSpPr/>
+          <p:nvPr/>
+        </p:nvSpPr>
+        <p:spPr>
+          <a:xfrm>
+            <a:off x="4297679" y="4800600"/>
+            <a:ext cx="457200" cy="30000"/>
+          </a:xfrm>
+          <a:prstGeom prst="rect">
+            <a:avLst/>
+          </a:prstGeom>
+          <a:solidFill>
+            <a:srgbClr val="E54C09"/>
+          </a:solidFill>
+          <a:ln>
+            <a:noFill/>
+          </a:ln>
+          <a:effectLst/>
+        </p:spPr>
+        <p:style>
+          <a:lnRef idx="1">
+            <a:schemeClr val="accent1"/>
+          </a:lnRef>
+          <a:fillRef idx="3">
+            <a:schemeClr val="accent1"/>
+          </a:fillRef>
+          <a:effectRef idx="2">
+            <a:schemeClr val="accent1"/>
+          </a:effectRef>
+          <a:fontRef idx="minor">
+            <a:schemeClr val="lt1"/>
+          </a:fontRef>
+        </p:style>
+        <p:txBody>
+          <a:bodyPr rtlCol="0" anchor="ctr"/>
+          <a:lstStyle/>
+          <a:p>
+            <a:pPr algn="ctr"/>
+          </a:p>
+        </p:txBody>
+      </p:sp>
+      <p:sp>
+        <p:nvSpPr>
+          <p:cNvPr id="22" name="TextBox 21"/>
+          <p:cNvSpPr txBox="1"/>
+          <p:nvPr/>
+        </p:nvSpPr>
+        <p:spPr>
+          <a:xfrm>
+            <a:off x="4297679" y="4910328"/>
+            <a:ext cx="3474720" cy="320040"/>
+          </a:xfrm>
+          <a:prstGeom prst="rect">
+            <a:avLst/>
+          </a:prstGeom>
+          <a:noFill/>
+        </p:spPr>
+        <p:txBody>
+          <a:bodyPr wrap="square" lIns="45720" rIns="45720" tIns="27432" bIns="27432" anchor="t">
+            <a:spAutoFit/>
+          </a:bodyPr>
+          <a:lstStyle/>
+          <a:p>
+            <a:pPr algn="l">
+              <a:lnSpc>
+                <a:spcPct val="115000"/>
+              </a:lnSpc>
+              <a:spcAft>
+                <a:spcPts val="0"/>
+              </a:spcAft>
+            </a:pPr>
+            <a:r>
+              <a:rPr sz="1100" b="1" i="0" spc="200">
+                <a:solidFill>
+                  <a:srgbClr val="0F1B2D"/>
+                </a:solidFill>
+                <a:latin typeface="Lato"/>
+              </a:rPr>
+              <a:t>CERTIFICACIÓN</a:t>
+            </a:r>
+          </a:p>
+        </p:txBody>
+      </p:sp>
+      <p:sp>
+        <p:nvSpPr>
+          <p:cNvPr id="23" name="TextBox 22"/>
+          <p:cNvSpPr txBox="1"/>
+          <p:nvPr/>
+        </p:nvSpPr>
+        <p:spPr>
+          <a:xfrm>
+            <a:off x="4297679" y="5230368"/>
+            <a:ext cx="3474720" cy="1097280"/>
+          </a:xfrm>
+          <a:prstGeom prst="rect">
+            <a:avLst/>
+          </a:prstGeom>
+          <a:noFill/>
+        </p:spPr>
+        <p:txBody>
+          <a:bodyPr wrap="square" lIns="45720" rIns="45720" tIns="27432" bIns="27432" anchor="t">
+            <a:spAutoFit/>
+          </a:bodyPr>
+          <a:lstStyle/>
+          <a:p>
+            <a:pPr algn="l">
+              <a:lnSpc>
+                <a:spcPct val="120000"/>
+              </a:lnSpc>
+              <a:spcAft>
+                <a:spcPts val="0"/>
+              </a:spcAft>
+            </a:pPr>
+            <a:r>
+              <a:rPr sz="1250" b="0" i="0">
+                <a:solidFill>
+                  <a:srgbClr val="2B3445"/>
+                </a:solidFill>
+                <a:latin typeface="Lato"/>
+              </a:rPr>
+              <a:t>Certificado Heiiu por nivel y por programa completo, según la Secretaría de Educación. Certificado de beca a nombre del fondo.</a:t>
+            </a:r>
+          </a:p>
+        </p:txBody>
+      </p:sp>
+      <p:sp>
+        <p:nvSpPr>
+          <p:cNvPr id="24" name="Rectangle 23"/>
+          <p:cNvSpPr/>
+          <p:nvPr/>
+        </p:nvSpPr>
+        <p:spPr>
+          <a:xfrm>
+            <a:off x="8046718" y="4800600"/>
+            <a:ext cx="457200" cy="30000"/>
+          </a:xfrm>
+          <a:prstGeom prst="rect">
+            <a:avLst/>
+          </a:prstGeom>
+          <a:solidFill>
+            <a:srgbClr val="E54C09"/>
+          </a:solidFill>
+          <a:ln>
+            <a:noFill/>
+          </a:ln>
+          <a:effectLst/>
+        </p:spPr>
+        <p:style>
+          <a:lnRef idx="1">
+            <a:schemeClr val="accent1"/>
+          </a:lnRef>
+          <a:fillRef idx="3">
+            <a:schemeClr val="accent1"/>
+          </a:fillRef>
+          <a:effectRef idx="2">
+            <a:schemeClr val="accent1"/>
+          </a:effectRef>
+          <a:fontRef idx="minor">
+            <a:schemeClr val="lt1"/>
+          </a:fontRef>
+        </p:style>
+        <p:txBody>
+          <a:bodyPr rtlCol="0" anchor="ctr"/>
+          <a:lstStyle/>
+          <a:p>
+            <a:pPr algn="ctr"/>
+          </a:p>
+        </p:txBody>
+      </p:sp>
+      <p:sp>
+        <p:nvSpPr>
+          <p:cNvPr id="25" name="TextBox 24"/>
+          <p:cNvSpPr txBox="1"/>
+          <p:nvPr/>
+        </p:nvSpPr>
+        <p:spPr>
+          <a:xfrm>
+            <a:off x="8046718" y="4910328"/>
+            <a:ext cx="3474720" cy="320040"/>
+          </a:xfrm>
+          <a:prstGeom prst="rect">
+            <a:avLst/>
+          </a:prstGeom>
+          <a:noFill/>
+        </p:spPr>
+        <p:txBody>
+          <a:bodyPr wrap="square" lIns="45720" rIns="45720" tIns="27432" bIns="27432" anchor="t">
+            <a:spAutoFit/>
+          </a:bodyPr>
+          <a:lstStyle/>
+          <a:p>
+            <a:pPr algn="l">
+              <a:lnSpc>
+                <a:spcPct val="115000"/>
+              </a:lnSpc>
+              <a:spcAft>
+                <a:spcPts val="0"/>
+              </a:spcAft>
+            </a:pPr>
+            <a:r>
+              <a:rPr sz="1100" b="1" i="0" spc="200">
+                <a:solidFill>
+                  <a:srgbClr val="0F1B2D"/>
+                </a:solidFill>
+                <a:latin typeface="Lato"/>
+              </a:rPr>
+              <a:t>GARANTÍA</a:t>
+            </a:r>
+          </a:p>
+        </p:txBody>
+      </p:sp>
+      <p:sp>
+        <p:nvSpPr>
+          <p:cNvPr id="26" name="TextBox 25"/>
+          <p:cNvSpPr txBox="1"/>
+          <p:nvPr/>
+        </p:nvSpPr>
+        <p:spPr>
+          <a:xfrm>
+            <a:off x="8046718" y="5230368"/>
+            <a:ext cx="3474720" cy="1097280"/>
+          </a:xfrm>
+          <a:prstGeom prst="rect">
+            <a:avLst/>
+          </a:prstGeom>
+          <a:noFill/>
+        </p:spPr>
+        <p:txBody>
+          <a:bodyPr wrap="square" lIns="45720" rIns="45720" tIns="27432" bIns="27432" anchor="t">
+            <a:spAutoFit/>
+          </a:bodyPr>
+          <a:lstStyle/>
+          <a:p>
+            <a:pPr algn="l">
+              <a:lnSpc>
+                <a:spcPct val="120000"/>
+              </a:lnSpc>
+              <a:spcAft>
+                <a:spcPts val="0"/>
+              </a:spcAft>
+            </a:pPr>
+            <a:r>
+              <a:rPr sz="1250" b="0" i="0">
+                <a:solidFill>
+                  <a:srgbClr val="2B3445"/>
+                </a:solidFill>
+                <a:latin typeface="Lato"/>
+              </a:rPr>
+              <a:t>Si cumple su parte (asistencia 80%, tareas 90%, evaluaciones) y no avanza, le devolvemos el 100% del nivel. Por escrito.</a:t>
             </a:r>
           </a:p>
         </p:txBody>
@@ -5388,7 +6598,7 @@
             <a:avLst/>
           </a:prstGeom>
           <a:solidFill>
-            <a:srgbClr val="1C1714"/>
+            <a:srgbClr val="F6F1E9"/>
           </a:solidFill>
           <a:ln>
             <a:noFill/>
@@ -5419,20 +6629,22 @@
       </p:sp>
       <p:sp>
         <p:nvSpPr>
-          <p:cNvPr id="3" name="Rectangle 2"/>
+          <p:cNvPr id="3" name="Rounded Rectangle 2"/>
           <p:cNvSpPr/>
           <p:nvPr/>
         </p:nvSpPr>
         <p:spPr>
           <a:xfrm>
-            <a:off x="0" y="0"/>
-            <a:ext cx="12191695" cy="384048"/>
-          </a:xfrm>
-          <a:prstGeom prst="rect">
-            <a:avLst/>
+            <a:off x="548640" y="384048"/>
+            <a:ext cx="1417320" cy="566928"/>
+          </a:xfrm>
+          <a:prstGeom prst="roundRect">
+            <a:avLst>
+              <a:gd name="adj" fmla="val 50000"/>
+            </a:avLst>
           </a:prstGeom>
           <a:solidFill>
-            <a:srgbClr val="FF4A00"/>
+            <a:srgbClr val="0F1B2D"/>
           </a:solidFill>
           <a:ln>
             <a:noFill/>
@@ -5461,16 +6673,40 @@
           </a:p>
         </p:txBody>
       </p:sp>
-      <p:sp>
-        <p:nvSpPr>
-          <p:cNvPr id="4" name="TextBox 3"/>
+      <p:pic>
+        <p:nvPicPr>
+          <p:cNvPr id="4" name="Picture 3" descr="logo_heiiu_transparente.png"/>
+          <p:cNvPicPr>
+            <a:picLocks noChangeAspect="1"/>
+          </p:cNvPicPr>
+          <p:nvPr/>
+        </p:nvPicPr>
+        <p:blipFill>
+          <a:blip r:embed="rId2"/>
+          <a:stretch>
+            <a:fillRect/>
+          </a:stretch>
+        </p:blipFill>
+        <p:spPr>
+          <a:xfrm>
+            <a:off x="731520" y="457200"/>
+            <a:ext cx="747979" cy="420624"/>
+          </a:xfrm>
+          <a:prstGeom prst="rect">
+            <a:avLst/>
+          </a:prstGeom>
+        </p:spPr>
+      </p:pic>
+      <p:sp>
+        <p:nvSpPr>
+          <p:cNvPr id="5" name="TextBox 4"/>
           <p:cNvSpPr txBox="1"/>
           <p:nvPr/>
         </p:nvSpPr>
         <p:spPr>
           <a:xfrm>
-            <a:off x="502920" y="36576"/>
-            <a:ext cx="5486400" cy="329184"/>
+            <a:off x="9418320" y="384048"/>
+            <a:ext cx="2286000" cy="566928"/>
           </a:xfrm>
           <a:prstGeom prst="rect">
             <a:avLst/>
@@ -5479,6 +6715,48 @@
         </p:spPr>
         <p:txBody>
           <a:bodyPr wrap="square" lIns="45720" rIns="45720" tIns="27432" bIns="27432" anchor="ctr">
+            <a:spAutoFit/>
+          </a:bodyPr>
+          <a:lstStyle/>
+          <a:p>
+            <a:pPr algn="r">
+              <a:lnSpc>
+                <a:spcPct val="115000"/>
+              </a:lnSpc>
+              <a:spcAft>
+                <a:spcPts val="0"/>
+              </a:spcAft>
+            </a:pPr>
+            <a:r>
+              <a:rPr sz="1200" b="0" i="0">
+                <a:solidFill>
+                  <a:srgbClr val="7A828F"/>
+                </a:solidFill>
+                <a:latin typeface="Oswald"/>
+              </a:rPr>
+              <a:t>4 / 7</a:t>
+            </a:r>
+          </a:p>
+        </p:txBody>
+      </p:sp>
+      <p:sp>
+        <p:nvSpPr>
+          <p:cNvPr id="6" name="TextBox 5"/>
+          <p:cNvSpPr txBox="1"/>
+          <p:nvPr/>
+        </p:nvSpPr>
+        <p:spPr>
+          <a:xfrm>
+            <a:off x="548640" y="1234440"/>
+            <a:ext cx="7315200" cy="320040"/>
+          </a:xfrm>
+          <a:prstGeom prst="rect">
+            <a:avLst/>
+          </a:prstGeom>
+          <a:noFill/>
+        </p:spPr>
+        <p:txBody>
+          <a:bodyPr wrap="square" lIns="45720" rIns="45720" tIns="27432" bIns="27432" anchor="t">
             <a:spAutoFit/>
           </a:bodyPr>
           <a:lstStyle/>
@@ -5492,27 +6770,27 @@
               </a:spcAft>
             </a:pPr>
             <a:r>
-              <a:rPr sz="1200" b="1" i="0">
-                <a:solidFill>
-                  <a:srgbClr val="FFFFFF"/>
-                </a:solidFill>
-                <a:latin typeface="Segoe UI"/>
-              </a:rPr>
-              <a:t>4 de 6</a:t>
-            </a:r>
-          </a:p>
-        </p:txBody>
-      </p:sp>
-      <p:sp>
-        <p:nvSpPr>
-          <p:cNvPr id="5" name="TextBox 4"/>
+              <a:rPr sz="1100" b="1" i="0" spc="250">
+                <a:solidFill>
+                  <a:srgbClr val="E54C09"/>
+                </a:solidFill>
+                <a:latin typeface="Lato"/>
+              </a:rPr>
+              <a:t>OFERTA EDUCATIVA · VALOR ECONÓMICO</a:t>
+            </a:r>
+          </a:p>
+        </p:txBody>
+      </p:sp>
+      <p:sp>
+        <p:nvSpPr>
+          <p:cNvPr id="7" name="TextBox 6"/>
           <p:cNvSpPr txBox="1"/>
           <p:nvPr/>
         </p:nvSpPr>
         <p:spPr>
           <a:xfrm>
-            <a:off x="6583680" y="36576"/>
-            <a:ext cx="5120640" cy="329184"/>
+            <a:off x="548640" y="1554480"/>
+            <a:ext cx="6949440" cy="1737360"/>
           </a:xfrm>
           <a:prstGeom prst="rect">
             <a:avLst/>
@@ -5520,114 +6798,28 @@
           <a:noFill/>
         </p:spPr>
         <p:txBody>
-          <a:bodyPr wrap="square" lIns="45720" rIns="45720" tIns="27432" bIns="27432" anchor="ctr">
+          <a:bodyPr wrap="square" lIns="45720" rIns="45720" tIns="27432" bIns="27432" anchor="t">
             <a:spAutoFit/>
           </a:bodyPr>
           <a:lstStyle/>
           <a:p>
-            <a:pPr algn="r">
+            <a:pPr algn="l">
               <a:lnSpc>
-                <a:spcPct val="115000"/>
+                <a:spcPct val="108000"/>
               </a:lnSpc>
               <a:spcAft>
                 <a:spcPts val="0"/>
               </a:spcAft>
             </a:pPr>
             <a:r>
-              <a:rPr sz="1100" b="1" i="0">
-                <a:solidFill>
-                  <a:srgbClr val="FFFFFF"/>
-                </a:solidFill>
-                <a:latin typeface="Segoe UI"/>
-              </a:rPr>
-              <a:t>HEIIU ENGLISH ACADEMY · PROGRAMA PARA FONDOS DE EMPLEADOS</a:t>
-            </a:r>
-          </a:p>
-        </p:txBody>
-      </p:sp>
-      <p:sp>
-        <p:nvSpPr>
-          <p:cNvPr id="6" name="TextBox 5"/>
-          <p:cNvSpPr txBox="1"/>
-          <p:nvPr/>
-        </p:nvSpPr>
-        <p:spPr>
-          <a:xfrm>
-            <a:off x="548640" y="914400"/>
-            <a:ext cx="7223760" cy="2377440"/>
-          </a:xfrm>
-          <a:prstGeom prst="rect">
-            <a:avLst/>
-          </a:prstGeom>
-          <a:noFill/>
-        </p:spPr>
-        <p:txBody>
-          <a:bodyPr wrap="square" lIns="45720" rIns="45720" tIns="27432" bIns="27432" anchor="ctr">
-            <a:spAutoFit/>
-          </a:bodyPr>
-          <a:lstStyle/>
-          <a:p>
-            <a:pPr algn="l">
-              <a:lnSpc>
-                <a:spcPct val="105000"/>
-              </a:lnSpc>
-              <a:spcAft>
-                <a:spcPts val="0"/>
-              </a:spcAft>
-            </a:pPr>
-            <a:r>
-              <a:rPr sz="4000" b="1" i="0">
-                <a:solidFill>
-                  <a:srgbClr val="FFFFFF"/>
-                </a:solidFill>
-                <a:latin typeface="Constantia"/>
-              </a:rPr>
-              <a:t>Si el estudiante cumple y no avanza, le devolvemos el 100% del nivel.</a:t>
-            </a:r>
-          </a:p>
-        </p:txBody>
-      </p:sp>
-      <p:sp>
-        <p:nvSpPr>
-          <p:cNvPr id="7" name="Rectangle 6"/>
-          <p:cNvSpPr/>
-          <p:nvPr/>
-        </p:nvSpPr>
-        <p:spPr>
-          <a:xfrm>
-            <a:off x="594360" y="3429000"/>
-            <a:ext cx="1463040" cy="38000"/>
-          </a:xfrm>
-          <a:prstGeom prst="rect">
-            <a:avLst/>
-          </a:prstGeom>
-          <a:solidFill>
-            <a:srgbClr val="FBC900"/>
-          </a:solidFill>
-          <a:ln>
-            <a:noFill/>
-          </a:ln>
-          <a:effectLst/>
-        </p:spPr>
-        <p:style>
-          <a:lnRef idx="1">
-            <a:schemeClr val="accent1"/>
-          </a:lnRef>
-          <a:fillRef idx="3">
-            <a:schemeClr val="accent1"/>
-          </a:fillRef>
-          <a:effectRef idx="2">
-            <a:schemeClr val="accent1"/>
-          </a:effectRef>
-          <a:fontRef idx="minor">
-            <a:schemeClr val="lt1"/>
-          </a:fontRef>
-        </p:style>
-        <p:txBody>
-          <a:bodyPr rtlCol="0" anchor="ctr"/>
-          <a:lstStyle/>
-          <a:p>
-            <a:pPr algn="ctr"/>
+              <a:rPr sz="3400" b="1" i="0">
+                <a:solidFill>
+                  <a:srgbClr val="0F1B2D"/>
+                </a:solidFill>
+                <a:latin typeface="Lato Black"/>
+              </a:rPr>
+              <a:t>El afiliado paga la mitad por venir con carta del fondo.</a:t>
+            </a:r>
           </a:p>
         </p:txBody>
       </p:sp>
@@ -5639,243 +6831,8 @@
         </p:nvSpPr>
         <p:spPr>
           <a:xfrm>
-            <a:off x="548640" y="3657600"/>
-            <a:ext cx="7223760" cy="2468880"/>
-          </a:xfrm>
-          <a:prstGeom prst="rect">
-            <a:avLst/>
-          </a:prstGeom>
-          <a:noFill/>
-        </p:spPr>
-        <p:txBody>
-          <a:bodyPr wrap="square" lIns="45720" rIns="45720" tIns="27432" bIns="27432" anchor="t">
-            <a:spAutoFit/>
-          </a:bodyPr>
-          <a:lstStyle/>
-          <a:p>
-            <a:pPr algn="l">
-              <a:lnSpc>
-                <a:spcPct val="115000"/>
-              </a:lnSpc>
-              <a:spcAft>
-                <a:spcPts val="1000"/>
-              </a:spcAft>
-            </a:pPr>
-            <a:r>
-              <a:rPr sz="2200" b="1" i="0">
-                <a:solidFill>
-                  <a:srgbClr val="FBC900"/>
-                </a:solidFill>
-                <a:latin typeface="Segoe UI"/>
-              </a:rPr>
-              <a:t>▪ </a:t>
-            </a:r>
-            <a:r>
-              <a:rPr sz="2200" b="0" i="0">
-                <a:solidFill>
-                  <a:srgbClr val="FFF8E7"/>
-                </a:solidFill>
-                <a:latin typeface="Segoe UI"/>
-              </a:rPr>
-              <a:t>Garantía por escrito, en el contrato de cada afiliado.</a:t>
-            </a:r>
-          </a:p>
-          <a:p>
-            <a:pPr algn="l">
-              <a:lnSpc>
-                <a:spcPct val="115000"/>
-              </a:lnSpc>
-              <a:spcAft>
-                <a:spcPts val="1000"/>
-              </a:spcAft>
-            </a:pPr>
-            <a:r>
-              <a:rPr sz="2200" b="1" i="0">
-                <a:solidFill>
-                  <a:srgbClr val="FBC900"/>
-                </a:solidFill>
-                <a:latin typeface="Segoe UI"/>
-              </a:rPr>
-              <a:t>▪ </a:t>
-            </a:r>
-            <a:r>
-              <a:rPr sz="2200" b="0" i="0">
-                <a:solidFill>
-                  <a:srgbClr val="FFF8E7"/>
-                </a:solidFill>
-                <a:latin typeface="Segoe UI"/>
-              </a:rPr>
-              <a:t>El fondo no paga, no cobra ni gestiona nada: cada afiliado contrata directo con la academia.</a:t>
-            </a:r>
-          </a:p>
-          <a:p>
-            <a:pPr algn="l">
-              <a:lnSpc>
-                <a:spcPct val="115000"/>
-              </a:lnSpc>
-              <a:spcAft>
-                <a:spcPts val="1000"/>
-              </a:spcAft>
-            </a:pPr>
-            <a:r>
-              <a:rPr sz="2200" b="1" i="0">
-                <a:solidFill>
-                  <a:srgbClr val="FBC900"/>
-                </a:solidFill>
-                <a:latin typeface="Segoe UI"/>
-              </a:rPr>
-              <a:t>▪ </a:t>
-            </a:r>
-            <a:r>
-              <a:rPr sz="2200" b="0" i="0">
-                <a:solidFill>
-                  <a:srgbClr val="FFF8E7"/>
-                </a:solidFill>
-                <a:latin typeface="Segoe UI"/>
-              </a:rPr>
-              <a:t>El convenio se termina con aviso de 30 días, sin afectar a los ya matriculados.</a:t>
-            </a:r>
-          </a:p>
-        </p:txBody>
-      </p:sp>
-      <p:sp>
-        <p:nvSpPr>
-          <p:cNvPr id="9" name="Rectangle 8"/>
-          <p:cNvSpPr/>
-          <p:nvPr/>
-        </p:nvSpPr>
-        <p:spPr>
-          <a:xfrm>
-            <a:off x="8138160" y="914400"/>
-            <a:ext cx="3566160" cy="5120640"/>
-          </a:xfrm>
-          <a:prstGeom prst="rect">
-            <a:avLst/>
-          </a:prstGeom>
-          <a:solidFill>
-            <a:srgbClr val="FF4A00"/>
-          </a:solidFill>
-          <a:ln>
-            <a:noFill/>
-          </a:ln>
-          <a:effectLst/>
-        </p:spPr>
-        <p:style>
-          <a:lnRef idx="1">
-            <a:schemeClr val="accent1"/>
-          </a:lnRef>
-          <a:fillRef idx="3">
-            <a:schemeClr val="accent1"/>
-          </a:fillRef>
-          <a:effectRef idx="2">
-            <a:schemeClr val="accent1"/>
-          </a:effectRef>
-          <a:fontRef idx="minor">
-            <a:schemeClr val="lt1"/>
-          </a:fontRef>
-        </p:style>
-        <p:txBody>
-          <a:bodyPr rtlCol="0" anchor="ctr"/>
-          <a:lstStyle/>
-          <a:p>
-            <a:pPr algn="ctr"/>
-          </a:p>
-        </p:txBody>
-      </p:sp>
-      <p:sp>
-        <p:nvSpPr>
-          <p:cNvPr id="10" name="TextBox 9"/>
-          <p:cNvSpPr txBox="1"/>
-          <p:nvPr/>
-        </p:nvSpPr>
-        <p:spPr>
-          <a:xfrm>
-            <a:off x="8229600" y="1280160"/>
-            <a:ext cx="3383280" cy="2377440"/>
-          </a:xfrm>
-          <a:prstGeom prst="rect">
-            <a:avLst/>
-          </a:prstGeom>
-          <a:noFill/>
-        </p:spPr>
-        <p:txBody>
-          <a:bodyPr wrap="square" lIns="45720" rIns="45720" tIns="27432" bIns="27432" anchor="ctr">
-            <a:spAutoFit/>
-          </a:bodyPr>
-          <a:lstStyle/>
-          <a:p>
-            <a:pPr algn="ctr">
-              <a:lnSpc>
-                <a:spcPct val="100000"/>
-              </a:lnSpc>
-              <a:spcAft>
-                <a:spcPts val="0"/>
-              </a:spcAft>
-            </a:pPr>
-            <a:r>
-              <a:rPr sz="6400" b="1" i="0">
-                <a:solidFill>
-                  <a:srgbClr val="FFFFFF"/>
-                </a:solidFill>
-                <a:latin typeface="Constantia"/>
-              </a:rPr>
-              <a:t>100%</a:t>
-            </a:r>
-          </a:p>
-        </p:txBody>
-      </p:sp>
-      <p:sp>
-        <p:nvSpPr>
-          <p:cNvPr id="11" name="TextBox 10"/>
-          <p:cNvSpPr txBox="1"/>
-          <p:nvPr/>
-        </p:nvSpPr>
-        <p:spPr>
-          <a:xfrm>
-            <a:off x="8321040" y="3749039"/>
-            <a:ext cx="3200400" cy="2103120"/>
-          </a:xfrm>
-          <a:prstGeom prst="rect">
-            <a:avLst/>
-          </a:prstGeom>
-          <a:noFill/>
-        </p:spPr>
-        <p:txBody>
-          <a:bodyPr wrap="square" lIns="45720" rIns="45720" tIns="27432" bIns="27432" anchor="t">
-            <a:spAutoFit/>
-          </a:bodyPr>
-          <a:lstStyle/>
-          <a:p>
-            <a:pPr algn="ctr">
-              <a:lnSpc>
-                <a:spcPct val="120000"/>
-              </a:lnSpc>
-              <a:spcAft>
-                <a:spcPts val="0"/>
-              </a:spcAft>
-            </a:pPr>
-            <a:r>
-              <a:rPr sz="1800" b="0" i="0">
-                <a:solidFill>
-                  <a:srgbClr val="FFFFFF"/>
-                </a:solidFill>
-                <a:latin typeface="Segoe UI"/>
-              </a:rPr>
-              <a:t>del nivel devuelto si cumple asistencia, tareas y evaluaciones y no avanza. Por escrito.</a:t>
-            </a:r>
-          </a:p>
-        </p:txBody>
-      </p:sp>
-      <p:sp>
-        <p:nvSpPr>
-          <p:cNvPr id="12" name="TextBox 11"/>
-          <p:cNvSpPr txBox="1"/>
-          <p:nvPr/>
-        </p:nvSpPr>
-        <p:spPr>
-          <a:xfrm>
-            <a:off x="502920" y="6355080"/>
-            <a:ext cx="11155680" cy="365760"/>
+            <a:off x="548640" y="6400800"/>
+            <a:ext cx="11155680" cy="320040"/>
           </a:xfrm>
           <a:prstGeom prst="rect">
             <a:avLst/>
@@ -5897,13 +6854,321 @@
               </a:spcAft>
             </a:pPr>
             <a:r>
-              <a:rPr sz="1000" b="0" i="0">
-                <a:solidFill>
-                  <a:srgbClr val="C9B8A3"/>
-                </a:solidFill>
-                <a:latin typeface="Segoe UI"/>
-              </a:rPr>
-              <a:t>Línea de alianzas 316 768 8793 · Carrera 27 # 48-49, Sotomayor, Bucaramanga</a:t>
+              <a:rPr sz="950" b="0" i="0">
+                <a:solidFill>
+                  <a:srgbClr val="7A828F"/>
+                </a:solidFill>
+                <a:latin typeface="Lato"/>
+              </a:rPr>
+              <a:t>Heiiu English Academy · Línea de alianzas 316 768 8793 · Carrera 27 # 48-49, Sotomayor, Bucaramanga</a:t>
+            </a:r>
+          </a:p>
+        </p:txBody>
+      </p:sp>
+      <p:sp>
+        <p:nvSpPr>
+          <p:cNvPr id="9" name="TextBox 8"/>
+          <p:cNvSpPr txBox="1"/>
+          <p:nvPr/>
+        </p:nvSpPr>
+        <p:spPr>
+          <a:xfrm>
+            <a:off x="548640" y="3383280"/>
+            <a:ext cx="7132320" cy="2926080"/>
+          </a:xfrm>
+          <a:prstGeom prst="rect">
+            <a:avLst/>
+          </a:prstGeom>
+          <a:noFill/>
+        </p:spPr>
+        <p:txBody>
+          <a:bodyPr wrap="square" lIns="45720" rIns="45720" tIns="27432" bIns="27432" anchor="t">
+            <a:spAutoFit/>
+          </a:bodyPr>
+          <a:lstStyle/>
+          <a:p>
+            <a:pPr algn="l">
+              <a:lnSpc>
+                <a:spcPct val="118000"/>
+              </a:lnSpc>
+              <a:spcAft>
+                <a:spcPts val="900"/>
+              </a:spcAft>
+            </a:pPr>
+            <a:r>
+              <a:rPr sz="1500" b="1" i="0">
+                <a:solidFill>
+                  <a:srgbClr val="E54C09"/>
+                </a:solidFill>
+                <a:latin typeface="Lato"/>
+              </a:rPr>
+              <a:t>—  </a:t>
+            </a:r>
+            <a:r>
+              <a:rPr sz="1500" b="1" i="0">
+                <a:solidFill>
+                  <a:srgbClr val="2B3445"/>
+                </a:solidFill>
+                <a:latin typeface="Lato"/>
+              </a:rPr>
+              <a:t>De contado: $4.782.800 </a:t>
+            </a:r>
+            <a:r>
+              <a:rPr sz="1500" b="0" i="0">
+                <a:solidFill>
+                  <a:srgbClr val="2B3445"/>
+                </a:solidFill>
+                <a:latin typeface="Lato"/>
+              </a:rPr>
+              <a:t>en lugar de $8.696.000 (beca del 45%). Crédito del fondo o cesantías cuentan como contado.</a:t>
+            </a:r>
+          </a:p>
+          <a:p>
+            <a:pPr algn="l">
+              <a:lnSpc>
+                <a:spcPct val="118000"/>
+              </a:lnSpc>
+              <a:spcAft>
+                <a:spcPts val="900"/>
+              </a:spcAft>
+            </a:pPr>
+            <a:r>
+              <a:rPr sz="1500" b="1" i="0">
+                <a:solidFill>
+                  <a:srgbClr val="E54C09"/>
+                </a:solidFill>
+                <a:latin typeface="Lato"/>
+              </a:rPr>
+              <a:t>—  </a:t>
+            </a:r>
+            <a:r>
+              <a:rPr sz="1500" b="1" i="0">
+                <a:solidFill>
+                  <a:srgbClr val="2B3445"/>
+                </a:solidFill>
+                <a:latin typeface="Lato"/>
+              </a:rPr>
+              <a:t>A cuotas con la academia: $5.565.440 </a:t>
+            </a:r>
+            <a:r>
+              <a:rPr sz="1500" b="0" i="0">
+                <a:solidFill>
+                  <a:srgbClr val="2B3445"/>
+                </a:solidFill>
+                <a:latin typeface="Lato"/>
+              </a:rPr>
+              <a:t>(beca del 36%). Ejemplo: $1.113.088 hoy y 11 cuotas de $452.348.</a:t>
+            </a:r>
+          </a:p>
+          <a:p>
+            <a:pPr algn="l">
+              <a:lnSpc>
+                <a:spcPct val="118000"/>
+              </a:lnSpc>
+              <a:spcAft>
+                <a:spcPts val="900"/>
+              </a:spcAft>
+            </a:pPr>
+            <a:r>
+              <a:rPr sz="1500" b="1" i="0">
+                <a:solidFill>
+                  <a:srgbClr val="E54C09"/>
+                </a:solidFill>
+                <a:latin typeface="Lato"/>
+              </a:rPr>
+              <a:t>—  </a:t>
+            </a:r>
+            <a:r>
+              <a:rPr sz="1500" b="1" i="0">
+                <a:solidFill>
+                  <a:srgbClr val="2B3445"/>
+                </a:solidFill>
+                <a:latin typeface="Lato"/>
+              </a:rPr>
+              <a:t>Beca con el nombre del fondo: </a:t>
+            </a:r>
+            <a:r>
+              <a:rPr sz="1500" b="0" i="0">
+                <a:solidFill>
+                  <a:srgbClr val="2B3445"/>
+                </a:solidFill>
+                <a:latin typeface="Lato"/>
+              </a:rPr>
+              <a:t>3 afiliados por trimestre reciben el 45% aunque paguen a cuotas, más los libros. Si todos cumplen, suben a 5.</a:t>
+            </a:r>
+          </a:p>
+        </p:txBody>
+      </p:sp>
+      <p:sp>
+        <p:nvSpPr>
+          <p:cNvPr id="10" name="Rounded Rectangle 9"/>
+          <p:cNvSpPr/>
+          <p:nvPr/>
+        </p:nvSpPr>
+        <p:spPr>
+          <a:xfrm>
+            <a:off x="8138160" y="1234440"/>
+            <a:ext cx="3520440" cy="4846320"/>
+          </a:xfrm>
+          <a:prstGeom prst="roundRect">
+            <a:avLst>
+              <a:gd name="adj" fmla="val 6000"/>
+            </a:avLst>
+          </a:prstGeom>
+          <a:solidFill>
+            <a:srgbClr val="0F1B2D"/>
+          </a:solidFill>
+          <a:ln>
+            <a:noFill/>
+          </a:ln>
+          <a:effectLst/>
+        </p:spPr>
+        <p:style>
+          <a:lnRef idx="1">
+            <a:schemeClr val="accent1"/>
+          </a:lnRef>
+          <a:fillRef idx="3">
+            <a:schemeClr val="accent1"/>
+          </a:fillRef>
+          <a:effectRef idx="2">
+            <a:schemeClr val="accent1"/>
+          </a:effectRef>
+          <a:fontRef idx="minor">
+            <a:schemeClr val="lt1"/>
+          </a:fontRef>
+        </p:style>
+        <p:txBody>
+          <a:bodyPr rtlCol="0" anchor="ctr"/>
+          <a:lstStyle/>
+          <a:p>
+            <a:pPr algn="ctr"/>
+          </a:p>
+        </p:txBody>
+      </p:sp>
+      <p:sp>
+        <p:nvSpPr>
+          <p:cNvPr id="11" name="Rectangle 10"/>
+          <p:cNvSpPr/>
+          <p:nvPr/>
+        </p:nvSpPr>
+        <p:spPr>
+          <a:xfrm>
+            <a:off x="8458200" y="1554480"/>
+            <a:ext cx="548640" cy="30000"/>
+          </a:xfrm>
+          <a:prstGeom prst="rect">
+            <a:avLst/>
+          </a:prstGeom>
+          <a:solidFill>
+            <a:srgbClr val="E54C09"/>
+          </a:solidFill>
+          <a:ln>
+            <a:noFill/>
+          </a:ln>
+          <a:effectLst/>
+        </p:spPr>
+        <p:style>
+          <a:lnRef idx="1">
+            <a:schemeClr val="accent1"/>
+          </a:lnRef>
+          <a:fillRef idx="3">
+            <a:schemeClr val="accent1"/>
+          </a:fillRef>
+          <a:effectRef idx="2">
+            <a:schemeClr val="accent1"/>
+          </a:effectRef>
+          <a:fontRef idx="minor">
+            <a:schemeClr val="lt1"/>
+          </a:fontRef>
+        </p:style>
+        <p:txBody>
+          <a:bodyPr rtlCol="0" anchor="ctr"/>
+          <a:lstStyle/>
+          <a:p>
+            <a:pPr algn="ctr"/>
+          </a:p>
+        </p:txBody>
+      </p:sp>
+      <p:sp>
+        <p:nvSpPr>
+          <p:cNvPr id="12" name="TextBox 11"/>
+          <p:cNvSpPr txBox="1"/>
+          <p:nvPr/>
+        </p:nvSpPr>
+        <p:spPr>
+          <a:xfrm>
+            <a:off x="8366760" y="1874520"/>
+            <a:ext cx="3063240" cy="2194560"/>
+          </a:xfrm>
+          <a:prstGeom prst="rect">
+            <a:avLst/>
+          </a:prstGeom>
+          <a:noFill/>
+        </p:spPr>
+        <p:txBody>
+          <a:bodyPr wrap="square" lIns="45720" rIns="45720" tIns="27432" bIns="27432" anchor="ctr">
+            <a:spAutoFit/>
+          </a:bodyPr>
+          <a:lstStyle/>
+          <a:p>
+            <a:pPr algn="l">
+              <a:lnSpc>
+                <a:spcPct val="100000"/>
+              </a:lnSpc>
+              <a:spcAft>
+                <a:spcPts val="0"/>
+              </a:spcAft>
+            </a:pPr>
+            <a:r>
+              <a:rPr sz="4800" b="0" i="0">
+                <a:solidFill>
+                  <a:srgbClr val="FBC900"/>
+                </a:solidFill>
+                <a:latin typeface="Oswald"/>
+              </a:rPr>
+              <a:t>$3.913.200</a:t>
+            </a:r>
+          </a:p>
+        </p:txBody>
+      </p:sp>
+      <p:sp>
+        <p:nvSpPr>
+          <p:cNvPr id="13" name="TextBox 12"/>
+          <p:cNvSpPr txBox="1"/>
+          <p:nvPr/>
+        </p:nvSpPr>
+        <p:spPr>
+          <a:xfrm>
+            <a:off x="8458200" y="4160520"/>
+            <a:ext cx="2880360" cy="1737360"/>
+          </a:xfrm>
+          <a:prstGeom prst="rect">
+            <a:avLst/>
+          </a:prstGeom>
+          <a:noFill/>
+        </p:spPr>
+        <p:txBody>
+          <a:bodyPr wrap="square" lIns="45720" rIns="45720" tIns="27432" bIns="27432" anchor="t">
+            <a:spAutoFit/>
+          </a:bodyPr>
+          <a:lstStyle/>
+          <a:p>
+            <a:pPr algn="l">
+              <a:lnSpc>
+                <a:spcPct val="125000"/>
+              </a:lnSpc>
+              <a:spcAft>
+                <a:spcPts val="0"/>
+              </a:spcAft>
+            </a:pPr>
+            <a:r>
+              <a:rPr sz="1500" b="0" i="0">
+                <a:solidFill>
+                  <a:srgbClr val="F6F1E9"/>
+                </a:solidFill>
+                <a:latin typeface="Lato"/>
+              </a:rPr>
+              <a:t>menos por afiliado sobre el programa completo. Es beca del Fondo de Becas Heiiu, no un descuento: misma tarifa y misma garantía para todos.</a:t>
             </a:r>
           </a:p>
         </p:txBody>
@@ -5941,7 +7206,7 @@
             <a:avLst/>
           </a:prstGeom>
           <a:solidFill>
-            <a:srgbClr val="FFF8E7"/>
+            <a:srgbClr val="F6F1E9"/>
           </a:solidFill>
           <a:ln>
             <a:noFill/>
@@ -5972,20 +7237,22 @@
       </p:sp>
       <p:sp>
         <p:nvSpPr>
-          <p:cNvPr id="3" name="Rectangle 2"/>
+          <p:cNvPr id="3" name="Rounded Rectangle 2"/>
           <p:cNvSpPr/>
           <p:nvPr/>
         </p:nvSpPr>
         <p:spPr>
           <a:xfrm>
-            <a:off x="0" y="0"/>
-            <a:ext cx="12191695" cy="384048"/>
-          </a:xfrm>
-          <a:prstGeom prst="rect">
-            <a:avLst/>
+            <a:off x="548640" y="384048"/>
+            <a:ext cx="1417320" cy="566928"/>
+          </a:xfrm>
+          <a:prstGeom prst="roundRect">
+            <a:avLst>
+              <a:gd name="adj" fmla="val 50000"/>
+            </a:avLst>
           </a:prstGeom>
           <a:solidFill>
-            <a:srgbClr val="FF4A00"/>
+            <a:srgbClr val="0F1B2D"/>
           </a:solidFill>
           <a:ln>
             <a:noFill/>
@@ -6014,16 +7281,40 @@
           </a:p>
         </p:txBody>
       </p:sp>
-      <p:sp>
-        <p:nvSpPr>
-          <p:cNvPr id="4" name="TextBox 3"/>
+      <p:pic>
+        <p:nvPicPr>
+          <p:cNvPr id="4" name="Picture 3" descr="logo_heiiu_transparente.png"/>
+          <p:cNvPicPr>
+            <a:picLocks noChangeAspect="1"/>
+          </p:cNvPicPr>
+          <p:nvPr/>
+        </p:nvPicPr>
+        <p:blipFill>
+          <a:blip r:embed="rId2"/>
+          <a:stretch>
+            <a:fillRect/>
+          </a:stretch>
+        </p:blipFill>
+        <p:spPr>
+          <a:xfrm>
+            <a:off x="731520" y="457200"/>
+            <a:ext cx="747979" cy="420624"/>
+          </a:xfrm>
+          <a:prstGeom prst="rect">
+            <a:avLst/>
+          </a:prstGeom>
+        </p:spPr>
+      </p:pic>
+      <p:sp>
+        <p:nvSpPr>
+          <p:cNvPr id="5" name="TextBox 4"/>
           <p:cNvSpPr txBox="1"/>
           <p:nvPr/>
         </p:nvSpPr>
         <p:spPr>
           <a:xfrm>
-            <a:off x="502920" y="36576"/>
-            <a:ext cx="5486400" cy="329184"/>
+            <a:off x="9418320" y="384048"/>
+            <a:ext cx="2286000" cy="566928"/>
           </a:xfrm>
           <a:prstGeom prst="rect">
             <a:avLst/>
@@ -6032,6 +7323,48 @@
         </p:spPr>
         <p:txBody>
           <a:bodyPr wrap="square" lIns="45720" rIns="45720" tIns="27432" bIns="27432" anchor="ctr">
+            <a:spAutoFit/>
+          </a:bodyPr>
+          <a:lstStyle/>
+          <a:p>
+            <a:pPr algn="r">
+              <a:lnSpc>
+                <a:spcPct val="115000"/>
+              </a:lnSpc>
+              <a:spcAft>
+                <a:spcPts val="0"/>
+              </a:spcAft>
+            </a:pPr>
+            <a:r>
+              <a:rPr sz="1200" b="0" i="0">
+                <a:solidFill>
+                  <a:srgbClr val="7A828F"/>
+                </a:solidFill>
+                <a:latin typeface="Oswald"/>
+              </a:rPr>
+              <a:t>5 / 7</a:t>
+            </a:r>
+          </a:p>
+        </p:txBody>
+      </p:sp>
+      <p:sp>
+        <p:nvSpPr>
+          <p:cNvPr id="6" name="TextBox 5"/>
+          <p:cNvSpPr txBox="1"/>
+          <p:nvPr/>
+        </p:nvSpPr>
+        <p:spPr>
+          <a:xfrm>
+            <a:off x="548640" y="1234440"/>
+            <a:ext cx="7315200" cy="320040"/>
+          </a:xfrm>
+          <a:prstGeom prst="rect">
+            <a:avLst/>
+          </a:prstGeom>
+          <a:noFill/>
+        </p:spPr>
+        <p:txBody>
+          <a:bodyPr wrap="square" lIns="45720" rIns="45720" tIns="27432" bIns="27432" anchor="t">
             <a:spAutoFit/>
           </a:bodyPr>
           <a:lstStyle/>
@@ -6045,27 +7378,27 @@
               </a:spcAft>
             </a:pPr>
             <a:r>
-              <a:rPr sz="1200" b="1" i="0">
-                <a:solidFill>
-                  <a:srgbClr val="FFFFFF"/>
-                </a:solidFill>
-                <a:latin typeface="Segoe UI"/>
-              </a:rPr>
-              <a:t>5 de 6</a:t>
-            </a:r>
-          </a:p>
-        </p:txBody>
-      </p:sp>
-      <p:sp>
-        <p:nvSpPr>
-          <p:cNvPr id="5" name="TextBox 4"/>
+              <a:rPr sz="1100" b="1" i="0" spc="250">
+                <a:solidFill>
+                  <a:srgbClr val="E54C09"/>
+                </a:solidFill>
+                <a:latin typeface="Lato"/>
+              </a:rPr>
+              <a:t>BENEFICIOS · ¿QUÉ GANO YO?</a:t>
+            </a:r>
+          </a:p>
+        </p:txBody>
+      </p:sp>
+      <p:sp>
+        <p:nvSpPr>
+          <p:cNvPr id="7" name="TextBox 6"/>
           <p:cNvSpPr txBox="1"/>
           <p:nvPr/>
         </p:nvSpPr>
         <p:spPr>
           <a:xfrm>
-            <a:off x="6583680" y="36576"/>
-            <a:ext cx="5120640" cy="329184"/>
+            <a:off x="548640" y="1554480"/>
+            <a:ext cx="10515600" cy="1737360"/>
           </a:xfrm>
           <a:prstGeom prst="rect">
             <a:avLst/>
@@ -6073,114 +7406,28 @@
           <a:noFill/>
         </p:spPr>
         <p:txBody>
-          <a:bodyPr wrap="square" lIns="45720" rIns="45720" tIns="27432" bIns="27432" anchor="ctr">
+          <a:bodyPr wrap="square" lIns="45720" rIns="45720" tIns="27432" bIns="27432" anchor="t">
             <a:spAutoFit/>
           </a:bodyPr>
           <a:lstStyle/>
           <a:p>
-            <a:pPr algn="r">
+            <a:pPr algn="l">
               <a:lnSpc>
-                <a:spcPct val="115000"/>
+                <a:spcPct val="108000"/>
               </a:lnSpc>
               <a:spcAft>
                 <a:spcPts val="0"/>
               </a:spcAft>
             </a:pPr>
             <a:r>
-              <a:rPr sz="1100" b="1" i="0">
-                <a:solidFill>
-                  <a:srgbClr val="FFFFFF"/>
-                </a:solidFill>
-                <a:latin typeface="Segoe UI"/>
-              </a:rPr>
-              <a:t>HEIIU ENGLISH ACADEMY · PROGRAMA PARA FONDOS DE EMPLEADOS</a:t>
-            </a:r>
-          </a:p>
-        </p:txBody>
-      </p:sp>
-      <p:sp>
-        <p:nvSpPr>
-          <p:cNvPr id="6" name="TextBox 5"/>
-          <p:cNvSpPr txBox="1"/>
-          <p:nvPr/>
-        </p:nvSpPr>
-        <p:spPr>
-          <a:xfrm>
-            <a:off x="548640" y="914400"/>
-            <a:ext cx="11155680" cy="2377440"/>
-          </a:xfrm>
-          <a:prstGeom prst="rect">
-            <a:avLst/>
-          </a:prstGeom>
-          <a:noFill/>
-        </p:spPr>
-        <p:txBody>
-          <a:bodyPr wrap="square" lIns="45720" rIns="45720" tIns="27432" bIns="27432" anchor="ctr">
-            <a:spAutoFit/>
-          </a:bodyPr>
-          <a:lstStyle/>
-          <a:p>
-            <a:pPr algn="l">
-              <a:lnSpc>
-                <a:spcPct val="105000"/>
-              </a:lnSpc>
-              <a:spcAft>
-                <a:spcPts val="0"/>
-              </a:spcAft>
-            </a:pPr>
-            <a:r>
-              <a:rPr sz="4000" b="1" i="0">
-                <a:solidFill>
-                  <a:srgbClr val="E54C09"/>
-                </a:solidFill>
-                <a:latin typeface="Constantia"/>
-              </a:rPr>
-              <a:t>Un beneficio nuevo con su nombre, sin presupuesto y con reporte.</a:t>
-            </a:r>
-          </a:p>
-        </p:txBody>
-      </p:sp>
-      <p:sp>
-        <p:nvSpPr>
-          <p:cNvPr id="7" name="Rectangle 6"/>
-          <p:cNvSpPr/>
-          <p:nvPr/>
-        </p:nvSpPr>
-        <p:spPr>
-          <a:xfrm>
-            <a:off x="594360" y="3429000"/>
-            <a:ext cx="1463040" cy="38000"/>
-          </a:xfrm>
-          <a:prstGeom prst="rect">
-            <a:avLst/>
-          </a:prstGeom>
-          <a:solidFill>
-            <a:srgbClr val="FBC900"/>
-          </a:solidFill>
-          <a:ln>
-            <a:noFill/>
-          </a:ln>
-          <a:effectLst/>
-        </p:spPr>
-        <p:style>
-          <a:lnRef idx="1">
-            <a:schemeClr val="accent1"/>
-          </a:lnRef>
-          <a:fillRef idx="3">
-            <a:schemeClr val="accent1"/>
-          </a:fillRef>
-          <a:effectRef idx="2">
-            <a:schemeClr val="accent1"/>
-          </a:effectRef>
-          <a:fontRef idx="minor">
-            <a:schemeClr val="lt1"/>
-          </a:fontRef>
-        </p:style>
-        <p:txBody>
-          <a:bodyPr rtlCol="0" anchor="ctr"/>
-          <a:lstStyle/>
-          <a:p>
-            <a:pPr algn="ctr"/>
+              <a:rPr sz="3400" b="1" i="0">
+                <a:solidFill>
+                  <a:srgbClr val="0F1B2D"/>
+                </a:solidFill>
+                <a:latin typeface="Lato Black"/>
+              </a:rPr>
+              <a:t>El fondo gana un beneficio con su nombre. El afiliado gana un inglés que le sirve.</a:t>
+            </a:r>
           </a:p>
         </p:txBody>
       </p:sp>
@@ -6192,115 +7439,8 @@
         </p:nvSpPr>
         <p:spPr>
           <a:xfrm>
-            <a:off x="548640" y="3657600"/>
-            <a:ext cx="11155680" cy="2468880"/>
-          </a:xfrm>
-          <a:prstGeom prst="rect">
-            <a:avLst/>
-          </a:prstGeom>
-          <a:noFill/>
-        </p:spPr>
-        <p:txBody>
-          <a:bodyPr wrap="square" lIns="45720" rIns="45720" tIns="27432" bIns="27432" anchor="t">
-            <a:spAutoFit/>
-          </a:bodyPr>
-          <a:lstStyle/>
-          <a:p>
-            <a:pPr algn="l">
-              <a:lnSpc>
-                <a:spcPct val="115000"/>
-              </a:lnSpc>
-              <a:spcAft>
-                <a:spcPts val="1000"/>
-              </a:spcAft>
-            </a:pPr>
-            <a:r>
-              <a:rPr sz="2200" b="1" i="0">
-                <a:solidFill>
-                  <a:srgbClr val="E54C09"/>
-                </a:solidFill>
-                <a:latin typeface="Segoe UI"/>
-              </a:rPr>
-              <a:t>▪ </a:t>
-            </a:r>
-            <a:r>
-              <a:rPr sz="2200" b="0" i="0">
-                <a:solidFill>
-                  <a:srgbClr val="222222"/>
-                </a:solidFill>
-                <a:latin typeface="Segoe UI"/>
-              </a:rPr>
-              <a:t>Becas y certificados con el nombre del fondo, entregados en su propio evento.</a:t>
-            </a:r>
-          </a:p>
-          <a:p>
-            <a:pPr algn="l">
-              <a:lnSpc>
-                <a:spcPct val="115000"/>
-              </a:lnSpc>
-              <a:spcAft>
-                <a:spcPts val="1000"/>
-              </a:spcAft>
-            </a:pPr>
-            <a:r>
-              <a:rPr sz="2200" b="1" i="0">
-                <a:solidFill>
-                  <a:srgbClr val="E54C09"/>
-                </a:solidFill>
-                <a:latin typeface="Segoe UI"/>
-              </a:rPr>
-              <a:t>▪ </a:t>
-            </a:r>
-            <a:r>
-              <a:rPr sz="2200" b="0" i="0">
-                <a:solidFill>
-                  <a:srgbClr val="222222"/>
-                </a:solidFill>
-                <a:latin typeface="Segoe UI"/>
-              </a:rPr>
-              <a:t>Reporte de asistencia y cumplimiento de cada becado: el fondo ve quién cumple.</a:t>
-            </a:r>
-          </a:p>
-          <a:p>
-            <a:pPr algn="l">
-              <a:lnSpc>
-                <a:spcPct val="115000"/>
-              </a:lnSpc>
-              <a:spcAft>
-                <a:spcPts val="1000"/>
-              </a:spcAft>
-            </a:pPr>
-            <a:r>
-              <a:rPr sz="2200" b="1" i="0">
-                <a:solidFill>
-                  <a:srgbClr val="E54C09"/>
-                </a:solidFill>
-                <a:latin typeface="Segoe UI"/>
-              </a:rPr>
-              <a:t>▪ </a:t>
-            </a:r>
-            <a:r>
-              <a:rPr sz="2200" b="0" i="0">
-                <a:solidFill>
-                  <a:srgbClr val="222222"/>
-                </a:solidFill>
-                <a:latin typeface="Segoe UI"/>
-              </a:rPr>
-              <a:t>Cero carga operativa: el fondo postula con una carta, la academia hace el resto. Y diagnóstico de nivel para 10 afiliados, sin costo.</a:t>
-            </a:r>
-          </a:p>
-        </p:txBody>
-      </p:sp>
-      <p:sp>
-        <p:nvSpPr>
-          <p:cNvPr id="9" name="TextBox 8"/>
-          <p:cNvSpPr txBox="1"/>
-          <p:nvPr/>
-        </p:nvSpPr>
-        <p:spPr>
-          <a:xfrm>
-            <a:off x="502920" y="6355080"/>
-            <a:ext cx="11155680" cy="365760"/>
+            <a:off x="548640" y="6400800"/>
+            <a:ext cx="11155680" cy="320040"/>
           </a:xfrm>
           <a:prstGeom prst="rect">
             <a:avLst/>
@@ -6322,13 +7462,575 @@
               </a:spcAft>
             </a:pPr>
             <a:r>
-              <a:rPr sz="1000" b="0" i="0">
-                <a:solidFill>
-                  <a:srgbClr val="5A5A5A"/>
-                </a:solidFill>
-                <a:latin typeface="Segoe UI"/>
-              </a:rPr>
-              <a:t>Línea de alianzas 316 768 8793 · Carrera 27 # 48-49, Sotomayor, Bucaramanga</a:t>
+              <a:rPr sz="950" b="0" i="0">
+                <a:solidFill>
+                  <a:srgbClr val="7A828F"/>
+                </a:solidFill>
+                <a:latin typeface="Lato"/>
+              </a:rPr>
+              <a:t>Heiiu English Academy · Línea de alianzas 316 768 8793 · Carrera 27 # 48-49, Sotomayor, Bucaramanga</a:t>
+            </a:r>
+          </a:p>
+        </p:txBody>
+      </p:sp>
+      <p:sp>
+        <p:nvSpPr>
+          <p:cNvPr id="9" name="Rounded Rectangle 8"/>
+          <p:cNvSpPr/>
+          <p:nvPr/>
+        </p:nvSpPr>
+        <p:spPr>
+          <a:xfrm>
+            <a:off x="548640" y="3246120"/>
+            <a:ext cx="5394960" cy="3017520"/>
+          </a:xfrm>
+          <a:prstGeom prst="roundRect">
+            <a:avLst>
+              <a:gd name="adj" fmla="val 5000"/>
+            </a:avLst>
+          </a:prstGeom>
+          <a:solidFill>
+            <a:srgbClr val="FFFFFF"/>
+          </a:solidFill>
+          <a:ln w="9525">
+            <a:solidFill>
+              <a:srgbClr val="E3DBCF"/>
+            </a:solidFill>
+          </a:ln>
+          <a:effectLst/>
+        </p:spPr>
+        <p:style>
+          <a:lnRef idx="1">
+            <a:schemeClr val="accent1"/>
+          </a:lnRef>
+          <a:fillRef idx="3">
+            <a:schemeClr val="accent1"/>
+          </a:fillRef>
+          <a:effectRef idx="2">
+            <a:schemeClr val="accent1"/>
+          </a:effectRef>
+          <a:fontRef idx="minor">
+            <a:schemeClr val="lt1"/>
+          </a:fontRef>
+        </p:style>
+        <p:txBody>
+          <a:bodyPr rtlCol="0" anchor="ctr"/>
+          <a:lstStyle/>
+          <a:p>
+            <a:pPr algn="ctr"/>
+          </a:p>
+        </p:txBody>
+      </p:sp>
+      <p:sp>
+        <p:nvSpPr>
+          <p:cNvPr id="10" name="TextBox 9"/>
+          <p:cNvSpPr txBox="1"/>
+          <p:nvPr/>
+        </p:nvSpPr>
+        <p:spPr>
+          <a:xfrm>
+            <a:off x="868680" y="3429000"/>
+            <a:ext cx="4754880" cy="320040"/>
+          </a:xfrm>
+          <a:prstGeom prst="rect">
+            <a:avLst/>
+          </a:prstGeom>
+          <a:noFill/>
+        </p:spPr>
+        <p:txBody>
+          <a:bodyPr wrap="square" lIns="45720" rIns="45720" tIns="27432" bIns="27432" anchor="t">
+            <a:spAutoFit/>
+          </a:bodyPr>
+          <a:lstStyle/>
+          <a:p>
+            <a:pPr algn="l">
+              <a:lnSpc>
+                <a:spcPct val="115000"/>
+              </a:lnSpc>
+              <a:spcAft>
+                <a:spcPts val="0"/>
+              </a:spcAft>
+            </a:pPr>
+            <a:r>
+              <a:rPr sz="1100" b="1" i="0" spc="200">
+                <a:solidFill>
+                  <a:srgbClr val="E54C09"/>
+                </a:solidFill>
+                <a:latin typeface="Lato"/>
+              </a:rPr>
+              <a:t>EL FONDO</a:t>
+            </a:r>
+          </a:p>
+        </p:txBody>
+      </p:sp>
+      <p:sp>
+        <p:nvSpPr>
+          <p:cNvPr id="11" name="TextBox 10"/>
+          <p:cNvSpPr txBox="1"/>
+          <p:nvPr/>
+        </p:nvSpPr>
+        <p:spPr>
+          <a:xfrm>
+            <a:off x="822960" y="3794760"/>
+            <a:ext cx="4846320" cy="2468880"/>
+          </a:xfrm>
+          <a:prstGeom prst="rect">
+            <a:avLst/>
+          </a:prstGeom>
+          <a:noFill/>
+        </p:spPr>
+        <p:txBody>
+          <a:bodyPr wrap="square" lIns="45720" rIns="45720" tIns="27432" bIns="27432" anchor="t">
+            <a:spAutoFit/>
+          </a:bodyPr>
+          <a:lstStyle/>
+          <a:p>
+            <a:pPr algn="l">
+              <a:lnSpc>
+                <a:spcPct val="118000"/>
+              </a:lnSpc>
+              <a:spcAft>
+                <a:spcPts val="600"/>
+              </a:spcAft>
+            </a:pPr>
+            <a:r>
+              <a:rPr sz="1300" b="1" i="0">
+                <a:solidFill>
+                  <a:srgbClr val="E54C09"/>
+                </a:solidFill>
+                <a:latin typeface="Lato"/>
+              </a:rPr>
+              <a:t>—  </a:t>
+            </a:r>
+            <a:r>
+              <a:rPr sz="1300" b="1" i="0">
+                <a:solidFill>
+                  <a:srgbClr val="2B3445"/>
+                </a:solidFill>
+                <a:latin typeface="Lato"/>
+              </a:rPr>
+              <a:t>Sin costo ni presupuesto. </a:t>
+            </a:r>
+            <a:r>
+              <a:rPr sz="1300" b="0" i="0">
+                <a:solidFill>
+                  <a:srgbClr val="2B3445"/>
+                </a:solidFill>
+                <a:latin typeface="Lato"/>
+              </a:rPr>
+              <a:t>El fondo postula con una carta; no paga ni cobra nada.</a:t>
+            </a:r>
+          </a:p>
+          <a:p>
+            <a:pPr algn="l">
+              <a:lnSpc>
+                <a:spcPct val="118000"/>
+              </a:lnSpc>
+              <a:spcAft>
+                <a:spcPts val="600"/>
+              </a:spcAft>
+            </a:pPr>
+            <a:r>
+              <a:rPr sz="1300" b="1" i="0">
+                <a:solidFill>
+                  <a:srgbClr val="E54C09"/>
+                </a:solidFill>
+                <a:latin typeface="Lato"/>
+              </a:rPr>
+              <a:t>—  </a:t>
+            </a:r>
+            <a:r>
+              <a:rPr sz="1300" b="1" i="0">
+                <a:solidFill>
+                  <a:srgbClr val="2B3445"/>
+                </a:solidFill>
+                <a:latin typeface="Lato"/>
+              </a:rPr>
+              <a:t>Becas y certificados con su nombre, </a:t>
+            </a:r>
+            <a:r>
+              <a:rPr sz="1300" b="0" i="0">
+                <a:solidFill>
+                  <a:srgbClr val="2B3445"/>
+                </a:solidFill>
+                <a:latin typeface="Lato"/>
+              </a:rPr>
+              <a:t>entregados en su propio evento.</a:t>
+            </a:r>
+          </a:p>
+          <a:p>
+            <a:pPr algn="l">
+              <a:lnSpc>
+                <a:spcPct val="118000"/>
+              </a:lnSpc>
+              <a:spcAft>
+                <a:spcPts val="600"/>
+              </a:spcAft>
+            </a:pPr>
+            <a:r>
+              <a:rPr sz="1300" b="1" i="0">
+                <a:solidFill>
+                  <a:srgbClr val="E54C09"/>
+                </a:solidFill>
+                <a:latin typeface="Lato"/>
+              </a:rPr>
+              <a:t>—  </a:t>
+            </a:r>
+            <a:r>
+              <a:rPr sz="1300" b="1" i="0">
+                <a:solidFill>
+                  <a:srgbClr val="2B3445"/>
+                </a:solidFill>
+                <a:latin typeface="Lato"/>
+              </a:rPr>
+              <a:t>Reporte de asistencia y cumplimiento </a:t>
+            </a:r>
+            <a:r>
+              <a:rPr sz="1300" b="0" i="0">
+                <a:solidFill>
+                  <a:srgbClr val="2B3445"/>
+                </a:solidFill>
+                <a:latin typeface="Lato"/>
+              </a:rPr>
+              <a:t>de cada becado: el fondo ve quién cumple.</a:t>
+            </a:r>
+          </a:p>
+          <a:p>
+            <a:pPr algn="l">
+              <a:lnSpc>
+                <a:spcPct val="118000"/>
+              </a:lnSpc>
+              <a:spcAft>
+                <a:spcPts val="600"/>
+              </a:spcAft>
+            </a:pPr>
+            <a:r>
+              <a:rPr sz="1300" b="1" i="0">
+                <a:solidFill>
+                  <a:srgbClr val="E54C09"/>
+                </a:solidFill>
+                <a:latin typeface="Lato"/>
+              </a:rPr>
+              <a:t>—  </a:t>
+            </a:r>
+            <a:r>
+              <a:rPr sz="1300" b="1" i="0">
+                <a:solidFill>
+                  <a:srgbClr val="2B3445"/>
+                </a:solidFill>
+                <a:latin typeface="Lato"/>
+              </a:rPr>
+              <a:t>10 diagnósticos de nivel sin costo </a:t>
+            </a:r>
+            <a:r>
+              <a:rPr sz="1300" b="0" i="0">
+                <a:solidFill>
+                  <a:srgbClr val="2B3445"/>
+                </a:solidFill>
+                <a:latin typeface="Lato"/>
+              </a:rPr>
+              <a:t>la semana siguiente a la firma.</a:t>
+            </a:r>
+          </a:p>
+        </p:txBody>
+      </p:sp>
+      <p:sp>
+        <p:nvSpPr>
+          <p:cNvPr id="12" name="Rounded Rectangle 11"/>
+          <p:cNvSpPr/>
+          <p:nvPr/>
+        </p:nvSpPr>
+        <p:spPr>
+          <a:xfrm>
+            <a:off x="6217920" y="3246120"/>
+            <a:ext cx="5394960" cy="3017520"/>
+          </a:xfrm>
+          <a:prstGeom prst="roundRect">
+            <a:avLst>
+              <a:gd name="adj" fmla="val 5000"/>
+            </a:avLst>
+          </a:prstGeom>
+          <a:solidFill>
+            <a:srgbClr val="0F1B2D"/>
+          </a:solidFill>
+          <a:ln>
+            <a:noFill/>
+          </a:ln>
+          <a:effectLst/>
+        </p:spPr>
+        <p:style>
+          <a:lnRef idx="1">
+            <a:schemeClr val="accent1"/>
+          </a:lnRef>
+          <a:fillRef idx="3">
+            <a:schemeClr val="accent1"/>
+          </a:fillRef>
+          <a:effectRef idx="2">
+            <a:schemeClr val="accent1"/>
+          </a:effectRef>
+          <a:fontRef idx="minor">
+            <a:schemeClr val="lt1"/>
+          </a:fontRef>
+        </p:style>
+        <p:txBody>
+          <a:bodyPr rtlCol="0" anchor="ctr"/>
+          <a:lstStyle/>
+          <a:p>
+            <a:pPr algn="ctr"/>
+          </a:p>
+        </p:txBody>
+      </p:sp>
+      <p:sp>
+        <p:nvSpPr>
+          <p:cNvPr id="13" name="TextBox 12"/>
+          <p:cNvSpPr txBox="1"/>
+          <p:nvPr/>
+        </p:nvSpPr>
+        <p:spPr>
+          <a:xfrm>
+            <a:off x="6537960" y="3429000"/>
+            <a:ext cx="4754880" cy="320040"/>
+          </a:xfrm>
+          <a:prstGeom prst="rect">
+            <a:avLst/>
+          </a:prstGeom>
+          <a:noFill/>
+        </p:spPr>
+        <p:txBody>
+          <a:bodyPr wrap="square" lIns="45720" rIns="45720" tIns="27432" bIns="27432" anchor="t">
+            <a:spAutoFit/>
+          </a:bodyPr>
+          <a:lstStyle/>
+          <a:p>
+            <a:pPr algn="l">
+              <a:lnSpc>
+                <a:spcPct val="115000"/>
+              </a:lnSpc>
+              <a:spcAft>
+                <a:spcPts val="0"/>
+              </a:spcAft>
+            </a:pPr>
+            <a:r>
+              <a:rPr sz="1100" b="1" i="0" spc="200">
+                <a:solidFill>
+                  <a:srgbClr val="E54C09"/>
+                </a:solidFill>
+                <a:latin typeface="Lato"/>
+              </a:rPr>
+              <a:t>EL AFILIADO Y SU FAMILIA</a:t>
+            </a:r>
+          </a:p>
+        </p:txBody>
+      </p:sp>
+      <p:sp>
+        <p:nvSpPr>
+          <p:cNvPr id="14" name="TextBox 13"/>
+          <p:cNvSpPr txBox="1"/>
+          <p:nvPr/>
+        </p:nvSpPr>
+        <p:spPr>
+          <a:xfrm>
+            <a:off x="6492240" y="3794760"/>
+            <a:ext cx="4846320" cy="2468880"/>
+          </a:xfrm>
+          <a:prstGeom prst="rect">
+            <a:avLst/>
+          </a:prstGeom>
+          <a:noFill/>
+        </p:spPr>
+        <p:txBody>
+          <a:bodyPr wrap="square" lIns="45720" rIns="45720" tIns="27432" bIns="27432" anchor="t">
+            <a:spAutoFit/>
+          </a:bodyPr>
+          <a:lstStyle/>
+          <a:p>
+            <a:pPr algn="l">
+              <a:lnSpc>
+                <a:spcPct val="118000"/>
+              </a:lnSpc>
+              <a:spcAft>
+                <a:spcPts val="600"/>
+              </a:spcAft>
+            </a:pPr>
+            <a:r>
+              <a:rPr sz="1300" b="1" i="0">
+                <a:solidFill>
+                  <a:srgbClr val="E54C09"/>
+                </a:solidFill>
+                <a:latin typeface="Lato"/>
+              </a:rPr>
+              <a:t>—  </a:t>
+            </a:r>
+            <a:r>
+              <a:rPr sz="1300" b="1" i="0">
+                <a:solidFill>
+                  <a:srgbClr val="F6F1E9"/>
+                </a:solidFill>
+                <a:latin typeface="Lato"/>
+              </a:rPr>
+              <a:t>Paga la mitad, </a:t>
+            </a:r>
+            <a:r>
+              <a:rPr sz="1300" b="0" i="0">
+                <a:solidFill>
+                  <a:srgbClr val="F6F1E9"/>
+                </a:solidFill>
+                <a:latin typeface="Lato"/>
+              </a:rPr>
+              <a:t>y la beca cubre también a su cónyuge y a sus hijos desde los 12 años.</a:t>
+            </a:r>
+          </a:p>
+          <a:p>
+            <a:pPr algn="l">
+              <a:lnSpc>
+                <a:spcPct val="118000"/>
+              </a:lnSpc>
+              <a:spcAft>
+                <a:spcPts val="600"/>
+              </a:spcAft>
+            </a:pPr>
+            <a:r>
+              <a:rPr sz="1300" b="1" i="0">
+                <a:solidFill>
+                  <a:srgbClr val="E54C09"/>
+                </a:solidFill>
+                <a:latin typeface="Lato"/>
+              </a:rPr>
+              <a:t>—  </a:t>
+            </a:r>
+            <a:r>
+              <a:rPr sz="1300" b="1" i="0">
+                <a:solidFill>
+                  <a:srgbClr val="F6F1E9"/>
+                </a:solidFill>
+                <a:latin typeface="Lato"/>
+              </a:rPr>
+              <a:t>Gana cerca de un 26% más </a:t>
+            </a:r>
+            <a:r>
+              <a:rPr sz="1300" b="0" i="0">
+                <a:solidFill>
+                  <a:srgbClr val="F6F1E9"/>
+                </a:solidFill>
+                <a:latin typeface="Lato"/>
+              </a:rPr>
+              <a:t>quien certifica su inglés, frente a quien hace el mismo trabajo sin él.¹</a:t>
+            </a:r>
+          </a:p>
+          <a:p>
+            <a:pPr algn="l">
+              <a:lnSpc>
+                <a:spcPct val="118000"/>
+              </a:lnSpc>
+              <a:spcAft>
+                <a:spcPts val="600"/>
+              </a:spcAft>
+            </a:pPr>
+            <a:r>
+              <a:rPr sz="1300" b="1" i="0">
+                <a:solidFill>
+                  <a:srgbClr val="E54C09"/>
+                </a:solidFill>
+                <a:latin typeface="Lato"/>
+              </a:rPr>
+              <a:t>—  </a:t>
+            </a:r>
+            <a:r>
+              <a:rPr sz="1300" b="1" i="0">
+                <a:solidFill>
+                  <a:srgbClr val="F6F1E9"/>
+                </a:solidFill>
+                <a:latin typeface="Lato"/>
+              </a:rPr>
+              <a:t>Garantía por escrito: </a:t>
+            </a:r>
+            <a:r>
+              <a:rPr sz="1300" b="0" i="0">
+                <a:solidFill>
+                  <a:srgbClr val="F6F1E9"/>
+                </a:solidFill>
+                <a:latin typeface="Lato"/>
+              </a:rPr>
+              <a:t>si cumple y no avanza, recibe el 100% del nivel de vuelta.</a:t>
+            </a:r>
+          </a:p>
+          <a:p>
+            <a:pPr algn="l">
+              <a:lnSpc>
+                <a:spcPct val="118000"/>
+              </a:lnSpc>
+              <a:spcAft>
+                <a:spcPts val="600"/>
+              </a:spcAft>
+            </a:pPr>
+            <a:r>
+              <a:rPr sz="1300" b="1" i="0">
+                <a:solidFill>
+                  <a:srgbClr val="E54C09"/>
+                </a:solidFill>
+                <a:latin typeface="Lato"/>
+              </a:rPr>
+              <a:t>—  </a:t>
+            </a:r>
+            <a:r>
+              <a:rPr sz="1300" b="1" i="0">
+                <a:solidFill>
+                  <a:srgbClr val="F6F1E9"/>
+                </a:solidFill>
+                <a:latin typeface="Lato"/>
+              </a:rPr>
+              <a:t>No entrena solo: </a:t>
+            </a:r>
+            <a:r>
+              <a:rPr sz="1300" b="0" i="0">
+                <a:solidFill>
+                  <a:srgbClr val="F6F1E9"/>
+                </a:solidFill>
+                <a:latin typeface="Lato"/>
+              </a:rPr>
+              <a:t>profesor que corrige ahí mismo, coach que no lo deja rendirse, y el video del primer día junto al del último.</a:t>
+            </a:r>
+          </a:p>
+        </p:txBody>
+      </p:sp>
+      <p:sp>
+        <p:nvSpPr>
+          <p:cNvPr id="15" name="TextBox 14"/>
+          <p:cNvSpPr txBox="1"/>
+          <p:nvPr/>
+        </p:nvSpPr>
+        <p:spPr>
+          <a:xfrm>
+            <a:off x="548640" y="6144768"/>
+            <a:ext cx="10972800" cy="274320"/>
+          </a:xfrm>
+          <a:prstGeom prst="rect">
+            <a:avLst/>
+          </a:prstGeom>
+          <a:noFill/>
+        </p:spPr>
+        <p:txBody>
+          <a:bodyPr wrap="square" lIns="45720" rIns="45720" tIns="27432" bIns="27432" anchor="t">
+            <a:spAutoFit/>
+          </a:bodyPr>
+          <a:lstStyle/>
+          <a:p>
+            <a:pPr algn="l">
+              <a:lnSpc>
+                <a:spcPct val="115000"/>
+              </a:lnSpc>
+              <a:spcAft>
+                <a:spcPts val="0"/>
+              </a:spcAft>
+            </a:pPr>
+            <a:r>
+              <a:rPr sz="900" b="0" i="0">
+                <a:solidFill>
+                  <a:srgbClr val="7A828F"/>
+                </a:solidFill>
+                <a:latin typeface="Lato"/>
+              </a:rPr>
+              <a:t>¹ DNP, Archivos de Economía, Bilingüismo laboral en Colombia.</a:t>
             </a:r>
           </a:p>
         </p:txBody>
@@ -6366,7 +8068,7 @@
             <a:avLst/>
           </a:prstGeom>
           <a:solidFill>
-            <a:srgbClr val="1C1714"/>
+            <a:srgbClr val="0F1B2D"/>
           </a:solidFill>
           <a:ln>
             <a:noFill/>
@@ -6397,20 +8099,22 @@
       </p:sp>
       <p:sp>
         <p:nvSpPr>
-          <p:cNvPr id="3" name="Rectangle 2"/>
+          <p:cNvPr id="3" name="Rounded Rectangle 2"/>
           <p:cNvSpPr/>
           <p:nvPr/>
         </p:nvSpPr>
         <p:spPr>
           <a:xfrm>
-            <a:off x="0" y="0"/>
-            <a:ext cx="12191695" cy="384048"/>
-          </a:xfrm>
-          <a:prstGeom prst="rect">
-            <a:avLst/>
+            <a:off x="548640" y="384048"/>
+            <a:ext cx="1417320" cy="566928"/>
+          </a:xfrm>
+          <a:prstGeom prst="roundRect">
+            <a:avLst>
+              <a:gd name="adj" fmla="val 50000"/>
+            </a:avLst>
           </a:prstGeom>
           <a:solidFill>
-            <a:srgbClr val="FF4A00"/>
+            <a:srgbClr val="1B2A41"/>
           </a:solidFill>
           <a:ln>
             <a:noFill/>
@@ -6439,16 +8143,40 @@
           </a:p>
         </p:txBody>
       </p:sp>
-      <p:sp>
-        <p:nvSpPr>
-          <p:cNvPr id="4" name="TextBox 3"/>
+      <p:pic>
+        <p:nvPicPr>
+          <p:cNvPr id="4" name="Picture 3" descr="logo_heiiu_transparente.png"/>
+          <p:cNvPicPr>
+            <a:picLocks noChangeAspect="1"/>
+          </p:cNvPicPr>
+          <p:nvPr/>
+        </p:nvPicPr>
+        <p:blipFill>
+          <a:blip r:embed="rId2"/>
+          <a:stretch>
+            <a:fillRect/>
+          </a:stretch>
+        </p:blipFill>
+        <p:spPr>
+          <a:xfrm>
+            <a:off x="731520" y="457200"/>
+            <a:ext cx="747979" cy="420624"/>
+          </a:xfrm>
+          <a:prstGeom prst="rect">
+            <a:avLst/>
+          </a:prstGeom>
+        </p:spPr>
+      </p:pic>
+      <p:sp>
+        <p:nvSpPr>
+          <p:cNvPr id="5" name="TextBox 4"/>
           <p:cNvSpPr txBox="1"/>
           <p:nvPr/>
         </p:nvSpPr>
         <p:spPr>
           <a:xfrm>
-            <a:off x="502920" y="36576"/>
-            <a:ext cx="5486400" cy="329184"/>
+            <a:off x="9418320" y="384048"/>
+            <a:ext cx="2286000" cy="566928"/>
           </a:xfrm>
           <a:prstGeom prst="rect">
             <a:avLst/>
@@ -6457,6 +8185,48 @@
         </p:spPr>
         <p:txBody>
           <a:bodyPr wrap="square" lIns="45720" rIns="45720" tIns="27432" bIns="27432" anchor="ctr">
+            <a:spAutoFit/>
+          </a:bodyPr>
+          <a:lstStyle/>
+          <a:p>
+            <a:pPr algn="r">
+              <a:lnSpc>
+                <a:spcPct val="115000"/>
+              </a:lnSpc>
+              <a:spcAft>
+                <a:spcPts val="0"/>
+              </a:spcAft>
+            </a:pPr>
+            <a:r>
+              <a:rPr sz="1200" b="0" i="0">
+                <a:solidFill>
+                  <a:srgbClr val="9AA4B5"/>
+                </a:solidFill>
+                <a:latin typeface="Oswald"/>
+              </a:rPr>
+              <a:t>6 / 7</a:t>
+            </a:r>
+          </a:p>
+        </p:txBody>
+      </p:sp>
+      <p:sp>
+        <p:nvSpPr>
+          <p:cNvPr id="6" name="TextBox 5"/>
+          <p:cNvSpPr txBox="1"/>
+          <p:nvPr/>
+        </p:nvSpPr>
+        <p:spPr>
+          <a:xfrm>
+            <a:off x="548640" y="1234440"/>
+            <a:ext cx="7315200" cy="320040"/>
+          </a:xfrm>
+          <a:prstGeom prst="rect">
+            <a:avLst/>
+          </a:prstGeom>
+          <a:noFill/>
+        </p:spPr>
+        <p:txBody>
+          <a:bodyPr wrap="square" lIns="45720" rIns="45720" tIns="27432" bIns="27432" anchor="t">
             <a:spAutoFit/>
           </a:bodyPr>
           <a:lstStyle/>
@@ -6470,27 +8240,713 @@
               </a:spcAft>
             </a:pPr>
             <a:r>
-              <a:rPr sz="1200" b="1" i="0">
-                <a:solidFill>
-                  <a:srgbClr val="FFFFFF"/>
-                </a:solidFill>
-                <a:latin typeface="Segoe UI"/>
-              </a:rPr>
-              <a:t>6 de 6</a:t>
-            </a:r>
-          </a:p>
-        </p:txBody>
-      </p:sp>
-      <p:sp>
-        <p:nvSpPr>
-          <p:cNvPr id="5" name="TextBox 4"/>
+              <a:rPr sz="1100" b="1" i="0" spc="250">
+                <a:solidFill>
+                  <a:srgbClr val="E54C09"/>
+                </a:solidFill>
+                <a:latin typeface="Lato"/>
+              </a:rPr>
+              <a:t>LLAMADO A LA ACCIÓN</a:t>
+            </a:r>
+          </a:p>
+        </p:txBody>
+      </p:sp>
+      <p:sp>
+        <p:nvSpPr>
+          <p:cNvPr id="7" name="TextBox 6"/>
           <p:cNvSpPr txBox="1"/>
           <p:nvPr/>
         </p:nvSpPr>
         <p:spPr>
           <a:xfrm>
-            <a:off x="6583680" y="36576"/>
-            <a:ext cx="5120640" cy="329184"/>
+            <a:off x="548640" y="1554480"/>
+            <a:ext cx="10515600" cy="1737360"/>
+          </a:xfrm>
+          <a:prstGeom prst="rect">
+            <a:avLst/>
+          </a:prstGeom>
+          <a:noFill/>
+        </p:spPr>
+        <p:txBody>
+          <a:bodyPr wrap="square" lIns="45720" rIns="45720" tIns="27432" bIns="27432" anchor="t">
+            <a:spAutoFit/>
+          </a:bodyPr>
+          <a:lstStyle/>
+          <a:p>
+            <a:pPr algn="l">
+              <a:lnSpc>
+                <a:spcPct val="108000"/>
+              </a:lnSpc>
+              <a:spcAft>
+                <a:spcPts val="0"/>
+              </a:spcAft>
+            </a:pPr>
+            <a:r>
+              <a:rPr sz="3400" b="1" i="0">
+                <a:solidFill>
+                  <a:srgbClr val="F6F1E9"/>
+                </a:solidFill>
+                <a:latin typeface="Lato Black"/>
+              </a:rPr>
+              <a:t>El próximo grupo arranca el martes 3 de noviembre. Firmemos esta semana.</a:t>
+            </a:r>
+          </a:p>
+        </p:txBody>
+      </p:sp>
+      <p:sp>
+        <p:nvSpPr>
+          <p:cNvPr id="8" name="TextBox 7"/>
+          <p:cNvSpPr txBox="1"/>
+          <p:nvPr/>
+        </p:nvSpPr>
+        <p:spPr>
+          <a:xfrm>
+            <a:off x="548640" y="6400800"/>
+            <a:ext cx="11155680" cy="320040"/>
+          </a:xfrm>
+          <a:prstGeom prst="rect">
+            <a:avLst/>
+          </a:prstGeom>
+          <a:noFill/>
+        </p:spPr>
+        <p:txBody>
+          <a:bodyPr wrap="square" lIns="45720" rIns="45720" tIns="27432" bIns="27432" anchor="ctr">
+            <a:spAutoFit/>
+          </a:bodyPr>
+          <a:lstStyle/>
+          <a:p>
+            <a:pPr algn="l">
+              <a:lnSpc>
+                <a:spcPct val="115000"/>
+              </a:lnSpc>
+              <a:spcAft>
+                <a:spcPts val="0"/>
+              </a:spcAft>
+            </a:pPr>
+            <a:r>
+              <a:rPr sz="950" b="0" i="0">
+                <a:solidFill>
+                  <a:srgbClr val="9AA4B5"/>
+                </a:solidFill>
+                <a:latin typeface="Lato"/>
+              </a:rPr>
+              <a:t>Heiiu English Academy · Línea de alianzas 316 768 8793 · Carrera 27 # 48-49, Sotomayor, Bucaramanga</a:t>
+            </a:r>
+          </a:p>
+        </p:txBody>
+      </p:sp>
+      <p:sp>
+        <p:nvSpPr>
+          <p:cNvPr id="9" name="Rounded Rectangle 8"/>
+          <p:cNvSpPr/>
+          <p:nvPr/>
+        </p:nvSpPr>
+        <p:spPr>
+          <a:xfrm>
+            <a:off x="548640" y="3246120"/>
+            <a:ext cx="3520440" cy="2834640"/>
+          </a:xfrm>
+          <a:prstGeom prst="roundRect">
+            <a:avLst>
+              <a:gd name="adj" fmla="val 6000"/>
+            </a:avLst>
+          </a:prstGeom>
+          <a:solidFill>
+            <a:srgbClr val="1B2A41"/>
+          </a:solidFill>
+          <a:ln>
+            <a:noFill/>
+          </a:ln>
+          <a:effectLst/>
+        </p:spPr>
+        <p:style>
+          <a:lnRef idx="1">
+            <a:schemeClr val="accent1"/>
+          </a:lnRef>
+          <a:fillRef idx="3">
+            <a:schemeClr val="accent1"/>
+          </a:fillRef>
+          <a:effectRef idx="2">
+            <a:schemeClr val="accent1"/>
+          </a:effectRef>
+          <a:fontRef idx="minor">
+            <a:schemeClr val="lt1"/>
+          </a:fontRef>
+        </p:style>
+        <p:txBody>
+          <a:bodyPr rtlCol="0" anchor="ctr"/>
+          <a:lstStyle/>
+          <a:p>
+            <a:pPr algn="ctr"/>
+          </a:p>
+        </p:txBody>
+      </p:sp>
+      <p:sp>
+        <p:nvSpPr>
+          <p:cNvPr id="10" name="TextBox 9"/>
+          <p:cNvSpPr txBox="1"/>
+          <p:nvPr/>
+        </p:nvSpPr>
+        <p:spPr>
+          <a:xfrm>
+            <a:off x="822960" y="3337560"/>
+            <a:ext cx="3017520" cy="914400"/>
+          </a:xfrm>
+          <a:prstGeom prst="rect">
+            <a:avLst/>
+          </a:prstGeom>
+          <a:noFill/>
+        </p:spPr>
+        <p:txBody>
+          <a:bodyPr wrap="square" lIns="45720" rIns="45720" tIns="27432" bIns="27432" anchor="ctr">
+            <a:spAutoFit/>
+          </a:bodyPr>
+          <a:lstStyle/>
+          <a:p>
+            <a:pPr algn="l">
+              <a:lnSpc>
+                <a:spcPct val="115000"/>
+              </a:lnSpc>
+              <a:spcAft>
+                <a:spcPts val="0"/>
+              </a:spcAft>
+            </a:pPr>
+            <a:r>
+              <a:rPr sz="5000" b="0" i="0">
+                <a:solidFill>
+                  <a:srgbClr val="FBC900"/>
+                </a:solidFill>
+                <a:latin typeface="Oswald"/>
+              </a:rPr>
+              <a:t>3 NOV</a:t>
+            </a:r>
+          </a:p>
+        </p:txBody>
+      </p:sp>
+      <p:sp>
+        <p:nvSpPr>
+          <p:cNvPr id="11" name="TextBox 10"/>
+          <p:cNvSpPr txBox="1"/>
+          <p:nvPr/>
+        </p:nvSpPr>
+        <p:spPr>
+          <a:xfrm>
+            <a:off x="822960" y="4251960"/>
+            <a:ext cx="3017520" cy="274320"/>
+          </a:xfrm>
+          <a:prstGeom prst="rect">
+            <a:avLst/>
+          </a:prstGeom>
+          <a:noFill/>
+        </p:spPr>
+        <p:txBody>
+          <a:bodyPr wrap="square" lIns="45720" rIns="45720" tIns="27432" bIns="27432" anchor="t">
+            <a:spAutoFit/>
+          </a:bodyPr>
+          <a:lstStyle/>
+          <a:p>
+            <a:pPr algn="l">
+              <a:lnSpc>
+                <a:spcPct val="115000"/>
+              </a:lnSpc>
+              <a:spcAft>
+                <a:spcPts val="0"/>
+              </a:spcAft>
+            </a:pPr>
+            <a:r>
+              <a:rPr sz="1050" b="1" i="0" spc="200">
+                <a:solidFill>
+                  <a:srgbClr val="E54C09"/>
+                </a:solidFill>
+                <a:latin typeface="Lato"/>
+              </a:rPr>
+              <a:t>INICIO</a:t>
+            </a:r>
+          </a:p>
+        </p:txBody>
+      </p:sp>
+      <p:sp>
+        <p:nvSpPr>
+          <p:cNvPr id="12" name="TextBox 11"/>
+          <p:cNvSpPr txBox="1"/>
+          <p:nvPr/>
+        </p:nvSpPr>
+        <p:spPr>
+          <a:xfrm>
+            <a:off x="822960" y="4572000"/>
+            <a:ext cx="3017520" cy="1463040"/>
+          </a:xfrm>
+          <a:prstGeom prst="rect">
+            <a:avLst/>
+          </a:prstGeom>
+          <a:noFill/>
+        </p:spPr>
+        <p:txBody>
+          <a:bodyPr wrap="square" lIns="45720" rIns="45720" tIns="27432" bIns="27432" anchor="t">
+            <a:spAutoFit/>
+          </a:bodyPr>
+          <a:lstStyle/>
+          <a:p>
+            <a:pPr algn="l">
+              <a:lnSpc>
+                <a:spcPct val="120000"/>
+              </a:lnSpc>
+              <a:spcAft>
+                <a:spcPts val="0"/>
+              </a:spcAft>
+            </a:pPr>
+            <a:r>
+              <a:rPr sz="1300" b="0" i="0">
+                <a:solidFill>
+                  <a:srgbClr val="F6F1E9"/>
+                </a:solidFill>
+                <a:latin typeface="Lato"/>
+              </a:rPr>
+              <a:t>Martes 3 de noviembre de 2026. El grupo no para en diciembre: sigue hasta terminar el nivel, solo descansa los festivos.</a:t>
+            </a:r>
+          </a:p>
+        </p:txBody>
+      </p:sp>
+      <p:sp>
+        <p:nvSpPr>
+          <p:cNvPr id="13" name="Rounded Rectangle 12"/>
+          <p:cNvSpPr/>
+          <p:nvPr/>
+        </p:nvSpPr>
+        <p:spPr>
+          <a:xfrm>
+            <a:off x="4297679" y="3246120"/>
+            <a:ext cx="3520440" cy="2834640"/>
+          </a:xfrm>
+          <a:prstGeom prst="roundRect">
+            <a:avLst>
+              <a:gd name="adj" fmla="val 6000"/>
+            </a:avLst>
+          </a:prstGeom>
+          <a:solidFill>
+            <a:srgbClr val="1B2A41"/>
+          </a:solidFill>
+          <a:ln>
+            <a:noFill/>
+          </a:ln>
+          <a:effectLst/>
+        </p:spPr>
+        <p:style>
+          <a:lnRef idx="1">
+            <a:schemeClr val="accent1"/>
+          </a:lnRef>
+          <a:fillRef idx="3">
+            <a:schemeClr val="accent1"/>
+          </a:fillRef>
+          <a:effectRef idx="2">
+            <a:schemeClr val="accent1"/>
+          </a:effectRef>
+          <a:fontRef idx="minor">
+            <a:schemeClr val="lt1"/>
+          </a:fontRef>
+        </p:style>
+        <p:txBody>
+          <a:bodyPr rtlCol="0" anchor="ctr"/>
+          <a:lstStyle/>
+          <a:p>
+            <a:pPr algn="ctr"/>
+          </a:p>
+        </p:txBody>
+      </p:sp>
+      <p:sp>
+        <p:nvSpPr>
+          <p:cNvPr id="14" name="TextBox 13"/>
+          <p:cNvSpPr txBox="1"/>
+          <p:nvPr/>
+        </p:nvSpPr>
+        <p:spPr>
+          <a:xfrm>
+            <a:off x="4571999" y="3337560"/>
+            <a:ext cx="3017520" cy="914400"/>
+          </a:xfrm>
+          <a:prstGeom prst="rect">
+            <a:avLst/>
+          </a:prstGeom>
+          <a:noFill/>
+        </p:spPr>
+        <p:txBody>
+          <a:bodyPr wrap="square" lIns="45720" rIns="45720" tIns="27432" bIns="27432" anchor="ctr">
+            <a:spAutoFit/>
+          </a:bodyPr>
+          <a:lstStyle/>
+          <a:p>
+            <a:pPr algn="l">
+              <a:lnSpc>
+                <a:spcPct val="115000"/>
+              </a:lnSpc>
+              <a:spcAft>
+                <a:spcPts val="0"/>
+              </a:spcAft>
+            </a:pPr>
+            <a:r>
+              <a:rPr sz="5000" b="0" i="0">
+                <a:solidFill>
+                  <a:srgbClr val="FBC900"/>
+                </a:solidFill>
+                <a:latin typeface="Oswald"/>
+              </a:rPr>
+              <a:t>16</a:t>
+            </a:r>
+          </a:p>
+        </p:txBody>
+      </p:sp>
+      <p:sp>
+        <p:nvSpPr>
+          <p:cNvPr id="15" name="TextBox 14"/>
+          <p:cNvSpPr txBox="1"/>
+          <p:nvPr/>
+        </p:nvSpPr>
+        <p:spPr>
+          <a:xfrm>
+            <a:off x="4571999" y="4251960"/>
+            <a:ext cx="3017520" cy="274320"/>
+          </a:xfrm>
+          <a:prstGeom prst="rect">
+            <a:avLst/>
+          </a:prstGeom>
+          <a:noFill/>
+        </p:spPr>
+        <p:txBody>
+          <a:bodyPr wrap="square" lIns="45720" rIns="45720" tIns="27432" bIns="27432" anchor="t">
+            <a:spAutoFit/>
+          </a:bodyPr>
+          <a:lstStyle/>
+          <a:p>
+            <a:pPr algn="l">
+              <a:lnSpc>
+                <a:spcPct val="115000"/>
+              </a:lnSpc>
+              <a:spcAft>
+                <a:spcPts val="0"/>
+              </a:spcAft>
+            </a:pPr>
+            <a:r>
+              <a:rPr sz="1050" b="1" i="0" spc="200">
+                <a:solidFill>
+                  <a:srgbClr val="E54C09"/>
+                </a:solidFill>
+                <a:latin typeface="Lato"/>
+              </a:rPr>
+              <a:t>CUPOS POR GRUPO</a:t>
+            </a:r>
+          </a:p>
+        </p:txBody>
+      </p:sp>
+      <p:sp>
+        <p:nvSpPr>
+          <p:cNvPr id="16" name="TextBox 15"/>
+          <p:cNvSpPr txBox="1"/>
+          <p:nvPr/>
+        </p:nvSpPr>
+        <p:spPr>
+          <a:xfrm>
+            <a:off x="4571999" y="4572000"/>
+            <a:ext cx="3017520" cy="1463040"/>
+          </a:xfrm>
+          <a:prstGeom prst="rect">
+            <a:avLst/>
+          </a:prstGeom>
+          <a:noFill/>
+        </p:spPr>
+        <p:txBody>
+          <a:bodyPr wrap="square" lIns="45720" rIns="45720" tIns="27432" bIns="27432" anchor="t">
+            <a:spAutoFit/>
+          </a:bodyPr>
+          <a:lstStyle/>
+          <a:p>
+            <a:pPr algn="l">
+              <a:lnSpc>
+                <a:spcPct val="120000"/>
+              </a:lnSpc>
+              <a:spcAft>
+                <a:spcPts val="0"/>
+              </a:spcAft>
+            </a:pPr>
+            <a:r>
+              <a:rPr sz="1300" b="0" i="0">
+                <a:solidFill>
+                  <a:srgbClr val="F6F1E9"/>
+                </a:solidFill>
+                <a:latin typeface="Lato"/>
+              </a:rPr>
+              <a:t>Grupos de máximo 16, por orden de matrícula con la inicial pagada. Los que no entren ahora esperan al siguiente grupo.</a:t>
+            </a:r>
+          </a:p>
+        </p:txBody>
+      </p:sp>
+      <p:sp>
+        <p:nvSpPr>
+          <p:cNvPr id="17" name="Rounded Rectangle 16"/>
+          <p:cNvSpPr/>
+          <p:nvPr/>
+        </p:nvSpPr>
+        <p:spPr>
+          <a:xfrm>
+            <a:off x="8046718" y="3246120"/>
+            <a:ext cx="3520440" cy="2834640"/>
+          </a:xfrm>
+          <a:prstGeom prst="roundRect">
+            <a:avLst>
+              <a:gd name="adj" fmla="val 6000"/>
+            </a:avLst>
+          </a:prstGeom>
+          <a:solidFill>
+            <a:srgbClr val="1B2A41"/>
+          </a:solidFill>
+          <a:ln>
+            <a:noFill/>
+          </a:ln>
+          <a:effectLst/>
+        </p:spPr>
+        <p:style>
+          <a:lnRef idx="1">
+            <a:schemeClr val="accent1"/>
+          </a:lnRef>
+          <a:fillRef idx="3">
+            <a:schemeClr val="accent1"/>
+          </a:fillRef>
+          <a:effectRef idx="2">
+            <a:schemeClr val="accent1"/>
+          </a:effectRef>
+          <a:fontRef idx="minor">
+            <a:schemeClr val="lt1"/>
+          </a:fontRef>
+        </p:style>
+        <p:txBody>
+          <a:bodyPr rtlCol="0" anchor="ctr"/>
+          <a:lstStyle/>
+          <a:p>
+            <a:pPr algn="ctr"/>
+          </a:p>
+        </p:txBody>
+      </p:sp>
+      <p:sp>
+        <p:nvSpPr>
+          <p:cNvPr id="18" name="TextBox 17"/>
+          <p:cNvSpPr txBox="1"/>
+          <p:nvPr/>
+        </p:nvSpPr>
+        <p:spPr>
+          <a:xfrm>
+            <a:off x="8321038" y="3337560"/>
+            <a:ext cx="3017520" cy="914400"/>
+          </a:xfrm>
+          <a:prstGeom prst="rect">
+            <a:avLst/>
+          </a:prstGeom>
+          <a:noFill/>
+        </p:spPr>
+        <p:txBody>
+          <a:bodyPr wrap="square" lIns="45720" rIns="45720" tIns="27432" bIns="27432" anchor="ctr">
+            <a:spAutoFit/>
+          </a:bodyPr>
+          <a:lstStyle/>
+          <a:p>
+            <a:pPr algn="l">
+              <a:lnSpc>
+                <a:spcPct val="115000"/>
+              </a:lnSpc>
+              <a:spcAft>
+                <a:spcPts val="0"/>
+              </a:spcAft>
+            </a:pPr>
+            <a:r>
+              <a:rPr sz="5000" b="0" i="0">
+                <a:solidFill>
+                  <a:srgbClr val="FBC900"/>
+                </a:solidFill>
+                <a:latin typeface="Oswald"/>
+              </a:rPr>
+              <a:t>3</a:t>
+            </a:r>
+          </a:p>
+        </p:txBody>
+      </p:sp>
+      <p:sp>
+        <p:nvSpPr>
+          <p:cNvPr id="19" name="TextBox 18"/>
+          <p:cNvSpPr txBox="1"/>
+          <p:nvPr/>
+        </p:nvSpPr>
+        <p:spPr>
+          <a:xfrm>
+            <a:off x="8321038" y="4251960"/>
+            <a:ext cx="3017520" cy="274320"/>
+          </a:xfrm>
+          <a:prstGeom prst="rect">
+            <a:avLst/>
+          </a:prstGeom>
+          <a:noFill/>
+        </p:spPr>
+        <p:txBody>
+          <a:bodyPr wrap="square" lIns="45720" rIns="45720" tIns="27432" bIns="27432" anchor="t">
+            <a:spAutoFit/>
+          </a:bodyPr>
+          <a:lstStyle/>
+          <a:p>
+            <a:pPr algn="l">
+              <a:lnSpc>
+                <a:spcPct val="115000"/>
+              </a:lnSpc>
+              <a:spcAft>
+                <a:spcPts val="0"/>
+              </a:spcAft>
+            </a:pPr>
+            <a:r>
+              <a:rPr sz="1050" b="1" i="0" spc="200">
+                <a:solidFill>
+                  <a:srgbClr val="E54C09"/>
+                </a:solidFill>
+                <a:latin typeface="Lato"/>
+              </a:rPr>
+              <a:t>BECAS CON SU NOMBRE</a:t>
+            </a:r>
+          </a:p>
+        </p:txBody>
+      </p:sp>
+      <p:sp>
+        <p:nvSpPr>
+          <p:cNvPr id="20" name="TextBox 19"/>
+          <p:cNvSpPr txBox="1"/>
+          <p:nvPr/>
+        </p:nvSpPr>
+        <p:spPr>
+          <a:xfrm>
+            <a:off x="8321038" y="4572000"/>
+            <a:ext cx="3017520" cy="1463040"/>
+          </a:xfrm>
+          <a:prstGeom prst="rect">
+            <a:avLst/>
+          </a:prstGeom>
+          <a:noFill/>
+        </p:spPr>
+        <p:txBody>
+          <a:bodyPr wrap="square" lIns="45720" rIns="45720" tIns="27432" bIns="27432" anchor="t">
+            <a:spAutoFit/>
+          </a:bodyPr>
+          <a:lstStyle/>
+          <a:p>
+            <a:pPr algn="l">
+              <a:lnSpc>
+                <a:spcPct val="120000"/>
+              </a:lnSpc>
+              <a:spcAft>
+                <a:spcPts val="0"/>
+              </a:spcAft>
+            </a:pPr>
+            <a:r>
+              <a:rPr sz="1300" b="0" i="0">
+                <a:solidFill>
+                  <a:srgbClr val="F6F1E9"/>
+                </a:solidFill>
+                <a:latin typeface="Lato"/>
+              </a:rPr>
+              <a:t>Este trimestre, para los afiliados que el fondo elija. Si todos cumplen, suben a 5 el siguiente.</a:t>
+            </a:r>
+          </a:p>
+        </p:txBody>
+      </p:sp>
+    </p:spTree>
+  </p:cSld>
+  <p:clrMapOvr>
+    <a:masterClrMapping/>
+  </p:clrMapOvr>
+</p:sld>
+</file>
+
+<file path=ppt/slides/slide7.xml><?xml version="1.0" encoding="utf-8"?>
+<p:sld xmlns:a="http://schemas.openxmlformats.org/drawingml/2006/main" xmlns:p="http://schemas.openxmlformats.org/presentationml/2006/main" xmlns:r="http://schemas.openxmlformats.org/officeDocument/2006/relationships">
+  <p:cSld>
+    <p:spTree>
+      <p:nvGrpSpPr>
+        <p:cNvPr id="1" name=""/>
+        <p:cNvGrpSpPr/>
+        <p:nvPr/>
+      </p:nvGrpSpPr>
+      <p:grpSpPr/>
+      <p:sp>
+        <p:nvSpPr>
+          <p:cNvPr id="2" name="Rectangle 1"/>
+          <p:cNvSpPr/>
+          <p:nvPr/>
+        </p:nvSpPr>
+        <p:spPr>
+          <a:xfrm>
+            <a:off x="0" y="0"/>
+            <a:ext cx="12191695" cy="6858000"/>
+          </a:xfrm>
+          <a:prstGeom prst="rect">
+            <a:avLst/>
+          </a:prstGeom>
+          <a:solidFill>
+            <a:srgbClr val="0F1B2D"/>
+          </a:solidFill>
+          <a:ln>
+            <a:noFill/>
+          </a:ln>
+          <a:effectLst/>
+        </p:spPr>
+        <p:style>
+          <a:lnRef idx="1">
+            <a:schemeClr val="accent1"/>
+          </a:lnRef>
+          <a:fillRef idx="3">
+            <a:schemeClr val="accent1"/>
+          </a:fillRef>
+          <a:effectRef idx="2">
+            <a:schemeClr val="accent1"/>
+          </a:effectRef>
+          <a:fontRef idx="minor">
+            <a:schemeClr val="lt1"/>
+          </a:fontRef>
+        </p:style>
+        <p:txBody>
+          <a:bodyPr rtlCol="0" anchor="ctr"/>
+          <a:lstStyle/>
+          <a:p>
+            <a:pPr algn="ctr"/>
+          </a:p>
+        </p:txBody>
+      </p:sp>
+      <p:pic>
+        <p:nvPicPr>
+          <p:cNvPr id="3" name="Picture 2" descr="logo_heiiu_transparente.png"/>
+          <p:cNvPicPr>
+            <a:picLocks noChangeAspect="1"/>
+          </p:cNvPicPr>
+          <p:nvPr/>
+        </p:nvPicPr>
+        <p:blipFill>
+          <a:blip r:embed="rId2"/>
+          <a:stretch>
+            <a:fillRect/>
+          </a:stretch>
+        </p:blipFill>
+        <p:spPr>
+          <a:xfrm>
+            <a:off x="548640" y="457200"/>
+            <a:ext cx="1626042" cy="914400"/>
+          </a:xfrm>
+          <a:prstGeom prst="rect">
+            <a:avLst/>
+          </a:prstGeom>
+        </p:spPr>
+      </p:pic>
+      <p:sp>
+        <p:nvSpPr>
+          <p:cNvPr id="4" name="TextBox 3"/>
+          <p:cNvSpPr txBox="1"/>
+          <p:nvPr/>
+        </p:nvSpPr>
+        <p:spPr>
+          <a:xfrm>
+            <a:off x="9418320" y="457200"/>
+            <a:ext cx="2286000" cy="914400"/>
           </a:xfrm>
           <a:prstGeom prst="rect">
             <a:avLst/>
@@ -6512,27 +8968,27 @@
               </a:spcAft>
             </a:pPr>
             <a:r>
-              <a:rPr sz="1100" b="1" i="0">
-                <a:solidFill>
-                  <a:srgbClr val="FFFFFF"/>
-                </a:solidFill>
-                <a:latin typeface="Segoe UI"/>
-              </a:rPr>
-              <a:t>HEIIU ENGLISH ACADEMY · PROGRAMA PARA FONDOS DE EMPLEADOS</a:t>
-            </a:r>
-          </a:p>
-        </p:txBody>
-      </p:sp>
-      <p:sp>
-        <p:nvSpPr>
-          <p:cNvPr id="6" name="TextBox 5"/>
+              <a:rPr sz="1200" b="0" i="0">
+                <a:solidFill>
+                  <a:srgbClr val="9AA4B5"/>
+                </a:solidFill>
+                <a:latin typeface="Oswald"/>
+              </a:rPr>
+              <a:t>7 / 7</a:t>
+            </a:r>
+          </a:p>
+        </p:txBody>
+      </p:sp>
+      <p:sp>
+        <p:nvSpPr>
+          <p:cNvPr id="5" name="TextBox 4"/>
           <p:cNvSpPr txBox="1"/>
           <p:nvPr/>
         </p:nvSpPr>
         <p:spPr>
           <a:xfrm>
-            <a:off x="548640" y="822960"/>
-            <a:ext cx="7498079" cy="2103120"/>
+            <a:off x="548640" y="1737360"/>
+            <a:ext cx="7589520" cy="320040"/>
           </a:xfrm>
           <a:prstGeom prst="rect">
             <a:avLst/>
@@ -6540,56 +8996,100 @@
           <a:noFill/>
         </p:spPr>
         <p:txBody>
-          <a:bodyPr wrap="square" lIns="45720" rIns="45720" tIns="27432" bIns="27432" anchor="ctr">
+          <a:bodyPr wrap="square" lIns="45720" rIns="45720" tIns="27432" bIns="27432" anchor="t">
             <a:spAutoFit/>
           </a:bodyPr>
           <a:lstStyle/>
           <a:p>
             <a:pPr algn="l">
               <a:lnSpc>
-                <a:spcPct val="105000"/>
+                <a:spcPct val="115000"/>
               </a:lnSpc>
               <a:spcAft>
                 <a:spcPts val="0"/>
               </a:spcAft>
             </a:pPr>
             <a:r>
-              <a:rPr sz="3600" b="1" i="0">
+              <a:rPr sz="1100" b="1" i="0" spc="250">
+                <a:solidFill>
+                  <a:srgbClr val="E54C09"/>
+                </a:solidFill>
+                <a:latin typeface="Lato"/>
+              </a:rPr>
+              <a:t>UN SOLO PASO</a:t>
+            </a:r>
+          </a:p>
+        </p:txBody>
+      </p:sp>
+      <p:sp>
+        <p:nvSpPr>
+          <p:cNvPr id="6" name="TextBox 5"/>
+          <p:cNvSpPr txBox="1"/>
+          <p:nvPr/>
+        </p:nvSpPr>
+        <p:spPr>
+          <a:xfrm>
+            <a:off x="548640" y="2103120"/>
+            <a:ext cx="7589520" cy="2011680"/>
+          </a:xfrm>
+          <a:prstGeom prst="rect">
+            <a:avLst/>
+          </a:prstGeom>
+          <a:noFill/>
+        </p:spPr>
+        <p:txBody>
+          <a:bodyPr wrap="square" lIns="45720" rIns="45720" tIns="27432" bIns="27432" anchor="t">
+            <a:spAutoFit/>
+          </a:bodyPr>
+          <a:lstStyle/>
+          <a:p>
+            <a:pPr algn="l">
+              <a:lnSpc>
+                <a:spcPct val="106000"/>
+              </a:lnSpc>
+              <a:spcAft>
+                <a:spcPts val="0"/>
+              </a:spcAft>
+            </a:pPr>
+            <a:r>
+              <a:rPr sz="3800" b="1" i="0">
+                <a:solidFill>
+                  <a:srgbClr val="F6F1E9"/>
+                </a:solidFill>
+                <a:latin typeface="Lato Black"/>
+              </a:rPr>
+              <a:t>¿Cuántos de sus afiliados quiere ver hablando inglés </a:t>
+            </a:r>
+            <a:r>
+              <a:rPr sz="3800" b="1" i="0">
                 <a:solidFill>
                   <a:srgbClr val="FBC900"/>
                 </a:solidFill>
-                <a:latin typeface="Constantia"/>
-              </a:rPr>
-              <a:t>Un solo paso: </a:t>
-            </a:r>
-            <a:r>
-              <a:rPr sz="3600" b="1" i="0">
-                <a:solidFill>
-                  <a:srgbClr val="FFFFFF"/>
-                </a:solidFill>
-                <a:latin typeface="Constantia"/>
-              </a:rPr>
-              <a:t>firmar el convenio hoy y fijar la charla de 20 minutos con sus afiliados.</a:t>
-            </a:r>
-          </a:p>
-        </p:txBody>
-      </p:sp>
-      <p:sp>
-        <p:nvSpPr>
-          <p:cNvPr id="7" name="Rectangle 6"/>
+                <a:latin typeface="Lato Black"/>
+              </a:rPr>
+              <a:t>el próximo año?</a:t>
+            </a:r>
+          </a:p>
+        </p:txBody>
+      </p:sp>
+      <p:sp>
+        <p:nvSpPr>
+          <p:cNvPr id="7" name="Rounded Rectangle 6"/>
           <p:cNvSpPr/>
           <p:nvPr/>
         </p:nvSpPr>
         <p:spPr>
           <a:xfrm>
-            <a:off x="594360" y="3017520"/>
-            <a:ext cx="1463040" cy="38000"/>
-          </a:xfrm>
-          <a:prstGeom prst="rect">
-            <a:avLst/>
+            <a:off x="548640" y="4251960"/>
+            <a:ext cx="7589520" cy="1051560"/>
+          </a:xfrm>
+          <a:prstGeom prst="roundRect">
+            <a:avLst>
+              <a:gd name="adj" fmla="val 30000"/>
+            </a:avLst>
           </a:prstGeom>
           <a:solidFill>
-            <a:srgbClr val="FBC900"/>
+            <a:srgbClr val="E54C09"/>
           </a:solidFill>
           <a:ln>
             <a:noFill/>
@@ -6620,58 +9120,14 @@
       </p:sp>
       <p:sp>
         <p:nvSpPr>
-          <p:cNvPr id="8" name="Rectangle 7"/>
-          <p:cNvSpPr/>
-          <p:nvPr/>
-        </p:nvSpPr>
-        <p:spPr>
-          <a:xfrm>
-            <a:off x="548640" y="3291840"/>
-            <a:ext cx="7498079" cy="1371600"/>
-          </a:xfrm>
-          <a:prstGeom prst="rect">
-            <a:avLst/>
-          </a:prstGeom>
-          <a:solidFill>
-            <a:srgbClr val="FF4A00"/>
-          </a:solidFill>
-          <a:ln>
-            <a:noFill/>
-          </a:ln>
-          <a:effectLst/>
-        </p:spPr>
-        <p:style>
-          <a:lnRef idx="1">
-            <a:schemeClr val="accent1"/>
-          </a:lnRef>
-          <a:fillRef idx="3">
-            <a:schemeClr val="accent1"/>
-          </a:fillRef>
-          <a:effectRef idx="2">
-            <a:schemeClr val="accent1"/>
-          </a:effectRef>
-          <a:fontRef idx="minor">
-            <a:schemeClr val="lt1"/>
-          </a:fontRef>
-        </p:style>
-        <p:txBody>
-          <a:bodyPr rtlCol="0" anchor="ctr"/>
-          <a:lstStyle/>
-          <a:p>
-            <a:pPr algn="ctr"/>
-          </a:p>
-        </p:txBody>
-      </p:sp>
-      <p:sp>
-        <p:nvSpPr>
-          <p:cNvPr id="9" name="TextBox 8"/>
+          <p:cNvPr id="8" name="TextBox 7"/>
           <p:cNvSpPr txBox="1"/>
           <p:nvPr/>
         </p:nvSpPr>
         <p:spPr>
           <a:xfrm>
-            <a:off x="731520" y="3337560"/>
-            <a:ext cx="7132320" cy="1280160"/>
+            <a:off x="777240" y="4251960"/>
+            <a:ext cx="7223760" cy="1051560"/>
           </a:xfrm>
           <a:prstGeom prst="rect">
             <a:avLst/>
@@ -6693,99 +9149,99 @@
               </a:spcAft>
             </a:pPr>
             <a:r>
-              <a:rPr sz="2400" b="1" i="0">
+              <a:rPr sz="1900" b="1" i="0">
                 <a:solidFill>
                   <a:srgbClr val="FFFFFF"/>
                 </a:solidFill>
-                <a:latin typeface="Segoe UI"/>
-              </a:rPr>
-              <a:t>¿La charla la hacemos el </a:t>
-            </a:r>
-            <a:r>
-              <a:rPr sz="2400" b="1" i="0">
+                <a:latin typeface="Lato"/>
+              </a:rPr>
+              <a:t>Firmamos hoy y la charla de 20 minutos la hacemos el </a:t>
+            </a:r>
+            <a:r>
+              <a:rPr sz="1900" b="1" i="0">
                 <a:solidFill>
                   <a:srgbClr val="FBC900"/>
                 </a:solidFill>
-                <a:latin typeface="Segoe UI"/>
-              </a:rPr>
-              <a:t>________</a:t>
-            </a:r>
-            <a:r>
-              <a:rPr sz="2400" b="1" i="0">
+                <a:latin typeface="Lato"/>
+              </a:rPr>
+              <a:t>_______</a:t>
+            </a:r>
+            <a:r>
+              <a:rPr sz="1900" b="1" i="0">
                 <a:solidFill>
                   <a:srgbClr val="FFFFFF"/>
                 </a:solidFill>
-                <a:latin typeface="Segoe UI"/>
+                <a:latin typeface="Lato"/>
               </a:rPr>
               <a:t> a las </a:t>
             </a:r>
             <a:r>
-              <a:rPr sz="2400" b="1" i="0">
+              <a:rPr sz="1900" b="1" i="0">
                 <a:solidFill>
                   <a:srgbClr val="FBC900"/>
                 </a:solidFill>
-                <a:latin typeface="Segoe UI"/>
+                <a:latin typeface="Lato"/>
               </a:rPr>
               <a:t>_____</a:t>
             </a:r>
             <a:r>
-              <a:rPr sz="2400" b="1" i="0">
+              <a:rPr sz="1900" b="1" i="0">
                 <a:solidFill>
                   <a:srgbClr val="FFFFFF"/>
                 </a:solidFill>
-                <a:latin typeface="Segoe UI"/>
+                <a:latin typeface="Lato"/>
               </a:rPr>
               <a:t> o el </a:t>
             </a:r>
             <a:r>
-              <a:rPr sz="2400" b="1" i="0">
+              <a:rPr sz="1900" b="1" i="0">
                 <a:solidFill>
                   <a:srgbClr val="FBC900"/>
                 </a:solidFill>
-                <a:latin typeface="Segoe UI"/>
-              </a:rPr>
-              <a:t>________</a:t>
-            </a:r>
-            <a:r>
-              <a:rPr sz="2400" b="1" i="0">
+                <a:latin typeface="Lato"/>
+              </a:rPr>
+              <a:t>_______</a:t>
+            </a:r>
+            <a:r>
+              <a:rPr sz="1900" b="1" i="0">
                 <a:solidFill>
                   <a:srgbClr val="FFFFFF"/>
                 </a:solidFill>
-                <a:latin typeface="Segoe UI"/>
+                <a:latin typeface="Lato"/>
               </a:rPr>
               <a:t> a las </a:t>
             </a:r>
             <a:r>
-              <a:rPr sz="2400" b="1" i="0">
+              <a:rPr sz="1900" b="1" i="0">
                 <a:solidFill>
                   <a:srgbClr val="FBC900"/>
                 </a:solidFill>
-                <a:latin typeface="Segoe UI"/>
+                <a:latin typeface="Lato"/>
               </a:rPr>
               <a:t>_____</a:t>
             </a:r>
             <a:r>
-              <a:rPr sz="2400" b="1" i="0">
+              <a:rPr sz="1900" b="1" i="0">
                 <a:solidFill>
                   <a:srgbClr val="FFFFFF"/>
                 </a:solidFill>
-                <a:latin typeface="Segoe UI"/>
-              </a:rPr>
-              <a:t>?</a:t>
-            </a:r>
-          </a:p>
-        </p:txBody>
-      </p:sp>
-      <p:sp>
-        <p:nvSpPr>
-          <p:cNvPr id="10" name="TextBox 9"/>
+                <a:latin typeface="Lato"/>
+              </a:rPr>
+              <a:t>.</a:t>
+            </a:r>
+          </a:p>
+        </p:txBody>
+      </p:sp>
+      <p:sp>
+        <p:nvSpPr>
+          <p:cNvPr id="9" name="TextBox 8"/>
           <p:cNvSpPr txBox="1"/>
           <p:nvPr/>
         </p:nvSpPr>
         <p:spPr>
           <a:xfrm>
-            <a:off x="548640" y="4846320"/>
-            <a:ext cx="7498079" cy="1280160"/>
+            <a:off x="548640" y="5440680"/>
+            <a:ext cx="7589520" cy="822960"/>
           </a:xfrm>
           <a:prstGeom prst="rect">
             <a:avLst/>
@@ -6800,27 +9256,27 @@
           <a:p>
             <a:pPr algn="l">
               <a:lnSpc>
-                <a:spcPct val="120000"/>
+                <a:spcPct val="125000"/>
               </a:lnSpc>
               <a:spcAft>
-                <a:spcPts val="600"/>
+                <a:spcPts val="400"/>
               </a:spcAft>
             </a:pPr>
             <a:r>
-              <a:rPr sz="1800" b="1" i="0">
+              <a:rPr sz="1600" b="1" i="0">
                 <a:solidFill>
                   <a:srgbClr val="FBC900"/>
                 </a:solidFill>
-                <a:latin typeface="Segoe UI"/>
+                <a:latin typeface="Lato"/>
               </a:rPr>
               <a:t>Si va a junta: </a:t>
             </a:r>
             <a:r>
-              <a:rPr sz="1800" b="0" i="0">
-                <a:solidFill>
-                  <a:srgbClr val="FFF8E7"/>
-                </a:solidFill>
-                <a:latin typeface="Segoe UI"/>
+              <a:rPr sz="1600" b="0" i="0">
+                <a:solidFill>
+                  <a:srgbClr val="F6F1E9"/>
+                </a:solidFill>
+                <a:latin typeface="Lato"/>
               </a:rPr>
               <a:t>¿cuándo se reúne? Le dejo el convenio listo para esa fecha.</a:t>
             </a:r>
@@ -6828,21 +9284,67 @@
           <a:p>
             <a:pPr algn="l">
               <a:lnSpc>
-                <a:spcPct val="120000"/>
+                <a:spcPct val="125000"/>
               </a:lnSpc>
               <a:spcAft>
-                <a:spcPts val="600"/>
+                <a:spcPts val="400"/>
               </a:spcAft>
             </a:pPr>
             <a:r>
-              <a:rPr sz="1500" b="0" i="0">
-                <a:solidFill>
-                  <a:srgbClr val="C9B8A3"/>
-                </a:solidFill>
-                <a:latin typeface="Segoe UI"/>
-              </a:rPr>
-              <a:t>Una hoja, sin costo, 12 meses, se termina con aviso de 30 días.</a:t>
-            </a:r>
+              <a:rPr sz="1300" b="0" i="0">
+                <a:solidFill>
+                  <a:srgbClr val="9AA4B5"/>
+                </a:solidFill>
+                <a:latin typeface="Lato"/>
+              </a:rPr>
+              <a:t>Una hoja · sin costo · 12 meses · se termina con aviso de 30 días.</a:t>
+            </a:r>
+          </a:p>
+        </p:txBody>
+      </p:sp>
+      <p:sp>
+        <p:nvSpPr>
+          <p:cNvPr id="10" name="Rounded Rectangle 9"/>
+          <p:cNvSpPr/>
+          <p:nvPr/>
+        </p:nvSpPr>
+        <p:spPr>
+          <a:xfrm>
+            <a:off x="8732520" y="1600200"/>
+            <a:ext cx="3017520" cy="4069080"/>
+          </a:xfrm>
+          <a:prstGeom prst="roundRect">
+            <a:avLst>
+              <a:gd name="adj" fmla="val 2000"/>
+            </a:avLst>
+          </a:prstGeom>
+          <a:solidFill>
+            <a:srgbClr val="FFFFFF"/>
+          </a:solidFill>
+          <a:ln>
+            <a:noFill/>
+          </a:ln>
+          <a:effectLst/>
+        </p:spPr>
+        <p:style>
+          <a:lnRef idx="1">
+            <a:schemeClr val="accent1"/>
+          </a:lnRef>
+          <a:fillRef idx="3">
+            <a:schemeClr val="accent1"/>
+          </a:fillRef>
+          <a:effectRef idx="2">
+            <a:schemeClr val="accent1"/>
+          </a:effectRef>
+          <a:fontRef idx="minor">
+            <a:schemeClr val="lt1"/>
+          </a:fontRef>
+        </p:style>
+        <p:txBody>
+          <a:bodyPr rtlCol="0" anchor="ctr"/>
+          <a:lstStyle/>
+          <a:p>
+            <a:pPr algn="ctr"/>
           </a:p>
         </p:txBody>
       </p:sp>
@@ -6855,15 +9357,15 @@
           <p:nvPr/>
         </p:nvPicPr>
         <p:blipFill>
-          <a:blip r:embed="rId2"/>
+          <a:blip r:embed="rId3"/>
           <a:stretch>
             <a:fillRect/>
           </a:stretch>
         </p:blipFill>
         <p:spPr>
           <a:xfrm>
-            <a:off x="8595360" y="822960"/>
-            <a:ext cx="3956858" cy="5120640"/>
+            <a:off x="8796528" y="1664208"/>
+            <a:ext cx="3045367" cy="3941063"/>
           </a:xfrm>
           <a:prstGeom prst="rect">
             <a:avLst/>
@@ -6878,8 +9380,50 @@
         </p:nvSpPr>
         <p:spPr>
           <a:xfrm>
-            <a:off x="502920" y="6355080"/>
-            <a:ext cx="11155680" cy="365760"/>
+            <a:off x="8732520" y="5760720"/>
+            <a:ext cx="3017520" cy="365760"/>
+          </a:xfrm>
+          <a:prstGeom prst="rect">
+            <a:avLst/>
+          </a:prstGeom>
+          <a:noFill/>
+        </p:spPr>
+        <p:txBody>
+          <a:bodyPr wrap="square" lIns="45720" rIns="45720" tIns="27432" bIns="27432" anchor="t">
+            <a:spAutoFit/>
+          </a:bodyPr>
+          <a:lstStyle/>
+          <a:p>
+            <a:pPr algn="ctr">
+              <a:lnSpc>
+                <a:spcPct val="115000"/>
+              </a:lnSpc>
+              <a:spcAft>
+                <a:spcPts val="0"/>
+              </a:spcAft>
+            </a:pPr>
+            <a:r>
+              <a:rPr sz="1100" b="0" i="0">
+                <a:solidFill>
+                  <a:srgbClr val="9AA4B5"/>
+                </a:solidFill>
+                <a:latin typeface="Lato"/>
+              </a:rPr>
+              <a:t>El convenio: una hoja</a:t>
+            </a:r>
+          </a:p>
+        </p:txBody>
+      </p:sp>
+      <p:sp>
+        <p:nvSpPr>
+          <p:cNvPr id="13" name="TextBox 12"/>
+          <p:cNvSpPr txBox="1"/>
+          <p:nvPr/>
+        </p:nvSpPr>
+        <p:spPr>
+          <a:xfrm>
+            <a:off x="548640" y="6400800"/>
+            <a:ext cx="11155680" cy="320040"/>
           </a:xfrm>
           <a:prstGeom prst="rect">
             <a:avLst/>
@@ -6901,11 +9445,11 @@
               </a:spcAft>
             </a:pPr>
             <a:r>
-              <a:rPr sz="1000" b="0" i="0">
-                <a:solidFill>
-                  <a:srgbClr val="C9B8A3"/>
-                </a:solidFill>
-                <a:latin typeface="Segoe UI"/>
+              <a:rPr sz="950" b="0" i="0">
+                <a:solidFill>
+                  <a:srgbClr val="9AA4B5"/>
+                </a:solidFill>
+                <a:latin typeface="Lato"/>
               </a:rPr>
               <a:t>Heiiu English Academy · Global Teacher S.A.S. · Línea de alianzas 316 768 8793 · Carrera 27 # 48-49, Sotomayor, Bucaramanga · @Heiiu_english</a:t>
             </a:r>

--- a/recursos/comercial/B2B/PRESENTACION_FONDOS_EMPLEADOS_HEIIU.pptx
+++ b/recursos/comercial/B2B/PRESENTACION_FONDOS_EMPLEADOS_HEIIU.pptx
@@ -588,7 +588,7 @@
           <a:lstStyle/>
           <a:p>
             <a:r>
-              <a:t>QUÉ DECIR (máximo 20 segundos, no más): "Somos una academia de Bucaramanga con licencia de la Secretaría de Educación desde 2012 y certificación ISO 9001 e ICONTEC. Un solo programa, de A1 a B2, presencial. Y lo que ninguna otra firma: la garantía por escrito." El detalle está en la hoja que se deja al final. Hablar de la academia más de 2 minutos baja el cierre.</a:t>
+              <a:t>QUÉ DECIR (máximo 20 segundos): "Somos una academia de Bucaramanga con licencia de la Secretaría de Educación desde 2012 y certificación ISO 9001 e ICONTEC. Un solo programa, de A1 a B2, presencial. Y lo que ninguna otra firma: la garantía por escrito." El detalle está en la hoja que se deja al final. Hablar de la academia más de 2 minutos baja el cierre.</a:t>
             </a:r>
           </a:p>
         </p:txBody>
@@ -658,12 +658,12 @@
           <a:lstStyle/>
           <a:p>
             <a:r>
-              <a:t>QUÉ DECIR: "Es un programa completo, presencial, en nuestra sede, en la mañana o en la noche; con 8 afiliados o más, el horario lo pone el fondo. Un profesor por grupo de máximo 16, y evaluador externo al cierre de cada nivel. Y lo firmamos: si cumple y no avanza, devolvemos el nivel."</a:t>
-            </a:r>
-          </a:p>
-          <a:p>
-            <a:r>
-              <a:t>NO leer las seis casillas. Si pregunta por una, responde en una frase: el detalle está en la hoja.</a:t>
+              <a:t>QUÉ DECIR: "Programa completo, presencial, en la mañana o en la noche; con 8 afiliados o más, el horario lo pone el fondo. Un profesor por grupo de máximo 16 y evaluador externo al cierre de cada nivel. Y lo firmamos: si cumple y no avanza, devolvemos el nivel."</a:t>
+            </a:r>
+          </a:p>
+          <a:p>
+            <a:r>
+              <a:t>Horarios exactos: mañana 8:00 a 12:00, noche 6:30 a 8:30 p. m., sábados 8:00 a 12:00. Todo está en la hoja; no leer las seis casillas.</a:t>
             </a:r>
           </a:p>
         </p:txBody>
@@ -738,7 +738,7 @@
           </a:p>
           <a:p>
             <a:r>
-              <a:t>Si el fondo quiere pagar los cupos: Plan Empresa, $4.782.800 por cupo de 3 a 7, $4.350.000 de 8 a 15, $3.950.000 de 16 a 30 (está en la hoja). NO recitar la tabla. "Beca", nunca "descuento".</a:t>
+              <a:t>A cuotas con la academia: $5.565.440 (36%); ejemplo $1.113.088 hoy y 11 cuotas de $452.348. Plan Empresa si el fondo paga los cupos: $4.782.800 por cupo de 3 a 7, $4.350.000 de 8 a 15, $3.950.000 de 16 a 30. Todo en la hoja. "Beca", nunca "descuento".</a:t>
             </a:r>
           </a:p>
         </p:txBody>
@@ -808,7 +808,7 @@
           <a:lstStyle/>
           <a:p>
             <a:r>
-              <a:t>QUÉ DECIR: "Para el fondo es un beneficio más en su portafolio, con su nombre y sin tocar presupuesto: usted postula con una carta y nosotros hacemos el resto. Para el afiliado es pagar la mitad, con garantía, y que lo acompañen hasta que hable." Decir UN dato, no todos.</a:t>
+              <a:t>QUÉ DECIR: "Para el fondo es un beneficio más en su portafolio, con su nombre y sin tocar presupuesto: usted postula con una carta y nosotros hacemos el resto. Para el afiliado es pagar la mitad, con garantía, y que lo acompañen hasta que hable." UN dato si hace falta: quien certifica su inglés gana cerca de un 26% más (DNP). Diagnóstico de nivel para 10 afiliados sin costo la semana siguiente a la firma.</a:t>
             </a:r>
           </a:p>
           <a:p>
@@ -883,7 +883,7 @@
           <a:lstStyle/>
           <a:p>
             <a:r>
-              <a:t>QUÉ DECIR: "Le hablo hoy y no el mes entrante por una razón: el grupo arranca el martes 3 de noviembre y no para en diciembre. Si firmamos esta semana, sus afiliados alcanzan a entrar. El convenio no tiene costo ni obligaciones, se firma en una hoja, dura 12 meses y se termina con aviso de 30 días. Lo único que le pido es 20 minutos con sus afiliados."</a:t>
+              <a:t>QUÉ DECIR: "Le hablo hoy y no el mes entrante por una razón: el grupo arranca el martes 3 de noviembre y no para en diciembre; solo descansa los festivos. Si firmamos esta semana, sus afiliados alcanzan a entrar. El convenio no tiene costo ni obligaciones, se firma en una hoja, dura 12 meses y se termina con aviso de 30 días. Lo único que le pido es 20 minutos con sus afiliados."</a:t>
             </a:r>
           </a:p>
           <a:p>
@@ -3989,7 +3989,7 @@
             <a:avLst/>
           </a:prstGeom>
           <a:solidFill>
-            <a:srgbClr val="0F1B2D"/>
+            <a:srgbClr val="2B5A8C"/>
           </a:solidFill>
           <a:ln>
             <a:noFill/>
@@ -4033,7 +4033,7 @@
             <a:avLst/>
           </a:prstGeom>
           <a:solidFill>
-            <a:srgbClr val="1B2A41"/>
+            <a:srgbClr val="3D6FA6"/>
           </a:solidFill>
           <a:ln>
             <a:noFill/>
@@ -4163,7 +4163,7 @@
             <a:r>
               <a:rPr sz="1100" b="1" i="0" spc="250">
                 <a:solidFill>
-                  <a:srgbClr val="E54C09"/>
+                  <a:srgbClr val="FBC900"/>
                 </a:solidFill>
                 <a:latin typeface="Lato"/>
               </a:rPr>
@@ -4205,7 +4205,7 @@
             <a:r>
               <a:rPr sz="4200" b="1" i="0">
                 <a:solidFill>
-                  <a:srgbClr val="F6F1E9"/>
+                  <a:srgbClr val="FFFFFF"/>
                 </a:solidFill>
                 <a:latin typeface="Lato Black"/>
               </a:rPr>
@@ -4256,11 +4256,11 @@
             <a:r>
               <a:rPr sz="1800" b="0" i="0">
                 <a:solidFill>
-                  <a:srgbClr val="C9D0DB"/>
+                  <a:srgbClr val="D6E2F0"/>
                 </a:solidFill>
                 <a:latin typeface="Lato"/>
               </a:rPr>
-              <a:t>Programa presencial de A1 a B2 en Bucaramanga, con garantía de aprendizaje por escrito.</a:t>
+              <a:t>Presencial, en Bucaramanga. Con garantía de aprendizaje por escrito.</a:t>
             </a:r>
           </a:p>
         </p:txBody>
@@ -4298,7 +4298,7 @@
             <a:r>
               <a:rPr sz="1300" b="0" i="0">
                 <a:solidFill>
-                  <a:srgbClr val="7A828F"/>
+                  <a:srgbClr val="D6E2F0"/>
                 </a:solidFill>
                 <a:latin typeface="Lato"/>
               </a:rPr>
@@ -4307,7 +4307,7 @@
             <a:r>
               <a:rPr sz="1300" b="0" i="0">
                 <a:solidFill>
-                  <a:srgbClr val="9AA4B5"/>
+                  <a:srgbClr val="D6E2F0"/>
                 </a:solidFill>
                 <a:latin typeface="Lato"/>
               </a:rPr>
@@ -4316,7 +4316,7 @@
             <a:r>
               <a:rPr sz="1300" b="0" i="0">
                 <a:solidFill>
-                  <a:srgbClr val="7A828F"/>
+                  <a:srgbClr val="D6E2F0"/>
                 </a:solidFill>
                 <a:latin typeface="Lato"/>
               </a:rPr>
@@ -4376,7 +4376,7 @@
         <p:spPr>
           <a:xfrm>
             <a:off x="9098280" y="3246120"/>
-            <a:ext cx="2834640" cy="914400"/>
+            <a:ext cx="2834640" cy="822960"/>
           </a:xfrm>
           <a:prstGeom prst="rect">
             <a:avLst/>
@@ -4400,11 +4400,11 @@
             <a:r>
               <a:rPr sz="1500" b="0" i="0">
                 <a:solidFill>
-                  <a:srgbClr val="F6F1E9"/>
+                  <a:srgbClr val="FFFFFF"/>
                 </a:solidFill>
                 <a:latin typeface="Lato"/>
               </a:rPr>
-              <a:t>de beca sobre el programa completo, a nombre del fondo</a:t>
+              <a:t>de beca, a nombre del fondo</a:t>
             </a:r>
           </a:p>
         </p:txBody>
@@ -4442,7 +4442,7 @@
             <a:r>
               <a:rPr sz="7200" b="0" i="0">
                 <a:solidFill>
-                  <a:srgbClr val="F6F1E9"/>
+                  <a:srgbClr val="FFFFFF"/>
                 </a:solidFill>
                 <a:latin typeface="Oswald"/>
               </a:rPr>
@@ -4484,11 +4484,11 @@
             <a:r>
               <a:rPr sz="1500" b="0" i="0">
                 <a:solidFill>
-                  <a:srgbClr val="F6F1E9"/>
+                  <a:srgbClr val="FFFFFF"/>
                 </a:solidFill>
                 <a:latin typeface="Lato"/>
               </a:rPr>
-              <a:t>de costo para el fondo. Una hoja, 12 meses.</a:t>
+              <a:t>para el fondo. Una hoja, 12 meses.</a:t>
             </a:r>
           </a:p>
         </p:txBody>
@@ -4526,7 +4526,7 @@
             <a:avLst/>
           </a:prstGeom>
           <a:solidFill>
-            <a:srgbClr val="F6F1E9"/>
+            <a:srgbClr val="F7F3EC"/>
           </a:solidFill>
           <a:ln>
             <a:noFill/>
@@ -4572,7 +4572,7 @@
             </a:avLst>
           </a:prstGeom>
           <a:solidFill>
-            <a:srgbClr val="0F1B2D"/>
+            <a:srgbClr val="2B5A8C"/>
           </a:solidFill>
           <a:ln>
             <a:noFill/>
@@ -4675,7 +4675,7 @@
         </p:nvSpPr>
         <p:spPr>
           <a:xfrm>
-            <a:off x="548640" y="1234440"/>
+            <a:off x="548640" y="1280160"/>
             <a:ext cx="7315200" cy="320040"/>
           </a:xfrm>
           <a:prstGeom prst="rect">
@@ -4717,8 +4717,8 @@
         </p:nvSpPr>
         <p:spPr>
           <a:xfrm>
-            <a:off x="548640" y="1554480"/>
-            <a:ext cx="10058400" cy="1737360"/>
+            <a:off x="548640" y="1600200"/>
+            <a:ext cx="10515600" cy="1645920"/>
           </a:xfrm>
           <a:prstGeom prst="rect">
             <a:avLst/>
@@ -4740,13 +4740,13 @@
               </a:spcAft>
             </a:pPr>
             <a:r>
-              <a:rPr sz="3400" b="1" i="0">
-                <a:solidFill>
-                  <a:srgbClr val="0F1B2D"/>
+              <a:rPr sz="3600" b="1" i="0">
+                <a:solidFill>
+                  <a:srgbClr val="1E3A5F"/>
                 </a:solidFill>
                 <a:latin typeface="Lato Black"/>
               </a:rPr>
-              <a:t>Una academia presencial de Bucaramanga que responde por el resultado.</a:t>
+              <a:t>Una academia de Bucaramanga que responde por el resultado.</a:t>
             </a:r>
           </a:p>
         </p:txBody>
@@ -4802,7 +4802,7 @@
         <p:spPr>
           <a:xfrm>
             <a:off x="548640" y="3429000"/>
-            <a:ext cx="2651760" cy="2606040"/>
+            <a:ext cx="2651760" cy="2377440"/>
           </a:xfrm>
           <a:prstGeom prst="roundRect">
             <a:avLst>
@@ -4814,7 +4814,7 @@
           </a:solidFill>
           <a:ln w="9525">
             <a:solidFill>
-              <a:srgbClr val="E3DBCF"/>
+              <a:srgbClr val="DDE4EE"/>
             </a:solidFill>
           </a:ln>
           <a:effectLst/>
@@ -4916,9 +4916,9 @@
               </a:spcAft>
             </a:pPr>
             <a:r>
-              <a:rPr sz="4400" b="0" i="0">
-                <a:solidFill>
-                  <a:srgbClr val="0F1B2D"/>
+              <a:rPr sz="4600" b="0" i="0">
+                <a:solidFill>
+                  <a:srgbClr val="1E3A5F"/>
                 </a:solidFill>
                 <a:latin typeface="Oswald"/>
               </a:rPr>
@@ -4935,8 +4935,8 @@
         </p:nvSpPr>
         <p:spPr>
           <a:xfrm>
-            <a:off x="822960" y="4846320"/>
-            <a:ext cx="2148840" cy="1143000"/>
+            <a:off x="822960" y="4892040"/>
+            <a:ext cx="2148840" cy="822960"/>
           </a:xfrm>
           <a:prstGeom prst="rect">
             <a:avLst/>
@@ -4958,13 +4958,13 @@
               </a:spcAft>
             </a:pPr>
             <a:r>
-              <a:rPr sz="1300" b="0" i="0">
+              <a:rPr sz="1400" b="0" i="0">
                 <a:solidFill>
                   <a:srgbClr val="2B3445"/>
                 </a:solidFill>
                 <a:latin typeface="Lato"/>
               </a:rPr>
-              <a:t>Licencia de la Secretaría de Educación desde 2012. Sede propia en Sotomayor.</a:t>
+              <a:t>Licencia de la Secretaría de Educación</a:t>
             </a:r>
           </a:p>
         </p:txBody>
@@ -4978,7 +4978,7 @@
         <p:spPr>
           <a:xfrm>
             <a:off x="3383280" y="3429000"/>
-            <a:ext cx="2651760" cy="2606040"/>
+            <a:ext cx="2651760" cy="2377440"/>
           </a:xfrm>
           <a:prstGeom prst="roundRect">
             <a:avLst>
@@ -4990,7 +4990,7 @@
           </a:solidFill>
           <a:ln w="9525">
             <a:solidFill>
-              <a:srgbClr val="E3DBCF"/>
+              <a:srgbClr val="DDE4EE"/>
             </a:solidFill>
           </a:ln>
           <a:effectLst/>
@@ -5092,9 +5092,9 @@
               </a:spcAft>
             </a:pPr>
             <a:r>
-              <a:rPr sz="4400" b="0" i="0">
-                <a:solidFill>
-                  <a:srgbClr val="0F1B2D"/>
+              <a:rPr sz="4600" b="0" i="0">
+                <a:solidFill>
+                  <a:srgbClr val="1E3A5F"/>
                 </a:solidFill>
                 <a:latin typeface="Oswald"/>
               </a:rPr>
@@ -5111,8 +5111,8 @@
         </p:nvSpPr>
         <p:spPr>
           <a:xfrm>
-            <a:off x="3657600" y="4846320"/>
-            <a:ext cx="2148840" cy="1143000"/>
+            <a:off x="3657600" y="4892040"/>
+            <a:ext cx="2148840" cy="822960"/>
           </a:xfrm>
           <a:prstGeom prst="rect">
             <a:avLst/>
@@ -5134,13 +5134,13 @@
               </a:spcAft>
             </a:pPr>
             <a:r>
-              <a:rPr sz="1300" b="0" i="0">
+              <a:rPr sz="1400" b="0" i="0">
                 <a:solidFill>
                   <a:srgbClr val="2B3445"/>
                 </a:solidFill>
                 <a:latin typeface="Lato"/>
               </a:rPr>
-              <a:t>Certificación de calidad ISO 9001 e ICONTEC.</a:t>
+              <a:t>Certificación ISO e ICONTEC</a:t>
             </a:r>
           </a:p>
         </p:txBody>
@@ -5154,7 +5154,7 @@
         <p:spPr>
           <a:xfrm>
             <a:off x="6217920" y="3429000"/>
-            <a:ext cx="2651760" cy="2606040"/>
+            <a:ext cx="2651760" cy="2377440"/>
           </a:xfrm>
           <a:prstGeom prst="roundRect">
             <a:avLst>
@@ -5166,7 +5166,7 @@
           </a:solidFill>
           <a:ln w="9525">
             <a:solidFill>
-              <a:srgbClr val="E3DBCF"/>
+              <a:srgbClr val="DDE4EE"/>
             </a:solidFill>
           </a:ln>
           <a:effectLst/>
@@ -5268,9 +5268,9 @@
               </a:spcAft>
             </a:pPr>
             <a:r>
-              <a:rPr sz="4400" b="0" i="0">
-                <a:solidFill>
-                  <a:srgbClr val="0F1B2D"/>
+              <a:rPr sz="4600" b="0" i="0">
+                <a:solidFill>
+                  <a:srgbClr val="1E3A5F"/>
                 </a:solidFill>
                 <a:latin typeface="Oswald"/>
               </a:rPr>
@@ -5287,8 +5287,8 @@
         </p:nvSpPr>
         <p:spPr>
           <a:xfrm>
-            <a:off x="6492240" y="4846320"/>
-            <a:ext cx="2148840" cy="1143000"/>
+            <a:off x="6492240" y="4892040"/>
+            <a:ext cx="2148840" cy="822960"/>
           </a:xfrm>
           <a:prstGeom prst="rect">
             <a:avLst/>
@@ -5310,13 +5310,13 @@
               </a:spcAft>
             </a:pPr>
             <a:r>
-              <a:rPr sz="1300" b="0" i="0">
+              <a:rPr sz="1400" b="0" i="0">
                 <a:solidFill>
                   <a:srgbClr val="2B3445"/>
                 </a:solidFill>
                 <a:latin typeface="Lato"/>
               </a:rPr>
-              <a:t>Un solo programa, completo: de A1 a B2, presencial, en grupos de máximo 16.</a:t>
+              <a:t>De A1 a B2, presencial, grupos de 16</a:t>
             </a:r>
           </a:p>
         </p:txBody>
@@ -5330,7 +5330,7 @@
         <p:spPr>
           <a:xfrm>
             <a:off x="9052560" y="3429000"/>
-            <a:ext cx="2651760" cy="2606040"/>
+            <a:ext cx="2651760" cy="2377440"/>
           </a:xfrm>
           <a:prstGeom prst="roundRect">
             <a:avLst>
@@ -5342,7 +5342,7 @@
           </a:solidFill>
           <a:ln w="9525">
             <a:solidFill>
-              <a:srgbClr val="E3DBCF"/>
+              <a:srgbClr val="DDE4EE"/>
             </a:solidFill>
           </a:ln>
           <a:effectLst/>
@@ -5444,9 +5444,9 @@
               </a:spcAft>
             </a:pPr>
             <a:r>
-              <a:rPr sz="4400" b="0" i="0">
-                <a:solidFill>
-                  <a:srgbClr val="0F1B2D"/>
+              <a:rPr sz="4600" b="0" i="0">
+                <a:solidFill>
+                  <a:srgbClr val="1E3A5F"/>
                 </a:solidFill>
                 <a:latin typeface="Oswald"/>
               </a:rPr>
@@ -5463,8 +5463,8 @@
         </p:nvSpPr>
         <p:spPr>
           <a:xfrm>
-            <a:off x="9326880" y="4846320"/>
-            <a:ext cx="2148840" cy="1143000"/>
+            <a:off x="9326880" y="4892040"/>
+            <a:ext cx="2148840" cy="822960"/>
           </a:xfrm>
           <a:prstGeom prst="rect">
             <a:avLst/>
@@ -5486,13 +5486,13 @@
               </a:spcAft>
             </a:pPr>
             <a:r>
-              <a:rPr sz="1300" b="0" i="0">
+              <a:rPr sz="1400" b="0" i="0">
                 <a:solidFill>
                   <a:srgbClr val="2B3445"/>
                 </a:solidFill>
                 <a:latin typeface="Lato"/>
               </a:rPr>
-              <a:t>Nuestro logro: la garantía por escrito. Si el estudiante cumple y no avanza, le devolvemos el 100% del nivel.</a:t>
+              <a:t>Garantía por escrito: devolvemos el nivel</a:t>
             </a:r>
           </a:p>
         </p:txBody>
@@ -5530,7 +5530,7 @@
             <a:avLst/>
           </a:prstGeom>
           <a:solidFill>
-            <a:srgbClr val="F6F1E9"/>
+            <a:srgbClr val="F7F3EC"/>
           </a:solidFill>
           <a:ln>
             <a:noFill/>
@@ -5576,7 +5576,7 @@
             </a:avLst>
           </a:prstGeom>
           <a:solidFill>
-            <a:srgbClr val="0F1B2D"/>
+            <a:srgbClr val="2B5A8C"/>
           </a:solidFill>
           <a:ln>
             <a:noFill/>
@@ -5679,7 +5679,7 @@
         </p:nvSpPr>
         <p:spPr>
           <a:xfrm>
-            <a:off x="548640" y="1234440"/>
+            <a:off x="548640" y="1280160"/>
             <a:ext cx="7315200" cy="320040"/>
           </a:xfrm>
           <a:prstGeom prst="rect">
@@ -5721,8 +5721,8 @@
         </p:nvSpPr>
         <p:spPr>
           <a:xfrm>
-            <a:off x="548640" y="1554480"/>
-            <a:ext cx="10058400" cy="1737360"/>
+            <a:off x="548640" y="1600200"/>
+            <a:ext cx="10515600" cy="1645920"/>
           </a:xfrm>
           <a:prstGeom prst="rect">
             <a:avLst/>
@@ -5744,13 +5744,13 @@
               </a:spcAft>
             </a:pPr>
             <a:r>
-              <a:rPr sz="3400" b="1" i="0">
-                <a:solidFill>
-                  <a:srgbClr val="0F1B2D"/>
+              <a:rPr sz="3600" b="1" i="0">
+                <a:solidFill>
+                  <a:srgbClr val="1E3A5F"/>
                 </a:solidFill>
                 <a:latin typeface="Lato Black"/>
               </a:rPr>
-              <a:t>Programa completo de inglés, de A1 a B2: 575 horas presenciales.</a:t>
+              <a:t>Programa completo de A1 a B2: 575 horas presenciales.</a:t>
             </a:r>
           </a:p>
         </p:txBody>
@@ -5805,7 +5805,7 @@
         </p:nvSpPr>
         <p:spPr>
           <a:xfrm>
-            <a:off x="548640" y="3246120"/>
+            <a:off x="548640" y="3383280"/>
             <a:ext cx="457200" cy="30000"/>
           </a:xfrm>
           <a:prstGeom prst="rect">
@@ -5849,7 +5849,7 @@
         </p:nvSpPr>
         <p:spPr>
           <a:xfrm>
-            <a:off x="548640" y="3355848"/>
+            <a:off x="548640" y="3493008"/>
             <a:ext cx="3474720" cy="320040"/>
           </a:xfrm>
           <a:prstGeom prst="rect">
@@ -5874,7 +5874,7 @@
             <a:r>
               <a:rPr sz="1100" b="1" i="0" spc="200">
                 <a:solidFill>
-                  <a:srgbClr val="0F1B2D"/>
+                  <a:srgbClr val="1E3A5F"/>
                 </a:solidFill>
                 <a:latin typeface="Lato"/>
               </a:rPr>
@@ -5891,94 +5891,8 @@
         </p:nvSpPr>
         <p:spPr>
           <a:xfrm>
-            <a:off x="548640" y="3675888"/>
-            <a:ext cx="3474720" cy="1097280"/>
-          </a:xfrm>
-          <a:prstGeom prst="rect">
-            <a:avLst/>
-          </a:prstGeom>
-          <a:noFill/>
-        </p:spPr>
-        <p:txBody>
-          <a:bodyPr wrap="square" lIns="45720" rIns="45720" tIns="27432" bIns="27432" anchor="t">
-            <a:spAutoFit/>
-          </a:bodyPr>
-          <a:lstStyle/>
-          <a:p>
-            <a:pPr algn="l">
-              <a:lnSpc>
-                <a:spcPct val="120000"/>
-              </a:lnSpc>
-              <a:spcAft>
-                <a:spcPts val="0"/>
-              </a:spcAft>
-            </a:pPr>
-            <a:r>
-              <a:rPr sz="1250" b="0" i="0">
-                <a:solidFill>
-                  <a:srgbClr val="2B3445"/>
-                </a:solidFill>
-                <a:latin typeface="Lato"/>
-              </a:rPr>
-              <a:t>Mañana 8:00 a 12:00 · Noche 6:30 a 8:30 p. m. · Sábados 8:00 a 12:00. Con 8 o más afiliados, el horario lo define el fondo.</a:t>
-            </a:r>
-          </a:p>
-        </p:txBody>
-      </p:sp>
-      <p:sp>
-        <p:nvSpPr>
-          <p:cNvPr id="12" name="Rectangle 11"/>
-          <p:cNvSpPr/>
-          <p:nvPr/>
-        </p:nvSpPr>
-        <p:spPr>
-          <a:xfrm>
-            <a:off x="4297679" y="3246120"/>
-            <a:ext cx="457200" cy="30000"/>
-          </a:xfrm>
-          <a:prstGeom prst="rect">
-            <a:avLst/>
-          </a:prstGeom>
-          <a:solidFill>
-            <a:srgbClr val="E54C09"/>
-          </a:solidFill>
-          <a:ln>
-            <a:noFill/>
-          </a:ln>
-          <a:effectLst/>
-        </p:spPr>
-        <p:style>
-          <a:lnRef idx="1">
-            <a:schemeClr val="accent1"/>
-          </a:lnRef>
-          <a:fillRef idx="3">
-            <a:schemeClr val="accent1"/>
-          </a:fillRef>
-          <a:effectRef idx="2">
-            <a:schemeClr val="accent1"/>
-          </a:effectRef>
-          <a:fontRef idx="minor">
-            <a:schemeClr val="lt1"/>
-          </a:fontRef>
-        </p:style>
-        <p:txBody>
-          <a:bodyPr rtlCol="0" anchor="ctr"/>
-          <a:lstStyle/>
-          <a:p>
-            <a:pPr algn="ctr"/>
-          </a:p>
-        </p:txBody>
-      </p:sp>
-      <p:sp>
-        <p:nvSpPr>
-          <p:cNvPr id="13" name="TextBox 12"/>
-          <p:cNvSpPr txBox="1"/>
-          <p:nvPr/>
-        </p:nvSpPr>
-        <p:spPr>
-          <a:xfrm>
-            <a:off x="4297679" y="3355848"/>
-            <a:ext cx="3474720" cy="320040"/>
+            <a:off x="548640" y="3813048"/>
+            <a:ext cx="3474720" cy="822960"/>
           </a:xfrm>
           <a:prstGeom prst="rect">
             <a:avLst/>
@@ -6000,68 +5914,26 @@
               </a:spcAft>
             </a:pPr>
             <a:r>
-              <a:rPr sz="1100" b="1" i="0" spc="200">
-                <a:solidFill>
-                  <a:srgbClr val="0F1B2D"/>
+              <a:rPr sz="1700" b="0" i="0">
+                <a:solidFill>
+                  <a:srgbClr val="2B3445"/>
                 </a:solidFill>
                 <a:latin typeface="Lato"/>
               </a:rPr>
-              <a:t>INTENSIDAD</a:t>
-            </a:r>
-          </a:p>
-        </p:txBody>
-      </p:sp>
-      <p:sp>
-        <p:nvSpPr>
-          <p:cNvPr id="14" name="TextBox 13"/>
-          <p:cNvSpPr txBox="1"/>
-          <p:nvPr/>
-        </p:nvSpPr>
-        <p:spPr>
-          <a:xfrm>
-            <a:off x="4297679" y="3675888"/>
-            <a:ext cx="3474720" cy="1097280"/>
-          </a:xfrm>
-          <a:prstGeom prst="rect">
-            <a:avLst/>
-          </a:prstGeom>
-          <a:noFill/>
-        </p:spPr>
-        <p:txBody>
-          <a:bodyPr wrap="square" lIns="45720" rIns="45720" tIns="27432" bIns="27432" anchor="t">
-            <a:spAutoFit/>
-          </a:bodyPr>
-          <a:lstStyle/>
-          <a:p>
-            <a:pPr algn="l">
-              <a:lnSpc>
-                <a:spcPct val="120000"/>
-              </a:lnSpc>
-              <a:spcAft>
-                <a:spcPts val="0"/>
-              </a:spcAft>
-            </a:pPr>
-            <a:r>
-              <a:rPr sz="1250" b="0" i="0">
-                <a:solidFill>
-                  <a:srgbClr val="2B3445"/>
-                </a:solidFill>
-                <a:latin typeface="Lato"/>
-              </a:rPr>
-              <a:t>20 h por semana (unos 7 meses) o 10 h por semana (unos 14 meses). Más un video corto en inglés cada día.</a:t>
-            </a:r>
-          </a:p>
-        </p:txBody>
-      </p:sp>
-      <p:sp>
-        <p:nvSpPr>
-          <p:cNvPr id="15" name="Rectangle 14"/>
+              <a:t>Mañana, noche o sábados</a:t>
+            </a:r>
+          </a:p>
+        </p:txBody>
+      </p:sp>
+      <p:sp>
+        <p:nvSpPr>
+          <p:cNvPr id="12" name="Rectangle 11"/>
           <p:cNvSpPr/>
           <p:nvPr/>
         </p:nvSpPr>
         <p:spPr>
           <a:xfrm>
-            <a:off x="8046718" y="3246120"/>
+            <a:off x="4297679" y="3383280"/>
             <a:ext cx="457200" cy="30000"/>
           </a:xfrm>
           <a:prstGeom prst="rect">
@@ -6099,13 +5971,13 @@
       </p:sp>
       <p:sp>
         <p:nvSpPr>
-          <p:cNvPr id="16" name="TextBox 15"/>
+          <p:cNvPr id="13" name="TextBox 12"/>
           <p:cNvSpPr txBox="1"/>
           <p:nvPr/>
         </p:nvSpPr>
         <p:spPr>
           <a:xfrm>
-            <a:off x="8046718" y="3355848"/>
+            <a:off x="4297679" y="3493008"/>
             <a:ext cx="3474720" cy="320040"/>
           </a:xfrm>
           <a:prstGeom prst="rect">
@@ -6130,111 +6002,25 @@
             <a:r>
               <a:rPr sz="1100" b="1" i="0" spc="200">
                 <a:solidFill>
-                  <a:srgbClr val="0F1B2D"/>
+                  <a:srgbClr val="1E3A5F"/>
                 </a:solidFill>
                 <a:latin typeface="Lato"/>
               </a:rPr>
-              <a:t>DOCENTES</a:t>
-            </a:r>
-          </a:p>
-        </p:txBody>
-      </p:sp>
-      <p:sp>
-        <p:nvSpPr>
-          <p:cNvPr id="17" name="TextBox 16"/>
+              <a:t>INTENSIDAD</a:t>
+            </a:r>
+          </a:p>
+        </p:txBody>
+      </p:sp>
+      <p:sp>
+        <p:nvSpPr>
+          <p:cNvPr id="14" name="TextBox 13"/>
           <p:cNvSpPr txBox="1"/>
           <p:nvPr/>
         </p:nvSpPr>
         <p:spPr>
           <a:xfrm>
-            <a:off x="8046718" y="3675888"/>
-            <a:ext cx="3474720" cy="1097280"/>
-          </a:xfrm>
-          <a:prstGeom prst="rect">
-            <a:avLst/>
-          </a:prstGeom>
-          <a:noFill/>
-        </p:spPr>
-        <p:txBody>
-          <a:bodyPr wrap="square" lIns="45720" rIns="45720" tIns="27432" bIns="27432" anchor="t">
-            <a:spAutoFit/>
-          </a:bodyPr>
-          <a:lstStyle/>
-          <a:p>
-            <a:pPr algn="l">
-              <a:lnSpc>
-                <a:spcPct val="120000"/>
-              </a:lnSpc>
-              <a:spcAft>
-                <a:spcPts val="0"/>
-              </a:spcAft>
-            </a:pPr>
-            <a:r>
-              <a:rPr sz="1250" b="0" i="0">
-                <a:solidFill>
-                  <a:srgbClr val="2B3445"/>
-                </a:solidFill>
-                <a:latin typeface="Lato"/>
-              </a:rPr>
-              <a:t>Profesores bilingües colombianos, uno por grupo de máximo 16, que trabajan como coach y corrigen en el momento.</a:t>
-            </a:r>
-          </a:p>
-        </p:txBody>
-      </p:sp>
-      <p:sp>
-        <p:nvSpPr>
-          <p:cNvPr id="18" name="Rectangle 17"/>
-          <p:cNvSpPr/>
-          <p:nvPr/>
-        </p:nvSpPr>
-        <p:spPr>
-          <a:xfrm>
-            <a:off x="548640" y="4800600"/>
-            <a:ext cx="457200" cy="30000"/>
-          </a:xfrm>
-          <a:prstGeom prst="rect">
-            <a:avLst/>
-          </a:prstGeom>
-          <a:solidFill>
-            <a:srgbClr val="E54C09"/>
-          </a:solidFill>
-          <a:ln>
-            <a:noFill/>
-          </a:ln>
-          <a:effectLst/>
-        </p:spPr>
-        <p:style>
-          <a:lnRef idx="1">
-            <a:schemeClr val="accent1"/>
-          </a:lnRef>
-          <a:fillRef idx="3">
-            <a:schemeClr val="accent1"/>
-          </a:fillRef>
-          <a:effectRef idx="2">
-            <a:schemeClr val="accent1"/>
-          </a:effectRef>
-          <a:fontRef idx="minor">
-            <a:schemeClr val="lt1"/>
-          </a:fontRef>
-        </p:style>
-        <p:txBody>
-          <a:bodyPr rtlCol="0" anchor="ctr"/>
-          <a:lstStyle/>
-          <a:p>
-            <a:pPr algn="ctr"/>
-          </a:p>
-        </p:txBody>
-      </p:sp>
-      <p:sp>
-        <p:nvSpPr>
-          <p:cNvPr id="19" name="TextBox 18"/>
-          <p:cNvSpPr txBox="1"/>
-          <p:nvPr/>
-        </p:nvSpPr>
-        <p:spPr>
-          <a:xfrm>
-            <a:off x="548640" y="4910328"/>
-            <a:ext cx="3474720" cy="320040"/>
+            <a:off x="4297679" y="3813048"/>
+            <a:ext cx="3474720" cy="822960"/>
           </a:xfrm>
           <a:prstGeom prst="rect">
             <a:avLst/>
@@ -6256,68 +6042,26 @@
               </a:spcAft>
             </a:pPr>
             <a:r>
-              <a:rPr sz="1100" b="1" i="0" spc="200">
-                <a:solidFill>
-                  <a:srgbClr val="0F1B2D"/>
+              <a:rPr sz="1700" b="0" i="0">
+                <a:solidFill>
+                  <a:srgbClr val="2B3445"/>
                 </a:solidFill>
                 <a:latin typeface="Lato"/>
               </a:rPr>
-              <a:t>EVALUACIÓN</a:t>
-            </a:r>
-          </a:p>
-        </p:txBody>
-      </p:sp>
-      <p:sp>
-        <p:nvSpPr>
-          <p:cNvPr id="20" name="TextBox 19"/>
-          <p:cNvSpPr txBox="1"/>
-          <p:nvPr/>
-        </p:nvSpPr>
-        <p:spPr>
-          <a:xfrm>
-            <a:off x="548640" y="5230368"/>
-            <a:ext cx="3474720" cy="1097280"/>
-          </a:xfrm>
-          <a:prstGeom prst="rect">
-            <a:avLst/>
-          </a:prstGeom>
-          <a:noFill/>
-        </p:spPr>
-        <p:txBody>
-          <a:bodyPr wrap="square" lIns="45720" rIns="45720" tIns="27432" bIns="27432" anchor="t">
-            <a:spAutoFit/>
-          </a:bodyPr>
-          <a:lstStyle/>
-          <a:p>
-            <a:pPr algn="l">
-              <a:lnSpc>
-                <a:spcPct val="120000"/>
-              </a:lnSpc>
-              <a:spcAft>
-                <a:spcPts val="0"/>
-              </a:spcAft>
-            </a:pPr>
-            <a:r>
-              <a:rPr sz="1250" b="0" i="0">
-                <a:solidFill>
-                  <a:srgbClr val="2B3445"/>
-                </a:solidFill>
-                <a:latin typeface="Lato"/>
-              </a:rPr>
-              <a:t>Prueba de entrada, evaluaciones por nivel y evaluador externo al cierre. El fondo recibe asistencia y cumplimiento; nunca notas.</a:t>
-            </a:r>
-          </a:p>
-        </p:txBody>
-      </p:sp>
-      <p:sp>
-        <p:nvSpPr>
-          <p:cNvPr id="21" name="Rectangle 20"/>
+              <a:t>20 h o 10 h por semana, más un video diario</a:t>
+            </a:r>
+          </a:p>
+        </p:txBody>
+      </p:sp>
+      <p:sp>
+        <p:nvSpPr>
+          <p:cNvPr id="15" name="Rectangle 14"/>
           <p:cNvSpPr/>
           <p:nvPr/>
         </p:nvSpPr>
         <p:spPr>
           <a:xfrm>
-            <a:off x="4297679" y="4800600"/>
+            <a:off x="8046718" y="3383280"/>
             <a:ext cx="457200" cy="30000"/>
           </a:xfrm>
           <a:prstGeom prst="rect">
@@ -6355,13 +6099,13 @@
       </p:sp>
       <p:sp>
         <p:nvSpPr>
-          <p:cNvPr id="22" name="TextBox 21"/>
+          <p:cNvPr id="16" name="TextBox 15"/>
           <p:cNvSpPr txBox="1"/>
           <p:nvPr/>
         </p:nvSpPr>
         <p:spPr>
           <a:xfrm>
-            <a:off x="4297679" y="4910328"/>
+            <a:off x="8046718" y="3493008"/>
             <a:ext cx="3474720" cy="320040"/>
           </a:xfrm>
           <a:prstGeom prst="rect">
@@ -6386,111 +6130,25 @@
             <a:r>
               <a:rPr sz="1100" b="1" i="0" spc="200">
                 <a:solidFill>
-                  <a:srgbClr val="0F1B2D"/>
+                  <a:srgbClr val="1E3A5F"/>
                 </a:solidFill>
                 <a:latin typeface="Lato"/>
               </a:rPr>
-              <a:t>CERTIFICACIÓN</a:t>
-            </a:r>
-          </a:p>
-        </p:txBody>
-      </p:sp>
-      <p:sp>
-        <p:nvSpPr>
-          <p:cNvPr id="23" name="TextBox 22"/>
+              <a:t>DOCENTES</a:t>
+            </a:r>
+          </a:p>
+        </p:txBody>
+      </p:sp>
+      <p:sp>
+        <p:nvSpPr>
+          <p:cNvPr id="17" name="TextBox 16"/>
           <p:cNvSpPr txBox="1"/>
           <p:nvPr/>
         </p:nvSpPr>
         <p:spPr>
           <a:xfrm>
-            <a:off x="4297679" y="5230368"/>
-            <a:ext cx="3474720" cy="1097280"/>
-          </a:xfrm>
-          <a:prstGeom prst="rect">
-            <a:avLst/>
-          </a:prstGeom>
-          <a:noFill/>
-        </p:spPr>
-        <p:txBody>
-          <a:bodyPr wrap="square" lIns="45720" rIns="45720" tIns="27432" bIns="27432" anchor="t">
-            <a:spAutoFit/>
-          </a:bodyPr>
-          <a:lstStyle/>
-          <a:p>
-            <a:pPr algn="l">
-              <a:lnSpc>
-                <a:spcPct val="120000"/>
-              </a:lnSpc>
-              <a:spcAft>
-                <a:spcPts val="0"/>
-              </a:spcAft>
-            </a:pPr>
-            <a:r>
-              <a:rPr sz="1250" b="0" i="0">
-                <a:solidFill>
-                  <a:srgbClr val="2B3445"/>
-                </a:solidFill>
-                <a:latin typeface="Lato"/>
-              </a:rPr>
-              <a:t>Certificado Heiiu por nivel y por programa completo, según la Secretaría de Educación. Certificado de beca a nombre del fondo.</a:t>
-            </a:r>
-          </a:p>
-        </p:txBody>
-      </p:sp>
-      <p:sp>
-        <p:nvSpPr>
-          <p:cNvPr id="24" name="Rectangle 23"/>
-          <p:cNvSpPr/>
-          <p:nvPr/>
-        </p:nvSpPr>
-        <p:spPr>
-          <a:xfrm>
-            <a:off x="8046718" y="4800600"/>
-            <a:ext cx="457200" cy="30000"/>
-          </a:xfrm>
-          <a:prstGeom prst="rect">
-            <a:avLst/>
-          </a:prstGeom>
-          <a:solidFill>
-            <a:srgbClr val="E54C09"/>
-          </a:solidFill>
-          <a:ln>
-            <a:noFill/>
-          </a:ln>
-          <a:effectLst/>
-        </p:spPr>
-        <p:style>
-          <a:lnRef idx="1">
-            <a:schemeClr val="accent1"/>
-          </a:lnRef>
-          <a:fillRef idx="3">
-            <a:schemeClr val="accent1"/>
-          </a:fillRef>
-          <a:effectRef idx="2">
-            <a:schemeClr val="accent1"/>
-          </a:effectRef>
-          <a:fontRef idx="minor">
-            <a:schemeClr val="lt1"/>
-          </a:fontRef>
-        </p:style>
-        <p:txBody>
-          <a:bodyPr rtlCol="0" anchor="ctr"/>
-          <a:lstStyle/>
-          <a:p>
-            <a:pPr algn="ctr"/>
-          </a:p>
-        </p:txBody>
-      </p:sp>
-      <p:sp>
-        <p:nvSpPr>
-          <p:cNvPr id="25" name="TextBox 24"/>
-          <p:cNvSpPr txBox="1"/>
-          <p:nvPr/>
-        </p:nvSpPr>
-        <p:spPr>
-          <a:xfrm>
-            <a:off x="8046718" y="4910328"/>
-            <a:ext cx="3474720" cy="320040"/>
+            <a:off x="8046718" y="3813048"/>
+            <a:ext cx="3474720" cy="822960"/>
           </a:xfrm>
           <a:prstGeom prst="rect">
             <a:avLst/>
@@ -6512,27 +6170,71 @@
               </a:spcAft>
             </a:pPr>
             <a:r>
-              <a:rPr sz="1100" b="1" i="0" spc="200">
-                <a:solidFill>
-                  <a:srgbClr val="0F1B2D"/>
+              <a:rPr sz="1700" b="0" i="0">
+                <a:solidFill>
+                  <a:srgbClr val="2B3445"/>
                 </a:solidFill>
                 <a:latin typeface="Lato"/>
               </a:rPr>
-              <a:t>GARANTÍA</a:t>
-            </a:r>
-          </a:p>
-        </p:txBody>
-      </p:sp>
-      <p:sp>
-        <p:nvSpPr>
-          <p:cNvPr id="26" name="TextBox 25"/>
+              <a:t>Bilingües, uno por grupo de máximo 16</a:t>
+            </a:r>
+          </a:p>
+        </p:txBody>
+      </p:sp>
+      <p:sp>
+        <p:nvSpPr>
+          <p:cNvPr id="18" name="Rectangle 17"/>
+          <p:cNvSpPr/>
+          <p:nvPr/>
+        </p:nvSpPr>
+        <p:spPr>
+          <a:xfrm>
+            <a:off x="548640" y="4800600"/>
+            <a:ext cx="457200" cy="30000"/>
+          </a:xfrm>
+          <a:prstGeom prst="rect">
+            <a:avLst/>
+          </a:prstGeom>
+          <a:solidFill>
+            <a:srgbClr val="E54C09"/>
+          </a:solidFill>
+          <a:ln>
+            <a:noFill/>
+          </a:ln>
+          <a:effectLst/>
+        </p:spPr>
+        <p:style>
+          <a:lnRef idx="1">
+            <a:schemeClr val="accent1"/>
+          </a:lnRef>
+          <a:fillRef idx="3">
+            <a:schemeClr val="accent1"/>
+          </a:fillRef>
+          <a:effectRef idx="2">
+            <a:schemeClr val="accent1"/>
+          </a:effectRef>
+          <a:fontRef idx="minor">
+            <a:schemeClr val="lt1"/>
+          </a:fontRef>
+        </p:style>
+        <p:txBody>
+          <a:bodyPr rtlCol="0" anchor="ctr"/>
+          <a:lstStyle/>
+          <a:p>
+            <a:pPr algn="ctr"/>
+          </a:p>
+        </p:txBody>
+      </p:sp>
+      <p:sp>
+        <p:nvSpPr>
+          <p:cNvPr id="19" name="TextBox 18"/>
           <p:cNvSpPr txBox="1"/>
           <p:nvPr/>
         </p:nvSpPr>
         <p:spPr>
           <a:xfrm>
-            <a:off x="8046718" y="5230368"/>
-            <a:ext cx="3474720" cy="1097280"/>
+            <a:off x="548640" y="4910328"/>
+            <a:ext cx="3474720" cy="320040"/>
           </a:xfrm>
           <a:prstGeom prst="rect">
             <a:avLst/>
@@ -6547,20 +6249,318 @@
           <a:p>
             <a:pPr algn="l">
               <a:lnSpc>
-                <a:spcPct val="120000"/>
+                <a:spcPct val="115000"/>
               </a:lnSpc>
               <a:spcAft>
                 <a:spcPts val="0"/>
               </a:spcAft>
             </a:pPr>
             <a:r>
-              <a:rPr sz="1250" b="0" i="0">
-                <a:solidFill>
-                  <a:srgbClr val="2B3445"/>
+              <a:rPr sz="1100" b="1" i="0" spc="200">
+                <a:solidFill>
+                  <a:srgbClr val="1E3A5F"/>
                 </a:solidFill>
                 <a:latin typeface="Lato"/>
               </a:rPr>
-              <a:t>Si cumple su parte (asistencia 80%, tareas 90%, evaluaciones) y no avanza, le devolvemos el 100% del nivel. Por escrito.</a:t>
+              <a:t>EVALUACIÓN</a:t>
+            </a:r>
+          </a:p>
+        </p:txBody>
+      </p:sp>
+      <p:sp>
+        <p:nvSpPr>
+          <p:cNvPr id="20" name="TextBox 19"/>
+          <p:cNvSpPr txBox="1"/>
+          <p:nvPr/>
+        </p:nvSpPr>
+        <p:spPr>
+          <a:xfrm>
+            <a:off x="548640" y="5230368"/>
+            <a:ext cx="3474720" cy="822960"/>
+          </a:xfrm>
+          <a:prstGeom prst="rect">
+            <a:avLst/>
+          </a:prstGeom>
+          <a:noFill/>
+        </p:spPr>
+        <p:txBody>
+          <a:bodyPr wrap="square" lIns="45720" rIns="45720" tIns="27432" bIns="27432" anchor="t">
+            <a:spAutoFit/>
+          </a:bodyPr>
+          <a:lstStyle/>
+          <a:p>
+            <a:pPr algn="l">
+              <a:lnSpc>
+                <a:spcPct val="115000"/>
+              </a:lnSpc>
+              <a:spcAft>
+                <a:spcPts val="0"/>
+              </a:spcAft>
+            </a:pPr>
+            <a:r>
+              <a:rPr sz="1700" b="0" i="0">
+                <a:solidFill>
+                  <a:srgbClr val="2B3445"/>
+                </a:solidFill>
+                <a:latin typeface="Lato"/>
+              </a:rPr>
+              <a:t>Entrada, por nivel y evaluador externo</a:t>
+            </a:r>
+          </a:p>
+        </p:txBody>
+      </p:sp>
+      <p:sp>
+        <p:nvSpPr>
+          <p:cNvPr id="21" name="Rectangle 20"/>
+          <p:cNvSpPr/>
+          <p:nvPr/>
+        </p:nvSpPr>
+        <p:spPr>
+          <a:xfrm>
+            <a:off x="4297679" y="4800600"/>
+            <a:ext cx="457200" cy="30000"/>
+          </a:xfrm>
+          <a:prstGeom prst="rect">
+            <a:avLst/>
+          </a:prstGeom>
+          <a:solidFill>
+            <a:srgbClr val="E54C09"/>
+          </a:solidFill>
+          <a:ln>
+            <a:noFill/>
+          </a:ln>
+          <a:effectLst/>
+        </p:spPr>
+        <p:style>
+          <a:lnRef idx="1">
+            <a:schemeClr val="accent1"/>
+          </a:lnRef>
+          <a:fillRef idx="3">
+            <a:schemeClr val="accent1"/>
+          </a:fillRef>
+          <a:effectRef idx="2">
+            <a:schemeClr val="accent1"/>
+          </a:effectRef>
+          <a:fontRef idx="minor">
+            <a:schemeClr val="lt1"/>
+          </a:fontRef>
+        </p:style>
+        <p:txBody>
+          <a:bodyPr rtlCol="0" anchor="ctr"/>
+          <a:lstStyle/>
+          <a:p>
+            <a:pPr algn="ctr"/>
+          </a:p>
+        </p:txBody>
+      </p:sp>
+      <p:sp>
+        <p:nvSpPr>
+          <p:cNvPr id="22" name="TextBox 21"/>
+          <p:cNvSpPr txBox="1"/>
+          <p:nvPr/>
+        </p:nvSpPr>
+        <p:spPr>
+          <a:xfrm>
+            <a:off x="4297679" y="4910328"/>
+            <a:ext cx="3474720" cy="320040"/>
+          </a:xfrm>
+          <a:prstGeom prst="rect">
+            <a:avLst/>
+          </a:prstGeom>
+          <a:noFill/>
+        </p:spPr>
+        <p:txBody>
+          <a:bodyPr wrap="square" lIns="45720" rIns="45720" tIns="27432" bIns="27432" anchor="t">
+            <a:spAutoFit/>
+          </a:bodyPr>
+          <a:lstStyle/>
+          <a:p>
+            <a:pPr algn="l">
+              <a:lnSpc>
+                <a:spcPct val="115000"/>
+              </a:lnSpc>
+              <a:spcAft>
+                <a:spcPts val="0"/>
+              </a:spcAft>
+            </a:pPr>
+            <a:r>
+              <a:rPr sz="1100" b="1" i="0" spc="200">
+                <a:solidFill>
+                  <a:srgbClr val="1E3A5F"/>
+                </a:solidFill>
+                <a:latin typeface="Lato"/>
+              </a:rPr>
+              <a:t>CERTIFICACIÓN</a:t>
+            </a:r>
+          </a:p>
+        </p:txBody>
+      </p:sp>
+      <p:sp>
+        <p:nvSpPr>
+          <p:cNvPr id="23" name="TextBox 22"/>
+          <p:cNvSpPr txBox="1"/>
+          <p:nvPr/>
+        </p:nvSpPr>
+        <p:spPr>
+          <a:xfrm>
+            <a:off x="4297679" y="5230368"/>
+            <a:ext cx="3474720" cy="822960"/>
+          </a:xfrm>
+          <a:prstGeom prst="rect">
+            <a:avLst/>
+          </a:prstGeom>
+          <a:noFill/>
+        </p:spPr>
+        <p:txBody>
+          <a:bodyPr wrap="square" lIns="45720" rIns="45720" tIns="27432" bIns="27432" anchor="t">
+            <a:spAutoFit/>
+          </a:bodyPr>
+          <a:lstStyle/>
+          <a:p>
+            <a:pPr algn="l">
+              <a:lnSpc>
+                <a:spcPct val="115000"/>
+              </a:lnSpc>
+              <a:spcAft>
+                <a:spcPts val="0"/>
+              </a:spcAft>
+            </a:pPr>
+            <a:r>
+              <a:rPr sz="1700" b="0" i="0">
+                <a:solidFill>
+                  <a:srgbClr val="2B3445"/>
+                </a:solidFill>
+                <a:latin typeface="Lato"/>
+              </a:rPr>
+              <a:t>Por nivel y por programa completo</a:t>
+            </a:r>
+          </a:p>
+        </p:txBody>
+      </p:sp>
+      <p:sp>
+        <p:nvSpPr>
+          <p:cNvPr id="24" name="Rectangle 23"/>
+          <p:cNvSpPr/>
+          <p:nvPr/>
+        </p:nvSpPr>
+        <p:spPr>
+          <a:xfrm>
+            <a:off x="8046718" y="4800600"/>
+            <a:ext cx="457200" cy="30000"/>
+          </a:xfrm>
+          <a:prstGeom prst="rect">
+            <a:avLst/>
+          </a:prstGeom>
+          <a:solidFill>
+            <a:srgbClr val="E54C09"/>
+          </a:solidFill>
+          <a:ln>
+            <a:noFill/>
+          </a:ln>
+          <a:effectLst/>
+        </p:spPr>
+        <p:style>
+          <a:lnRef idx="1">
+            <a:schemeClr val="accent1"/>
+          </a:lnRef>
+          <a:fillRef idx="3">
+            <a:schemeClr val="accent1"/>
+          </a:fillRef>
+          <a:effectRef idx="2">
+            <a:schemeClr val="accent1"/>
+          </a:effectRef>
+          <a:fontRef idx="minor">
+            <a:schemeClr val="lt1"/>
+          </a:fontRef>
+        </p:style>
+        <p:txBody>
+          <a:bodyPr rtlCol="0" anchor="ctr"/>
+          <a:lstStyle/>
+          <a:p>
+            <a:pPr algn="ctr"/>
+          </a:p>
+        </p:txBody>
+      </p:sp>
+      <p:sp>
+        <p:nvSpPr>
+          <p:cNvPr id="25" name="TextBox 24"/>
+          <p:cNvSpPr txBox="1"/>
+          <p:nvPr/>
+        </p:nvSpPr>
+        <p:spPr>
+          <a:xfrm>
+            <a:off x="8046718" y="4910328"/>
+            <a:ext cx="3474720" cy="320040"/>
+          </a:xfrm>
+          <a:prstGeom prst="rect">
+            <a:avLst/>
+          </a:prstGeom>
+          <a:noFill/>
+        </p:spPr>
+        <p:txBody>
+          <a:bodyPr wrap="square" lIns="45720" rIns="45720" tIns="27432" bIns="27432" anchor="t">
+            <a:spAutoFit/>
+          </a:bodyPr>
+          <a:lstStyle/>
+          <a:p>
+            <a:pPr algn="l">
+              <a:lnSpc>
+                <a:spcPct val="115000"/>
+              </a:lnSpc>
+              <a:spcAft>
+                <a:spcPts val="0"/>
+              </a:spcAft>
+            </a:pPr>
+            <a:r>
+              <a:rPr sz="1100" b="1" i="0" spc="200">
+                <a:solidFill>
+                  <a:srgbClr val="1E3A5F"/>
+                </a:solidFill>
+                <a:latin typeface="Lato"/>
+              </a:rPr>
+              <a:t>GARANTÍA</a:t>
+            </a:r>
+          </a:p>
+        </p:txBody>
+      </p:sp>
+      <p:sp>
+        <p:nvSpPr>
+          <p:cNvPr id="26" name="TextBox 25"/>
+          <p:cNvSpPr txBox="1"/>
+          <p:nvPr/>
+        </p:nvSpPr>
+        <p:spPr>
+          <a:xfrm>
+            <a:off x="8046718" y="5230368"/>
+            <a:ext cx="3474720" cy="822960"/>
+          </a:xfrm>
+          <a:prstGeom prst="rect">
+            <a:avLst/>
+          </a:prstGeom>
+          <a:noFill/>
+        </p:spPr>
+        <p:txBody>
+          <a:bodyPr wrap="square" lIns="45720" rIns="45720" tIns="27432" bIns="27432" anchor="t">
+            <a:spAutoFit/>
+          </a:bodyPr>
+          <a:lstStyle/>
+          <a:p>
+            <a:pPr algn="l">
+              <a:lnSpc>
+                <a:spcPct val="115000"/>
+              </a:lnSpc>
+              <a:spcAft>
+                <a:spcPts val="0"/>
+              </a:spcAft>
+            </a:pPr>
+            <a:r>
+              <a:rPr sz="1700" b="0" i="0">
+                <a:solidFill>
+                  <a:srgbClr val="2B3445"/>
+                </a:solidFill>
+                <a:latin typeface="Lato"/>
+              </a:rPr>
+              <a:t>Cumple y no avanza: devolvemos el 100%</a:t>
             </a:r>
           </a:p>
         </p:txBody>
@@ -6598,7 +6598,7 @@
             <a:avLst/>
           </a:prstGeom>
           <a:solidFill>
-            <a:srgbClr val="F6F1E9"/>
+            <a:srgbClr val="F7F3EC"/>
           </a:solidFill>
           <a:ln>
             <a:noFill/>
@@ -6644,7 +6644,7 @@
             </a:avLst>
           </a:prstGeom>
           <a:solidFill>
-            <a:srgbClr val="0F1B2D"/>
+            <a:srgbClr val="2B5A8C"/>
           </a:solidFill>
           <a:ln>
             <a:noFill/>
@@ -6747,7 +6747,7 @@
         </p:nvSpPr>
         <p:spPr>
           <a:xfrm>
-            <a:off x="548640" y="1234440"/>
+            <a:off x="548640" y="1280160"/>
             <a:ext cx="7315200" cy="320040"/>
           </a:xfrm>
           <a:prstGeom prst="rect">
@@ -6789,8 +6789,8 @@
         </p:nvSpPr>
         <p:spPr>
           <a:xfrm>
-            <a:off x="548640" y="1554480"/>
-            <a:ext cx="6949440" cy="1737360"/>
+            <a:off x="548640" y="1600200"/>
+            <a:ext cx="7132320" cy="1645920"/>
           </a:xfrm>
           <a:prstGeom prst="rect">
             <a:avLst/>
@@ -6812,9 +6812,9 @@
               </a:spcAft>
             </a:pPr>
             <a:r>
-              <a:rPr sz="3400" b="1" i="0">
-                <a:solidFill>
-                  <a:srgbClr val="0F1B2D"/>
+              <a:rPr sz="3600" b="1" i="0">
+                <a:solidFill>
+                  <a:srgbClr val="1E3A5F"/>
                 </a:solidFill>
                 <a:latin typeface="Lato Black"/>
               </a:rPr>
@@ -6873,8 +6873,8 @@
         </p:nvSpPr>
         <p:spPr>
           <a:xfrm>
-            <a:off x="548640" y="3383280"/>
-            <a:ext cx="7132320" cy="2926080"/>
+            <a:off x="548640" y="3474720"/>
+            <a:ext cx="7132320" cy="2743200"/>
           </a:xfrm>
           <a:prstGeom prst="rect">
             <a:avLst/>
@@ -6889,14 +6889,14 @@
           <a:p>
             <a:pPr algn="l">
               <a:lnSpc>
-                <a:spcPct val="118000"/>
+                <a:spcPct val="120000"/>
               </a:lnSpc>
               <a:spcAft>
-                <a:spcPts val="900"/>
+                <a:spcPts val="1200"/>
               </a:spcAft>
             </a:pPr>
             <a:r>
-              <a:rPr sz="1500" b="1" i="0">
+              <a:rPr sz="2000" b="1" i="0">
                 <a:solidFill>
                   <a:srgbClr val="E54C09"/>
                 </a:solidFill>
@@ -6905,35 +6905,26 @@
               <a:t>—  </a:t>
             </a:r>
             <a:r>
-              <a:rPr sz="1500" b="1" i="0">
+              <a:rPr sz="2000" b="0" i="0">
                 <a:solidFill>
                   <a:srgbClr val="2B3445"/>
                 </a:solidFill>
                 <a:latin typeface="Lato"/>
               </a:rPr>
-              <a:t>De contado: $4.782.800 </a:t>
-            </a:r>
-            <a:r>
-              <a:rPr sz="1500" b="0" i="0">
-                <a:solidFill>
-                  <a:srgbClr val="2B3445"/>
-                </a:solidFill>
-                <a:latin typeface="Lato"/>
-              </a:rPr>
-              <a:t>en lugar de $8.696.000 (beca del 45%). Crédito del fondo o cesantías cuentan como contado.</a:t>
+              <a:t>$4.782.800 de contado, en lugar de $8.696.000.</a:t>
             </a:r>
           </a:p>
           <a:p>
             <a:pPr algn="l">
               <a:lnSpc>
-                <a:spcPct val="118000"/>
+                <a:spcPct val="120000"/>
               </a:lnSpc>
               <a:spcAft>
-                <a:spcPts val="900"/>
+                <a:spcPts val="1200"/>
               </a:spcAft>
             </a:pPr>
             <a:r>
-              <a:rPr sz="1500" b="1" i="0">
+              <a:rPr sz="2000" b="1" i="0">
                 <a:solidFill>
                   <a:srgbClr val="E54C09"/>
                 </a:solidFill>
@@ -6942,35 +6933,26 @@
               <a:t>—  </a:t>
             </a:r>
             <a:r>
-              <a:rPr sz="1500" b="1" i="0">
+              <a:rPr sz="2000" b="0" i="0">
                 <a:solidFill>
                   <a:srgbClr val="2B3445"/>
                 </a:solidFill>
                 <a:latin typeface="Lato"/>
               </a:rPr>
-              <a:t>A cuotas con la academia: $5.565.440 </a:t>
-            </a:r>
-            <a:r>
-              <a:rPr sz="1500" b="0" i="0">
-                <a:solidFill>
-                  <a:srgbClr val="2B3445"/>
-                </a:solidFill>
-                <a:latin typeface="Lato"/>
-              </a:rPr>
-              <a:t>(beca del 36%). Ejemplo: $1.113.088 hoy y 11 cuotas de $452.348.</a:t>
+              <a:t>Crédito del fondo o cesantías cuentan como contado.</a:t>
             </a:r>
           </a:p>
           <a:p>
             <a:pPr algn="l">
               <a:lnSpc>
-                <a:spcPct val="118000"/>
+                <a:spcPct val="120000"/>
               </a:lnSpc>
               <a:spcAft>
-                <a:spcPts val="900"/>
+                <a:spcPts val="1200"/>
               </a:spcAft>
             </a:pPr>
             <a:r>
-              <a:rPr sz="1500" b="1" i="0">
+              <a:rPr sz="2000" b="1" i="0">
                 <a:solidFill>
                   <a:srgbClr val="E54C09"/>
                 </a:solidFill>
@@ -6979,22 +6961,13 @@
               <a:t>—  </a:t>
             </a:r>
             <a:r>
-              <a:rPr sz="1500" b="1" i="0">
+              <a:rPr sz="2000" b="0" i="0">
                 <a:solidFill>
                   <a:srgbClr val="2B3445"/>
                 </a:solidFill>
                 <a:latin typeface="Lato"/>
               </a:rPr>
-              <a:t>Beca con el nombre del fondo: </a:t>
-            </a:r>
-            <a:r>
-              <a:rPr sz="1500" b="0" i="0">
-                <a:solidFill>
-                  <a:srgbClr val="2B3445"/>
-                </a:solidFill>
-                <a:latin typeface="Lato"/>
-              </a:rPr>
-              <a:t>3 afiliados por trimestre reciben el 45% aunque paguen a cuotas, más los libros. Si todos cumplen, suben a 5.</a:t>
+              <a:t>3 becas por trimestre con el nombre del fondo.</a:t>
             </a:r>
           </a:p>
         </p:txBody>
@@ -7007,8 +6980,8 @@
         </p:nvSpPr>
         <p:spPr>
           <a:xfrm>
-            <a:off x="8138160" y="1234440"/>
-            <a:ext cx="3520440" cy="4846320"/>
+            <a:off x="8138160" y="1280160"/>
+            <a:ext cx="3520440" cy="4800600"/>
           </a:xfrm>
           <a:prstGeom prst="roundRect">
             <a:avLst>
@@ -7016,7 +6989,7 @@
             </a:avLst>
           </a:prstGeom>
           <a:solidFill>
-            <a:srgbClr val="0F1B2D"/>
+            <a:srgbClr val="2B5A8C"/>
           </a:solidFill>
           <a:ln>
             <a:noFill/>
@@ -7053,14 +7026,14 @@
         </p:nvSpPr>
         <p:spPr>
           <a:xfrm>
-            <a:off x="8458200" y="1554480"/>
+            <a:off x="8458200" y="1600200"/>
             <a:ext cx="548640" cy="30000"/>
           </a:xfrm>
           <a:prstGeom prst="rect">
             <a:avLst/>
           </a:prstGeom>
           <a:solidFill>
-            <a:srgbClr val="E54C09"/>
+            <a:srgbClr val="FBC900"/>
           </a:solidFill>
           <a:ln>
             <a:noFill/>
@@ -7097,7 +7070,7 @@
         </p:nvSpPr>
         <p:spPr>
           <a:xfrm>
-            <a:off x="8366760" y="1874520"/>
+            <a:off x="8366760" y="1920240"/>
             <a:ext cx="3063240" cy="2194560"/>
           </a:xfrm>
           <a:prstGeom prst="rect">
@@ -7113,7 +7086,7 @@
           <a:p>
             <a:pPr algn="l">
               <a:lnSpc>
-                <a:spcPct val="100000"/>
+                <a:spcPct val="115000"/>
               </a:lnSpc>
               <a:spcAft>
                 <a:spcPts val="0"/>
@@ -7139,7 +7112,7 @@
         </p:nvSpPr>
         <p:spPr>
           <a:xfrm>
-            <a:off x="8458200" y="4160520"/>
+            <a:off x="8458200" y="4206240"/>
             <a:ext cx="2880360" cy="1737360"/>
           </a:xfrm>
           <a:prstGeom prst="rect">
@@ -7164,11 +7137,11 @@
             <a:r>
               <a:rPr sz="1500" b="0" i="0">
                 <a:solidFill>
-                  <a:srgbClr val="F6F1E9"/>
+                  <a:srgbClr val="FFFFFF"/>
                 </a:solidFill>
                 <a:latin typeface="Lato"/>
               </a:rPr>
-              <a:t>menos por afiliado sobre el programa completo. Es beca del Fondo de Becas Heiiu, no un descuento: misma tarifa y misma garantía para todos.</a:t>
+              <a:t>menos por afiliado. Beca, no descuento: misma tarifa y misma garantía para todos.</a:t>
             </a:r>
           </a:p>
         </p:txBody>
@@ -7206,7 +7179,7 @@
             <a:avLst/>
           </a:prstGeom>
           <a:solidFill>
-            <a:srgbClr val="F6F1E9"/>
+            <a:srgbClr val="F7F3EC"/>
           </a:solidFill>
           <a:ln>
             <a:noFill/>
@@ -7252,7 +7225,7 @@
             </a:avLst>
           </a:prstGeom>
           <a:solidFill>
-            <a:srgbClr val="0F1B2D"/>
+            <a:srgbClr val="2B5A8C"/>
           </a:solidFill>
           <a:ln>
             <a:noFill/>
@@ -7355,7 +7328,7 @@
         </p:nvSpPr>
         <p:spPr>
           <a:xfrm>
-            <a:off x="548640" y="1234440"/>
+            <a:off x="548640" y="1280160"/>
             <a:ext cx="7315200" cy="320040"/>
           </a:xfrm>
           <a:prstGeom prst="rect">
@@ -7397,8 +7370,8 @@
         </p:nvSpPr>
         <p:spPr>
           <a:xfrm>
-            <a:off x="548640" y="1554480"/>
-            <a:ext cx="10515600" cy="1737360"/>
+            <a:off x="548640" y="1600200"/>
+            <a:ext cx="10515600" cy="1645920"/>
           </a:xfrm>
           <a:prstGeom prst="rect">
             <a:avLst/>
@@ -7420,13 +7393,13 @@
               </a:spcAft>
             </a:pPr>
             <a:r>
-              <a:rPr sz="3400" b="1" i="0">
-                <a:solidFill>
-                  <a:srgbClr val="0F1B2D"/>
+              <a:rPr sz="3600" b="1" i="0">
+                <a:solidFill>
+                  <a:srgbClr val="1E3A5F"/>
                 </a:solidFill>
                 <a:latin typeface="Lato Black"/>
               </a:rPr>
-              <a:t>El fondo gana un beneficio con su nombre. El afiliado gana un inglés que le sirve.</a:t>
+              <a:t>El fondo gana un beneficio con su nombre. El afiliado, un inglés que le sirve.</a:t>
             </a:r>
           </a:p>
         </p:txBody>
@@ -7481,8 +7454,8 @@
         </p:nvSpPr>
         <p:spPr>
           <a:xfrm>
-            <a:off x="548640" y="3246120"/>
-            <a:ext cx="5394960" cy="3017520"/>
+            <a:off x="548640" y="3383280"/>
+            <a:ext cx="5394960" cy="2697480"/>
           </a:xfrm>
           <a:prstGeom prst="roundRect">
             <a:avLst>
@@ -7494,7 +7467,7 @@
           </a:solidFill>
           <a:ln w="9525">
             <a:solidFill>
-              <a:srgbClr val="E3DBCF"/>
+              <a:srgbClr val="DDE4EE"/>
             </a:solidFill>
           </a:ln>
           <a:effectLst/>
@@ -7529,7 +7502,7 @@
         </p:nvSpPr>
         <p:spPr>
           <a:xfrm>
-            <a:off x="868680" y="3429000"/>
+            <a:off x="868680" y="3566160"/>
             <a:ext cx="4754880" cy="320040"/>
           </a:xfrm>
           <a:prstGeom prst="rect">
@@ -7571,8 +7544,8 @@
         </p:nvSpPr>
         <p:spPr>
           <a:xfrm>
-            <a:off x="822960" y="3794760"/>
-            <a:ext cx="4846320" cy="2468880"/>
+            <a:off x="822960" y="3977639"/>
+            <a:ext cx="4846320" cy="2103120"/>
           </a:xfrm>
           <a:prstGeom prst="rect">
             <a:avLst/>
@@ -7587,14 +7560,14 @@
           <a:p>
             <a:pPr algn="l">
               <a:lnSpc>
-                <a:spcPct val="118000"/>
+                <a:spcPct val="120000"/>
               </a:lnSpc>
               <a:spcAft>
-                <a:spcPts val="600"/>
+                <a:spcPts val="800"/>
               </a:spcAft>
             </a:pPr>
             <a:r>
-              <a:rPr sz="1300" b="1" i="0">
+              <a:rPr sz="1800" b="1" i="0">
                 <a:solidFill>
                   <a:srgbClr val="E54C09"/>
                 </a:solidFill>
@@ -7603,35 +7576,26 @@
               <a:t>—  </a:t>
             </a:r>
             <a:r>
-              <a:rPr sz="1300" b="1" i="0">
+              <a:rPr sz="1800" b="0" i="0">
                 <a:solidFill>
                   <a:srgbClr val="2B3445"/>
                 </a:solidFill>
                 <a:latin typeface="Lato"/>
               </a:rPr>
-              <a:t>Sin costo ni presupuesto. </a:t>
-            </a:r>
-            <a:r>
-              <a:rPr sz="1300" b="0" i="0">
-                <a:solidFill>
-                  <a:srgbClr val="2B3445"/>
-                </a:solidFill>
-                <a:latin typeface="Lato"/>
-              </a:rPr>
-              <a:t>El fondo postula con una carta; no paga ni cobra nada.</a:t>
+              <a:t>Sin costo ni presupuesto</a:t>
             </a:r>
           </a:p>
           <a:p>
             <a:pPr algn="l">
               <a:lnSpc>
-                <a:spcPct val="118000"/>
+                <a:spcPct val="120000"/>
               </a:lnSpc>
               <a:spcAft>
-                <a:spcPts val="600"/>
+                <a:spcPts val="800"/>
               </a:spcAft>
             </a:pPr>
             <a:r>
-              <a:rPr sz="1300" b="1" i="0">
+              <a:rPr sz="1800" b="1" i="0">
                 <a:solidFill>
                   <a:srgbClr val="E54C09"/>
                 </a:solidFill>
@@ -7640,35 +7604,26 @@
               <a:t>—  </a:t>
             </a:r>
             <a:r>
-              <a:rPr sz="1300" b="1" i="0">
+              <a:rPr sz="1800" b="0" i="0">
                 <a:solidFill>
                   <a:srgbClr val="2B3445"/>
                 </a:solidFill>
                 <a:latin typeface="Lato"/>
               </a:rPr>
-              <a:t>Becas y certificados con su nombre, </a:t>
-            </a:r>
-            <a:r>
-              <a:rPr sz="1300" b="0" i="0">
-                <a:solidFill>
-                  <a:srgbClr val="2B3445"/>
-                </a:solidFill>
-                <a:latin typeface="Lato"/>
-              </a:rPr>
-              <a:t>entregados en su propio evento.</a:t>
+              <a:t>Becas y certificados con su nombre</a:t>
             </a:r>
           </a:p>
           <a:p>
             <a:pPr algn="l">
               <a:lnSpc>
-                <a:spcPct val="118000"/>
+                <a:spcPct val="120000"/>
               </a:lnSpc>
               <a:spcAft>
-                <a:spcPts val="600"/>
+                <a:spcPts val="800"/>
               </a:spcAft>
             </a:pPr>
             <a:r>
-              <a:rPr sz="1300" b="1" i="0">
+              <a:rPr sz="1800" b="1" i="0">
                 <a:solidFill>
                   <a:srgbClr val="E54C09"/>
                 </a:solidFill>
@@ -7677,59 +7632,13 @@
               <a:t>—  </a:t>
             </a:r>
             <a:r>
-              <a:rPr sz="1300" b="1" i="0">
+              <a:rPr sz="1800" b="0" i="0">
                 <a:solidFill>
                   <a:srgbClr val="2B3445"/>
                 </a:solidFill>
                 <a:latin typeface="Lato"/>
               </a:rPr>
-              <a:t>Reporte de asistencia y cumplimiento </a:t>
-            </a:r>
-            <a:r>
-              <a:rPr sz="1300" b="0" i="0">
-                <a:solidFill>
-                  <a:srgbClr val="2B3445"/>
-                </a:solidFill>
-                <a:latin typeface="Lato"/>
-              </a:rPr>
-              <a:t>de cada becado: el fondo ve quién cumple.</a:t>
-            </a:r>
-          </a:p>
-          <a:p>
-            <a:pPr algn="l">
-              <a:lnSpc>
-                <a:spcPct val="118000"/>
-              </a:lnSpc>
-              <a:spcAft>
-                <a:spcPts val="600"/>
-              </a:spcAft>
-            </a:pPr>
-            <a:r>
-              <a:rPr sz="1300" b="1" i="0">
-                <a:solidFill>
-                  <a:srgbClr val="E54C09"/>
-                </a:solidFill>
-                <a:latin typeface="Lato"/>
-              </a:rPr>
-              <a:t>—  </a:t>
-            </a:r>
-            <a:r>
-              <a:rPr sz="1300" b="1" i="0">
-                <a:solidFill>
-                  <a:srgbClr val="2B3445"/>
-                </a:solidFill>
-                <a:latin typeface="Lato"/>
-              </a:rPr>
-              <a:t>10 diagnósticos de nivel sin costo </a:t>
-            </a:r>
-            <a:r>
-              <a:rPr sz="1300" b="0" i="0">
-                <a:solidFill>
-                  <a:srgbClr val="2B3445"/>
-                </a:solidFill>
-                <a:latin typeface="Lato"/>
-              </a:rPr>
-              <a:t>la semana siguiente a la firma.</a:t>
+              <a:t>Reporte: ve quién cumple</a:t>
             </a:r>
           </a:p>
         </p:txBody>
@@ -7742,8 +7651,8 @@
         </p:nvSpPr>
         <p:spPr>
           <a:xfrm>
-            <a:off x="6217920" y="3246120"/>
-            <a:ext cx="5394960" cy="3017520"/>
+            <a:off x="6217920" y="3383280"/>
+            <a:ext cx="5394960" cy="2697480"/>
           </a:xfrm>
           <a:prstGeom prst="roundRect">
             <a:avLst>
@@ -7751,7 +7660,7 @@
             </a:avLst>
           </a:prstGeom>
           <a:solidFill>
-            <a:srgbClr val="0F1B2D"/>
+            <a:srgbClr val="2B5A8C"/>
           </a:solidFill>
           <a:ln>
             <a:noFill/>
@@ -7788,7 +7697,7 @@
         </p:nvSpPr>
         <p:spPr>
           <a:xfrm>
-            <a:off x="6537960" y="3429000"/>
+            <a:off x="6537960" y="3566160"/>
             <a:ext cx="4754880" cy="320040"/>
           </a:xfrm>
           <a:prstGeom prst="rect">
@@ -7813,7 +7722,7 @@
             <a:r>
               <a:rPr sz="1100" b="1" i="0" spc="200">
                 <a:solidFill>
-                  <a:srgbClr val="E54C09"/>
+                  <a:srgbClr val="FBC900"/>
                 </a:solidFill>
                 <a:latin typeface="Lato"/>
               </a:rPr>
@@ -7830,8 +7739,8 @@
         </p:nvSpPr>
         <p:spPr>
           <a:xfrm>
-            <a:off x="6492240" y="3794760"/>
-            <a:ext cx="4846320" cy="2468880"/>
+            <a:off x="6492240" y="3977639"/>
+            <a:ext cx="4846320" cy="2103120"/>
           </a:xfrm>
           <a:prstGeom prst="rect">
             <a:avLst/>
@@ -7846,191 +7755,85 @@
           <a:p>
             <a:pPr algn="l">
               <a:lnSpc>
-                <a:spcPct val="118000"/>
+                <a:spcPct val="120000"/>
               </a:lnSpc>
               <a:spcAft>
-                <a:spcPts val="600"/>
+                <a:spcPts val="800"/>
               </a:spcAft>
             </a:pPr>
             <a:r>
-              <a:rPr sz="1300" b="1" i="0">
-                <a:solidFill>
-                  <a:srgbClr val="E54C09"/>
+              <a:rPr sz="1800" b="1" i="0">
+                <a:solidFill>
+                  <a:srgbClr val="FBC900"/>
                 </a:solidFill>
                 <a:latin typeface="Lato"/>
               </a:rPr>
               <a:t>—  </a:t>
             </a:r>
             <a:r>
-              <a:rPr sz="1300" b="1" i="0">
-                <a:solidFill>
-                  <a:srgbClr val="F6F1E9"/>
+              <a:rPr sz="1800" b="0" i="0">
+                <a:solidFill>
+                  <a:srgbClr val="FFFFFF"/>
                 </a:solidFill>
                 <a:latin typeface="Lato"/>
               </a:rPr>
-              <a:t>Paga la mitad, </a:t>
-            </a:r>
-            <a:r>
-              <a:rPr sz="1300" b="0" i="0">
-                <a:solidFill>
-                  <a:srgbClr val="F6F1E9"/>
-                </a:solidFill>
-                <a:latin typeface="Lato"/>
-              </a:rPr>
-              <a:t>y la beca cubre también a su cónyuge y a sus hijos desde los 12 años.</a:t>
+              <a:t>Paga la mitad, también cónyuge e hijos</a:t>
             </a:r>
           </a:p>
           <a:p>
             <a:pPr algn="l">
               <a:lnSpc>
-                <a:spcPct val="118000"/>
+                <a:spcPct val="120000"/>
               </a:lnSpc>
               <a:spcAft>
-                <a:spcPts val="600"/>
+                <a:spcPts val="800"/>
               </a:spcAft>
             </a:pPr>
             <a:r>
-              <a:rPr sz="1300" b="1" i="0">
-                <a:solidFill>
-                  <a:srgbClr val="E54C09"/>
+              <a:rPr sz="1800" b="1" i="0">
+                <a:solidFill>
+                  <a:srgbClr val="FBC900"/>
                 </a:solidFill>
                 <a:latin typeface="Lato"/>
               </a:rPr>
               <a:t>—  </a:t>
             </a:r>
             <a:r>
-              <a:rPr sz="1300" b="1" i="0">
-                <a:solidFill>
-                  <a:srgbClr val="F6F1E9"/>
+              <a:rPr sz="1800" b="0" i="0">
+                <a:solidFill>
+                  <a:srgbClr val="FFFFFF"/>
                 </a:solidFill>
                 <a:latin typeface="Lato"/>
               </a:rPr>
-              <a:t>Gana cerca de un 26% más </a:t>
-            </a:r>
-            <a:r>
-              <a:rPr sz="1300" b="0" i="0">
-                <a:solidFill>
-                  <a:srgbClr val="F6F1E9"/>
-                </a:solidFill>
-                <a:latin typeface="Lato"/>
-              </a:rPr>
-              <a:t>quien certifica su inglés, frente a quien hace el mismo trabajo sin él.¹</a:t>
+              <a:t>Garantía: si cumple y no avanza, 100% de vuelta</a:t>
             </a:r>
           </a:p>
           <a:p>
             <a:pPr algn="l">
               <a:lnSpc>
-                <a:spcPct val="118000"/>
+                <a:spcPct val="120000"/>
               </a:lnSpc>
               <a:spcAft>
-                <a:spcPts val="600"/>
+                <a:spcPts val="800"/>
               </a:spcAft>
             </a:pPr>
             <a:r>
-              <a:rPr sz="1300" b="1" i="0">
-                <a:solidFill>
-                  <a:srgbClr val="E54C09"/>
+              <a:rPr sz="1800" b="1" i="0">
+                <a:solidFill>
+                  <a:srgbClr val="FBC900"/>
                 </a:solidFill>
                 <a:latin typeface="Lato"/>
               </a:rPr>
               <a:t>—  </a:t>
             </a:r>
             <a:r>
-              <a:rPr sz="1300" b="1" i="0">
-                <a:solidFill>
-                  <a:srgbClr val="F6F1E9"/>
+              <a:rPr sz="1800" b="0" i="0">
+                <a:solidFill>
+                  <a:srgbClr val="FFFFFF"/>
                 </a:solidFill>
                 <a:latin typeface="Lato"/>
               </a:rPr>
-              <a:t>Garantía por escrito: </a:t>
-            </a:r>
-            <a:r>
-              <a:rPr sz="1300" b="0" i="0">
-                <a:solidFill>
-                  <a:srgbClr val="F6F1E9"/>
-                </a:solidFill>
-                <a:latin typeface="Lato"/>
-              </a:rPr>
-              <a:t>si cumple y no avanza, recibe el 100% del nivel de vuelta.</a:t>
-            </a:r>
-          </a:p>
-          <a:p>
-            <a:pPr algn="l">
-              <a:lnSpc>
-                <a:spcPct val="118000"/>
-              </a:lnSpc>
-              <a:spcAft>
-                <a:spcPts val="600"/>
-              </a:spcAft>
-            </a:pPr>
-            <a:r>
-              <a:rPr sz="1300" b="1" i="0">
-                <a:solidFill>
-                  <a:srgbClr val="E54C09"/>
-                </a:solidFill>
-                <a:latin typeface="Lato"/>
-              </a:rPr>
-              <a:t>—  </a:t>
-            </a:r>
-            <a:r>
-              <a:rPr sz="1300" b="1" i="0">
-                <a:solidFill>
-                  <a:srgbClr val="F6F1E9"/>
-                </a:solidFill>
-                <a:latin typeface="Lato"/>
-              </a:rPr>
-              <a:t>No entrena solo: </a:t>
-            </a:r>
-            <a:r>
-              <a:rPr sz="1300" b="0" i="0">
-                <a:solidFill>
-                  <a:srgbClr val="F6F1E9"/>
-                </a:solidFill>
-                <a:latin typeface="Lato"/>
-              </a:rPr>
-              <a:t>profesor que corrige ahí mismo, coach que no lo deja rendirse, y el video del primer día junto al del último.</a:t>
-            </a:r>
-          </a:p>
-        </p:txBody>
-      </p:sp>
-      <p:sp>
-        <p:nvSpPr>
-          <p:cNvPr id="15" name="TextBox 14"/>
-          <p:cNvSpPr txBox="1"/>
-          <p:nvPr/>
-        </p:nvSpPr>
-        <p:spPr>
-          <a:xfrm>
-            <a:off x="548640" y="6144768"/>
-            <a:ext cx="10972800" cy="274320"/>
-          </a:xfrm>
-          <a:prstGeom prst="rect">
-            <a:avLst/>
-          </a:prstGeom>
-          <a:noFill/>
-        </p:spPr>
-        <p:txBody>
-          <a:bodyPr wrap="square" lIns="45720" rIns="45720" tIns="27432" bIns="27432" anchor="t">
-            <a:spAutoFit/>
-          </a:bodyPr>
-          <a:lstStyle/>
-          <a:p>
-            <a:pPr algn="l">
-              <a:lnSpc>
-                <a:spcPct val="115000"/>
-              </a:lnSpc>
-              <a:spcAft>
-                <a:spcPts val="0"/>
-              </a:spcAft>
-            </a:pPr>
-            <a:r>
-              <a:rPr sz="900" b="0" i="0">
-                <a:solidFill>
-                  <a:srgbClr val="7A828F"/>
-                </a:solidFill>
-                <a:latin typeface="Lato"/>
-              </a:rPr>
-              <a:t>¹ DNP, Archivos de Economía, Bilingüismo laboral en Colombia.</a:t>
+              <a:t>Nadie entrena solo: coach y video diario</a:t>
             </a:r>
           </a:p>
         </p:txBody>
@@ -8068,7 +7871,7 @@
             <a:avLst/>
           </a:prstGeom>
           <a:solidFill>
-            <a:srgbClr val="0F1B2D"/>
+            <a:srgbClr val="2B5A8C"/>
           </a:solidFill>
           <a:ln>
             <a:noFill/>
@@ -8114,7 +7917,7 @@
             </a:avLst>
           </a:prstGeom>
           <a:solidFill>
-            <a:srgbClr val="1B2A41"/>
+            <a:srgbClr val="3D6FA6"/>
           </a:solidFill>
           <a:ln>
             <a:noFill/>
@@ -8200,7 +8003,7 @@
             <a:r>
               <a:rPr sz="1200" b="0" i="0">
                 <a:solidFill>
-                  <a:srgbClr val="9AA4B5"/>
+                  <a:srgbClr val="D6E2F0"/>
                 </a:solidFill>
                 <a:latin typeface="Oswald"/>
               </a:rPr>
@@ -8217,7 +8020,7 @@
         </p:nvSpPr>
         <p:spPr>
           <a:xfrm>
-            <a:off x="548640" y="1234440"/>
+            <a:off x="548640" y="1280160"/>
             <a:ext cx="7315200" cy="320040"/>
           </a:xfrm>
           <a:prstGeom prst="rect">
@@ -8242,7 +8045,7 @@
             <a:r>
               <a:rPr sz="1100" b="1" i="0" spc="250">
                 <a:solidFill>
-                  <a:srgbClr val="E54C09"/>
+                  <a:srgbClr val="FBC900"/>
                 </a:solidFill>
                 <a:latin typeface="Lato"/>
               </a:rPr>
@@ -8259,8 +8062,8 @@
         </p:nvSpPr>
         <p:spPr>
           <a:xfrm>
-            <a:off x="548640" y="1554480"/>
-            <a:ext cx="10515600" cy="1737360"/>
+            <a:off x="548640" y="1600200"/>
+            <a:ext cx="10515600" cy="1645920"/>
           </a:xfrm>
           <a:prstGeom prst="rect">
             <a:avLst/>
@@ -8282,9 +8085,9 @@
               </a:spcAft>
             </a:pPr>
             <a:r>
-              <a:rPr sz="3400" b="1" i="0">
-                <a:solidFill>
-                  <a:srgbClr val="F6F1E9"/>
+              <a:rPr sz="3600" b="1" i="0">
+                <a:solidFill>
+                  <a:srgbClr val="FFFFFF"/>
                 </a:solidFill>
                 <a:latin typeface="Lato Black"/>
               </a:rPr>
@@ -8326,7 +8129,7 @@
             <a:r>
               <a:rPr sz="950" b="0" i="0">
                 <a:solidFill>
-                  <a:srgbClr val="9AA4B5"/>
+                  <a:srgbClr val="D6E2F0"/>
                 </a:solidFill>
                 <a:latin typeface="Lato"/>
               </a:rPr>
@@ -8343,8 +8146,8 @@
         </p:nvSpPr>
         <p:spPr>
           <a:xfrm>
-            <a:off x="548640" y="3246120"/>
-            <a:ext cx="3520440" cy="2834640"/>
+            <a:off x="548640" y="3383280"/>
+            <a:ext cx="3520440" cy="2560320"/>
           </a:xfrm>
           <a:prstGeom prst="roundRect">
             <a:avLst>
@@ -8352,7 +8155,7 @@
             </a:avLst>
           </a:prstGeom>
           <a:solidFill>
-            <a:srgbClr val="1B2A41"/>
+            <a:srgbClr val="3D6FA6"/>
           </a:solidFill>
           <a:ln>
             <a:noFill/>
@@ -8389,7 +8192,7 @@
         </p:nvSpPr>
         <p:spPr>
           <a:xfrm>
-            <a:off x="822960" y="3337560"/>
+            <a:off x="822960" y="3474720"/>
             <a:ext cx="3017520" cy="914400"/>
           </a:xfrm>
           <a:prstGeom prst="rect">
@@ -8412,7 +8215,7 @@
               </a:spcAft>
             </a:pPr>
             <a:r>
-              <a:rPr sz="5000" b="0" i="0">
+              <a:rPr sz="5400" b="0" i="0">
                 <a:solidFill>
                   <a:srgbClr val="FBC900"/>
                 </a:solidFill>
@@ -8431,7 +8234,7 @@
         </p:nvSpPr>
         <p:spPr>
           <a:xfrm>
-            <a:off x="822960" y="4251960"/>
+            <a:off x="822960" y="4434840"/>
             <a:ext cx="3017520" cy="274320"/>
           </a:xfrm>
           <a:prstGeom prst="rect">
@@ -8456,7 +8259,7 @@
             <a:r>
               <a:rPr sz="1050" b="1" i="0" spc="200">
                 <a:solidFill>
-                  <a:srgbClr val="E54C09"/>
+                  <a:srgbClr val="FBC900"/>
                 </a:solidFill>
                 <a:latin typeface="Lato"/>
               </a:rPr>
@@ -8473,8 +8276,8 @@
         </p:nvSpPr>
         <p:spPr>
           <a:xfrm>
-            <a:off x="822960" y="4572000"/>
-            <a:ext cx="3017520" cy="1463040"/>
+            <a:off x="822960" y="4754880"/>
+            <a:ext cx="3017520" cy="1005840"/>
           </a:xfrm>
           <a:prstGeom prst="rect">
             <a:avLst/>
@@ -8496,13 +8299,13 @@
               </a:spcAft>
             </a:pPr>
             <a:r>
-              <a:rPr sz="1300" b="0" i="0">
-                <a:solidFill>
-                  <a:srgbClr val="F6F1E9"/>
+              <a:rPr sz="1700" b="0" i="0">
+                <a:solidFill>
+                  <a:srgbClr val="FFFFFF"/>
                 </a:solidFill>
                 <a:latin typeface="Lato"/>
               </a:rPr>
-              <a:t>Martes 3 de noviembre de 2026. El grupo no para en diciembre: sigue hasta terminar el nivel, solo descansa los festivos.</a:t>
+              <a:t>Y no para en diciembre.</a:t>
             </a:r>
           </a:p>
         </p:txBody>
@@ -8515,8 +8318,8 @@
         </p:nvSpPr>
         <p:spPr>
           <a:xfrm>
-            <a:off x="4297679" y="3246120"/>
-            <a:ext cx="3520440" cy="2834640"/>
+            <a:off x="4297679" y="3383280"/>
+            <a:ext cx="3520440" cy="2560320"/>
           </a:xfrm>
           <a:prstGeom prst="roundRect">
             <a:avLst>
@@ -8524,7 +8327,7 @@
             </a:avLst>
           </a:prstGeom>
           <a:solidFill>
-            <a:srgbClr val="1B2A41"/>
+            <a:srgbClr val="3D6FA6"/>
           </a:solidFill>
           <a:ln>
             <a:noFill/>
@@ -8561,7 +8364,7 @@
         </p:nvSpPr>
         <p:spPr>
           <a:xfrm>
-            <a:off x="4571999" y="3337560"/>
+            <a:off x="4571999" y="3474720"/>
             <a:ext cx="3017520" cy="914400"/>
           </a:xfrm>
           <a:prstGeom prst="rect">
@@ -8584,7 +8387,7 @@
               </a:spcAft>
             </a:pPr>
             <a:r>
-              <a:rPr sz="5000" b="0" i="0">
+              <a:rPr sz="5400" b="0" i="0">
                 <a:solidFill>
                   <a:srgbClr val="FBC900"/>
                 </a:solidFill>
@@ -8603,7 +8406,7 @@
         </p:nvSpPr>
         <p:spPr>
           <a:xfrm>
-            <a:off x="4571999" y="4251960"/>
+            <a:off x="4571999" y="4434840"/>
             <a:ext cx="3017520" cy="274320"/>
           </a:xfrm>
           <a:prstGeom prst="rect">
@@ -8628,7 +8431,7 @@
             <a:r>
               <a:rPr sz="1050" b="1" i="0" spc="200">
                 <a:solidFill>
-                  <a:srgbClr val="E54C09"/>
+                  <a:srgbClr val="FBC900"/>
                 </a:solidFill>
                 <a:latin typeface="Lato"/>
               </a:rPr>
@@ -8645,8 +8448,8 @@
         </p:nvSpPr>
         <p:spPr>
           <a:xfrm>
-            <a:off x="4571999" y="4572000"/>
-            <a:ext cx="3017520" cy="1463040"/>
+            <a:off x="4571999" y="4754880"/>
+            <a:ext cx="3017520" cy="1005840"/>
           </a:xfrm>
           <a:prstGeom prst="rect">
             <a:avLst/>
@@ -8668,13 +8471,13 @@
               </a:spcAft>
             </a:pPr>
             <a:r>
-              <a:rPr sz="1300" b="0" i="0">
-                <a:solidFill>
-                  <a:srgbClr val="F6F1E9"/>
+              <a:rPr sz="1700" b="0" i="0">
+                <a:solidFill>
+                  <a:srgbClr val="FFFFFF"/>
                 </a:solidFill>
                 <a:latin typeface="Lato"/>
               </a:rPr>
-              <a:t>Grupos de máximo 16, por orden de matrícula con la inicial pagada. Los que no entren ahora esperan al siguiente grupo.</a:t>
+              <a:t>Por orden de matrícula.</a:t>
             </a:r>
           </a:p>
         </p:txBody>
@@ -8687,8 +8490,8 @@
         </p:nvSpPr>
         <p:spPr>
           <a:xfrm>
-            <a:off x="8046718" y="3246120"/>
-            <a:ext cx="3520440" cy="2834640"/>
+            <a:off x="8046718" y="3383280"/>
+            <a:ext cx="3520440" cy="2560320"/>
           </a:xfrm>
           <a:prstGeom prst="roundRect">
             <a:avLst>
@@ -8696,7 +8499,7 @@
             </a:avLst>
           </a:prstGeom>
           <a:solidFill>
-            <a:srgbClr val="1B2A41"/>
+            <a:srgbClr val="3D6FA6"/>
           </a:solidFill>
           <a:ln>
             <a:noFill/>
@@ -8733,7 +8536,7 @@
         </p:nvSpPr>
         <p:spPr>
           <a:xfrm>
-            <a:off x="8321038" y="3337560"/>
+            <a:off x="8321038" y="3474720"/>
             <a:ext cx="3017520" cy="914400"/>
           </a:xfrm>
           <a:prstGeom prst="rect">
@@ -8756,7 +8559,7 @@
               </a:spcAft>
             </a:pPr>
             <a:r>
-              <a:rPr sz="5000" b="0" i="0">
+              <a:rPr sz="5400" b="0" i="0">
                 <a:solidFill>
                   <a:srgbClr val="FBC900"/>
                 </a:solidFill>
@@ -8775,7 +8578,7 @@
         </p:nvSpPr>
         <p:spPr>
           <a:xfrm>
-            <a:off x="8321038" y="4251960"/>
+            <a:off x="8321038" y="4434840"/>
             <a:ext cx="3017520" cy="274320"/>
           </a:xfrm>
           <a:prstGeom prst="rect">
@@ -8800,7 +8603,7 @@
             <a:r>
               <a:rPr sz="1050" b="1" i="0" spc="200">
                 <a:solidFill>
-                  <a:srgbClr val="E54C09"/>
+                  <a:srgbClr val="FBC900"/>
                 </a:solidFill>
                 <a:latin typeface="Lato"/>
               </a:rPr>
@@ -8817,8 +8620,8 @@
         </p:nvSpPr>
         <p:spPr>
           <a:xfrm>
-            <a:off x="8321038" y="4572000"/>
-            <a:ext cx="3017520" cy="1463040"/>
+            <a:off x="8321038" y="4754880"/>
+            <a:ext cx="3017520" cy="1005840"/>
           </a:xfrm>
           <a:prstGeom prst="rect">
             <a:avLst/>
@@ -8840,13 +8643,13 @@
               </a:spcAft>
             </a:pPr>
             <a:r>
-              <a:rPr sz="1300" b="0" i="0">
-                <a:solidFill>
-                  <a:srgbClr val="F6F1E9"/>
+              <a:rPr sz="1700" b="0" i="0">
+                <a:solidFill>
+                  <a:srgbClr val="FFFFFF"/>
                 </a:solidFill>
                 <a:latin typeface="Lato"/>
               </a:rPr>
-              <a:t>Este trimestre, para los afiliados que el fondo elija. Si todos cumplen, suben a 5 el siguiente.</a:t>
+              <a:t>Este trimestre. Suben a 5.</a:t>
             </a:r>
           </a:p>
         </p:txBody>
@@ -8884,7 +8687,7 @@
             <a:avLst/>
           </a:prstGeom>
           <a:solidFill>
-            <a:srgbClr val="0F1B2D"/>
+            <a:srgbClr val="2B5A8C"/>
           </a:solidFill>
           <a:ln>
             <a:noFill/>
@@ -8970,7 +8773,7 @@
             <a:r>
               <a:rPr sz="1200" b="0" i="0">
                 <a:solidFill>
-                  <a:srgbClr val="9AA4B5"/>
+                  <a:srgbClr val="D6E2F0"/>
                 </a:solidFill>
                 <a:latin typeface="Oswald"/>
               </a:rPr>
@@ -9012,7 +8815,7 @@
             <a:r>
               <a:rPr sz="1100" b="1" i="0" spc="250">
                 <a:solidFill>
-                  <a:srgbClr val="E54C09"/>
+                  <a:srgbClr val="FBC900"/>
                 </a:solidFill>
                 <a:latin typeface="Lato"/>
               </a:rPr>
@@ -9054,7 +8857,7 @@
             <a:r>
               <a:rPr sz="3800" b="1" i="0">
                 <a:solidFill>
-                  <a:srgbClr val="F6F1E9"/>
+                  <a:srgbClr val="FFFFFF"/>
                 </a:solidFill>
                 <a:latin typeface="Lato Black"/>
               </a:rPr>
@@ -9155,7 +8958,7 @@
                 </a:solidFill>
                 <a:latin typeface="Lato"/>
               </a:rPr>
-              <a:t>Firmamos hoy y la charla de 20 minutos la hacemos el </a:t>
+              <a:t>Firmamos hoy. ¿La charla la hacemos el </a:t>
             </a:r>
             <a:r>
               <a:rPr sz="1900" b="1" i="0">
@@ -9227,7 +9030,7 @@
                 </a:solidFill>
                 <a:latin typeface="Lato"/>
               </a:rPr>
-              <a:t>.</a:t>
+              <a:t>?</a:t>
             </a:r>
           </a:p>
         </p:txBody>
@@ -9274,11 +9077,11 @@
             <a:r>
               <a:rPr sz="1600" b="0" i="0">
                 <a:solidFill>
-                  <a:srgbClr val="F6F1E9"/>
+                  <a:srgbClr val="FFFFFF"/>
                 </a:solidFill>
                 <a:latin typeface="Lato"/>
               </a:rPr>
-              <a:t>¿cuándo se reúne? Le dejo el convenio listo para esa fecha.</a:t>
+              <a:t>¿cuándo se reúne? Le dejo el convenio listo.</a:t>
             </a:r>
           </a:p>
           <a:p>
@@ -9293,7 +9096,7 @@
             <a:r>
               <a:rPr sz="1300" b="0" i="0">
                 <a:solidFill>
-                  <a:srgbClr val="9AA4B5"/>
+                  <a:srgbClr val="D6E2F0"/>
                 </a:solidFill>
                 <a:latin typeface="Lato"/>
               </a:rPr>
@@ -9405,7 +9208,7 @@
             <a:r>
               <a:rPr sz="1100" b="0" i="0">
                 <a:solidFill>
-                  <a:srgbClr val="9AA4B5"/>
+                  <a:srgbClr val="D6E2F0"/>
                 </a:solidFill>
                 <a:latin typeface="Lato"/>
               </a:rPr>
@@ -9447,7 +9250,7 @@
             <a:r>
               <a:rPr sz="950" b="0" i="0">
                 <a:solidFill>
-                  <a:srgbClr val="9AA4B5"/>
+                  <a:srgbClr val="D6E2F0"/>
                 </a:solidFill>
                 <a:latin typeface="Lato"/>
               </a:rPr>

--- a/recursos/comercial/B2B/PRESENTACION_FONDOS_EMPLEADOS_HEIIU.pptx
+++ b/recursos/comercial/B2B/PRESENTACION_FONDOS_EMPLEADOS_HEIIU.pptx
@@ -3989,7 +3989,7 @@
             <a:avLst/>
           </a:prstGeom>
           <a:solidFill>
-            <a:srgbClr val="2B5A8C"/>
+            <a:srgbClr val="F39A55"/>
           </a:solidFill>
           <a:ln>
             <a:noFill/>
@@ -4033,7 +4033,7 @@
             <a:avLst/>
           </a:prstGeom>
           <a:solidFill>
-            <a:srgbClr val="3D6FA6"/>
+            <a:srgbClr val="FFFFFF"/>
           </a:solidFill>
           <a:ln>
             <a:noFill/>
@@ -4106,9 +4106,55 @@
           </a:p>
         </p:txBody>
       </p:sp>
+      <p:sp>
+        <p:nvSpPr>
+          <p:cNvPr id="5" name="Rounded Rectangle 4"/>
+          <p:cNvSpPr/>
+          <p:nvPr/>
+        </p:nvSpPr>
+        <p:spPr>
+          <a:xfrm>
+            <a:off x="548640" y="502920"/>
+            <a:ext cx="1732970" cy="914400"/>
+          </a:xfrm>
+          <a:prstGeom prst="roundRect">
+            <a:avLst>
+              <a:gd name="adj" fmla="val 50000"/>
+            </a:avLst>
+          </a:prstGeom>
+          <a:solidFill>
+            <a:srgbClr val="E54C09"/>
+          </a:solidFill>
+          <a:ln>
+            <a:noFill/>
+          </a:ln>
+          <a:effectLst/>
+        </p:spPr>
+        <p:style>
+          <a:lnRef idx="1">
+            <a:schemeClr val="accent1"/>
+          </a:lnRef>
+          <a:fillRef idx="3">
+            <a:schemeClr val="accent1"/>
+          </a:fillRef>
+          <a:effectRef idx="2">
+            <a:schemeClr val="accent1"/>
+          </a:effectRef>
+          <a:fontRef idx="minor">
+            <a:schemeClr val="lt1"/>
+          </a:fontRef>
+        </p:style>
+        <p:txBody>
+          <a:bodyPr rtlCol="0" anchor="ctr"/>
+          <a:lstStyle/>
+          <a:p>
+            <a:pPr algn="ctr"/>
+          </a:p>
+        </p:txBody>
+      </p:sp>
       <p:pic>
         <p:nvPicPr>
-          <p:cNvPr id="5" name="Picture 4" descr="logo_heiiu_transparente.png"/>
+          <p:cNvPr id="6" name="Picture 5" descr="logo_heiiu_transparente.png"/>
           <p:cNvPicPr>
             <a:picLocks noChangeAspect="1"/>
           </p:cNvPicPr>
@@ -4122,8 +4168,8 @@
         </p:blipFill>
         <p:spPr>
           <a:xfrm>
-            <a:off x="548640" y="502920"/>
-            <a:ext cx="2032552" cy="1143000"/>
+            <a:off x="731520" y="576072"/>
+            <a:ext cx="1365875" cy="768096"/>
           </a:xfrm>
           <a:prstGeom prst="rect">
             <a:avLst/>
@@ -4132,7 +4178,7 @@
       </p:pic>
       <p:sp>
         <p:nvSpPr>
-          <p:cNvPr id="6" name="TextBox 5"/>
+          <p:cNvPr id="7" name="TextBox 6"/>
           <p:cNvSpPr txBox="1"/>
           <p:nvPr/>
         </p:nvSpPr>
@@ -4163,7 +4209,7 @@
             <a:r>
               <a:rPr sz="1100" b="1" i="0" spc="250">
                 <a:solidFill>
-                  <a:srgbClr val="FBC900"/>
+                  <a:srgbClr val="3B2A20"/>
                 </a:solidFill>
                 <a:latin typeface="Lato"/>
               </a:rPr>
@@ -4174,7 +4220,7 @@
       </p:sp>
       <p:sp>
         <p:nvSpPr>
-          <p:cNvPr id="7" name="TextBox 6"/>
+          <p:cNvPr id="8" name="TextBox 7"/>
           <p:cNvSpPr txBox="1"/>
           <p:nvPr/>
         </p:nvSpPr>
@@ -4205,7 +4251,7 @@
             <a:r>
               <a:rPr sz="4200" b="1" i="0">
                 <a:solidFill>
-                  <a:srgbClr val="FFFFFF"/>
+                  <a:srgbClr val="3B2A20"/>
                 </a:solidFill>
                 <a:latin typeface="Lato Black"/>
               </a:rPr>
@@ -4214,7 +4260,7 @@
             <a:r>
               <a:rPr sz="4200" b="1" i="0">
                 <a:solidFill>
-                  <a:srgbClr val="FBC900"/>
+                  <a:srgbClr val="FFFFFF"/>
                 </a:solidFill>
                 <a:latin typeface="Lato Black"/>
               </a:rPr>
@@ -4225,7 +4271,7 @@
       </p:sp>
       <p:sp>
         <p:nvSpPr>
-          <p:cNvPr id="8" name="TextBox 7"/>
+          <p:cNvPr id="9" name="TextBox 8"/>
           <p:cNvSpPr txBox="1"/>
           <p:nvPr/>
         </p:nvSpPr>
@@ -4256,7 +4302,7 @@
             <a:r>
               <a:rPr sz="1800" b="0" i="0">
                 <a:solidFill>
-                  <a:srgbClr val="D6E2F0"/>
+                  <a:srgbClr val="6B4A33"/>
                 </a:solidFill>
                 <a:latin typeface="Lato"/>
               </a:rPr>
@@ -4267,7 +4313,7 @@
       </p:sp>
       <p:sp>
         <p:nvSpPr>
-          <p:cNvPr id="9" name="TextBox 8"/>
+          <p:cNvPr id="10" name="TextBox 9"/>
           <p:cNvSpPr txBox="1"/>
           <p:nvPr/>
         </p:nvSpPr>
@@ -4298,7 +4344,7 @@
             <a:r>
               <a:rPr sz="1300" b="0" i="0">
                 <a:solidFill>
-                  <a:srgbClr val="D6E2F0"/>
+                  <a:srgbClr val="6B4A33"/>
                 </a:solidFill>
                 <a:latin typeface="Lato"/>
               </a:rPr>
@@ -4307,7 +4353,7 @@
             <a:r>
               <a:rPr sz="1300" b="0" i="0">
                 <a:solidFill>
-                  <a:srgbClr val="D6E2F0"/>
+                  <a:srgbClr val="6B4A33"/>
                 </a:solidFill>
                 <a:latin typeface="Lato"/>
               </a:rPr>
@@ -4316,7 +4362,7 @@
             <a:r>
               <a:rPr sz="1300" b="0" i="0">
                 <a:solidFill>
-                  <a:srgbClr val="D6E2F0"/>
+                  <a:srgbClr val="6B4A33"/>
                 </a:solidFill>
                 <a:latin typeface="Lato"/>
               </a:rPr>
@@ -4327,7 +4373,7 @@
       </p:sp>
       <p:sp>
         <p:nvSpPr>
-          <p:cNvPr id="10" name="TextBox 9"/>
+          <p:cNvPr id="11" name="TextBox 10"/>
           <p:cNvSpPr txBox="1"/>
           <p:nvPr/>
         </p:nvSpPr>
@@ -4358,7 +4404,7 @@
             <a:r>
               <a:rPr sz="9600" b="0" i="0">
                 <a:solidFill>
-                  <a:srgbClr val="FBC900"/>
+                  <a:srgbClr val="E54C09"/>
                 </a:solidFill>
                 <a:latin typeface="Oswald"/>
               </a:rPr>
@@ -4369,7 +4415,7 @@
       </p:sp>
       <p:sp>
         <p:nvSpPr>
-          <p:cNvPr id="11" name="TextBox 10"/>
+          <p:cNvPr id="12" name="TextBox 11"/>
           <p:cNvSpPr txBox="1"/>
           <p:nvPr/>
         </p:nvSpPr>
@@ -4400,7 +4446,7 @@
             <a:r>
               <a:rPr sz="1500" b="0" i="0">
                 <a:solidFill>
-                  <a:srgbClr val="FFFFFF"/>
+                  <a:srgbClr val="3B2A20"/>
                 </a:solidFill>
                 <a:latin typeface="Lato"/>
               </a:rPr>
@@ -4411,7 +4457,7 @@
       </p:sp>
       <p:sp>
         <p:nvSpPr>
-          <p:cNvPr id="12" name="TextBox 11"/>
+          <p:cNvPr id="13" name="TextBox 12"/>
           <p:cNvSpPr txBox="1"/>
           <p:nvPr/>
         </p:nvSpPr>
@@ -4442,7 +4488,7 @@
             <a:r>
               <a:rPr sz="7200" b="0" i="0">
                 <a:solidFill>
-                  <a:srgbClr val="FFFFFF"/>
+                  <a:srgbClr val="E54C09"/>
                 </a:solidFill>
                 <a:latin typeface="Oswald"/>
               </a:rPr>
@@ -4453,7 +4499,7 @@
       </p:sp>
       <p:sp>
         <p:nvSpPr>
-          <p:cNvPr id="13" name="TextBox 12"/>
+          <p:cNvPr id="14" name="TextBox 13"/>
           <p:cNvSpPr txBox="1"/>
           <p:nvPr/>
         </p:nvSpPr>
@@ -4484,7 +4530,7 @@
             <a:r>
               <a:rPr sz="1500" b="0" i="0">
                 <a:solidFill>
-                  <a:srgbClr val="FFFFFF"/>
+                  <a:srgbClr val="3B2A20"/>
                 </a:solidFill>
                 <a:latin typeface="Lato"/>
               </a:rPr>
@@ -4526,7 +4572,7 @@
             <a:avLst/>
           </a:prstGeom>
           <a:solidFill>
-            <a:srgbClr val="F7F3EC"/>
+            <a:srgbClr val="FBF5EE"/>
           </a:solidFill>
           <a:ln>
             <a:noFill/>
@@ -4564,7 +4610,7 @@
         <p:spPr>
           <a:xfrm>
             <a:off x="548640" y="384048"/>
-            <a:ext cx="1417320" cy="566928"/>
+            <a:ext cx="1114470" cy="566928"/>
           </a:xfrm>
           <a:prstGeom prst="roundRect">
             <a:avLst>
@@ -4572,7 +4618,7 @@
             </a:avLst>
           </a:prstGeom>
           <a:solidFill>
-            <a:srgbClr val="2B5A8C"/>
+            <a:srgbClr val="E54C09"/>
           </a:solidFill>
           <a:ln>
             <a:noFill/>
@@ -4742,7 +4788,7 @@
             <a:r>
               <a:rPr sz="3600" b="1" i="0">
                 <a:solidFill>
-                  <a:srgbClr val="1E3A5F"/>
+                  <a:srgbClr val="3B2A20"/>
                 </a:solidFill>
                 <a:latin typeface="Lato Black"/>
               </a:rPr>
@@ -4814,7 +4860,7 @@
           </a:solidFill>
           <a:ln w="9525">
             <a:solidFill>
-              <a:srgbClr val="DDE4EE"/>
+              <a:srgbClr val="F0DCC8"/>
             </a:solidFill>
           </a:ln>
           <a:effectLst/>
@@ -4918,7 +4964,7 @@
             <a:r>
               <a:rPr sz="4600" b="0" i="0">
                 <a:solidFill>
-                  <a:srgbClr val="1E3A5F"/>
+                  <a:srgbClr val="3B2A20"/>
                 </a:solidFill>
                 <a:latin typeface="Oswald"/>
               </a:rPr>
@@ -4990,7 +5036,7 @@
           </a:solidFill>
           <a:ln w="9525">
             <a:solidFill>
-              <a:srgbClr val="DDE4EE"/>
+              <a:srgbClr val="F0DCC8"/>
             </a:solidFill>
           </a:ln>
           <a:effectLst/>
@@ -5094,7 +5140,7 @@
             <a:r>
               <a:rPr sz="4600" b="0" i="0">
                 <a:solidFill>
-                  <a:srgbClr val="1E3A5F"/>
+                  <a:srgbClr val="3B2A20"/>
                 </a:solidFill>
                 <a:latin typeface="Oswald"/>
               </a:rPr>
@@ -5166,7 +5212,7 @@
           </a:solidFill>
           <a:ln w="9525">
             <a:solidFill>
-              <a:srgbClr val="DDE4EE"/>
+              <a:srgbClr val="F0DCC8"/>
             </a:solidFill>
           </a:ln>
           <a:effectLst/>
@@ -5270,7 +5316,7 @@
             <a:r>
               <a:rPr sz="4600" b="0" i="0">
                 <a:solidFill>
-                  <a:srgbClr val="1E3A5F"/>
+                  <a:srgbClr val="3B2A20"/>
                 </a:solidFill>
                 <a:latin typeface="Oswald"/>
               </a:rPr>
@@ -5342,7 +5388,7 @@
           </a:solidFill>
           <a:ln w="9525">
             <a:solidFill>
-              <a:srgbClr val="DDE4EE"/>
+              <a:srgbClr val="F0DCC8"/>
             </a:solidFill>
           </a:ln>
           <a:effectLst/>
@@ -5446,7 +5492,7 @@
             <a:r>
               <a:rPr sz="4600" b="0" i="0">
                 <a:solidFill>
-                  <a:srgbClr val="1E3A5F"/>
+                  <a:srgbClr val="3B2A20"/>
                 </a:solidFill>
                 <a:latin typeface="Oswald"/>
               </a:rPr>
@@ -5530,7 +5576,7 @@
             <a:avLst/>
           </a:prstGeom>
           <a:solidFill>
-            <a:srgbClr val="F7F3EC"/>
+            <a:srgbClr val="FBF5EE"/>
           </a:solidFill>
           <a:ln>
             <a:noFill/>
@@ -5568,7 +5614,7 @@
         <p:spPr>
           <a:xfrm>
             <a:off x="548640" y="384048"/>
-            <a:ext cx="1417320" cy="566928"/>
+            <a:ext cx="1114470" cy="566928"/>
           </a:xfrm>
           <a:prstGeom prst="roundRect">
             <a:avLst>
@@ -5576,7 +5622,7 @@
             </a:avLst>
           </a:prstGeom>
           <a:solidFill>
-            <a:srgbClr val="2B5A8C"/>
+            <a:srgbClr val="E54C09"/>
           </a:solidFill>
           <a:ln>
             <a:noFill/>
@@ -5746,7 +5792,7 @@
             <a:r>
               <a:rPr sz="3600" b="1" i="0">
                 <a:solidFill>
-                  <a:srgbClr val="1E3A5F"/>
+                  <a:srgbClr val="3B2A20"/>
                 </a:solidFill>
                 <a:latin typeface="Lato Black"/>
               </a:rPr>
@@ -5874,7 +5920,7 @@
             <a:r>
               <a:rPr sz="1100" b="1" i="0" spc="200">
                 <a:solidFill>
-                  <a:srgbClr val="1E3A5F"/>
+                  <a:srgbClr val="3B2A20"/>
                 </a:solidFill>
                 <a:latin typeface="Lato"/>
               </a:rPr>
@@ -6002,7 +6048,7 @@
             <a:r>
               <a:rPr sz="1100" b="1" i="0" spc="200">
                 <a:solidFill>
-                  <a:srgbClr val="1E3A5F"/>
+                  <a:srgbClr val="3B2A20"/>
                 </a:solidFill>
                 <a:latin typeface="Lato"/>
               </a:rPr>
@@ -6130,7 +6176,7 @@
             <a:r>
               <a:rPr sz="1100" b="1" i="0" spc="200">
                 <a:solidFill>
-                  <a:srgbClr val="1E3A5F"/>
+                  <a:srgbClr val="3B2A20"/>
                 </a:solidFill>
                 <a:latin typeface="Lato"/>
               </a:rPr>
@@ -6258,7 +6304,7 @@
             <a:r>
               <a:rPr sz="1100" b="1" i="0" spc="200">
                 <a:solidFill>
-                  <a:srgbClr val="1E3A5F"/>
+                  <a:srgbClr val="3B2A20"/>
                 </a:solidFill>
                 <a:latin typeface="Lato"/>
               </a:rPr>
@@ -6386,7 +6432,7 @@
             <a:r>
               <a:rPr sz="1100" b="1" i="0" spc="200">
                 <a:solidFill>
-                  <a:srgbClr val="1E3A5F"/>
+                  <a:srgbClr val="3B2A20"/>
                 </a:solidFill>
                 <a:latin typeface="Lato"/>
               </a:rPr>
@@ -6514,7 +6560,7 @@
             <a:r>
               <a:rPr sz="1100" b="1" i="0" spc="200">
                 <a:solidFill>
-                  <a:srgbClr val="1E3A5F"/>
+                  <a:srgbClr val="3B2A20"/>
                 </a:solidFill>
                 <a:latin typeface="Lato"/>
               </a:rPr>
@@ -6598,7 +6644,7 @@
             <a:avLst/>
           </a:prstGeom>
           <a:solidFill>
-            <a:srgbClr val="F7F3EC"/>
+            <a:srgbClr val="FBF5EE"/>
           </a:solidFill>
           <a:ln>
             <a:noFill/>
@@ -6636,7 +6682,7 @@
         <p:spPr>
           <a:xfrm>
             <a:off x="548640" y="384048"/>
-            <a:ext cx="1417320" cy="566928"/>
+            <a:ext cx="1114470" cy="566928"/>
           </a:xfrm>
           <a:prstGeom prst="roundRect">
             <a:avLst>
@@ -6644,7 +6690,7 @@
             </a:avLst>
           </a:prstGeom>
           <a:solidFill>
-            <a:srgbClr val="2B5A8C"/>
+            <a:srgbClr val="E54C09"/>
           </a:solidFill>
           <a:ln>
             <a:noFill/>
@@ -6814,7 +6860,7 @@
             <a:r>
               <a:rPr sz="3600" b="1" i="0">
                 <a:solidFill>
-                  <a:srgbClr val="1E3A5F"/>
+                  <a:srgbClr val="3B2A20"/>
                 </a:solidFill>
                 <a:latin typeface="Lato Black"/>
               </a:rPr>
@@ -6989,7 +7035,7 @@
             </a:avLst>
           </a:prstGeom>
           <a:solidFill>
-            <a:srgbClr val="2B5A8C"/>
+            <a:srgbClr val="F39A55"/>
           </a:solidFill>
           <a:ln>
             <a:noFill/>
@@ -7033,7 +7079,7 @@
             <a:avLst/>
           </a:prstGeom>
           <a:solidFill>
-            <a:srgbClr val="FBC900"/>
+            <a:srgbClr val="3B2A20"/>
           </a:solidFill>
           <a:ln>
             <a:noFill/>
@@ -7095,7 +7141,7 @@
             <a:r>
               <a:rPr sz="4800" b="0" i="0">
                 <a:solidFill>
-                  <a:srgbClr val="FBC900"/>
+                  <a:srgbClr val="3B2A20"/>
                 </a:solidFill>
                 <a:latin typeface="Oswald"/>
               </a:rPr>
@@ -7137,7 +7183,7 @@
             <a:r>
               <a:rPr sz="1500" b="0" i="0">
                 <a:solidFill>
-                  <a:srgbClr val="FFFFFF"/>
+                  <a:srgbClr val="3B2A20"/>
                 </a:solidFill>
                 <a:latin typeface="Lato"/>
               </a:rPr>
@@ -7179,7 +7225,7 @@
             <a:avLst/>
           </a:prstGeom>
           <a:solidFill>
-            <a:srgbClr val="F7F3EC"/>
+            <a:srgbClr val="FBF5EE"/>
           </a:solidFill>
           <a:ln>
             <a:noFill/>
@@ -7217,7 +7263,7 @@
         <p:spPr>
           <a:xfrm>
             <a:off x="548640" y="384048"/>
-            <a:ext cx="1417320" cy="566928"/>
+            <a:ext cx="1114470" cy="566928"/>
           </a:xfrm>
           <a:prstGeom prst="roundRect">
             <a:avLst>
@@ -7225,7 +7271,7 @@
             </a:avLst>
           </a:prstGeom>
           <a:solidFill>
-            <a:srgbClr val="2B5A8C"/>
+            <a:srgbClr val="E54C09"/>
           </a:solidFill>
           <a:ln>
             <a:noFill/>
@@ -7395,7 +7441,7 @@
             <a:r>
               <a:rPr sz="3600" b="1" i="0">
                 <a:solidFill>
-                  <a:srgbClr val="1E3A5F"/>
+                  <a:srgbClr val="3B2A20"/>
                 </a:solidFill>
                 <a:latin typeface="Lato Black"/>
               </a:rPr>
@@ -7467,7 +7513,7 @@
           </a:solidFill>
           <a:ln w="9525">
             <a:solidFill>
-              <a:srgbClr val="DDE4EE"/>
+              <a:srgbClr val="F0DCC8"/>
             </a:solidFill>
           </a:ln>
           <a:effectLst/>
@@ -7660,7 +7706,7 @@
             </a:avLst>
           </a:prstGeom>
           <a:solidFill>
-            <a:srgbClr val="2B5A8C"/>
+            <a:srgbClr val="F39A55"/>
           </a:solidFill>
           <a:ln>
             <a:noFill/>
@@ -7722,7 +7768,7 @@
             <a:r>
               <a:rPr sz="1100" b="1" i="0" spc="200">
                 <a:solidFill>
-                  <a:srgbClr val="FBC900"/>
+                  <a:srgbClr val="3B2A20"/>
                 </a:solidFill>
                 <a:latin typeface="Lato"/>
               </a:rPr>
@@ -7764,7 +7810,7 @@
             <a:r>
               <a:rPr sz="1800" b="1" i="0">
                 <a:solidFill>
-                  <a:srgbClr val="FBC900"/>
+                  <a:srgbClr val="FFFFFF"/>
                 </a:solidFill>
                 <a:latin typeface="Lato"/>
               </a:rPr>
@@ -7773,7 +7819,7 @@
             <a:r>
               <a:rPr sz="1800" b="0" i="0">
                 <a:solidFill>
-                  <a:srgbClr val="FFFFFF"/>
+                  <a:srgbClr val="3B2A20"/>
                 </a:solidFill>
                 <a:latin typeface="Lato"/>
               </a:rPr>
@@ -7792,7 +7838,7 @@
             <a:r>
               <a:rPr sz="1800" b="1" i="0">
                 <a:solidFill>
-                  <a:srgbClr val="FBC900"/>
+                  <a:srgbClr val="FFFFFF"/>
                 </a:solidFill>
                 <a:latin typeface="Lato"/>
               </a:rPr>
@@ -7801,7 +7847,7 @@
             <a:r>
               <a:rPr sz="1800" b="0" i="0">
                 <a:solidFill>
-                  <a:srgbClr val="FFFFFF"/>
+                  <a:srgbClr val="3B2A20"/>
                 </a:solidFill>
                 <a:latin typeface="Lato"/>
               </a:rPr>
@@ -7820,7 +7866,7 @@
             <a:r>
               <a:rPr sz="1800" b="1" i="0">
                 <a:solidFill>
-                  <a:srgbClr val="FBC900"/>
+                  <a:srgbClr val="FFFFFF"/>
                 </a:solidFill>
                 <a:latin typeface="Lato"/>
               </a:rPr>
@@ -7829,7 +7875,7 @@
             <a:r>
               <a:rPr sz="1800" b="0" i="0">
                 <a:solidFill>
-                  <a:srgbClr val="FFFFFF"/>
+                  <a:srgbClr val="3B2A20"/>
                 </a:solidFill>
                 <a:latin typeface="Lato"/>
               </a:rPr>
@@ -7871,7 +7917,7 @@
             <a:avLst/>
           </a:prstGeom>
           <a:solidFill>
-            <a:srgbClr val="2B5A8C"/>
+            <a:srgbClr val="F39A55"/>
           </a:solidFill>
           <a:ln>
             <a:noFill/>
@@ -7909,7 +7955,7 @@
         <p:spPr>
           <a:xfrm>
             <a:off x="548640" y="384048"/>
-            <a:ext cx="1417320" cy="566928"/>
+            <a:ext cx="1114470" cy="566928"/>
           </a:xfrm>
           <a:prstGeom prst="roundRect">
             <a:avLst>
@@ -7917,7 +7963,7 @@
             </a:avLst>
           </a:prstGeom>
           <a:solidFill>
-            <a:srgbClr val="3D6FA6"/>
+            <a:srgbClr val="E54C09"/>
           </a:solidFill>
           <a:ln>
             <a:noFill/>
@@ -8003,7 +8049,7 @@
             <a:r>
               <a:rPr sz="1200" b="0" i="0">
                 <a:solidFill>
-                  <a:srgbClr val="D6E2F0"/>
+                  <a:srgbClr val="6B4A33"/>
                 </a:solidFill>
                 <a:latin typeface="Oswald"/>
               </a:rPr>
@@ -8045,7 +8091,7 @@
             <a:r>
               <a:rPr sz="1100" b="1" i="0" spc="250">
                 <a:solidFill>
-                  <a:srgbClr val="FBC900"/>
+                  <a:srgbClr val="3B2A20"/>
                 </a:solidFill>
                 <a:latin typeface="Lato"/>
               </a:rPr>
@@ -8087,7 +8133,7 @@
             <a:r>
               <a:rPr sz="3600" b="1" i="0">
                 <a:solidFill>
-                  <a:srgbClr val="FFFFFF"/>
+                  <a:srgbClr val="3B2A20"/>
                 </a:solidFill>
                 <a:latin typeface="Lato Black"/>
               </a:rPr>
@@ -8129,7 +8175,7 @@
             <a:r>
               <a:rPr sz="950" b="0" i="0">
                 <a:solidFill>
-                  <a:srgbClr val="D6E2F0"/>
+                  <a:srgbClr val="6B4A33"/>
                 </a:solidFill>
                 <a:latin typeface="Lato"/>
               </a:rPr>
@@ -8155,7 +8201,7 @@
             </a:avLst>
           </a:prstGeom>
           <a:solidFill>
-            <a:srgbClr val="3D6FA6"/>
+            <a:srgbClr val="FFFFFF"/>
           </a:solidFill>
           <a:ln>
             <a:noFill/>
@@ -8217,7 +8263,7 @@
             <a:r>
               <a:rPr sz="5400" b="0" i="0">
                 <a:solidFill>
-                  <a:srgbClr val="FBC900"/>
+                  <a:srgbClr val="E54C09"/>
                 </a:solidFill>
                 <a:latin typeface="Oswald"/>
               </a:rPr>
@@ -8259,7 +8305,7 @@
             <a:r>
               <a:rPr sz="1050" b="1" i="0" spc="200">
                 <a:solidFill>
-                  <a:srgbClr val="FBC900"/>
+                  <a:srgbClr val="3B2A20"/>
                 </a:solidFill>
                 <a:latin typeface="Lato"/>
               </a:rPr>
@@ -8301,7 +8347,7 @@
             <a:r>
               <a:rPr sz="1700" b="0" i="0">
                 <a:solidFill>
-                  <a:srgbClr val="FFFFFF"/>
+                  <a:srgbClr val="2B3445"/>
                 </a:solidFill>
                 <a:latin typeface="Lato"/>
               </a:rPr>
@@ -8327,7 +8373,7 @@
             </a:avLst>
           </a:prstGeom>
           <a:solidFill>
-            <a:srgbClr val="3D6FA6"/>
+            <a:srgbClr val="FFFFFF"/>
           </a:solidFill>
           <a:ln>
             <a:noFill/>
@@ -8389,7 +8435,7 @@
             <a:r>
               <a:rPr sz="5400" b="0" i="0">
                 <a:solidFill>
-                  <a:srgbClr val="FBC900"/>
+                  <a:srgbClr val="E54C09"/>
                 </a:solidFill>
                 <a:latin typeface="Oswald"/>
               </a:rPr>
@@ -8431,7 +8477,7 @@
             <a:r>
               <a:rPr sz="1050" b="1" i="0" spc="200">
                 <a:solidFill>
-                  <a:srgbClr val="FBC900"/>
+                  <a:srgbClr val="3B2A20"/>
                 </a:solidFill>
                 <a:latin typeface="Lato"/>
               </a:rPr>
@@ -8473,7 +8519,7 @@
             <a:r>
               <a:rPr sz="1700" b="0" i="0">
                 <a:solidFill>
-                  <a:srgbClr val="FFFFFF"/>
+                  <a:srgbClr val="2B3445"/>
                 </a:solidFill>
                 <a:latin typeface="Lato"/>
               </a:rPr>
@@ -8499,7 +8545,7 @@
             </a:avLst>
           </a:prstGeom>
           <a:solidFill>
-            <a:srgbClr val="3D6FA6"/>
+            <a:srgbClr val="FFFFFF"/>
           </a:solidFill>
           <a:ln>
             <a:noFill/>
@@ -8561,7 +8607,7 @@
             <a:r>
               <a:rPr sz="5400" b="0" i="0">
                 <a:solidFill>
-                  <a:srgbClr val="FBC900"/>
+                  <a:srgbClr val="E54C09"/>
                 </a:solidFill>
                 <a:latin typeface="Oswald"/>
               </a:rPr>
@@ -8603,7 +8649,7 @@
             <a:r>
               <a:rPr sz="1050" b="1" i="0" spc="200">
                 <a:solidFill>
-                  <a:srgbClr val="FBC900"/>
+                  <a:srgbClr val="3B2A20"/>
                 </a:solidFill>
                 <a:latin typeface="Lato"/>
               </a:rPr>
@@ -8645,7 +8691,7 @@
             <a:r>
               <a:rPr sz="1700" b="0" i="0">
                 <a:solidFill>
-                  <a:srgbClr val="FFFFFF"/>
+                  <a:srgbClr val="2B3445"/>
                 </a:solidFill>
                 <a:latin typeface="Lato"/>
               </a:rPr>
@@ -8687,7 +8733,7 @@
             <a:avLst/>
           </a:prstGeom>
           <a:solidFill>
-            <a:srgbClr val="2B5A8C"/>
+            <a:srgbClr val="F39A55"/>
           </a:solidFill>
           <a:ln>
             <a:noFill/>
@@ -8716,9 +8762,55 @@
           </a:p>
         </p:txBody>
       </p:sp>
+      <p:sp>
+        <p:nvSpPr>
+          <p:cNvPr id="3" name="Rounded Rectangle 2"/>
+          <p:cNvSpPr/>
+          <p:nvPr/>
+        </p:nvSpPr>
+        <p:spPr>
+          <a:xfrm>
+            <a:off x="548640" y="457200"/>
+            <a:ext cx="1407444" cy="731520"/>
+          </a:xfrm>
+          <a:prstGeom prst="roundRect">
+            <a:avLst>
+              <a:gd name="adj" fmla="val 50000"/>
+            </a:avLst>
+          </a:prstGeom>
+          <a:solidFill>
+            <a:srgbClr val="E54C09"/>
+          </a:solidFill>
+          <a:ln>
+            <a:noFill/>
+          </a:ln>
+          <a:effectLst/>
+        </p:spPr>
+        <p:style>
+          <a:lnRef idx="1">
+            <a:schemeClr val="accent1"/>
+          </a:lnRef>
+          <a:fillRef idx="3">
+            <a:schemeClr val="accent1"/>
+          </a:fillRef>
+          <a:effectRef idx="2">
+            <a:schemeClr val="accent1"/>
+          </a:effectRef>
+          <a:fontRef idx="minor">
+            <a:schemeClr val="lt1"/>
+          </a:fontRef>
+        </p:style>
+        <p:txBody>
+          <a:bodyPr rtlCol="0" anchor="ctr"/>
+          <a:lstStyle/>
+          <a:p>
+            <a:pPr algn="ctr"/>
+          </a:p>
+        </p:txBody>
+      </p:sp>
       <p:pic>
         <p:nvPicPr>
-          <p:cNvPr id="3" name="Picture 2" descr="logo_heiiu_transparente.png"/>
+          <p:cNvPr id="4" name="Picture 3" descr="logo_heiiu_transparente.png"/>
           <p:cNvPicPr>
             <a:picLocks noChangeAspect="1"/>
           </p:cNvPicPr>
@@ -8732,8 +8824,8 @@
         </p:blipFill>
         <p:spPr>
           <a:xfrm>
-            <a:off x="548640" y="457200"/>
-            <a:ext cx="1626042" cy="914400"/>
+            <a:off x="731520" y="530352"/>
+            <a:ext cx="1040667" cy="585216"/>
           </a:xfrm>
           <a:prstGeom prst="rect">
             <a:avLst/>
@@ -8742,14 +8834,14 @@
       </p:pic>
       <p:sp>
         <p:nvSpPr>
-          <p:cNvPr id="4" name="TextBox 3"/>
+          <p:cNvPr id="5" name="TextBox 4"/>
           <p:cNvSpPr txBox="1"/>
           <p:nvPr/>
         </p:nvSpPr>
         <p:spPr>
           <a:xfrm>
             <a:off x="9418320" y="457200"/>
-            <a:ext cx="2286000" cy="914400"/>
+            <a:ext cx="2286000" cy="731520"/>
           </a:xfrm>
           <a:prstGeom prst="rect">
             <a:avLst/>
@@ -8773,7 +8865,7 @@
             <a:r>
               <a:rPr sz="1200" b="0" i="0">
                 <a:solidFill>
-                  <a:srgbClr val="D6E2F0"/>
+                  <a:srgbClr val="6B4A33"/>
                 </a:solidFill>
                 <a:latin typeface="Oswald"/>
               </a:rPr>
@@ -8784,7 +8876,7 @@
       </p:sp>
       <p:sp>
         <p:nvSpPr>
-          <p:cNvPr id="5" name="TextBox 4"/>
+          <p:cNvPr id="6" name="TextBox 5"/>
           <p:cNvSpPr txBox="1"/>
           <p:nvPr/>
         </p:nvSpPr>
@@ -8815,7 +8907,7 @@
             <a:r>
               <a:rPr sz="1100" b="1" i="0" spc="250">
                 <a:solidFill>
-                  <a:srgbClr val="FBC900"/>
+                  <a:srgbClr val="3B2A20"/>
                 </a:solidFill>
                 <a:latin typeface="Lato"/>
               </a:rPr>
@@ -8826,7 +8918,7 @@
       </p:sp>
       <p:sp>
         <p:nvSpPr>
-          <p:cNvPr id="6" name="TextBox 5"/>
+          <p:cNvPr id="7" name="TextBox 6"/>
           <p:cNvSpPr txBox="1"/>
           <p:nvPr/>
         </p:nvSpPr>
@@ -8857,7 +8949,7 @@
             <a:r>
               <a:rPr sz="3800" b="1" i="0">
                 <a:solidFill>
-                  <a:srgbClr val="FFFFFF"/>
+                  <a:srgbClr val="3B2A20"/>
                 </a:solidFill>
                 <a:latin typeface="Lato Black"/>
               </a:rPr>
@@ -8866,7 +8958,7 @@
             <a:r>
               <a:rPr sz="3800" b="1" i="0">
                 <a:solidFill>
-                  <a:srgbClr val="FBC900"/>
+                  <a:srgbClr val="FFFFFF"/>
                 </a:solidFill>
                 <a:latin typeface="Lato Black"/>
               </a:rPr>
@@ -8877,7 +8969,7 @@
       </p:sp>
       <p:sp>
         <p:nvSpPr>
-          <p:cNvPr id="7" name="Rounded Rectangle 6"/>
+          <p:cNvPr id="8" name="Rounded Rectangle 7"/>
           <p:cNvSpPr/>
           <p:nvPr/>
         </p:nvSpPr>
@@ -8923,7 +9015,7 @@
       </p:sp>
       <p:sp>
         <p:nvSpPr>
-          <p:cNvPr id="8" name="TextBox 7"/>
+          <p:cNvPr id="9" name="TextBox 8"/>
           <p:cNvSpPr txBox="1"/>
           <p:nvPr/>
         </p:nvSpPr>
@@ -9037,7 +9129,7 @@
       </p:sp>
       <p:sp>
         <p:nvSpPr>
-          <p:cNvPr id="9" name="TextBox 8"/>
+          <p:cNvPr id="10" name="TextBox 9"/>
           <p:cNvSpPr txBox="1"/>
           <p:nvPr/>
         </p:nvSpPr>
@@ -9068,7 +9160,7 @@
             <a:r>
               <a:rPr sz="1600" b="1" i="0">
                 <a:solidFill>
-                  <a:srgbClr val="FBC900"/>
+                  <a:srgbClr val="3B2A20"/>
                 </a:solidFill>
                 <a:latin typeface="Lato"/>
               </a:rPr>
@@ -9077,7 +9169,7 @@
             <a:r>
               <a:rPr sz="1600" b="0" i="0">
                 <a:solidFill>
-                  <a:srgbClr val="FFFFFF"/>
+                  <a:srgbClr val="3B2A20"/>
                 </a:solidFill>
                 <a:latin typeface="Lato"/>
               </a:rPr>
@@ -9096,7 +9188,7 @@
             <a:r>
               <a:rPr sz="1300" b="0" i="0">
                 <a:solidFill>
-                  <a:srgbClr val="D6E2F0"/>
+                  <a:srgbClr val="6B4A33"/>
                 </a:solidFill>
                 <a:latin typeface="Lato"/>
               </a:rPr>
@@ -9107,7 +9199,7 @@
       </p:sp>
       <p:sp>
         <p:nvSpPr>
-          <p:cNvPr id="10" name="Rounded Rectangle 9"/>
+          <p:cNvPr id="11" name="Rounded Rectangle 10"/>
           <p:cNvSpPr/>
           <p:nvPr/>
         </p:nvSpPr>
@@ -9153,7 +9245,7 @@
       </p:sp>
       <p:pic>
         <p:nvPicPr>
-          <p:cNvPr id="11" name="Picture 10" descr="_convenio_entidad_miniatura.png"/>
+          <p:cNvPr id="12" name="Picture 11" descr="_convenio_entidad_miniatura.png"/>
           <p:cNvPicPr>
             <a:picLocks noChangeAspect="1"/>
           </p:cNvPicPr>
@@ -9177,7 +9269,7 @@
       </p:pic>
       <p:sp>
         <p:nvSpPr>
-          <p:cNvPr id="12" name="TextBox 11"/>
+          <p:cNvPr id="13" name="TextBox 12"/>
           <p:cNvSpPr txBox="1"/>
           <p:nvPr/>
         </p:nvSpPr>
@@ -9208,7 +9300,7 @@
             <a:r>
               <a:rPr sz="1100" b="0" i="0">
                 <a:solidFill>
-                  <a:srgbClr val="D6E2F0"/>
+                  <a:srgbClr val="6B4A33"/>
                 </a:solidFill>
                 <a:latin typeface="Lato"/>
               </a:rPr>
@@ -9219,7 +9311,7 @@
       </p:sp>
       <p:sp>
         <p:nvSpPr>
-          <p:cNvPr id="13" name="TextBox 12"/>
+          <p:cNvPr id="14" name="TextBox 13"/>
           <p:cNvSpPr txBox="1"/>
           <p:nvPr/>
         </p:nvSpPr>
@@ -9250,7 +9342,7 @@
             <a:r>
               <a:rPr sz="950" b="0" i="0">
                 <a:solidFill>
-                  <a:srgbClr val="D6E2F0"/>
+                  <a:srgbClr val="6B4A33"/>
                 </a:solidFill>
                 <a:latin typeface="Lato"/>
               </a:rPr>

--- a/recursos/comercial/B2B/PRESENTACION_FONDOS_EMPLEADOS_HEIIU.pptx
+++ b/recursos/comercial/B2B/PRESENTACION_FONDOS_EMPLEADOS_HEIIU.pptx
@@ -658,7 +658,7 @@
           <a:lstStyle/>
           <a:p>
             <a:r>
-              <a:t>QUÉ DECIR: "Programa completo, presencial, en la mañana o en la noche; con 8 afiliados o más, el horario lo pone el fondo. Un profesor por grupo de máximo 16 y evaluador externo al cierre de cada nivel. Y lo firmamos: si cumple y no avanza, devolvemos el nivel."</a:t>
+              <a:t>QUÉ DECIR: "Programa completo, presencial, en la mañana o en la noche; con 8 afiliados o más, el horario lo pone el fondo. Profesores que trabajan como coach y evaluador externo al cierre de cada nivel. Y lo firmamos: si cumple y no avanza, devolvemos el nivel."</a:t>
             </a:r>
           </a:p>
           <a:p>
@@ -888,7 +888,7 @@
           </a:p>
           <a:p>
             <a:r>
-              <a:t>Decir solo cupos reales (grupos de 16, 3 becas con nombre). Nunca "últimos cupos" si no es cierto.</a:t>
+              <a:t>Decir solo cupos reales (3 becas con nombre). Nunca "últimos cupos" si no es cierto.</a:t>
             </a:r>
           </a:p>
         </p:txBody>
@@ -5362,7 +5362,7 @@
                 </a:solidFill>
                 <a:latin typeface="Lato"/>
               </a:rPr>
-              <a:t>De A1 a B2, presencial, grupos de 16</a:t>
+              <a:t>De A1 a B2, presencial y certificado</a:t>
             </a:r>
           </a:p>
         </p:txBody>
@@ -6222,7 +6222,7 @@
                 </a:solidFill>
                 <a:latin typeface="Lato"/>
               </a:rPr>
-              <a:t>Bilingües, uno por grupo de máximo 16</a:t>
+              <a:t>Bilingües, trabajan como coach</a:t>
             </a:r>
           </a:p>
         </p:txBody>

--- a/recursos/comercial/B2B/PRESENTACION_FONDOS_EMPLEADOS_HEIIU.pptx
+++ b/recursos/comercial/B2B/PRESENTACION_FONDOS_EMPLEADOS_HEIIU.pptx
@@ -658,7 +658,7 @@
           <a:lstStyle/>
           <a:p>
             <a:r>
-              <a:t>QUÉ DECIR: "Programa completo, presencial, en la mañana o en la noche; con 8 afiliados o más, el horario lo pone el fondo. Profesores que trabajan como coach y evaluador externo al cierre de cada nivel. Y lo firmamos: si cumple y no avanza, devolvemos el nivel."</a:t>
+              <a:t>QUÉ DECIR: "Programa completo, presencial, en la mañana o en la noche; con 8 afiliados o más, el horario lo pone el fondo. Profesores que trabajan como coach y evaluador externo al cierre de cada nivel. Y lo firmamos: si cumple y no avanza en inglés, devolvemos el nivel."</a:t>
             </a:r>
           </a:p>
           <a:p>
@@ -6606,7 +6606,7 @@
                 </a:solidFill>
                 <a:latin typeface="Lato"/>
               </a:rPr>
-              <a:t>Cumple y no avanza: devolvemos el 100%</a:t>
+              <a:t>Cumple y no avanza en inglés: devolvemos el 100%</a:t>
             </a:r>
           </a:p>
         </p:txBody>
@@ -7851,7 +7851,7 @@
                 </a:solidFill>
                 <a:latin typeface="Lato"/>
               </a:rPr>
-              <a:t>Garantía: si cumple y no avanza, 100% de vuelta</a:t>
+              <a:t>Garantía: si cumple y no avanza en inglés, 100% de vuelta</a:t>
             </a:r>
           </a:p>
           <a:p>
